--- a/02-geometry-of-least-squares/slides.pptx
+++ b/02-geometry-of-least-squares/slides.pptx
@@ -23,6 +23,15 @@
     <p:sldId id="271" r:id="rId17"/>
     <p:sldId id="272" r:id="rId18"/>
     <p:sldId id="273" r:id="rId19"/>
+    <p:sldId id="274" r:id="rId20"/>
+    <p:sldId id="275" r:id="rId21"/>
+    <p:sldId id="276" r:id="rId22"/>
+    <p:sldId id="277" r:id="rId23"/>
+    <p:sldId id="278" r:id="rId24"/>
+    <p:sldId id="279" r:id="rId25"/>
+    <p:sldId id="280" r:id="rId26"/>
+    <p:sldId id="281" r:id="rId27"/>
+    <p:sldId id="282" r:id="rId28"/>
   </p:sldIdLst>
   <p:sldSz cx="9144000" cy="5143500" type="screen16x9"/>
   <p:notesSz cx="6858000" cy="9144000"/>
@@ -3220,31 +3229,51 @@
           <a:chExt cx="0" cy="0"/>
         </a:xfrm>
       </p:grpSpPr>
-      <p:sp>
-        <p:nvSpPr>
-          <p:cNvPr id="2" name="Title 1"/>
-          <p:cNvSpPr>
-            <a:spLocks noGrp="1"/>
-          </p:cNvSpPr>
-          <p:nvPr>
-            <p:ph type="title"/>
-          </p:nvPr>
-        </p:nvSpPr>
-        <p:spPr/>
-        <p:txBody>
-          <a:bodyPr/>
-          <a:lstStyle/>
-          <a:p>
-            <a:pPr lvl="0" indent="0" marL="0">
-              <a:buNone/>
-            </a:pPr>
-            <a:r>
-              <a:rPr/>
-              <a:t>The trap in this table</a:t>
-            </a:r>
-          </a:p>
-        </p:txBody>
-      </p:sp>
+      <mc:AlternateContent xmlns:mc="http://schemas.openxmlformats.org/markup-compatibility/2006">
+        <mc:Choice xmlns:a14="http://schemas.microsoft.com/office/drawing/2010/main" Requires="a14">
+          <p:sp>
+            <p:nvSpPr>
+              <p:cNvPr id="2" name="Title 1"/>
+              <p:cNvSpPr>
+                <a:spLocks noGrp="1"/>
+              </p:cNvSpPr>
+              <p:nvPr>
+                <p:ph type="title"/>
+              </p:nvPr>
+            </p:nvSpPr>
+            <p:spPr/>
+            <p:txBody>
+              <a:bodyPr/>
+              <a:lstStyle/>
+              <a:p>
+                <a:pPr lvl="0" indent="0" marL="0">
+                  <a:buNone/>
+                </a:pPr>
+                <a14:m>
+                  <m:oMath xmlns:m="http://schemas.openxmlformats.org/officeDocument/2006/math">
+                    <m:sSup>
+                      <m:e>
+                        <m:r>
+                          <m:t>R</m:t>
+                        </m:r>
+                      </m:e>
+                      <m:sup>
+                        <m:r>
+                          <m:t>2</m:t>
+                        </m:r>
+                      </m:sup>
+                    </m:sSup>
+                  </m:oMath>
+                </a14:m>
+                <a:r>
+                  <a:rPr/>
+                  <a:t> is a cosine</a:t>
+                </a:r>
+              </a:p>
+            </p:txBody>
+          </p:sp>
+        </mc:Choice>
+      </mc:AlternateContent>
       <mc:AlternateContent xmlns:mc="http://schemas.openxmlformats.org/markup-compatibility/2006">
         <mc:Choice xmlns:a14="http://schemas.microsoft.com/office/drawing/2010/main" Requires="a14">
           <p:sp>
@@ -3267,193 +3296,337 @@
                 </a:pPr>
                 <a:r>
                   <a:rPr/>
-                  <a:t>The three generation shares </a:t>
-                </a:r>
-                <a:r>
-                  <a:rPr b="1"/>
-                  <a:t>sum to one</a:t>
-                </a:r>
+                  <a:t>Because </a:t>
+                </a:r>
+                <a14:m>
+                  <m:oMath xmlns:m="http://schemas.openxmlformats.org/officeDocument/2006/math">
+                    <m:r>
+                      <m:t>y</m:t>
+                    </m:r>
+                    <m:r>
+                      <m:rPr>
+                        <m:sty m:val="p"/>
+                      </m:rPr>
+                      <m:t>=</m:t>
+                    </m:r>
+                    <m:acc>
+                      <m:accPr>
+                        <m:chr m:val="̂"/>
+                      </m:accPr>
+                      <m:e>
+                        <m:r>
+                          <m:t>y</m:t>
+                        </m:r>
+                      </m:e>
+                    </m:acc>
+                    <m:r>
+                      <m:rPr>
+                        <m:sty m:val="p"/>
+                      </m:rPr>
+                      <m:t>+</m:t>
+                    </m:r>
+                    <m:r>
+                      <m:t>e</m:t>
+                    </m:r>
+                  </m:oMath>
+                </a14:m>
                 <a:r>
                   <a:rPr/>
-                  <a:t>, exactly:</a:t>
-                </a:r>
-              </a:p>
-              <a:p>
-                <a:pPr lvl="0" indent="0">
-                  <a:buNone/>
-                </a:pPr>
-                <a:r>
-                  <a:rPr>
-                    <a:latin typeface="Courier"/>
-                  </a:rPr>
-                  <a:t>df[[</a:t>
-                </a:r>
-                <a:r>
-                  <a:rPr>
-                    <a:solidFill>
-                      <a:srgbClr val="4070A0"/>
-                    </a:solidFill>
-                    <a:latin typeface="Courier"/>
-                  </a:rPr>
-                  <a:t>"share_renew"</a:t>
-                </a:r>
-                <a:r>
-                  <a:rPr>
-                    <a:latin typeface="Courier"/>
-                  </a:rPr>
-                  <a:t>, </a:t>
-                </a:r>
-                <a:r>
-                  <a:rPr>
-                    <a:solidFill>
-                      <a:srgbClr val="4070A0"/>
-                    </a:solidFill>
-                    <a:latin typeface="Courier"/>
-                  </a:rPr>
-                  <a:t>"share_fossil"</a:t>
-                </a:r>
-                <a:r>
-                  <a:rPr>
-                    <a:latin typeface="Courier"/>
-                  </a:rPr>
-                  <a:t>, </a:t>
-                </a:r>
-                <a:r>
-                  <a:rPr>
-                    <a:solidFill>
-                      <a:srgbClr val="4070A0"/>
-                    </a:solidFill>
-                    <a:latin typeface="Courier"/>
-                  </a:rPr>
-                  <a:t>"share_nuclear"</a:t>
-                </a:r>
-                <a:r>
-                  <a:rPr>
-                    <a:latin typeface="Courier"/>
-                  </a:rPr>
-                  <a:t>]].</a:t>
-                </a:r>
-                <a:r>
-                  <a:rPr>
-                    <a:solidFill>
-                      <a:srgbClr val="008000"/>
-                    </a:solidFill>
-                    <a:latin typeface="Courier"/>
-                  </a:rPr>
-                  <a:t>sum</a:t>
-                </a:r>
-                <a:r>
-                  <a:rPr>
-                    <a:latin typeface="Courier"/>
-                  </a:rPr>
-                  <a:t>(axis</a:t>
-                </a:r>
-                <a:r>
-                  <a:rPr>
-                    <a:solidFill>
-                      <a:srgbClr val="666666"/>
-                    </a:solidFill>
-                    <a:latin typeface="Courier"/>
-                  </a:rPr>
-                  <a:t>=</a:t>
-                </a:r>
-                <a:r>
-                  <a:rPr>
-                    <a:solidFill>
-                      <a:srgbClr val="40A070"/>
-                    </a:solidFill>
-                    <a:latin typeface="Courier"/>
-                  </a:rPr>
-                  <a:t>1</a:t>
-                </a:r>
-                <a:r>
-                  <a:rPr>
-                    <a:latin typeface="Courier"/>
-                  </a:rPr>
-                  <a:t>).</a:t>
-                </a:r>
-                <a:r>
-                  <a:rPr>
-                    <a:solidFill>
-                      <a:srgbClr val="008000"/>
-                    </a:solidFill>
-                    <a:latin typeface="Courier"/>
-                  </a:rPr>
-                  <a:t>max</a:t>
-                </a:r>
-                <a:r>
-                  <a:rPr>
-                    <a:latin typeface="Courier"/>
-                  </a:rPr>
-                  <a:t>()</a:t>
-                </a:r>
-                <a:br/>
-                <a:r>
-                  <a:rPr i="1">
-                    <a:solidFill>
-                      <a:srgbClr val="60A0B0"/>
-                    </a:solidFill>
-                    <a:latin typeface="Courier"/>
-                  </a:rPr>
-                  <a:t># 1.0001  (rounding only)</a:t>
+                  <a:t> with </a:t>
+                </a:r>
+                <a14:m>
+                  <m:oMath xmlns:m="http://schemas.openxmlformats.org/officeDocument/2006/math">
+                    <m:acc>
+                      <m:accPr>
+                        <m:chr m:val="̂"/>
+                      </m:accPr>
+                      <m:e>
+                        <m:r>
+                          <m:t>y</m:t>
+                        </m:r>
+                      </m:e>
+                    </m:acc>
+                    <m:r>
+                      <m:rPr>
+                        <m:sty m:val="p"/>
+                      </m:rPr>
+                      <m:t>⟂</m:t>
+                    </m:r>
+                    <m:r>
+                      <m:t>e</m:t>
+                    </m:r>
+                  </m:oMath>
+                </a14:m>
+                <a:r>
+                  <a:rPr/>
+                  <a:t>, Pythagoras applies:</a:t>
                 </a:r>
               </a:p>
               <a:p>
                 <a:pPr lvl="0" indent="0" marL="0">
                   <a:buNone/>
                 </a:pPr>
-                <a:r>
-                  <a:rPr/>
-                  <a:t>Include all three shares </a:t>
-                </a:r>
-                <a:r>
-                  <a:rPr b="1"/>
-                  <a:t>and</a:t>
-                </a:r>
-                <a:r>
-                  <a:rPr/>
-                  <a:t> an intercept and you have created exact collinearity. </a:t>
-                </a:r>
                 <a14:m>
-                  <m:oMath xmlns:m="http://schemas.openxmlformats.org/officeDocument/2006/math">
-                    <m:r>
-                      <m:t>X</m:t>
-                    </m:r>
-                    <m:r>
-                      <m:rPr>
-                        <m:sty m:val="p"/>
-                      </m:rPr>
-                      <m:t>′</m:t>
-                    </m:r>
-                    <m:r>
-                      <m:t>X</m:t>
-                    </m:r>
-                  </m:oMath>
+                  <m:oMathPara xmlns:m="http://schemas.openxmlformats.org/officeDocument/2006/math">
+                    <m:oMathParaPr>
+                      <m:jc m:val="center"/>
+                    </m:oMathParaPr>
+                    <m:oMath>
+                      <m:r>
+                        <m:rPr>
+                          <m:sty m:val="p"/>
+                        </m:rPr>
+                        <m:t>∥</m:t>
+                      </m:r>
+                      <m:r>
+                        <m:t>y</m:t>
+                      </m:r>
+                      <m:sSup>
+                        <m:e>
+                          <m:r>
+                            <m:rPr>
+                              <m:sty m:val="p"/>
+                            </m:rPr>
+                            <m:t>∥</m:t>
+                          </m:r>
+                        </m:e>
+                        <m:sup>
+                          <m:r>
+                            <m:t>2</m:t>
+                          </m:r>
+                        </m:sup>
+                      </m:sSup>
+                      <m:r>
+                        <m:rPr>
+                          <m:sty m:val="p"/>
+                        </m:rPr>
+                        <m:t>=</m:t>
+                      </m:r>
+                      <m:r>
+                        <m:rPr>
+                          <m:sty m:val="p"/>
+                        </m:rPr>
+                        <m:t>∥</m:t>
+                      </m:r>
+                      <m:acc>
+                        <m:accPr>
+                          <m:chr m:val="̂"/>
+                        </m:accPr>
+                        <m:e>
+                          <m:r>
+                            <m:t>y</m:t>
+                          </m:r>
+                        </m:e>
+                      </m:acc>
+                      <m:sSup>
+                        <m:e>
+                          <m:r>
+                            <m:rPr>
+                              <m:sty m:val="p"/>
+                            </m:rPr>
+                            <m:t>∥</m:t>
+                          </m:r>
+                        </m:e>
+                        <m:sup>
+                          <m:r>
+                            <m:t>2</m:t>
+                          </m:r>
+                        </m:sup>
+                      </m:sSup>
+                      <m:r>
+                        <m:rPr>
+                          <m:sty m:val="p"/>
+                        </m:rPr>
+                        <m:t>+</m:t>
+                      </m:r>
+                      <m:r>
+                        <m:rPr>
+                          <m:sty m:val="p"/>
+                        </m:rPr>
+                        <m:t>∥</m:t>
+                      </m:r>
+                      <m:r>
+                        <m:t>e</m:t>
+                      </m:r>
+                      <m:sSup>
+                        <m:e>
+                          <m:r>
+                            <m:rPr>
+                              <m:sty m:val="p"/>
+                            </m:rPr>
+                            <m:t>∥</m:t>
+                          </m:r>
+                        </m:e>
+                        <m:sup>
+                          <m:r>
+                            <m:t>2</m:t>
+                          </m:r>
+                        </m:sup>
+                      </m:sSup>
+                    </m:oMath>
+                  </m:oMathPara>
                 </a14:m>
-                <a:r>
-                  <a:rPr/>
-                  <a:t> is singular. Some libraries error; others silently return one of infinitely many solutions.</a:t>
-                </a:r>
               </a:p>
               <a:p>
                 <a:pPr lvl="0" indent="0" marL="0">
                   <a:buNone/>
                 </a:pPr>
                 <a:r>
-                  <a:rPr b="1"/>
-                  <a:t>Drop one share.</a:t>
-                </a:r>
-                <a:r>
                   <a:rPr/>
-                  <a:t> Every coefficient is then read </a:t>
+                  <a:t>and</a:t>
+                </a:r>
+              </a:p>
+              <a:p>
+                <a:pPr lvl="0" indent="0" marL="0">
+                  <a:buNone/>
+                </a:pPr>
+                <a14:m>
+                  <m:oMathPara xmlns:m="http://schemas.openxmlformats.org/officeDocument/2006/math">
+                    <m:oMathParaPr>
+                      <m:jc m:val="center"/>
+                    </m:oMathParaPr>
+                    <m:oMath>
+                      <m:sSup>
+                        <m:e>
+                          <m:r>
+                            <m:t>R</m:t>
+                          </m:r>
+                        </m:e>
+                        <m:sup>
+                          <m:r>
+                            <m:t>2</m:t>
+                          </m:r>
+                        </m:sup>
+                      </m:sSup>
+                      <m:r>
+                        <m:rPr>
+                          <m:sty m:val="p"/>
+                        </m:rPr>
+                        <m:t>=</m:t>
+                      </m:r>
+                      <m:f>
+                        <m:fPr>
+                          <m:type m:val="bar"/>
+                        </m:fPr>
+                        <m:num>
+                          <m:r>
+                            <m:rPr>
+                              <m:sty m:val="p"/>
+                            </m:rPr>
+                            <m:t>∥</m:t>
+                          </m:r>
+                          <m:acc>
+                            <m:accPr>
+                              <m:chr m:val="̂"/>
+                            </m:accPr>
+                            <m:e>
+                              <m:r>
+                                <m:t>y</m:t>
+                              </m:r>
+                            </m:e>
+                          </m:acc>
+                          <m:sSup>
+                            <m:e>
+                              <m:r>
+                                <m:rPr>
+                                  <m:sty m:val="p"/>
+                                </m:rPr>
+                                <m:t>∥</m:t>
+                              </m:r>
+                            </m:e>
+                            <m:sup>
+                              <m:r>
+                                <m:t>2</m:t>
+                              </m:r>
+                            </m:sup>
+                          </m:sSup>
+                        </m:num>
+                        <m:den>
+                          <m:r>
+                            <m:rPr>
+                              <m:sty m:val="p"/>
+                            </m:rPr>
+                            <m:t>∥</m:t>
+                          </m:r>
+                          <m:r>
+                            <m:t>y</m:t>
+                          </m:r>
+                          <m:sSup>
+                            <m:e>
+                              <m:r>
+                                <m:rPr>
+                                  <m:sty m:val="p"/>
+                                </m:rPr>
+                                <m:t>∥</m:t>
+                              </m:r>
+                            </m:e>
+                            <m:sup>
+                              <m:r>
+                                <m:t>2</m:t>
+                              </m:r>
+                            </m:sup>
+                          </m:sSup>
+                        </m:den>
+                      </m:f>
+                      <m:r>
+                        <m:rPr>
+                          <m:sty m:val="p"/>
+                        </m:rPr>
+                        <m:t>=</m:t>
+                      </m:r>
+                      <m:sSup>
+                        <m:e>
+                          <m:r>
+                            <m:rPr>
+                              <m:sty m:val="p"/>
+                            </m:rPr>
+                            <m:t>cos</m:t>
+                          </m:r>
+                        </m:e>
+                        <m:sup>
+                          <m:r>
+                            <m:t>2</m:t>
+                          </m:r>
+                        </m:sup>
+                      </m:sSup>
+                      <m:r>
+                        <m:t>θ</m:t>
+                      </m:r>
+                    </m:oMath>
+                  </m:oMathPara>
+                </a14:m>
+              </a:p>
+              <a:p>
+                <a:pPr lvl="0" indent="0" marL="0">
+                  <a:buNone/>
+                </a:pPr>
+                <a14:m>
+                  <m:oMath xmlns:m="http://schemas.openxmlformats.org/officeDocument/2006/math">
+                    <m:sSup>
+                      <m:e>
+                        <m:r>
+                          <m:t>R</m:t>
+                        </m:r>
+                      </m:e>
+                      <m:sup>
+                        <m:r>
+                          <m:t>2</m:t>
+                        </m:r>
+                      </m:sup>
+                    </m:sSup>
+                  </m:oMath>
+                </a14:m>
+                <a:r>
+                  <a:rPr/>
+                  <a:t> is the squared cosine of the angle between your outcome and the space your regressors span. That is </a:t>
                 </a:r>
                 <a:r>
                   <a:rPr i="1"/>
-                  <a:t>relative to the omitted category</a:t>
+                  <a:t>all</a:t>
                 </a:r>
                 <a:r>
                   <a:rPr/>
-                  <a:t> — which you must state in your table note.</a:t>
+                  <a:t> it is — which is why it says nothing about whether the model is right.</a:t>
                 </a:r>
               </a:p>
             </p:txBody>
@@ -3502,102 +3675,186 @@
             </a:pPr>
             <a:r>
               <a:rPr/>
-              <a:t>A price without its band is meaningless</a:t>
-            </a:r>
-          </a:p>
-        </p:txBody>
-      </p:sp>
-      <p:sp>
-        <p:nvSpPr>
-          <p:cNvPr id="3" name="Content Placeholder 2"/>
-          <p:cNvSpPr>
-            <a:spLocks noGrp="1"/>
-          </p:cNvSpPr>
-          <p:nvPr>
-            <p:ph idx="1"/>
-          </p:nvPr>
-        </p:nvSpPr>
-        <p:spPr/>
-        <p:txBody>
-          <a:bodyPr/>
-          <a:lstStyle/>
-          <a:p>
-            <a:pPr lvl="0" indent="0" marL="0">
-              <a:buNone/>
-            </a:pPr>
-            <a:r>
-              <a:rPr>
-                <a:latin typeface="Courier"/>
-              </a:rPr>
-              <a:t>elec_price_eur_kwh</a:t>
-            </a:r>
-            <a:r>
-              <a:rPr/>
-              <a:t> is </a:t>
-            </a:r>
-            <a:r>
-              <a:rPr b="1"/>
-              <a:t>band IC</a:t>
-            </a:r>
-            <a:r>
-              <a:rPr/>
-              <a:t>: consumers using 500–2000 MWh a year.</a:t>
-            </a:r>
-          </a:p>
-          <a:p>
-            <a:pPr lvl="0"/>
-            <a:r>
-              <a:rPr/>
-              <a:t>A different band is a different number for the same country and year.</a:t>
-            </a:r>
-          </a:p>
-          <a:p>
-            <a:pPr lvl="0"/>
-            <a:r>
-              <a:rPr/>
-              <a:t>There is a </a:t>
-            </a:r>
-            <a:r>
-              <a:rPr b="1"/>
-              <a:t>structural break in 2022</a:t>
-            </a:r>
-            <a:r>
-              <a:rPr/>
-              <a:t> — the energy shock.</a:t>
-            </a:r>
-          </a:p>
-          <a:p>
-            <a:pPr lvl="0"/>
-            <a:r>
-              <a:rPr>
-                <a:latin typeface="Courier"/>
-              </a:rPr>
-              <a:t>elec_price_incl_tax</a:t>
-            </a:r>
-            <a:r>
-              <a:rPr/>
-              <a:t> minus the excl.-tax series is the </a:t>
-            </a:r>
-            <a:r>
-              <a:rPr b="1"/>
-              <a:t>policy wedge</a:t>
-            </a:r>
-            <a:r>
-              <a:rPr/>
-              <a:t>, not a measurement error.</a:t>
-            </a:r>
-          </a:p>
-          <a:p>
-            <a:pPr lvl="0" indent="0" marL="0">
-              <a:buNone/>
-            </a:pPr>
-            <a:r>
-              <a:rPr/>
-              <a:t>Reporting “the electricity price in Germany” without the band is the kind of sentence this course is designed to stop you writing.</a:t>
-            </a:r>
-          </a:p>
-        </p:txBody>
-      </p:sp>
+              <a:t>Degrees of freedom, geometrically</a:t>
+            </a:r>
+          </a:p>
+        </p:txBody>
+      </p:sp>
+      <mc:AlternateContent xmlns:mc="http://schemas.openxmlformats.org/markup-compatibility/2006">
+        <mc:Choice xmlns:a14="http://schemas.microsoft.com/office/drawing/2010/main" Requires="a14">
+          <p:sp>
+            <p:nvSpPr>
+              <p:cNvPr id="3" name="Content Placeholder 2"/>
+              <p:cNvSpPr>
+                <a:spLocks noGrp="1"/>
+              </p:cNvSpPr>
+              <p:nvPr>
+                <p:ph idx="1"/>
+              </p:nvPr>
+            </p:nvSpPr>
+            <p:spPr/>
+            <p:txBody>
+              <a:bodyPr/>
+              <a:lstStyle/>
+              <a:p>
+                <a:pPr lvl="0" indent="0" marL="0">
+                  <a:buNone/>
+                </a:pPr>
+                <a:r>
+                  <a:rPr/>
+                  <a:t>The residual lives in a space of dimension </a:t>
+                </a:r>
+                <a14:m>
+                  <m:oMath xmlns:m="http://schemas.openxmlformats.org/officeDocument/2006/math">
+                    <m:r>
+                      <m:t>n</m:t>
+                    </m:r>
+                    <m:r>
+                      <m:rPr>
+                        <m:sty m:val="p"/>
+                      </m:rPr>
+                      <m:t>−</m:t>
+                    </m:r>
+                    <m:r>
+                      <m:t>k</m:t>
+                    </m:r>
+                  </m:oMath>
+                </a14:m>
+                <a:r>
+                  <a:rPr/>
+                  <a:t>: you started with </a:t>
+                </a:r>
+                <a14:m>
+                  <m:oMath xmlns:m="http://schemas.openxmlformats.org/officeDocument/2006/math">
+                    <m:r>
+                      <m:t>n</m:t>
+                    </m:r>
+                  </m:oMath>
+                </a14:m>
+                <a:r>
+                  <a:rPr/>
+                  <a:t> dimensions and spent </a:t>
+                </a:r>
+                <a14:m>
+                  <m:oMath xmlns:m="http://schemas.openxmlformats.org/officeDocument/2006/math">
+                    <m:r>
+                      <m:t>k</m:t>
+                    </m:r>
+                  </m:oMath>
+                </a14:m>
+                <a:r>
+                  <a:rPr/>
+                  <a:t> of them fitting.</a:t>
+                </a:r>
+              </a:p>
+              <a:p>
+                <a:pPr lvl="0" indent="0" marL="0">
+                  <a:buNone/>
+                </a:pPr>
+                <a14:m>
+                  <m:oMathPara xmlns:m="http://schemas.openxmlformats.org/officeDocument/2006/math">
+                    <m:oMathParaPr>
+                      <m:jc m:val="center"/>
+                    </m:oMathParaPr>
+                    <m:oMath>
+                      <m:sSup>
+                        <m:e>
+                          <m:acc>
+                            <m:accPr>
+                              <m:chr m:val="̂"/>
+                            </m:accPr>
+                            <m:e>
+                              <m:r>
+                                <m:t>σ</m:t>
+                              </m:r>
+                            </m:e>
+                          </m:acc>
+                        </m:e>
+                        <m:sup>
+                          <m:r>
+                            <m:t>2</m:t>
+                          </m:r>
+                        </m:sup>
+                      </m:sSup>
+                      <m:r>
+                        <m:rPr>
+                          <m:sty m:val="p"/>
+                        </m:rPr>
+                        <m:t>=</m:t>
+                      </m:r>
+                      <m:f>
+                        <m:fPr>
+                          <m:type m:val="bar"/>
+                        </m:fPr>
+                        <m:num>
+                          <m:r>
+                            <m:rPr>
+                              <m:sty m:val="p"/>
+                            </m:rPr>
+                            <m:t>∥</m:t>
+                          </m:r>
+                          <m:r>
+                            <m:t>e</m:t>
+                          </m:r>
+                          <m:sSup>
+                            <m:e>
+                              <m:r>
+                                <m:rPr>
+                                  <m:sty m:val="p"/>
+                                </m:rPr>
+                                <m:t>∥</m:t>
+                              </m:r>
+                            </m:e>
+                            <m:sup>
+                              <m:r>
+                                <m:t>2</m:t>
+                              </m:r>
+                            </m:sup>
+                          </m:sSup>
+                        </m:num>
+                        <m:den>
+                          <m:r>
+                            <m:t>n</m:t>
+                          </m:r>
+                          <m:r>
+                            <m:rPr>
+                              <m:sty m:val="p"/>
+                            </m:rPr>
+                            <m:t>−</m:t>
+                          </m:r>
+                          <m:r>
+                            <m:t>k</m:t>
+                          </m:r>
+                        </m:den>
+                      </m:f>
+                    </m:oMath>
+                  </m:oMathPara>
+                </a14:m>
+              </a:p>
+              <a:p>
+                <a:pPr lvl="0" indent="0" marL="0">
+                  <a:buNone/>
+                </a:pPr>
+                <a:r>
+                  <a:rPr/>
+                  <a:t>Add a regressor and the residual space shrinks by one. Add </a:t>
+                </a:r>
+                <a14:m>
+                  <m:oMath xmlns:m="http://schemas.openxmlformats.org/officeDocument/2006/math">
+                    <m:r>
+                      <m:t>n</m:t>
+                    </m:r>
+                  </m:oMath>
+                </a14:m>
+                <a:r>
+                  <a:rPr/>
+                  <a:t> of them and it vanishes — a perfect fit that has learned nothing.</a:t>
+                </a:r>
+              </a:p>
+            </p:txBody>
+          </p:sp>
+        </mc:Choice>
+      </mc:AlternateContent>
     </p:spTree>
   </p:cSld>
 </p:sld>
@@ -3645,7 +3902,7 @@
             </a:pPr>
             <a:r>
               <a:rPr/>
-              <a:t>Doing it</a:t>
+              <a:t>The method</a:t>
             </a:r>
           </a:p>
         </p:txBody>
@@ -3656,1787 +3913,6 @@
 </file>
 
 <file path=ppt/slides/slide13.xml><?xml version="1.0" encoding="utf-8"?>
-<p:sld xmlns:a="http://schemas.openxmlformats.org/drawingml/2006/main" xmlns:r="http://schemas.openxmlformats.org/officeDocument/2006/relationships" xmlns:p="http://schemas.openxmlformats.org/presentationml/2006/main">
-  <p:cSld>
-    <p:spTree>
-      <p:nvGrpSpPr>
-        <p:cNvPr id="1" name=""/>
-        <p:cNvGrpSpPr/>
-        <p:nvPr/>
-      </p:nvGrpSpPr>
-      <p:grpSpPr>
-        <a:xfrm>
-          <a:off x="0" y="0"/>
-          <a:ext cx="0" cy="0"/>
-          <a:chOff x="0" y="0"/>
-          <a:chExt cx="0" cy="0"/>
-        </a:xfrm>
-      </p:grpSpPr>
-      <p:sp>
-        <p:nvSpPr>
-          <p:cNvPr id="2" name="Title 1"/>
-          <p:cNvSpPr>
-            <a:spLocks noGrp="1"/>
-          </p:cNvSpPr>
-          <p:nvPr>
-            <p:ph type="title"/>
-          </p:nvPr>
-        </p:nvSpPr>
-        <p:spPr/>
-        <p:txBody>
-          <a:bodyPr/>
-          <a:lstStyle/>
-          <a:p>
-            <a:pPr lvl="0" indent="0" marL="0">
-              <a:buNone/>
-            </a:pPr>
-            <a:r>
-              <a:rPr/>
-              <a:t>The naive regression</a:t>
-            </a:r>
-          </a:p>
-        </p:txBody>
-      </p:sp>
-      <p:sp>
-        <p:nvSpPr>
-          <p:cNvPr id="3" name="Content Placeholder 2"/>
-          <p:cNvSpPr>
-            <a:spLocks noGrp="1"/>
-          </p:cNvSpPr>
-          <p:nvPr>
-            <p:ph idx="1"/>
-          </p:nvPr>
-        </p:nvSpPr>
-        <p:spPr/>
-        <p:txBody>
-          <a:bodyPr/>
-          <a:lstStyle/>
-          <a:p>
-            <a:pPr lvl="0" indent="0">
-              <a:buNone/>
-            </a:pPr>
-            <a:r>
-              <a:rPr b="1">
-                <a:solidFill>
-                  <a:srgbClr val="008000"/>
-                </a:solidFill>
-                <a:latin typeface="Courier"/>
-              </a:rPr>
-              <a:t>import</a:t>
-            </a:r>
-            <a:r>
-              <a:rPr>
-                <a:latin typeface="Courier"/>
-              </a:rPr>
-              <a:t> statsmodels.formula.api </a:t>
-            </a:r>
-            <a:r>
-              <a:rPr b="1">
-                <a:solidFill>
-                  <a:srgbClr val="008000"/>
-                </a:solidFill>
-                <a:latin typeface="Courier"/>
-              </a:rPr>
-              <a:t>as</a:t>
-            </a:r>
-            <a:r>
-              <a:rPr>
-                <a:latin typeface="Courier"/>
-              </a:rPr>
-              <a:t> smf</a:t>
-            </a:r>
-            <a:br/>
-            <a:br/>
-            <a:r>
-              <a:rPr>
-                <a:latin typeface="Courier"/>
-              </a:rPr>
-              <a:t>m1 </a:t>
-            </a:r>
-            <a:r>
-              <a:rPr>
-                <a:solidFill>
-                  <a:srgbClr val="666666"/>
-                </a:solidFill>
-                <a:latin typeface="Courier"/>
-              </a:rPr>
-              <a:t>=</a:t>
-            </a:r>
-            <a:r>
-              <a:rPr>
-                <a:latin typeface="Courier"/>
-              </a:rPr>
-              <a:t> smf.ols(</a:t>
-            </a:r>
-            <a:r>
-              <a:rPr>
-                <a:solidFill>
-                  <a:srgbClr val="4070A0"/>
-                </a:solidFill>
-                <a:latin typeface="Courier"/>
-              </a:rPr>
-              <a:t>"elec_price_eur_kwh ~ share_fossil + share_nuclear"</a:t>
-            </a:r>
-            <a:r>
-              <a:rPr>
-                <a:latin typeface="Courier"/>
-              </a:rPr>
-              <a:t>, data</a:t>
-            </a:r>
-            <a:r>
-              <a:rPr>
-                <a:solidFill>
-                  <a:srgbClr val="666666"/>
-                </a:solidFill>
-                <a:latin typeface="Courier"/>
-              </a:rPr>
-              <a:t>=</a:t>
-            </a:r>
-            <a:r>
-              <a:rPr>
-                <a:latin typeface="Courier"/>
-              </a:rPr>
-              <a:t>df).fit()</a:t>
-            </a:r>
-            <a:br/>
-            <a:r>
-              <a:rPr>
-                <a:solidFill>
-                  <a:srgbClr val="008000"/>
-                </a:solidFill>
-                <a:latin typeface="Courier"/>
-              </a:rPr>
-              <a:t>print</a:t>
-            </a:r>
-            <a:r>
-              <a:rPr>
-                <a:latin typeface="Courier"/>
-              </a:rPr>
-              <a:t>(m1.summary().tables[</a:t>
-            </a:r>
-            <a:r>
-              <a:rPr>
-                <a:solidFill>
-                  <a:srgbClr val="40A070"/>
-                </a:solidFill>
-                <a:latin typeface="Courier"/>
-              </a:rPr>
-              <a:t>1</a:t>
-            </a:r>
-            <a:r>
-              <a:rPr>
-                <a:latin typeface="Courier"/>
-              </a:rPr>
-              <a:t>])</a:t>
-            </a:r>
-          </a:p>
-          <a:p>
-            <a:pPr lvl="0" indent="0" marL="0">
-              <a:buNone/>
-            </a:pPr>
-            <a:r>
-              <a:rPr>
-                <a:latin typeface="Courier"/>
-              </a:rPr>
-              <a:t>share_renew</a:t>
-            </a:r>
-            <a:r>
-              <a:rPr/>
-              <a:t> is omitted, so both coefficients are read </a:t>
-            </a:r>
-            <a:r>
-              <a:rPr b="1"/>
-              <a:t>against renewables</a:t>
-            </a:r>
-            <a:r>
-              <a:rPr/>
-              <a:t>.</a:t>
-            </a:r>
-          </a:p>
-          <a:p>
-            <a:pPr lvl="0" indent="0" marL="0">
-              <a:buNone/>
-            </a:pPr>
-            <a:r>
-              <a:rPr/>
-              <a:t>Write down the sign you expect </a:t>
-            </a:r>
-            <a:r>
-              <a:rPr i="1"/>
-              <a:t>before</a:t>
-            </a:r>
-            <a:r>
-              <a:rPr/>
-              <a:t> you run it. You are allowed to be wrong; you are not allowed to decide afterwards what you predicted.</a:t>
-            </a:r>
-          </a:p>
-        </p:txBody>
-      </p:sp>
-    </p:spTree>
-  </p:cSld>
-</p:sld>
-</file>
-
-<file path=ppt/slides/slide14.xml><?xml version="1.0" encoding="utf-8"?>
-<p:sld xmlns:a="http://schemas.openxmlformats.org/drawingml/2006/main" xmlns:r="http://schemas.openxmlformats.org/officeDocument/2006/relationships" xmlns:p="http://schemas.openxmlformats.org/presentationml/2006/main">
-  <p:cSld>
-    <p:spTree>
-      <p:nvGrpSpPr>
-        <p:cNvPr id="1" name=""/>
-        <p:cNvGrpSpPr/>
-        <p:nvPr/>
-      </p:nvGrpSpPr>
-      <p:grpSpPr>
-        <a:xfrm>
-          <a:off x="0" y="0"/>
-          <a:ext cx="0" cy="0"/>
-          <a:chOff x="0" y="0"/>
-          <a:chExt cx="0" cy="0"/>
-        </a:xfrm>
-      </p:grpSpPr>
-      <p:sp>
-        <p:nvSpPr>
-          <p:cNvPr id="2" name="Title 1"/>
-          <p:cNvSpPr>
-            <a:spLocks noGrp="1"/>
-          </p:cNvSpPr>
-          <p:nvPr>
-            <p:ph type="title"/>
-          </p:nvPr>
-        </p:nvSpPr>
-        <p:spPr/>
-        <p:txBody>
-          <a:bodyPr/>
-          <a:lstStyle/>
-          <a:p>
-            <a:pPr lvl="0" indent="0" marL="0">
-              <a:buNone/>
-            </a:pPr>
-            <a:r>
-              <a:rPr/>
-              <a:t>Now add composition</a:t>
-            </a:r>
-          </a:p>
-        </p:txBody>
-      </p:sp>
-      <p:sp>
-        <p:nvSpPr>
-          <p:cNvPr id="3" name="Content Placeholder 2"/>
-          <p:cNvSpPr>
-            <a:spLocks noGrp="1"/>
-          </p:cNvSpPr>
-          <p:nvPr>
-            <p:ph idx="1"/>
-          </p:nvPr>
-        </p:nvSpPr>
-        <p:spPr/>
-        <p:txBody>
-          <a:bodyPr/>
-          <a:lstStyle/>
-          <a:p>
-            <a:pPr lvl="0" indent="0">
-              <a:buNone/>
-            </a:pPr>
-            <a:r>
-              <a:rPr>
-                <a:latin typeface="Courier"/>
-              </a:rPr>
-              <a:t>m2 </a:t>
-            </a:r>
-            <a:r>
-              <a:rPr>
-                <a:solidFill>
-                  <a:srgbClr val="666666"/>
-                </a:solidFill>
-                <a:latin typeface="Courier"/>
-              </a:rPr>
-              <a:t>=</a:t>
-            </a:r>
-            <a:r>
-              <a:rPr>
-                <a:latin typeface="Courier"/>
-              </a:rPr>
-              <a:t> smf.ols(</a:t>
-            </a:r>
-            <a:br/>
-            <a:r>
-              <a:rPr>
-                <a:latin typeface="Courier"/>
-              </a:rPr>
-              <a:t>    </a:t>
-            </a:r>
-            <a:r>
-              <a:rPr>
-                <a:solidFill>
-                  <a:srgbClr val="4070A0"/>
-                </a:solidFill>
-                <a:latin typeface="Courier"/>
-              </a:rPr>
-              <a:t>"elec_price_eur_kwh ~ share_fossil + share_nuclear "</a:t>
-            </a:r>
-            <a:br/>
-            <a:r>
-              <a:rPr>
-                <a:latin typeface="Courier"/>
-              </a:rPr>
-              <a:t>    </a:t>
-            </a:r>
-            <a:r>
-              <a:rPr>
-                <a:solidFill>
-                  <a:srgbClr val="4070A0"/>
-                </a:solidFill>
-                <a:latin typeface="Courier"/>
-              </a:rPr>
-              <a:t>"+ np.log(gdp_pc_eur) + productivity_idx"</a:t>
-            </a:r>
-            <a:r>
-              <a:rPr>
-                <a:latin typeface="Courier"/>
-              </a:rPr>
-              <a:t>,</a:t>
-            </a:r>
-            <a:br/>
-            <a:r>
-              <a:rPr>
-                <a:latin typeface="Courier"/>
-              </a:rPr>
-              <a:t>    data</a:t>
-            </a:r>
-            <a:r>
-              <a:rPr>
-                <a:solidFill>
-                  <a:srgbClr val="666666"/>
-                </a:solidFill>
-                <a:latin typeface="Courier"/>
-              </a:rPr>
-              <a:t>=</a:t>
-            </a:r>
-            <a:r>
-              <a:rPr>
-                <a:latin typeface="Courier"/>
-              </a:rPr>
-              <a:t>df,</a:t>
-            </a:r>
-            <a:br/>
-            <a:r>
-              <a:rPr>
-                <a:latin typeface="Courier"/>
-              </a:rPr>
-              <a:t>).fit()</a:t>
-            </a:r>
-          </a:p>
-          <a:p>
-            <a:pPr lvl="0" indent="0" marL="0">
-              <a:buNone/>
-            </a:pPr>
-            <a:r>
-              <a:rPr/>
-              <a:t>Compare </a:t>
-            </a:r>
-            <a:r>
-              <a:rPr>
-                <a:latin typeface="Courier"/>
-              </a:rPr>
-              <a:t>share_fossil</a:t>
-            </a:r>
-            <a:r>
-              <a:rPr/>
-              <a:t> across </a:t>
-            </a:r>
-            <a:r>
-              <a:rPr>
-                <a:latin typeface="Courier"/>
-              </a:rPr>
-              <a:t>m1</a:t>
-            </a:r>
-            <a:r>
-              <a:rPr/>
-              <a:t> and </a:t>
-            </a:r>
-            <a:r>
-              <a:rPr>
-                <a:latin typeface="Courier"/>
-              </a:rPr>
-              <a:t>m2</a:t>
-            </a:r>
-            <a:r>
-              <a:rPr/>
-              <a:t>.</a:t>
-            </a:r>
-          </a:p>
-          <a:p>
-            <a:pPr lvl="0" indent="0" marL="0">
-              <a:buNone/>
-            </a:pPr>
-            <a:r>
-              <a:rPr/>
-              <a:t>If it moved, composition was doing part of the work. FWL tells you exactly how much — and the next slide proves it.</a:t>
-            </a:r>
-          </a:p>
-        </p:txBody>
-      </p:sp>
-    </p:spTree>
-  </p:cSld>
-</p:sld>
-</file>
-
-<file path=ppt/slides/slide15.xml><?xml version="1.0" encoding="utf-8"?>
-<p:sld xmlns:a="http://schemas.openxmlformats.org/drawingml/2006/main" xmlns:r="http://schemas.openxmlformats.org/officeDocument/2006/relationships" xmlns:p="http://schemas.openxmlformats.org/presentationml/2006/main">
-  <p:cSld>
-    <p:spTree>
-      <p:nvGrpSpPr>
-        <p:cNvPr id="1" name=""/>
-        <p:cNvGrpSpPr/>
-        <p:nvPr/>
-      </p:nvGrpSpPr>
-      <p:grpSpPr>
-        <a:xfrm>
-          <a:off x="0" y="0"/>
-          <a:ext cx="0" cy="0"/>
-          <a:chOff x="0" y="0"/>
-          <a:chExt cx="0" cy="0"/>
-        </a:xfrm>
-      </p:grpSpPr>
-      <p:sp>
-        <p:nvSpPr>
-          <p:cNvPr id="2" name="Title 1"/>
-          <p:cNvSpPr>
-            <a:spLocks noGrp="1"/>
-          </p:cNvSpPr>
-          <p:nvPr>
-            <p:ph type="title"/>
-          </p:nvPr>
-        </p:nvSpPr>
-        <p:spPr/>
-        <p:txBody>
-          <a:bodyPr/>
-          <a:lstStyle/>
-          <a:p>
-            <a:pPr lvl="0" indent="0" marL="0">
-              <a:buNone/>
-            </a:pPr>
-            <a:r>
-              <a:rPr/>
-              <a:t>Verify FWL yourself</a:t>
-            </a:r>
-          </a:p>
-        </p:txBody>
-      </p:sp>
-      <p:sp>
-        <p:nvSpPr>
-          <p:cNvPr id="3" name="Content Placeholder 2"/>
-          <p:cNvSpPr>
-            <a:spLocks noGrp="1"/>
-          </p:cNvSpPr>
-          <p:nvPr>
-            <p:ph idx="1"/>
-          </p:nvPr>
-        </p:nvSpPr>
-        <p:spPr/>
-        <p:txBody>
-          <a:bodyPr/>
-          <a:lstStyle/>
-          <a:p>
-            <a:pPr lvl="0" indent="0">
-              <a:buNone/>
-            </a:pPr>
-            <a:r>
-              <a:rPr b="1">
-                <a:solidFill>
-                  <a:srgbClr val="008000"/>
-                </a:solidFill>
-                <a:latin typeface="Courier"/>
-              </a:rPr>
-              <a:t>import</a:t>
-            </a:r>
-            <a:r>
-              <a:rPr>
-                <a:latin typeface="Courier"/>
-              </a:rPr>
-              <a:t> numpy </a:t>
-            </a:r>
-            <a:r>
-              <a:rPr b="1">
-                <a:solidFill>
-                  <a:srgbClr val="008000"/>
-                </a:solidFill>
-                <a:latin typeface="Courier"/>
-              </a:rPr>
-              <a:t>as</a:t>
-            </a:r>
-            <a:r>
-              <a:rPr>
-                <a:latin typeface="Courier"/>
-              </a:rPr>
-              <a:t> np</a:t>
-            </a:r>
-            <a:br/>
-            <a:r>
-              <a:rPr b="1">
-                <a:solidFill>
-                  <a:srgbClr val="008000"/>
-                </a:solidFill>
-                <a:latin typeface="Courier"/>
-              </a:rPr>
-              <a:t>import</a:t>
-            </a:r>
-            <a:r>
-              <a:rPr>
-                <a:latin typeface="Courier"/>
-              </a:rPr>
-              <a:t> statsmodels.api </a:t>
-            </a:r>
-            <a:r>
-              <a:rPr b="1">
-                <a:solidFill>
-                  <a:srgbClr val="008000"/>
-                </a:solidFill>
-                <a:latin typeface="Courier"/>
-              </a:rPr>
-              <a:t>as</a:t>
-            </a:r>
-            <a:r>
-              <a:rPr>
-                <a:latin typeface="Courier"/>
-              </a:rPr>
-              <a:t> sm</a:t>
-            </a:r>
-            <a:br/>
-            <a:br/>
-            <a:r>
-              <a:rPr>
-                <a:latin typeface="Courier"/>
-              </a:rPr>
-              <a:t>d </a:t>
-            </a:r>
-            <a:r>
-              <a:rPr>
-                <a:solidFill>
-                  <a:srgbClr val="666666"/>
-                </a:solidFill>
-                <a:latin typeface="Courier"/>
-              </a:rPr>
-              <a:t>=</a:t>
-            </a:r>
-            <a:r>
-              <a:rPr>
-                <a:latin typeface="Courier"/>
-              </a:rPr>
-              <a:t> df.dropna(subset</a:t>
-            </a:r>
-            <a:r>
-              <a:rPr>
-                <a:solidFill>
-                  <a:srgbClr val="666666"/>
-                </a:solidFill>
-                <a:latin typeface="Courier"/>
-              </a:rPr>
-              <a:t>=</a:t>
-            </a:r>
-            <a:r>
-              <a:rPr>
-                <a:latin typeface="Courier"/>
-              </a:rPr>
-              <a:t>[</a:t>
-            </a:r>
-            <a:r>
-              <a:rPr>
-                <a:solidFill>
-                  <a:srgbClr val="4070A0"/>
-                </a:solidFill>
-                <a:latin typeface="Courier"/>
-              </a:rPr>
-              <a:t>"elec_price_eur_kwh"</a:t>
-            </a:r>
-            <a:r>
-              <a:rPr>
-                <a:latin typeface="Courier"/>
-              </a:rPr>
-              <a:t>, </a:t>
-            </a:r>
-            <a:r>
-              <a:rPr>
-                <a:solidFill>
-                  <a:srgbClr val="4070A0"/>
-                </a:solidFill>
-                <a:latin typeface="Courier"/>
-              </a:rPr>
-              <a:t>"share_fossil"</a:t>
-            </a:r>
-            <a:r>
-              <a:rPr>
-                <a:latin typeface="Courier"/>
-              </a:rPr>
-              <a:t>,</a:t>
-            </a:r>
-            <a:br/>
-            <a:r>
-              <a:rPr>
-                <a:latin typeface="Courier"/>
-              </a:rPr>
-              <a:t>                      </a:t>
-            </a:r>
-            <a:r>
-              <a:rPr>
-                <a:solidFill>
-                  <a:srgbClr val="4070A0"/>
-                </a:solidFill>
-                <a:latin typeface="Courier"/>
-              </a:rPr>
-              <a:t>"gdp_pc_eur"</a:t>
-            </a:r>
-            <a:r>
-              <a:rPr>
-                <a:latin typeface="Courier"/>
-              </a:rPr>
-              <a:t>, </a:t>
-            </a:r>
-            <a:r>
-              <a:rPr>
-                <a:solidFill>
-                  <a:srgbClr val="4070A0"/>
-                </a:solidFill>
-                <a:latin typeface="Courier"/>
-              </a:rPr>
-              <a:t>"productivity_idx"</a:t>
-            </a:r>
-            <a:r>
-              <a:rPr>
-                <a:latin typeface="Courier"/>
-              </a:rPr>
-              <a:t>])</a:t>
-            </a:r>
-            <a:br/>
-            <a:br/>
-            <a:r>
-              <a:rPr>
-                <a:latin typeface="Courier"/>
-              </a:rPr>
-              <a:t>Z </a:t>
-            </a:r>
-            <a:r>
-              <a:rPr>
-                <a:solidFill>
-                  <a:srgbClr val="666666"/>
-                </a:solidFill>
-                <a:latin typeface="Courier"/>
-              </a:rPr>
-              <a:t>=</a:t>
-            </a:r>
-            <a:r>
-              <a:rPr>
-                <a:latin typeface="Courier"/>
-              </a:rPr>
-              <a:t> sm.add_constant(d[[</a:t>
-            </a:r>
-            <a:r>
-              <a:rPr>
-                <a:solidFill>
-                  <a:srgbClr val="4070A0"/>
-                </a:solidFill>
-                <a:latin typeface="Courier"/>
-              </a:rPr>
-              <a:t>"gdp_pc_eur"</a:t>
-            </a:r>
-            <a:r>
-              <a:rPr>
-                <a:latin typeface="Courier"/>
-              </a:rPr>
-              <a:t>, </a:t>
-            </a:r>
-            <a:r>
-              <a:rPr>
-                <a:solidFill>
-                  <a:srgbClr val="4070A0"/>
-                </a:solidFill>
-                <a:latin typeface="Courier"/>
-              </a:rPr>
-              <a:t>"productivity_idx"</a:t>
-            </a:r>
-            <a:r>
-              <a:rPr>
-                <a:latin typeface="Courier"/>
-              </a:rPr>
-              <a:t>]])</a:t>
-            </a:r>
-            <a:br/>
-            <a:br/>
-            <a:r>
-              <a:rPr i="1">
-                <a:solidFill>
-                  <a:srgbClr val="60A0B0"/>
-                </a:solidFill>
-                <a:latin typeface="Courier"/>
-              </a:rPr>
-              <a:t># residualise BOTH the outcome and the regressor against Z</a:t>
-            </a:r>
-            <a:br/>
-            <a:r>
-              <a:rPr>
-                <a:latin typeface="Courier"/>
-              </a:rPr>
-              <a:t>y_r </a:t>
-            </a:r>
-            <a:r>
-              <a:rPr>
-                <a:solidFill>
-                  <a:srgbClr val="666666"/>
-                </a:solidFill>
-                <a:latin typeface="Courier"/>
-              </a:rPr>
-              <a:t>=</a:t>
-            </a:r>
-            <a:r>
-              <a:rPr>
-                <a:latin typeface="Courier"/>
-              </a:rPr>
-              <a:t> sm.OLS(d[</a:t>
-            </a:r>
-            <a:r>
-              <a:rPr>
-                <a:solidFill>
-                  <a:srgbClr val="4070A0"/>
-                </a:solidFill>
-                <a:latin typeface="Courier"/>
-              </a:rPr>
-              <a:t>"elec_price_eur_kwh"</a:t>
-            </a:r>
-            <a:r>
-              <a:rPr>
-                <a:latin typeface="Courier"/>
-              </a:rPr>
-              <a:t>], Z).fit().resid</a:t>
-            </a:r>
-            <a:br/>
-            <a:r>
-              <a:rPr>
-                <a:latin typeface="Courier"/>
-              </a:rPr>
-              <a:t>x_r </a:t>
-            </a:r>
-            <a:r>
-              <a:rPr>
-                <a:solidFill>
-                  <a:srgbClr val="666666"/>
-                </a:solidFill>
-                <a:latin typeface="Courier"/>
-              </a:rPr>
-              <a:t>=</a:t>
-            </a:r>
-            <a:r>
-              <a:rPr>
-                <a:latin typeface="Courier"/>
-              </a:rPr>
-              <a:t> sm.OLS(d[</a:t>
-            </a:r>
-            <a:r>
-              <a:rPr>
-                <a:solidFill>
-                  <a:srgbClr val="4070A0"/>
-                </a:solidFill>
-                <a:latin typeface="Courier"/>
-              </a:rPr>
-              <a:t>"share_fossil"</a:t>
-            </a:r>
-            <a:r>
-              <a:rPr>
-                <a:latin typeface="Courier"/>
-              </a:rPr>
-              <a:t>],       Z).fit().resid</a:t>
-            </a:r>
-            <a:br/>
-            <a:br/>
-            <a:r>
-              <a:rPr>
-                <a:solidFill>
-                  <a:srgbClr val="008000"/>
-                </a:solidFill>
-                <a:latin typeface="Courier"/>
-              </a:rPr>
-              <a:t>print</a:t>
-            </a:r>
-            <a:r>
-              <a:rPr>
-                <a:latin typeface="Courier"/>
-              </a:rPr>
-              <a:t>(sm.OLS(y_r, sm.add_constant(x_r)).fit().params.iloc[</a:t>
-            </a:r>
-            <a:r>
-              <a:rPr>
-                <a:solidFill>
-                  <a:srgbClr val="40A070"/>
-                </a:solidFill>
-                <a:latin typeface="Courier"/>
-              </a:rPr>
-              <a:t>1</a:t>
-            </a:r>
-            <a:r>
-              <a:rPr>
-                <a:latin typeface="Courier"/>
-              </a:rPr>
-              <a:t>])</a:t>
-            </a:r>
-            <a:br/>
-            <a:r>
-              <a:rPr i="1">
-                <a:solidFill>
-                  <a:srgbClr val="60A0B0"/>
-                </a:solidFill>
-                <a:latin typeface="Courier"/>
-              </a:rPr>
-              <a:t># identical to share_fossil in the full multiple regression</a:t>
-            </a:r>
-          </a:p>
-          <a:p>
-            <a:pPr lvl="0" indent="0" marL="0">
-              <a:buNone/>
-            </a:pPr>
-            <a:r>
-              <a:rPr/>
-              <a:t>Two routes, one number. That identity </a:t>
-            </a:r>
-            <a:r>
-              <a:rPr i="1"/>
-              <a:t>is</a:t>
-            </a:r>
-            <a:r>
-              <a:rPr/>
-              <a:t> what “controlling for” means.</a:t>
-            </a:r>
-          </a:p>
-        </p:txBody>
-      </p:sp>
-    </p:spTree>
-  </p:cSld>
-</p:sld>
-</file>
-
-<file path=ppt/slides/slide16.xml><?xml version="1.0" encoding="utf-8"?>
-<p:sld xmlns:a="http://schemas.openxmlformats.org/drawingml/2006/main" xmlns:r="http://schemas.openxmlformats.org/officeDocument/2006/relationships" xmlns:p="http://schemas.openxmlformats.org/presentationml/2006/main">
-  <p:cSld>
-    <p:spTree>
-      <p:nvGrpSpPr>
-        <p:cNvPr id="1" name=""/>
-        <p:cNvGrpSpPr/>
-        <p:nvPr/>
-      </p:nvGrpSpPr>
-      <p:grpSpPr>
-        <a:xfrm>
-          <a:off x="0" y="0"/>
-          <a:ext cx="0" cy="0"/>
-          <a:chOff x="0" y="0"/>
-          <a:chExt cx="0" cy="0"/>
-        </a:xfrm>
-      </p:grpSpPr>
-      <p:sp>
-        <p:nvSpPr>
-          <p:cNvPr id="2" name="Title 1"/>
-          <p:cNvSpPr>
-            <a:spLocks noGrp="1"/>
-          </p:cNvSpPr>
-          <p:nvPr>
-            <p:ph type="title"/>
-          </p:nvPr>
-        </p:nvSpPr>
-        <p:spPr/>
-        <p:txBody>
-          <a:bodyPr/>
-          <a:lstStyle/>
-          <a:p>
-            <a:pPr lvl="0" indent="0" marL="0">
-              <a:buNone/>
-            </a:pPr>
-            <a:r>
-              <a:rPr/>
-              <a:t>What to report</a:t>
-            </a:r>
-          </a:p>
-        </p:txBody>
-      </p:sp>
-      <mc:AlternateContent xmlns:mc="http://schemas.openxmlformats.org/markup-compatibility/2006">
-        <mc:Choice xmlns:a14="http://schemas.microsoft.com/office/drawing/2010/main" Requires="a14">
-          <p:sp>
-            <p:nvSpPr>
-              <p:cNvPr id="3" name="Content Placeholder 2"/>
-              <p:cNvSpPr>
-                <a:spLocks noGrp="1"/>
-              </p:cNvSpPr>
-              <p:nvPr>
-                <p:ph idx="1"/>
-              </p:nvPr>
-            </p:nvSpPr>
-            <p:spPr/>
-            <p:txBody>
-              <a:bodyPr/>
-              <a:lstStyle/>
-              <a:p>
-                <a:pPr lvl="0"/>
-                <a:r>
-                  <a:rPr/>
-                  <a:t>Which share you </a:t>
-                </a:r>
-                <a:r>
-                  <a:rPr b="1"/>
-                  <a:t>omitted</a:t>
-                </a:r>
-                <a:r>
-                  <a:rPr/>
-                  <a:t>, and therefore what the comparison is against</a:t>
-                </a:r>
-              </a:p>
-              <a:p>
-                <a:pPr lvl="0"/>
-                <a:r>
-                  <a:rPr/>
-                  <a:t>Whether the fossil coefficient </a:t>
-                </a:r>
-                <a:r>
-                  <a:rPr b="1"/>
-                  <a:t>moved</a:t>
-                </a:r>
-                <a:r>
-                  <a:rPr/>
-                  <a:t> when composition entered, and in which direction</a:t>
-                </a:r>
-              </a:p>
-              <a:p>
-                <a:pPr lvl="0"/>
-                <a14:m>
-                  <m:oMath xmlns:m="http://schemas.openxmlformats.org/officeDocument/2006/math">
-                    <m:sSup>
-                      <m:e>
-                        <m:r>
-                          <m:t>R</m:t>
-                        </m:r>
-                      </m:e>
-                      <m:sup>
-                        <m:r>
-                          <m:t>2</m:t>
-                        </m:r>
-                      </m:sup>
-                    </m:sSup>
-                  </m:oMath>
-                </a14:m>
-                <a:r>
-                  <a:rPr/>
-                  <a:t> </a:t>
-                </a:r>
-                <a:r>
-                  <a:rPr b="1"/>
-                  <a:t>and</a:t>
-                </a:r>
-                <a:r>
-                  <a:rPr/>
-                  <a:t> the residual standard error in price units — a share of variance is not a magnitude</a:t>
-                </a:r>
-              </a:p>
-              <a:p>
-                <a:pPr lvl="0"/>
-                <a:r>
-                  <a:rPr/>
-                  <a:t>That 2022 breaks the series, and what you did about it</a:t>
-                </a:r>
-              </a:p>
-              <a:p>
-                <a:pPr lvl="0" indent="0" marL="0">
-                  <a:buNone/>
-                </a:pPr>
-                <a:r>
-                  <a:rPr/>
-                  <a:t>Do not write “fossil generation raises prices by X”. You have an association in a 30-country panel, not an experiment. Session 10 is where causal language becomes available, and it costs more than this.</a:t>
-                </a:r>
-              </a:p>
-            </p:txBody>
-          </p:sp>
-        </mc:Choice>
-      </mc:AlternateContent>
-    </p:spTree>
-  </p:cSld>
-</p:sld>
-</file>
-
-<file path=ppt/slides/slide17.xml><?xml version="1.0" encoding="UTF-8"?><p:sld xmlns:a="http://schemas.openxmlformats.org/drawingml/2006/main" xmlns:r="http://schemas.openxmlformats.org/officeDocument/2006/relationships" xmlns:p="http://schemas.openxmlformats.org/presentationml/2006/main"><p:cSld><p:spTree><p:nvGrpSpPr><p:cNvPr id="1" name="" /><p:cNvGrpSpPr /><p:nvPr /></p:nvGrpSpPr><p:grpSpPr><a:xfrm><a:off x="0" y="0" /><a:ext cx="0" cy="0" /><a:chOff x="0" y="0" /><a:chExt cx="0" cy="0" /></a:xfrm></p:grpSpPr><p:sp><p:nvSpPr><p:cNvPr id="2" name="Title 1" /><p:cNvSpPr><a:spLocks noGrp="1" /></p:cNvSpPr><p:nvPr><p:ph type="title" /></p:nvPr></p:nvSpPr><p:spPr /><p:txBody><a:bodyPr /><a:lstStyle /><a:p><a:pPr lvl="0" indent="0" marL="0"><a:buNone /></a:pPr><a:r><a:rPr /><a:t>Common mistakes</a:t></a:r></a:p></p:txBody></p:sp><p:graphicFrame><p:nvGraphicFramePr><p:cNvPr id="6" name="Content Placeholder 5" /><p:cNvGraphicFramePr><a:graphicFrameLocks noGrp="1" /></p:cNvGraphicFramePr><p:nvPr><p:ph idx="1" /></p:nvPr></p:nvGraphicFramePr><p:xfrm><a:off x="457200" y="1193800" /><a:ext cx="8229600" cy="3390900" /></p:xfrm><a:graphic><a:graphicData uri="http://schemas.openxmlformats.org/drawingml/2006/table"><a:tbl><a:tblPr firstRow="1" bandRow="1"><a:tableStyleId>{5C22544A-7EE6-4342-B048-85BDC9FD1C3A}</a:tableStyleId></a:tblPr><a:tblGrid><a:gridCol w="4114800" /><a:gridCol w="4114800" /></a:tblGrid><a:tr h="0"><a:tc><a:txBody><a:bodyPr /><a:lstStyle /><a:p><a:pPr lvl="0" indent="0" marL="0"><a:buNone /></a:pPr><a:r><a:rPr /><a:t>Mistake</a:t></a:r></a:p></a:txBody><a:tcPr /></a:tc><a:tc><a:txBody><a:bodyPr /><a:lstStyle /><a:p><a:pPr lvl="0" indent="0" marL="0"><a:buNone /></a:pPr><a:r><a:rPr /><a:t>What happens</a:t></a:r></a:p></a:txBody><a:tcPr /></a:tc></a:tr><a:tr h="0"><a:tc><a:txBody><a:bodyPr /><a:lstStyle /><a:p><a:pPr lvl="0" indent="0" marL="0"><a:buNone /></a:pPr><a:r><a:rPr /><a:t>All three shares + intercept</a:t></a:r></a:p></a:txBody></a:tc><a:tc><a:txBody><a:bodyPr /><a:lstStyle /><a:p><a:pPr lvl="0" indent="0" marL="0"><a:buNone /></a:pPr><a:r><a:rPr /><a:t>Singular </a:t></a:r><a14:m><m:oMath xmlns:m="http://schemas.openxmlformats.org/officeDocument/2006/math"><m:r><m:t>X</m:t></m:r><m:r><m:rPr><m:sty m:val="p" /></m:rPr><m:t>′</m:t></m:r><m:r><m:t>X</m:t></m:r></m:oMath></a14:m><a:r><a:rPr /><a:t>; meaningless coefficients</a:t></a:r></a:p></a:txBody></a:tc></a:tr><a:tr h="0"><a:tc><a:txBody><a:bodyPr /><a:lstStyle /><a:p><a:pPr lvl="0" indent="0" marL="0"><a:buNone /></a:pPr><a:r><a:rPr /><a:t>Reading a coefficient without naming the omitted share</a:t></a:r></a:p></a:txBody></a:tc><a:tc><a:txBody><a:bodyPr /><a:lstStyle /><a:p><a:pPr lvl="0" indent="0" marL="0"><a:buNone /></a:pPr><a:r><a:rPr /><a:t>The number has no referent</a:t></a:r></a:p></a:txBody></a:tc></a:tr><a:tr h="0"><a:tc><a:txBody><a:bodyPr /><a:lstStyle /><a:p><a:pPr lvl="0" indent="0" marL="0"><a:buNone /></a:pPr><a:r><a:rPr /><a:t>Pooling 2022 with earlier years silently</a:t></a:r></a:p></a:txBody></a:tc><a:tc><a:txBody><a:bodyPr /><a:lstStyle /><a:p><a:pPr lvl="0" indent="0" marL="0"><a:buNone /></a:pPr><a:r><a:rPr /><a:t>One structural break masquerades as an effect</a:t></a:r></a:p></a:txBody></a:tc></a:tr><a:tr h="0"><a:tc><a:txBody><a:bodyPr /><a:lstStyle /><a:p><a:pPr lvl="0" indent="0" marL="0"><a:buNone /></a:pPr><a:r><a:rPr /><a:t>Dropping rows with </a:t></a:r><a:r><a:rPr><a:latin typeface="Courier" /></a:rPr><a:t>flag == &quot;u&quot;</a:t></a:r></a:p></a:txBody></a:tc><a:tc><a:txBody><a:bodyPr /><a:lstStyle /><a:p><a:pPr lvl="0" indent="0" marL="0"><a:buNone /></a:pPr><a:r><a:rPr /><a:t>Coverage tilts toward large economies</a:t></a:r></a:p></a:txBody></a:tc></a:tr><a:tr h="0"><a:tc><a:txBody><a:bodyPr /><a:lstStyle /><a:p><a:pPr lvl="0" indent="0" marL="0"><a:buNone /></a:pPr><a:r><a:rPr /><a:t>Reporting </a:t></a:r><a14:m><m:oMath xmlns:m="http://schemas.openxmlformats.org/officeDocument/2006/math"><m:sSup><m:e><m:r><m:t>R</m:t></m:r></m:e><m:sup><m:r><m:t>2</m:t></m:r></m:sup></m:sSup></m:oMath></a14:m><a:r><a:rPr /><a:t> alone</a:t></a:r></a:p></a:txBody></a:tc><a:tc><a:txBody><a:bodyPr /><a:lstStyle /><a:p><a:pPr lvl="0" indent="0" marL="0"><a:buNone /></a:pPr><a:r><a:rPr /><a:t>No sense of magnitude</a:t></a:r></a:p></a:txBody></a:tc></a:tr></a:tbl></a:graphicData></a:graphic></p:graphicFrame></p:spTree></p:cSld></p:sld>
-</file>
-
-<file path=ppt/slides/slide18.xml><?xml version="1.0" encoding="utf-8"?>
-<p:sld xmlns:a="http://schemas.openxmlformats.org/drawingml/2006/main" xmlns:r="http://schemas.openxmlformats.org/officeDocument/2006/relationships" xmlns:p="http://schemas.openxmlformats.org/presentationml/2006/main">
-  <p:cSld>
-    <p:spTree>
-      <p:nvGrpSpPr>
-        <p:cNvPr id="1" name=""/>
-        <p:cNvGrpSpPr/>
-        <p:nvPr/>
-      </p:nvGrpSpPr>
-      <p:grpSpPr>
-        <a:xfrm>
-          <a:off x="0" y="0"/>
-          <a:ext cx="0" cy="0"/>
-          <a:chOff x="0" y="0"/>
-          <a:chExt cx="0" cy="0"/>
-        </a:xfrm>
-      </p:grpSpPr>
-      <p:sp>
-        <p:nvSpPr>
-          <p:cNvPr id="2" name="Title 1"/>
-          <p:cNvSpPr>
-            <a:spLocks noGrp="1"/>
-          </p:cNvSpPr>
-          <p:nvPr>
-            <p:ph type="title"/>
-          </p:nvPr>
-        </p:nvSpPr>
-        <p:spPr/>
-        <p:txBody>
-          <a:bodyPr/>
-          <a:lstStyle/>
-          <a:p>
-            <a:pPr lvl="0" indent="0" marL="0">
-              <a:buNone/>
-            </a:pPr>
-            <a:r>
-              <a:rPr/>
-              <a:t>In the lab</a:t>
-            </a:r>
-          </a:p>
-        </p:txBody>
-      </p:sp>
-      <p:sp>
-        <p:nvSpPr>
-          <p:cNvPr id="3" name="Content Placeholder 2"/>
-          <p:cNvSpPr>
-            <a:spLocks noGrp="1"/>
-          </p:cNvSpPr>
-          <p:nvPr>
-            <p:ph idx="1"/>
-          </p:nvPr>
-        </p:nvSpPr>
-        <p:spPr/>
-        <p:txBody>
-          <a:bodyPr/>
-          <a:lstStyle/>
-          <a:p>
-            <a:pPr lvl="0" indent="0" marL="0">
-              <a:buNone/>
-            </a:pPr>
-            <a:r>
-              <a:rPr/>
-              <a:t>Work through </a:t>
-            </a:r>
-            <a:r>
-              <a:rPr>
-                <a:hlinkClick r:id="rId2"/>
-                <a:latin typeface="Courier"/>
-              </a:rPr>
-              <a:t>02-lab/README.md</a:t>
-            </a:r>
-            <a:r>
-              <a:rPr/>
-              <a:t>.</a:t>
-            </a:r>
-          </a:p>
-          <a:p>
-            <a:pPr lvl="0" indent="0" marL="0">
-              <a:buNone/>
-            </a:pPr>
-            <a:r>
-              <a:rPr/>
-              <a:t>You will:</a:t>
-            </a:r>
-          </a:p>
-          <a:p>
-            <a:pPr lvl="0" indent="-342900" marL="342900">
-              <a:buAutoNum type="arabicPeriod"/>
-            </a:pPr>
-            <a:r>
-              <a:rPr/>
-              <a:t>Build the merged panel and confirm the collinearity for yourself</a:t>
-            </a:r>
-          </a:p>
-          <a:p>
-            <a:pPr lvl="0" indent="-342900" marL="342900">
-              <a:buAutoNum type="arabicPeriod"/>
-            </a:pPr>
-            <a:r>
-              <a:rPr/>
-              <a:t>Estimate the naive and the composition-adjusted specification</a:t>
-            </a:r>
-          </a:p>
-          <a:p>
-            <a:pPr lvl="0" indent="-342900" marL="342900">
-              <a:buAutoNum type="arabicPeriod"/>
-            </a:pPr>
-            <a:r>
-              <a:rPr/>
-              <a:t>Reproduce the coefficient by residualising, and show the two agree</a:t>
-            </a:r>
-          </a:p>
-          <a:p>
-            <a:pPr lvl="0" indent="-342900" marL="342900">
-              <a:buAutoNum type="arabicPeriod"/>
-            </a:pPr>
-            <a:r>
-              <a:rPr/>
-              <a:t>Write </a:t>
-            </a:r>
-            <a:r>
-              <a:rPr b="1"/>
-              <a:t>three sentences</a:t>
-            </a:r>
-            <a:r>
-              <a:rPr/>
-              <a:t> your group will defend if drawn</a:t>
-            </a:r>
-          </a:p>
-          <a:p>
-            <a:pPr lvl="0" indent="0" marL="0">
-              <a:buNone/>
-            </a:pPr>
-            <a:r>
-              <a:rPr/>
-              <a:t>The three sentences are the deliverable. The code is how you earn the right to write them.</a:t>
-            </a:r>
-          </a:p>
-        </p:txBody>
-      </p:sp>
-    </p:spTree>
-  </p:cSld>
-</p:sld>
-</file>
-
-<file path=ppt/slides/slide2.xml><?xml version="1.0" encoding="utf-8"?>
-<p:sld xmlns:a="http://schemas.openxmlformats.org/drawingml/2006/main" xmlns:r="http://schemas.openxmlformats.org/officeDocument/2006/relationships" xmlns:p="http://schemas.openxmlformats.org/presentationml/2006/main">
-  <p:cSld>
-    <p:spTree>
-      <p:nvGrpSpPr>
-        <p:cNvPr id="1" name=""/>
-        <p:cNvGrpSpPr/>
-        <p:nvPr/>
-      </p:nvGrpSpPr>
-      <p:grpSpPr>
-        <a:xfrm>
-          <a:off x="0" y="0"/>
-          <a:ext cx="0" cy="0"/>
-          <a:chOff x="0" y="0"/>
-          <a:chExt cx="0" cy="0"/>
-        </a:xfrm>
-      </p:grpSpPr>
-      <p:sp>
-        <p:nvSpPr>
-          <p:cNvPr id="2" name="Title 1"/>
-          <p:cNvSpPr>
-            <a:spLocks noGrp="1"/>
-          </p:cNvSpPr>
-          <p:nvPr>
-            <p:ph type="title"/>
-          </p:nvPr>
-        </p:nvSpPr>
-        <p:spPr>
-          <a:xfrm>
-            <a:off x="722313" y="3305176"/>
-            <a:ext cx="7772400" cy="1021556"/>
-          </a:xfrm>
-        </p:spPr>
-        <p:txBody>
-          <a:bodyPr/>
-          <a:lstStyle/>
-          <a:p>
-            <a:pPr lvl="0" indent="0" marL="0">
-              <a:buNone/>
-            </a:pPr>
-            <a:r>
-              <a:rPr/>
-              <a:t>The question</a:t>
-            </a:r>
-          </a:p>
-        </p:txBody>
-      </p:sp>
-    </p:spTree>
-  </p:cSld>
-</p:sld>
-</file>
-
-<file path=ppt/slides/slide3.xml><?xml version="1.0" encoding="utf-8"?>
-<p:sld xmlns:a="http://schemas.openxmlformats.org/drawingml/2006/main" xmlns:r="http://schemas.openxmlformats.org/officeDocument/2006/relationships" xmlns:p="http://schemas.openxmlformats.org/presentationml/2006/main">
-  <p:cSld>
-    <p:spTree>
-      <p:nvGrpSpPr>
-        <p:cNvPr id="1" name=""/>
-        <p:cNvGrpSpPr/>
-        <p:nvPr/>
-      </p:nvGrpSpPr>
-      <p:grpSpPr>
-        <a:xfrm>
-          <a:off x="0" y="0"/>
-          <a:ext cx="0" cy="0"/>
-          <a:chOff x="0" y="0"/>
-          <a:chExt cx="0" cy="0"/>
-        </a:xfrm>
-      </p:grpSpPr>
-      <p:sp>
-        <p:nvSpPr>
-          <p:cNvPr id="2" name="Title 1"/>
-          <p:cNvSpPr>
-            <a:spLocks noGrp="1"/>
-          </p:cNvSpPr>
-          <p:nvPr>
-            <p:ph type="title"/>
-          </p:nvPr>
-        </p:nvSpPr>
-        <p:spPr/>
-        <p:txBody>
-          <a:bodyPr/>
-          <a:lstStyle/>
-          <a:p>
-            <a:pPr lvl="0" indent="0" marL="0">
-              <a:buNone/>
-            </a:pPr>
-            <a:r>
-              <a:rPr/>
-              <a:t>Electricity prices across Europe</a:t>
-            </a:r>
-          </a:p>
-        </p:txBody>
-      </p:sp>
-      <p:sp>
-        <p:nvSpPr>
-          <p:cNvPr id="3" name="Content Placeholder 2"/>
-          <p:cNvSpPr>
-            <a:spLocks noGrp="1"/>
-          </p:cNvSpPr>
-          <p:nvPr>
-            <p:ph idx="1"/>
-          </p:nvPr>
-        </p:nvSpPr>
-        <p:spPr/>
-        <p:txBody>
-          <a:bodyPr/>
-          <a:lstStyle/>
-          <a:p>
-            <a:pPr lvl="0" indent="0" marL="0">
-              <a:buNone/>
-            </a:pPr>
-            <a:r>
-              <a:rPr/>
-              <a:t>Industrial electricity costs more in some European countries than others.</a:t>
-            </a:r>
-          </a:p>
-          <a:p>
-            <a:pPr lvl="0" indent="0" marL="0">
-              <a:buNone/>
-            </a:pPr>
-            <a:r>
-              <a:rPr/>
-              <a:t>A natural first claim:</a:t>
-            </a:r>
-          </a:p>
-          <a:p>
-            <a:pPr lvl="0" indent="0" marL="1270000">
-              <a:buNone/>
-            </a:pPr>
-            <a:r>
-              <a:rPr sz="2000" i="1"/>
-              <a:t>“Countries with more fossil generation have higher electricity prices.”</a:t>
-            </a:r>
-          </a:p>
-          <a:p>
-            <a:pPr lvl="0" indent="0" marL="0">
-              <a:buNone/>
-            </a:pPr>
-            <a:r>
-              <a:rPr/>
-              <a:t>Before we can defend that sentence, we have to separate two things:</a:t>
-            </a:r>
-          </a:p>
-          <a:p>
-            <a:pPr lvl="0"/>
-            <a:r>
-              <a:rPr/>
-              <a:t>the </a:t>
-            </a:r>
-            <a:r>
-              <a:rPr b="1"/>
-              <a:t>effect</a:t>
-            </a:r>
-            <a:r>
-              <a:rPr/>
-              <a:t> of the generation mix on price</a:t>
-            </a:r>
-          </a:p>
-          <a:p>
-            <a:pPr lvl="0"/>
-            <a:r>
-              <a:rPr/>
-              <a:t>the </a:t>
-            </a:r>
-            <a:r>
-              <a:rPr b="1"/>
-              <a:t>composition</a:t>
-            </a:r>
-            <a:r>
-              <a:rPr/>
-              <a:t> of the countries that happen to have that mix</a:t>
-            </a:r>
-          </a:p>
-          <a:p>
-            <a:pPr lvl="0" indent="0" marL="0">
-              <a:buNone/>
-            </a:pPr>
-            <a:r>
-              <a:rPr/>
-              <a:t>Rich countries differ from poor ones in more than their power stations.</a:t>
-            </a:r>
-          </a:p>
-        </p:txBody>
-      </p:sp>
-    </p:spTree>
-  </p:cSld>
-</p:sld>
-</file>
-
-<file path=ppt/slides/slide4.xml><?xml version="1.0" encoding="utf-8"?>
-<p:sld xmlns:a="http://schemas.openxmlformats.org/drawingml/2006/main" xmlns:r="http://schemas.openxmlformats.org/officeDocument/2006/relationships" xmlns:p="http://schemas.openxmlformats.org/presentationml/2006/main">
-  <p:cSld>
-    <p:spTree>
-      <p:nvGrpSpPr>
-        <p:cNvPr id="1" name=""/>
-        <p:cNvGrpSpPr/>
-        <p:nvPr/>
-      </p:nvGrpSpPr>
-      <p:grpSpPr>
-        <a:xfrm>
-          <a:off x="0" y="0"/>
-          <a:ext cx="0" cy="0"/>
-          <a:chOff x="0" y="0"/>
-          <a:chExt cx="0" cy="0"/>
-        </a:xfrm>
-      </p:grpSpPr>
-      <p:sp>
-        <p:nvSpPr>
-          <p:cNvPr id="2" name="Title 1"/>
-          <p:cNvSpPr>
-            <a:spLocks noGrp="1"/>
-          </p:cNvSpPr>
-          <p:nvPr>
-            <p:ph type="title"/>
-          </p:nvPr>
-        </p:nvSpPr>
-        <p:spPr/>
-        <p:txBody>
-          <a:bodyPr/>
-          <a:lstStyle/>
-          <a:p>
-            <a:pPr lvl="0" indent="0" marL="0">
-              <a:buNone/>
-            </a:pPr>
-            <a:r>
-              <a:rPr/>
-              <a:t>Why this is a geometry problem</a:t>
-            </a:r>
-          </a:p>
-        </p:txBody>
-      </p:sp>
-      <mc:AlternateContent xmlns:mc="http://schemas.openxmlformats.org/markup-compatibility/2006">
-        <mc:Choice xmlns:a14="http://schemas.microsoft.com/office/drawing/2010/main" Requires="a14">
-          <p:sp>
-            <p:nvSpPr>
-              <p:cNvPr id="3" name="Content Placeholder 2"/>
-              <p:cNvSpPr>
-                <a:spLocks noGrp="1"/>
-              </p:cNvSpPr>
-              <p:nvPr>
-                <p:ph idx="1"/>
-              </p:nvPr>
-            </p:nvSpPr>
-            <p:spPr/>
-            <p:txBody>
-              <a:bodyPr/>
-              <a:lstStyle/>
-              <a:p>
-                <a:pPr lvl="0" indent="0" marL="0">
-                  <a:buNone/>
-                </a:pPr>
-                <a:r>
-                  <a:rPr/>
-                  <a:t>Least squares is not a formula to memorise. It is a </a:t>
-                </a:r>
-                <a:r>
-                  <a:rPr b="1"/>
-                  <a:t>projection</a:t>
-                </a:r>
-                <a:r>
-                  <a:rPr/>
-                  <a:t>.</a:t>
-                </a:r>
-              </a:p>
-              <a:p>
-                <a:pPr lvl="0" indent="0" marL="0">
-                  <a:buNone/>
-                </a:pPr>
-                <a14:m>
-                  <m:oMathPara xmlns:m="http://schemas.openxmlformats.org/officeDocument/2006/math">
-                    <m:oMathParaPr>
-                      <m:jc m:val="center"/>
-                    </m:oMathParaPr>
-                    <m:oMath>
-                      <m:acc>
-                        <m:accPr>
-                          <m:chr m:val="̂"/>
-                        </m:accPr>
-                        <m:e>
-                          <m:r>
-                            <m:t>y</m:t>
-                          </m:r>
-                        </m:e>
-                      </m:acc>
-                      <m:r>
-                        <m:rPr>
-                          <m:sty m:val="p"/>
-                        </m:rPr>
-                        <m:t>=</m:t>
-                      </m:r>
-                      <m:r>
-                        <m:t>X</m:t>
-                      </m:r>
-                      <m:sSup>
-                        <m:e>
-                          <m:d>
-                            <m:dPr>
-                              <m:begChr m:val="("/>
-                              <m:sepChr m:val=""/>
-                              <m:endChr m:val=")"/>
-                              <m:grow/>
-                            </m:dPr>
-                            <m:e>
-                              <m:r>
-                                <m:t>X</m:t>
-                              </m:r>
-                              <m:r>
-                                <m:rPr>
-                                  <m:sty m:val="p"/>
-                                </m:rPr>
-                                <m:t>′</m:t>
-                              </m:r>
-                              <m:r>
-                                <m:t>X</m:t>
-                              </m:r>
-                            </m:e>
-                          </m:d>
-                        </m:e>
-                        <m:sup>
-                          <m:r>
-                            <m:rPr>
-                              <m:sty m:val="p"/>
-                            </m:rPr>
-                            <m:t>−</m:t>
-                          </m:r>
-                          <m:r>
-                            <m:t>1</m:t>
-                          </m:r>
-                        </m:sup>
-                      </m:sSup>
-                      <m:r>
-                        <m:t>X</m:t>
-                      </m:r>
-                      <m:r>
-                        <m:rPr>
-                          <m:sty m:val="p"/>
-                        </m:rPr>
-                        <m:t>′</m:t>
-                      </m:r>
-                      <m:r>
-                        <m:t>y</m:t>
-                      </m:r>
-                      <m:r>
-                        <m:rPr>
-                          <m:sty m:val="p"/>
-                        </m:rPr>
-                        <m:t>=</m:t>
-                      </m:r>
-                      <m:sSub>
-                        <m:e>
-                          <m:r>
-                            <m:t>P</m:t>
-                          </m:r>
-                        </m:e>
-                        <m:sub>
-                          <m:r>
-                            <m:t>X</m:t>
-                          </m:r>
-                        </m:sub>
-                      </m:sSub>
-                      <m:r>
-                        <m:t> </m:t>
-                      </m:r>
-                      <m:r>
-                        <m:t>y</m:t>
-                      </m:r>
-                    </m:oMath>
-                  </m:oMathPara>
-                </a14:m>
-              </a:p>
-              <a:p>
-                <a:pPr lvl="0" indent="0" marL="0">
-                  <a:buNone/>
-                </a:pPr>
-                <a14:m>
-                  <m:oMath xmlns:m="http://schemas.openxmlformats.org/officeDocument/2006/math">
-                    <m:sSub>
-                      <m:e>
-                        <m:r>
-                          <m:t>P</m:t>
-                        </m:r>
-                      </m:e>
-                      <m:sub>
-                        <m:r>
-                          <m:t>X</m:t>
-                        </m:r>
-                      </m:sub>
-                    </m:sSub>
-                  </m:oMath>
-                </a14:m>
-                <a:r>
-                  <a:rPr/>
-                  <a:t> projects </a:t>
-                </a:r>
-                <a14:m>
-                  <m:oMath xmlns:m="http://schemas.openxmlformats.org/officeDocument/2006/math">
-                    <m:r>
-                      <m:t>y</m:t>
-                    </m:r>
-                  </m:oMath>
-                </a14:m>
-                <a:r>
-                  <a:rPr/>
-                  <a:t> onto the column space of </a:t>
-                </a:r>
-                <a14:m>
-                  <m:oMath xmlns:m="http://schemas.openxmlformats.org/officeDocument/2006/math">
-                    <m:r>
-                      <m:t>X</m:t>
-                    </m:r>
-                  </m:oMath>
-                </a14:m>
-                <a:r>
-                  <a:rPr/>
-                  <a:t>. The residual</a:t>
-                </a:r>
-              </a:p>
-              <a:p>
-                <a:pPr lvl="0" indent="0" marL="0">
-                  <a:buNone/>
-                </a:pPr>
-                <a14:m>
-                  <m:oMathPara xmlns:m="http://schemas.openxmlformats.org/officeDocument/2006/math">
-                    <m:oMathParaPr>
-                      <m:jc m:val="center"/>
-                    </m:oMathParaPr>
-                    <m:oMath>
-                      <m:r>
-                        <m:t>e</m:t>
-                      </m:r>
-                      <m:r>
-                        <m:rPr>
-                          <m:sty m:val="p"/>
-                        </m:rPr>
-                        <m:t>=</m:t>
-                      </m:r>
-                      <m:d>
-                        <m:dPr>
-                          <m:begChr m:val="("/>
-                          <m:sepChr m:val=""/>
-                          <m:endChr m:val=")"/>
-                          <m:grow/>
-                        </m:dPr>
-                        <m:e>
-                          <m:r>
-                            <m:t>I</m:t>
-                          </m:r>
-                          <m:r>
-                            <m:rPr>
-                              <m:sty m:val="p"/>
-                            </m:rPr>
-                            <m:t>−</m:t>
-                          </m:r>
-                          <m:sSub>
-                            <m:e>
-                              <m:r>
-                                <m:t>P</m:t>
-                              </m:r>
-                            </m:e>
-                            <m:sub>
-                              <m:r>
-                                <m:t>X</m:t>
-                              </m:r>
-                            </m:sub>
-                          </m:sSub>
-                        </m:e>
-                      </m:d>
-                      <m:r>
-                        <m:t> </m:t>
-                      </m:r>
-                      <m:r>
-                        <m:t>y</m:t>
-                      </m:r>
-                      <m:r>
-                        <m:rPr>
-                          <m:sty m:val="p"/>
-                        </m:rPr>
-                        <m:t>=</m:t>
-                      </m:r>
-                      <m:sSub>
-                        <m:e>
-                          <m:r>
-                            <m:t>M</m:t>
-                          </m:r>
-                        </m:e>
-                        <m:sub>
-                          <m:r>
-                            <m:t>X</m:t>
-                          </m:r>
-                        </m:sub>
-                      </m:sSub>
-                      <m:r>
-                        <m:t> </m:t>
-                      </m:r>
-                      <m:r>
-                        <m:t>y</m:t>
-                      </m:r>
-                    </m:oMath>
-                  </m:oMathPara>
-                </a14:m>
-              </a:p>
-              <a:p>
-                <a:pPr lvl="0" indent="0" marL="0">
-                  <a:buNone/>
-                </a:pPr>
-                <a:r>
-                  <a:rPr/>
-                  <a:t>is what is left </a:t>
-                </a:r>
-                <a:r>
-                  <a:rPr b="1"/>
-                  <a:t>orthogonal</a:t>
-                </a:r>
-                <a:r>
-                  <a:rPr/>
-                  <a:t> to everything </a:t>
-                </a:r>
-                <a14:m>
-                  <m:oMath xmlns:m="http://schemas.openxmlformats.org/officeDocument/2006/math">
-                    <m:r>
-                      <m:t>X</m:t>
-                    </m:r>
-                  </m:oMath>
-                </a14:m>
-                <a:r>
-                  <a:rPr/>
-                  <a:t> can explain.</a:t>
-                </a:r>
-              </a:p>
-              <a:p>
-                <a:pPr lvl="0" indent="0" marL="0">
-                  <a:buNone/>
-                </a:pPr>
-                <a:r>
-                  <a:rPr/>
-                  <a:t>Every result today follows from one fact: </a:t>
-                </a:r>
-                <a14:m>
-                  <m:oMath xmlns:m="http://schemas.openxmlformats.org/officeDocument/2006/math">
-                    <m:sSub>
-                      <m:e>
-                        <m:r>
-                          <m:t>M</m:t>
-                        </m:r>
-                      </m:e>
-                      <m:sub>
-                        <m:r>
-                          <m:t>X</m:t>
-                        </m:r>
-                      </m:sub>
-                    </m:sSub>
-                    <m:r>
-                      <m:t>X</m:t>
-                    </m:r>
-                    <m:r>
-                      <m:rPr>
-                        <m:sty m:val="p"/>
-                      </m:rPr>
-                      <m:t>=</m:t>
-                    </m:r>
-                    <m:r>
-                      <m:t>0</m:t>
-                    </m:r>
-                  </m:oMath>
-                </a14:m>
-                <a:r>
-                  <a:rPr/>
-                  <a:t>. The residual carries no trace of the columns you controlled for.</a:t>
-                </a:r>
-              </a:p>
-            </p:txBody>
-          </p:sp>
-        </mc:Choice>
-      </mc:AlternateContent>
-    </p:spTree>
-  </p:cSld>
-</p:sld>
-</file>
-
-<file path=ppt/slides/slide5.xml><?xml version="1.0" encoding="utf-8"?>
-<p:sld xmlns:a="http://schemas.openxmlformats.org/drawingml/2006/main" xmlns:r="http://schemas.openxmlformats.org/officeDocument/2006/relationships" xmlns:p="http://schemas.openxmlformats.org/presentationml/2006/main">
-  <p:cSld>
-    <p:spTree>
-      <p:nvGrpSpPr>
-        <p:cNvPr id="1" name=""/>
-        <p:cNvGrpSpPr/>
-        <p:nvPr/>
-      </p:nvGrpSpPr>
-      <p:grpSpPr>
-        <a:xfrm>
-          <a:off x="0" y="0"/>
-          <a:ext cx="0" cy="0"/>
-          <a:chOff x="0" y="0"/>
-          <a:chExt cx="0" cy="0"/>
-        </a:xfrm>
-      </p:grpSpPr>
-      <p:sp>
-        <p:nvSpPr>
-          <p:cNvPr id="2" name="Title 1"/>
-          <p:cNvSpPr>
-            <a:spLocks noGrp="1"/>
-          </p:cNvSpPr>
-          <p:nvPr>
-            <p:ph type="title"/>
-          </p:nvPr>
-        </p:nvSpPr>
-        <p:spPr>
-          <a:xfrm>
-            <a:off x="722313" y="3305176"/>
-            <a:ext cx="7772400" cy="1021556"/>
-          </a:xfrm>
-        </p:spPr>
-        <p:txBody>
-          <a:bodyPr/>
-          <a:lstStyle/>
-          <a:p>
-            <a:pPr lvl="0" indent="0" marL="0">
-              <a:buNone/>
-            </a:pPr>
-            <a:r>
-              <a:rPr/>
-              <a:t>The method</a:t>
-            </a:r>
-          </a:p>
-        </p:txBody>
-      </p:sp>
-    </p:spTree>
-  </p:cSld>
-</p:sld>
-</file>
-
-<file path=ppt/slides/slide6.xml><?xml version="1.0" encoding="utf-8"?>
 <p:sld xmlns:a="http://schemas.openxmlformats.org/drawingml/2006/main" xmlns:r="http://schemas.openxmlformats.org/officeDocument/2006/relationships" xmlns:p="http://schemas.openxmlformats.org/presentationml/2006/main">
   <p:cSld>
     <p:spTree>
@@ -5976,7 +4452,7 @@
 </p:sld>
 </file>
 
-<file path=ppt/slides/slide7.xml><?xml version="1.0" encoding="utf-8"?>
+<file path=ppt/slides/slide14.xml><?xml version="1.0" encoding="utf-8"?>
 <p:sld xmlns:a="http://schemas.openxmlformats.org/drawingml/2006/main" xmlns:r="http://schemas.openxmlformats.org/officeDocument/2006/relationships" xmlns:p="http://schemas.openxmlformats.org/presentationml/2006/main">
   <p:cSld>
     <p:spTree>
@@ -6231,7 +4707,7 @@
 </p:sld>
 </file>
 
-<file path=ppt/slides/slide8.xml><?xml version="1.0" encoding="utf-8"?>
+<file path=ppt/slides/slide15.xml><?xml version="1.0" encoding="utf-8"?>
 <p:sld xmlns:a="http://schemas.openxmlformats.org/drawingml/2006/main" xmlns:r="http://schemas.openxmlformats.org/officeDocument/2006/relationships" xmlns:p="http://schemas.openxmlformats.org/presentationml/2006/main">
   <p:cSld>
     <p:spTree>
@@ -6283,7 +4759,7 @@
 </p:sld>
 </file>
 
-<file path=ppt/slides/slide9.xml><?xml version="1.0" encoding="utf-8"?>
+<file path=ppt/slides/slide16.xml><?xml version="1.0" encoding="utf-8"?>
 <p:sld xmlns:a="http://schemas.openxmlformats.org/drawingml/2006/main" xmlns:r="http://schemas.openxmlformats.org/officeDocument/2006/relationships" xmlns:p="http://schemas.openxmlformats.org/presentationml/2006/main">
   <p:cSld>
     <p:spTree>
@@ -6743,6 +5219,3759 @@
           </a:graphicData>
         </a:graphic>
       </p:graphicFrame>
+    </p:spTree>
+  </p:cSld>
+</p:sld>
+</file>
+
+<file path=ppt/slides/slide17.xml><?xml version="1.0" encoding="utf-8"?>
+<p:sld xmlns:a="http://schemas.openxmlformats.org/drawingml/2006/main" xmlns:r="http://schemas.openxmlformats.org/officeDocument/2006/relationships" xmlns:p="http://schemas.openxmlformats.org/presentationml/2006/main">
+  <p:cSld>
+    <p:spTree>
+      <p:nvGrpSpPr>
+        <p:cNvPr id="1" name=""/>
+        <p:cNvGrpSpPr/>
+        <p:nvPr/>
+      </p:nvGrpSpPr>
+      <p:grpSpPr>
+        <a:xfrm>
+          <a:off x="0" y="0"/>
+          <a:ext cx="0" cy="0"/>
+          <a:chOff x="0" y="0"/>
+          <a:chExt cx="0" cy="0"/>
+        </a:xfrm>
+      </p:grpSpPr>
+      <p:sp>
+        <p:nvSpPr>
+          <p:cNvPr id="2" name="Title 1"/>
+          <p:cNvSpPr>
+            <a:spLocks noGrp="1"/>
+          </p:cNvSpPr>
+          <p:nvPr>
+            <p:ph type="title"/>
+          </p:nvPr>
+        </p:nvSpPr>
+        <p:spPr/>
+        <p:txBody>
+          <a:bodyPr/>
+          <a:lstStyle/>
+          <a:p>
+            <a:pPr lvl="0" indent="0" marL="0">
+              <a:buNone/>
+            </a:pPr>
+            <a:r>
+              <a:rPr/>
+              <a:t>The trap in this table</a:t>
+            </a:r>
+          </a:p>
+        </p:txBody>
+      </p:sp>
+      <mc:AlternateContent xmlns:mc="http://schemas.openxmlformats.org/markup-compatibility/2006">
+        <mc:Choice xmlns:a14="http://schemas.microsoft.com/office/drawing/2010/main" Requires="a14">
+          <p:sp>
+            <p:nvSpPr>
+              <p:cNvPr id="3" name="Content Placeholder 2"/>
+              <p:cNvSpPr>
+                <a:spLocks noGrp="1"/>
+              </p:cNvSpPr>
+              <p:nvPr>
+                <p:ph idx="1"/>
+              </p:nvPr>
+            </p:nvSpPr>
+            <p:spPr/>
+            <p:txBody>
+              <a:bodyPr/>
+              <a:lstStyle/>
+              <a:p>
+                <a:pPr lvl="0" indent="0" marL="0">
+                  <a:buNone/>
+                </a:pPr>
+                <a:r>
+                  <a:rPr/>
+                  <a:t>The three generation shares </a:t>
+                </a:r>
+                <a:r>
+                  <a:rPr b="1"/>
+                  <a:t>sum to one</a:t>
+                </a:r>
+                <a:r>
+                  <a:rPr/>
+                  <a:t>, exactly:</a:t>
+                </a:r>
+              </a:p>
+              <a:p>
+                <a:pPr lvl="0" indent="0">
+                  <a:buNone/>
+                </a:pPr>
+                <a:r>
+                  <a:rPr>
+                    <a:latin typeface="Courier"/>
+                  </a:rPr>
+                  <a:t>df[[</a:t>
+                </a:r>
+                <a:r>
+                  <a:rPr>
+                    <a:solidFill>
+                      <a:srgbClr val="4070A0"/>
+                    </a:solidFill>
+                    <a:latin typeface="Courier"/>
+                  </a:rPr>
+                  <a:t>"share_renew"</a:t>
+                </a:r>
+                <a:r>
+                  <a:rPr>
+                    <a:latin typeface="Courier"/>
+                  </a:rPr>
+                  <a:t>, </a:t>
+                </a:r>
+                <a:r>
+                  <a:rPr>
+                    <a:solidFill>
+                      <a:srgbClr val="4070A0"/>
+                    </a:solidFill>
+                    <a:latin typeface="Courier"/>
+                  </a:rPr>
+                  <a:t>"share_fossil"</a:t>
+                </a:r>
+                <a:r>
+                  <a:rPr>
+                    <a:latin typeface="Courier"/>
+                  </a:rPr>
+                  <a:t>, </a:t>
+                </a:r>
+                <a:r>
+                  <a:rPr>
+                    <a:solidFill>
+                      <a:srgbClr val="4070A0"/>
+                    </a:solidFill>
+                    <a:latin typeface="Courier"/>
+                  </a:rPr>
+                  <a:t>"share_nuclear"</a:t>
+                </a:r>
+                <a:r>
+                  <a:rPr>
+                    <a:latin typeface="Courier"/>
+                  </a:rPr>
+                  <a:t>]].</a:t>
+                </a:r>
+                <a:r>
+                  <a:rPr>
+                    <a:solidFill>
+                      <a:srgbClr val="008000"/>
+                    </a:solidFill>
+                    <a:latin typeface="Courier"/>
+                  </a:rPr>
+                  <a:t>sum</a:t>
+                </a:r>
+                <a:r>
+                  <a:rPr>
+                    <a:latin typeface="Courier"/>
+                  </a:rPr>
+                  <a:t>(axis</a:t>
+                </a:r>
+                <a:r>
+                  <a:rPr>
+                    <a:solidFill>
+                      <a:srgbClr val="666666"/>
+                    </a:solidFill>
+                    <a:latin typeface="Courier"/>
+                  </a:rPr>
+                  <a:t>=</a:t>
+                </a:r>
+                <a:r>
+                  <a:rPr>
+                    <a:solidFill>
+                      <a:srgbClr val="40A070"/>
+                    </a:solidFill>
+                    <a:latin typeface="Courier"/>
+                  </a:rPr>
+                  <a:t>1</a:t>
+                </a:r>
+                <a:r>
+                  <a:rPr>
+                    <a:latin typeface="Courier"/>
+                  </a:rPr>
+                  <a:t>).</a:t>
+                </a:r>
+                <a:r>
+                  <a:rPr>
+                    <a:solidFill>
+                      <a:srgbClr val="008000"/>
+                    </a:solidFill>
+                    <a:latin typeface="Courier"/>
+                  </a:rPr>
+                  <a:t>max</a:t>
+                </a:r>
+                <a:r>
+                  <a:rPr>
+                    <a:latin typeface="Courier"/>
+                  </a:rPr>
+                  <a:t>()</a:t>
+                </a:r>
+                <a:br/>
+                <a:r>
+                  <a:rPr i="1">
+                    <a:solidFill>
+                      <a:srgbClr val="60A0B0"/>
+                    </a:solidFill>
+                    <a:latin typeface="Courier"/>
+                  </a:rPr>
+                  <a:t># 1.0001  (rounding only)</a:t>
+                </a:r>
+              </a:p>
+              <a:p>
+                <a:pPr lvl="0" indent="0" marL="0">
+                  <a:buNone/>
+                </a:pPr>
+                <a:r>
+                  <a:rPr/>
+                  <a:t>Include all three shares </a:t>
+                </a:r>
+                <a:r>
+                  <a:rPr b="1"/>
+                  <a:t>and</a:t>
+                </a:r>
+                <a:r>
+                  <a:rPr/>
+                  <a:t> an intercept and you have created exact collinearity. </a:t>
+                </a:r>
+                <a14:m>
+                  <m:oMath xmlns:m="http://schemas.openxmlformats.org/officeDocument/2006/math">
+                    <m:r>
+                      <m:t>X</m:t>
+                    </m:r>
+                    <m:r>
+                      <m:rPr>
+                        <m:sty m:val="p"/>
+                      </m:rPr>
+                      <m:t>′</m:t>
+                    </m:r>
+                    <m:r>
+                      <m:t>X</m:t>
+                    </m:r>
+                  </m:oMath>
+                </a14:m>
+                <a:r>
+                  <a:rPr/>
+                  <a:t> is singular. Some libraries error; others silently return one of infinitely many solutions.</a:t>
+                </a:r>
+              </a:p>
+              <a:p>
+                <a:pPr lvl="0" indent="0" marL="0">
+                  <a:buNone/>
+                </a:pPr>
+                <a:r>
+                  <a:rPr b="1"/>
+                  <a:t>Drop one share.</a:t>
+                </a:r>
+                <a:r>
+                  <a:rPr/>
+                  <a:t> Every coefficient is then read </a:t>
+                </a:r>
+                <a:r>
+                  <a:rPr i="1"/>
+                  <a:t>relative to the omitted category</a:t>
+                </a:r>
+                <a:r>
+                  <a:rPr/>
+                  <a:t> — which you must state in your table note.</a:t>
+                </a:r>
+              </a:p>
+            </p:txBody>
+          </p:sp>
+        </mc:Choice>
+      </mc:AlternateContent>
+    </p:spTree>
+  </p:cSld>
+</p:sld>
+</file>
+
+<file path=ppt/slides/slide18.xml><?xml version="1.0" encoding="utf-8"?>
+<p:sld xmlns:a="http://schemas.openxmlformats.org/drawingml/2006/main" xmlns:r="http://schemas.openxmlformats.org/officeDocument/2006/relationships" xmlns:p="http://schemas.openxmlformats.org/presentationml/2006/main">
+  <p:cSld>
+    <p:spTree>
+      <p:nvGrpSpPr>
+        <p:cNvPr id="1" name=""/>
+        <p:cNvGrpSpPr/>
+        <p:nvPr/>
+      </p:nvGrpSpPr>
+      <p:grpSpPr>
+        <a:xfrm>
+          <a:off x="0" y="0"/>
+          <a:ext cx="0" cy="0"/>
+          <a:chOff x="0" y="0"/>
+          <a:chExt cx="0" cy="0"/>
+        </a:xfrm>
+      </p:grpSpPr>
+      <p:sp>
+        <p:nvSpPr>
+          <p:cNvPr id="2" name="Title 1"/>
+          <p:cNvSpPr>
+            <a:spLocks noGrp="1"/>
+          </p:cNvSpPr>
+          <p:nvPr>
+            <p:ph type="title"/>
+          </p:nvPr>
+        </p:nvSpPr>
+        <p:spPr/>
+        <p:txBody>
+          <a:bodyPr/>
+          <a:lstStyle/>
+          <a:p>
+            <a:pPr lvl="0" indent="0" marL="0">
+              <a:buNone/>
+            </a:pPr>
+            <a:r>
+              <a:rPr/>
+              <a:t>A price without its band is meaningless</a:t>
+            </a:r>
+          </a:p>
+        </p:txBody>
+      </p:sp>
+      <p:sp>
+        <p:nvSpPr>
+          <p:cNvPr id="3" name="Content Placeholder 2"/>
+          <p:cNvSpPr>
+            <a:spLocks noGrp="1"/>
+          </p:cNvSpPr>
+          <p:nvPr>
+            <p:ph idx="1"/>
+          </p:nvPr>
+        </p:nvSpPr>
+        <p:spPr/>
+        <p:txBody>
+          <a:bodyPr/>
+          <a:lstStyle/>
+          <a:p>
+            <a:pPr lvl="0" indent="0" marL="0">
+              <a:buNone/>
+            </a:pPr>
+            <a:r>
+              <a:rPr>
+                <a:latin typeface="Courier"/>
+              </a:rPr>
+              <a:t>elec_price_eur_kwh</a:t>
+            </a:r>
+            <a:r>
+              <a:rPr/>
+              <a:t> is </a:t>
+            </a:r>
+            <a:r>
+              <a:rPr b="1"/>
+              <a:t>band IC</a:t>
+            </a:r>
+            <a:r>
+              <a:rPr/>
+              <a:t>: consumers using 500–2000 MWh a year.</a:t>
+            </a:r>
+          </a:p>
+          <a:p>
+            <a:pPr lvl="0"/>
+            <a:r>
+              <a:rPr/>
+              <a:t>A different band is a different number for the same country and year.</a:t>
+            </a:r>
+          </a:p>
+          <a:p>
+            <a:pPr lvl="0"/>
+            <a:r>
+              <a:rPr/>
+              <a:t>There is a </a:t>
+            </a:r>
+            <a:r>
+              <a:rPr b="1"/>
+              <a:t>structural break in 2022</a:t>
+            </a:r>
+            <a:r>
+              <a:rPr/>
+              <a:t> — the energy shock.</a:t>
+            </a:r>
+          </a:p>
+          <a:p>
+            <a:pPr lvl="0"/>
+            <a:r>
+              <a:rPr>
+                <a:latin typeface="Courier"/>
+              </a:rPr>
+              <a:t>elec_price_incl_tax</a:t>
+            </a:r>
+            <a:r>
+              <a:rPr/>
+              <a:t> minus the excl.-tax series is the </a:t>
+            </a:r>
+            <a:r>
+              <a:rPr b="1"/>
+              <a:t>policy wedge</a:t>
+            </a:r>
+            <a:r>
+              <a:rPr/>
+              <a:t>, not a measurement error.</a:t>
+            </a:r>
+          </a:p>
+          <a:p>
+            <a:pPr lvl="0" indent="0" marL="0">
+              <a:buNone/>
+            </a:pPr>
+            <a:r>
+              <a:rPr/>
+              <a:t>Reporting “the electricity price in Germany” without the band is the kind of sentence this course is designed to stop you writing.</a:t>
+            </a:r>
+          </a:p>
+        </p:txBody>
+      </p:sp>
+    </p:spTree>
+  </p:cSld>
+</p:sld>
+</file>
+
+<file path=ppt/slides/slide19.xml><?xml version="1.0" encoding="utf-8"?>
+<p:sld xmlns:a="http://schemas.openxmlformats.org/drawingml/2006/main" xmlns:r="http://schemas.openxmlformats.org/officeDocument/2006/relationships" xmlns:p="http://schemas.openxmlformats.org/presentationml/2006/main">
+  <p:cSld>
+    <p:spTree>
+      <p:nvGrpSpPr>
+        <p:cNvPr id="1" name=""/>
+        <p:cNvGrpSpPr/>
+        <p:nvPr/>
+      </p:nvGrpSpPr>
+      <p:grpSpPr>
+        <a:xfrm>
+          <a:off x="0" y="0"/>
+          <a:ext cx="0" cy="0"/>
+          <a:chOff x="0" y="0"/>
+          <a:chExt cx="0" cy="0"/>
+        </a:xfrm>
+      </p:grpSpPr>
+      <p:sp>
+        <p:nvSpPr>
+          <p:cNvPr id="2" name="Title 1"/>
+          <p:cNvSpPr>
+            <a:spLocks noGrp="1"/>
+          </p:cNvSpPr>
+          <p:nvPr>
+            <p:ph type="title"/>
+          </p:nvPr>
+        </p:nvSpPr>
+        <p:spPr>
+          <a:xfrm>
+            <a:off x="722313" y="3305176"/>
+            <a:ext cx="7772400" cy="1021556"/>
+          </a:xfrm>
+        </p:spPr>
+        <p:txBody>
+          <a:bodyPr/>
+          <a:lstStyle/>
+          <a:p>
+            <a:pPr lvl="0" indent="0" marL="0">
+              <a:buNone/>
+            </a:pPr>
+            <a:r>
+              <a:rPr/>
+              <a:t>Doing it</a:t>
+            </a:r>
+          </a:p>
+        </p:txBody>
+      </p:sp>
+    </p:spTree>
+  </p:cSld>
+</p:sld>
+</file>
+
+<file path=ppt/slides/slide2.xml><?xml version="1.0" encoding="utf-8"?>
+<p:sld xmlns:a="http://schemas.openxmlformats.org/drawingml/2006/main" xmlns:r="http://schemas.openxmlformats.org/officeDocument/2006/relationships" xmlns:p="http://schemas.openxmlformats.org/presentationml/2006/main">
+  <p:cSld>
+    <p:spTree>
+      <p:nvGrpSpPr>
+        <p:cNvPr id="1" name=""/>
+        <p:cNvGrpSpPr/>
+        <p:nvPr/>
+      </p:nvGrpSpPr>
+      <p:grpSpPr>
+        <a:xfrm>
+          <a:off x="0" y="0"/>
+          <a:ext cx="0" cy="0"/>
+          <a:chOff x="0" y="0"/>
+          <a:chExt cx="0" cy="0"/>
+        </a:xfrm>
+      </p:grpSpPr>
+      <p:sp>
+        <p:nvSpPr>
+          <p:cNvPr id="2" name="Title 1"/>
+          <p:cNvSpPr>
+            <a:spLocks noGrp="1"/>
+          </p:cNvSpPr>
+          <p:nvPr>
+            <p:ph type="title"/>
+          </p:nvPr>
+        </p:nvSpPr>
+        <p:spPr>
+          <a:xfrm>
+            <a:off x="722313" y="3305176"/>
+            <a:ext cx="7772400" cy="1021556"/>
+          </a:xfrm>
+        </p:spPr>
+        <p:txBody>
+          <a:bodyPr/>
+          <a:lstStyle/>
+          <a:p>
+            <a:pPr lvl="0" indent="0" marL="0">
+              <a:buNone/>
+            </a:pPr>
+            <a:r>
+              <a:rPr/>
+              <a:t>Where we are</a:t>
+            </a:r>
+          </a:p>
+        </p:txBody>
+      </p:sp>
+    </p:spTree>
+  </p:cSld>
+</p:sld>
+</file>
+
+<file path=ppt/slides/slide20.xml><?xml version="1.0" encoding="utf-8"?>
+<p:sld xmlns:a="http://schemas.openxmlformats.org/drawingml/2006/main" xmlns:r="http://schemas.openxmlformats.org/officeDocument/2006/relationships" xmlns:p="http://schemas.openxmlformats.org/presentationml/2006/main">
+  <p:cSld>
+    <p:spTree>
+      <p:nvGrpSpPr>
+        <p:cNvPr id="1" name=""/>
+        <p:cNvGrpSpPr/>
+        <p:nvPr/>
+      </p:nvGrpSpPr>
+      <p:grpSpPr>
+        <a:xfrm>
+          <a:off x="0" y="0"/>
+          <a:ext cx="0" cy="0"/>
+          <a:chOff x="0" y="0"/>
+          <a:chExt cx="0" cy="0"/>
+        </a:xfrm>
+      </p:grpSpPr>
+      <p:sp>
+        <p:nvSpPr>
+          <p:cNvPr id="2" name="Title 1"/>
+          <p:cNvSpPr>
+            <a:spLocks noGrp="1"/>
+          </p:cNvSpPr>
+          <p:nvPr>
+            <p:ph type="title"/>
+          </p:nvPr>
+        </p:nvSpPr>
+        <p:spPr/>
+        <p:txBody>
+          <a:bodyPr/>
+          <a:lstStyle/>
+          <a:p>
+            <a:pPr lvl="0" indent="0" marL="0">
+              <a:buNone/>
+            </a:pPr>
+            <a:r>
+              <a:rPr/>
+              <a:t>The naive regression</a:t>
+            </a:r>
+          </a:p>
+        </p:txBody>
+      </p:sp>
+      <p:sp>
+        <p:nvSpPr>
+          <p:cNvPr id="3" name="Content Placeholder 2"/>
+          <p:cNvSpPr>
+            <a:spLocks noGrp="1"/>
+          </p:cNvSpPr>
+          <p:nvPr>
+            <p:ph idx="1"/>
+          </p:nvPr>
+        </p:nvSpPr>
+        <p:spPr/>
+        <p:txBody>
+          <a:bodyPr/>
+          <a:lstStyle/>
+          <a:p>
+            <a:pPr lvl="0" indent="0">
+              <a:buNone/>
+            </a:pPr>
+            <a:r>
+              <a:rPr b="1">
+                <a:solidFill>
+                  <a:srgbClr val="008000"/>
+                </a:solidFill>
+                <a:latin typeface="Courier"/>
+              </a:rPr>
+              <a:t>import</a:t>
+            </a:r>
+            <a:r>
+              <a:rPr>
+                <a:latin typeface="Courier"/>
+              </a:rPr>
+              <a:t> statsmodels.formula.api </a:t>
+            </a:r>
+            <a:r>
+              <a:rPr b="1">
+                <a:solidFill>
+                  <a:srgbClr val="008000"/>
+                </a:solidFill>
+                <a:latin typeface="Courier"/>
+              </a:rPr>
+              <a:t>as</a:t>
+            </a:r>
+            <a:r>
+              <a:rPr>
+                <a:latin typeface="Courier"/>
+              </a:rPr>
+              <a:t> smf</a:t>
+            </a:r>
+            <a:br/>
+            <a:br/>
+            <a:r>
+              <a:rPr>
+                <a:latin typeface="Courier"/>
+              </a:rPr>
+              <a:t>m1 </a:t>
+            </a:r>
+            <a:r>
+              <a:rPr>
+                <a:solidFill>
+                  <a:srgbClr val="666666"/>
+                </a:solidFill>
+                <a:latin typeface="Courier"/>
+              </a:rPr>
+              <a:t>=</a:t>
+            </a:r>
+            <a:r>
+              <a:rPr>
+                <a:latin typeface="Courier"/>
+              </a:rPr>
+              <a:t> smf.ols(</a:t>
+            </a:r>
+            <a:r>
+              <a:rPr>
+                <a:solidFill>
+                  <a:srgbClr val="4070A0"/>
+                </a:solidFill>
+                <a:latin typeface="Courier"/>
+              </a:rPr>
+              <a:t>"elec_price_eur_kwh ~ share_fossil + share_nuclear"</a:t>
+            </a:r>
+            <a:r>
+              <a:rPr>
+                <a:latin typeface="Courier"/>
+              </a:rPr>
+              <a:t>, data</a:t>
+            </a:r>
+            <a:r>
+              <a:rPr>
+                <a:solidFill>
+                  <a:srgbClr val="666666"/>
+                </a:solidFill>
+                <a:latin typeface="Courier"/>
+              </a:rPr>
+              <a:t>=</a:t>
+            </a:r>
+            <a:r>
+              <a:rPr>
+                <a:latin typeface="Courier"/>
+              </a:rPr>
+              <a:t>df).fit()</a:t>
+            </a:r>
+            <a:br/>
+            <a:r>
+              <a:rPr>
+                <a:solidFill>
+                  <a:srgbClr val="008000"/>
+                </a:solidFill>
+                <a:latin typeface="Courier"/>
+              </a:rPr>
+              <a:t>print</a:t>
+            </a:r>
+            <a:r>
+              <a:rPr>
+                <a:latin typeface="Courier"/>
+              </a:rPr>
+              <a:t>(m1.summary().tables[</a:t>
+            </a:r>
+            <a:r>
+              <a:rPr>
+                <a:solidFill>
+                  <a:srgbClr val="40A070"/>
+                </a:solidFill>
+                <a:latin typeface="Courier"/>
+              </a:rPr>
+              <a:t>1</a:t>
+            </a:r>
+            <a:r>
+              <a:rPr>
+                <a:latin typeface="Courier"/>
+              </a:rPr>
+              <a:t>])</a:t>
+            </a:r>
+          </a:p>
+          <a:p>
+            <a:pPr lvl="0" indent="0" marL="0">
+              <a:buNone/>
+            </a:pPr>
+            <a:r>
+              <a:rPr>
+                <a:latin typeface="Courier"/>
+              </a:rPr>
+              <a:t>share_renew</a:t>
+            </a:r>
+            <a:r>
+              <a:rPr/>
+              <a:t> is omitted, so both coefficients are read </a:t>
+            </a:r>
+            <a:r>
+              <a:rPr b="1"/>
+              <a:t>against renewables</a:t>
+            </a:r>
+            <a:r>
+              <a:rPr/>
+              <a:t>.</a:t>
+            </a:r>
+          </a:p>
+          <a:p>
+            <a:pPr lvl="0" indent="0" marL="0">
+              <a:buNone/>
+            </a:pPr>
+            <a:r>
+              <a:rPr/>
+              <a:t>Write down the sign you expect </a:t>
+            </a:r>
+            <a:r>
+              <a:rPr i="1"/>
+              <a:t>before</a:t>
+            </a:r>
+            <a:r>
+              <a:rPr/>
+              <a:t> you run it. You are allowed to be wrong; you are not allowed to decide afterwards what you predicted.</a:t>
+            </a:r>
+          </a:p>
+        </p:txBody>
+      </p:sp>
+    </p:spTree>
+  </p:cSld>
+</p:sld>
+</file>
+
+<file path=ppt/slides/slide21.xml><?xml version="1.0" encoding="utf-8"?>
+<p:sld xmlns:a="http://schemas.openxmlformats.org/drawingml/2006/main" xmlns:r="http://schemas.openxmlformats.org/officeDocument/2006/relationships" xmlns:p="http://schemas.openxmlformats.org/presentationml/2006/main">
+  <p:cSld>
+    <p:spTree>
+      <p:nvGrpSpPr>
+        <p:cNvPr id="1" name=""/>
+        <p:cNvGrpSpPr/>
+        <p:nvPr/>
+      </p:nvGrpSpPr>
+      <p:grpSpPr>
+        <a:xfrm>
+          <a:off x="0" y="0"/>
+          <a:ext cx="0" cy="0"/>
+          <a:chOff x="0" y="0"/>
+          <a:chExt cx="0" cy="0"/>
+        </a:xfrm>
+      </p:grpSpPr>
+      <p:sp>
+        <p:nvSpPr>
+          <p:cNvPr id="2" name="Title 1"/>
+          <p:cNvSpPr>
+            <a:spLocks noGrp="1"/>
+          </p:cNvSpPr>
+          <p:nvPr>
+            <p:ph type="title"/>
+          </p:nvPr>
+        </p:nvSpPr>
+        <p:spPr/>
+        <p:txBody>
+          <a:bodyPr/>
+          <a:lstStyle/>
+          <a:p>
+            <a:pPr lvl="0" indent="0" marL="0">
+              <a:buNone/>
+            </a:pPr>
+            <a:r>
+              <a:rPr/>
+              <a:t>Now add composition</a:t>
+            </a:r>
+          </a:p>
+        </p:txBody>
+      </p:sp>
+      <p:sp>
+        <p:nvSpPr>
+          <p:cNvPr id="3" name="Content Placeholder 2"/>
+          <p:cNvSpPr>
+            <a:spLocks noGrp="1"/>
+          </p:cNvSpPr>
+          <p:nvPr>
+            <p:ph idx="1"/>
+          </p:nvPr>
+        </p:nvSpPr>
+        <p:spPr/>
+        <p:txBody>
+          <a:bodyPr/>
+          <a:lstStyle/>
+          <a:p>
+            <a:pPr lvl="0" indent="0">
+              <a:buNone/>
+            </a:pPr>
+            <a:r>
+              <a:rPr>
+                <a:latin typeface="Courier"/>
+              </a:rPr>
+              <a:t>m2 </a:t>
+            </a:r>
+            <a:r>
+              <a:rPr>
+                <a:solidFill>
+                  <a:srgbClr val="666666"/>
+                </a:solidFill>
+                <a:latin typeface="Courier"/>
+              </a:rPr>
+              <a:t>=</a:t>
+            </a:r>
+            <a:r>
+              <a:rPr>
+                <a:latin typeface="Courier"/>
+              </a:rPr>
+              <a:t> smf.ols(</a:t>
+            </a:r>
+            <a:br/>
+            <a:r>
+              <a:rPr>
+                <a:latin typeface="Courier"/>
+              </a:rPr>
+              <a:t>    </a:t>
+            </a:r>
+            <a:r>
+              <a:rPr>
+                <a:solidFill>
+                  <a:srgbClr val="4070A0"/>
+                </a:solidFill>
+                <a:latin typeface="Courier"/>
+              </a:rPr>
+              <a:t>"elec_price_eur_kwh ~ share_fossil + share_nuclear "</a:t>
+            </a:r>
+            <a:br/>
+            <a:r>
+              <a:rPr>
+                <a:latin typeface="Courier"/>
+              </a:rPr>
+              <a:t>    </a:t>
+            </a:r>
+            <a:r>
+              <a:rPr>
+                <a:solidFill>
+                  <a:srgbClr val="4070A0"/>
+                </a:solidFill>
+                <a:latin typeface="Courier"/>
+              </a:rPr>
+              <a:t>"+ np.log(gdp_pc_eur) + productivity_idx"</a:t>
+            </a:r>
+            <a:r>
+              <a:rPr>
+                <a:latin typeface="Courier"/>
+              </a:rPr>
+              <a:t>,</a:t>
+            </a:r>
+            <a:br/>
+            <a:r>
+              <a:rPr>
+                <a:latin typeface="Courier"/>
+              </a:rPr>
+              <a:t>    data</a:t>
+            </a:r>
+            <a:r>
+              <a:rPr>
+                <a:solidFill>
+                  <a:srgbClr val="666666"/>
+                </a:solidFill>
+                <a:latin typeface="Courier"/>
+              </a:rPr>
+              <a:t>=</a:t>
+            </a:r>
+            <a:r>
+              <a:rPr>
+                <a:latin typeface="Courier"/>
+              </a:rPr>
+              <a:t>df,</a:t>
+            </a:r>
+            <a:br/>
+            <a:r>
+              <a:rPr>
+                <a:latin typeface="Courier"/>
+              </a:rPr>
+              <a:t>).fit()</a:t>
+            </a:r>
+          </a:p>
+          <a:p>
+            <a:pPr lvl="0" indent="0" marL="0">
+              <a:buNone/>
+            </a:pPr>
+            <a:r>
+              <a:rPr/>
+              <a:t>Compare </a:t>
+            </a:r>
+            <a:r>
+              <a:rPr>
+                <a:latin typeface="Courier"/>
+              </a:rPr>
+              <a:t>share_fossil</a:t>
+            </a:r>
+            <a:r>
+              <a:rPr/>
+              <a:t> across </a:t>
+            </a:r>
+            <a:r>
+              <a:rPr>
+                <a:latin typeface="Courier"/>
+              </a:rPr>
+              <a:t>m1</a:t>
+            </a:r>
+            <a:r>
+              <a:rPr/>
+              <a:t> and </a:t>
+            </a:r>
+            <a:r>
+              <a:rPr>
+                <a:latin typeface="Courier"/>
+              </a:rPr>
+              <a:t>m2</a:t>
+            </a:r>
+            <a:r>
+              <a:rPr/>
+              <a:t>.</a:t>
+            </a:r>
+          </a:p>
+          <a:p>
+            <a:pPr lvl="0" indent="0" marL="0">
+              <a:buNone/>
+            </a:pPr>
+            <a:r>
+              <a:rPr/>
+              <a:t>If it moved, composition was doing part of the work. FWL tells you exactly how much — and the next slide proves it.</a:t>
+            </a:r>
+          </a:p>
+        </p:txBody>
+      </p:sp>
+    </p:spTree>
+  </p:cSld>
+</p:sld>
+</file>
+
+<file path=ppt/slides/slide22.xml><?xml version="1.0" encoding="utf-8"?>
+<p:sld xmlns:a="http://schemas.openxmlformats.org/drawingml/2006/main" xmlns:r="http://schemas.openxmlformats.org/officeDocument/2006/relationships" xmlns:p="http://schemas.openxmlformats.org/presentationml/2006/main">
+  <p:cSld>
+    <p:spTree>
+      <p:nvGrpSpPr>
+        <p:cNvPr id="1" name=""/>
+        <p:cNvGrpSpPr/>
+        <p:nvPr/>
+      </p:nvGrpSpPr>
+      <p:grpSpPr>
+        <a:xfrm>
+          <a:off x="0" y="0"/>
+          <a:ext cx="0" cy="0"/>
+          <a:chOff x="0" y="0"/>
+          <a:chExt cx="0" cy="0"/>
+        </a:xfrm>
+      </p:grpSpPr>
+      <p:sp>
+        <p:nvSpPr>
+          <p:cNvPr id="2" name="Title 1"/>
+          <p:cNvSpPr>
+            <a:spLocks noGrp="1"/>
+          </p:cNvSpPr>
+          <p:nvPr>
+            <p:ph type="title"/>
+          </p:nvPr>
+        </p:nvSpPr>
+        <p:spPr/>
+        <p:txBody>
+          <a:bodyPr/>
+          <a:lstStyle/>
+          <a:p>
+            <a:pPr lvl="0" indent="0" marL="0">
+              <a:buNone/>
+            </a:pPr>
+            <a:r>
+              <a:rPr/>
+              <a:t>Verify FWL yourself</a:t>
+            </a:r>
+          </a:p>
+        </p:txBody>
+      </p:sp>
+      <p:sp>
+        <p:nvSpPr>
+          <p:cNvPr id="3" name="Content Placeholder 2"/>
+          <p:cNvSpPr>
+            <a:spLocks noGrp="1"/>
+          </p:cNvSpPr>
+          <p:nvPr>
+            <p:ph idx="1"/>
+          </p:nvPr>
+        </p:nvSpPr>
+        <p:spPr/>
+        <p:txBody>
+          <a:bodyPr/>
+          <a:lstStyle/>
+          <a:p>
+            <a:pPr lvl="0" indent="0">
+              <a:buNone/>
+            </a:pPr>
+            <a:r>
+              <a:rPr b="1">
+                <a:solidFill>
+                  <a:srgbClr val="008000"/>
+                </a:solidFill>
+                <a:latin typeface="Courier"/>
+              </a:rPr>
+              <a:t>import</a:t>
+            </a:r>
+            <a:r>
+              <a:rPr>
+                <a:latin typeface="Courier"/>
+              </a:rPr>
+              <a:t> numpy </a:t>
+            </a:r>
+            <a:r>
+              <a:rPr b="1">
+                <a:solidFill>
+                  <a:srgbClr val="008000"/>
+                </a:solidFill>
+                <a:latin typeface="Courier"/>
+              </a:rPr>
+              <a:t>as</a:t>
+            </a:r>
+            <a:r>
+              <a:rPr>
+                <a:latin typeface="Courier"/>
+              </a:rPr>
+              <a:t> np</a:t>
+            </a:r>
+            <a:br/>
+            <a:r>
+              <a:rPr b="1">
+                <a:solidFill>
+                  <a:srgbClr val="008000"/>
+                </a:solidFill>
+                <a:latin typeface="Courier"/>
+              </a:rPr>
+              <a:t>import</a:t>
+            </a:r>
+            <a:r>
+              <a:rPr>
+                <a:latin typeface="Courier"/>
+              </a:rPr>
+              <a:t> statsmodels.api </a:t>
+            </a:r>
+            <a:r>
+              <a:rPr b="1">
+                <a:solidFill>
+                  <a:srgbClr val="008000"/>
+                </a:solidFill>
+                <a:latin typeface="Courier"/>
+              </a:rPr>
+              <a:t>as</a:t>
+            </a:r>
+            <a:r>
+              <a:rPr>
+                <a:latin typeface="Courier"/>
+              </a:rPr>
+              <a:t> sm</a:t>
+            </a:r>
+            <a:br/>
+            <a:br/>
+            <a:r>
+              <a:rPr>
+                <a:latin typeface="Courier"/>
+              </a:rPr>
+              <a:t>d </a:t>
+            </a:r>
+            <a:r>
+              <a:rPr>
+                <a:solidFill>
+                  <a:srgbClr val="666666"/>
+                </a:solidFill>
+                <a:latin typeface="Courier"/>
+              </a:rPr>
+              <a:t>=</a:t>
+            </a:r>
+            <a:r>
+              <a:rPr>
+                <a:latin typeface="Courier"/>
+              </a:rPr>
+              <a:t> df.dropna(subset</a:t>
+            </a:r>
+            <a:r>
+              <a:rPr>
+                <a:solidFill>
+                  <a:srgbClr val="666666"/>
+                </a:solidFill>
+                <a:latin typeface="Courier"/>
+              </a:rPr>
+              <a:t>=</a:t>
+            </a:r>
+            <a:r>
+              <a:rPr>
+                <a:latin typeface="Courier"/>
+              </a:rPr>
+              <a:t>[</a:t>
+            </a:r>
+            <a:r>
+              <a:rPr>
+                <a:solidFill>
+                  <a:srgbClr val="4070A0"/>
+                </a:solidFill>
+                <a:latin typeface="Courier"/>
+              </a:rPr>
+              <a:t>"elec_price_eur_kwh"</a:t>
+            </a:r>
+            <a:r>
+              <a:rPr>
+                <a:latin typeface="Courier"/>
+              </a:rPr>
+              <a:t>, </a:t>
+            </a:r>
+            <a:r>
+              <a:rPr>
+                <a:solidFill>
+                  <a:srgbClr val="4070A0"/>
+                </a:solidFill>
+                <a:latin typeface="Courier"/>
+              </a:rPr>
+              <a:t>"share_fossil"</a:t>
+            </a:r>
+            <a:r>
+              <a:rPr>
+                <a:latin typeface="Courier"/>
+              </a:rPr>
+              <a:t>,</a:t>
+            </a:r>
+            <a:br/>
+            <a:r>
+              <a:rPr>
+                <a:latin typeface="Courier"/>
+              </a:rPr>
+              <a:t>                      </a:t>
+            </a:r>
+            <a:r>
+              <a:rPr>
+                <a:solidFill>
+                  <a:srgbClr val="4070A0"/>
+                </a:solidFill>
+                <a:latin typeface="Courier"/>
+              </a:rPr>
+              <a:t>"gdp_pc_eur"</a:t>
+            </a:r>
+            <a:r>
+              <a:rPr>
+                <a:latin typeface="Courier"/>
+              </a:rPr>
+              <a:t>, </a:t>
+            </a:r>
+            <a:r>
+              <a:rPr>
+                <a:solidFill>
+                  <a:srgbClr val="4070A0"/>
+                </a:solidFill>
+                <a:latin typeface="Courier"/>
+              </a:rPr>
+              <a:t>"productivity_idx"</a:t>
+            </a:r>
+            <a:r>
+              <a:rPr>
+                <a:latin typeface="Courier"/>
+              </a:rPr>
+              <a:t>])</a:t>
+            </a:r>
+            <a:br/>
+            <a:br/>
+            <a:r>
+              <a:rPr>
+                <a:latin typeface="Courier"/>
+              </a:rPr>
+              <a:t>Z </a:t>
+            </a:r>
+            <a:r>
+              <a:rPr>
+                <a:solidFill>
+                  <a:srgbClr val="666666"/>
+                </a:solidFill>
+                <a:latin typeface="Courier"/>
+              </a:rPr>
+              <a:t>=</a:t>
+            </a:r>
+            <a:r>
+              <a:rPr>
+                <a:latin typeface="Courier"/>
+              </a:rPr>
+              <a:t> sm.add_constant(d[[</a:t>
+            </a:r>
+            <a:r>
+              <a:rPr>
+                <a:solidFill>
+                  <a:srgbClr val="4070A0"/>
+                </a:solidFill>
+                <a:latin typeface="Courier"/>
+              </a:rPr>
+              <a:t>"gdp_pc_eur"</a:t>
+            </a:r>
+            <a:r>
+              <a:rPr>
+                <a:latin typeface="Courier"/>
+              </a:rPr>
+              <a:t>, </a:t>
+            </a:r>
+            <a:r>
+              <a:rPr>
+                <a:solidFill>
+                  <a:srgbClr val="4070A0"/>
+                </a:solidFill>
+                <a:latin typeface="Courier"/>
+              </a:rPr>
+              <a:t>"productivity_idx"</a:t>
+            </a:r>
+            <a:r>
+              <a:rPr>
+                <a:latin typeface="Courier"/>
+              </a:rPr>
+              <a:t>]])</a:t>
+            </a:r>
+            <a:br/>
+            <a:br/>
+            <a:r>
+              <a:rPr i="1">
+                <a:solidFill>
+                  <a:srgbClr val="60A0B0"/>
+                </a:solidFill>
+                <a:latin typeface="Courier"/>
+              </a:rPr>
+              <a:t># residualise BOTH the outcome and the regressor against Z</a:t>
+            </a:r>
+            <a:br/>
+            <a:r>
+              <a:rPr>
+                <a:latin typeface="Courier"/>
+              </a:rPr>
+              <a:t>y_r </a:t>
+            </a:r>
+            <a:r>
+              <a:rPr>
+                <a:solidFill>
+                  <a:srgbClr val="666666"/>
+                </a:solidFill>
+                <a:latin typeface="Courier"/>
+              </a:rPr>
+              <a:t>=</a:t>
+            </a:r>
+            <a:r>
+              <a:rPr>
+                <a:latin typeface="Courier"/>
+              </a:rPr>
+              <a:t> sm.OLS(d[</a:t>
+            </a:r>
+            <a:r>
+              <a:rPr>
+                <a:solidFill>
+                  <a:srgbClr val="4070A0"/>
+                </a:solidFill>
+                <a:latin typeface="Courier"/>
+              </a:rPr>
+              <a:t>"elec_price_eur_kwh"</a:t>
+            </a:r>
+            <a:r>
+              <a:rPr>
+                <a:latin typeface="Courier"/>
+              </a:rPr>
+              <a:t>], Z).fit().resid</a:t>
+            </a:r>
+            <a:br/>
+            <a:r>
+              <a:rPr>
+                <a:latin typeface="Courier"/>
+              </a:rPr>
+              <a:t>x_r </a:t>
+            </a:r>
+            <a:r>
+              <a:rPr>
+                <a:solidFill>
+                  <a:srgbClr val="666666"/>
+                </a:solidFill>
+                <a:latin typeface="Courier"/>
+              </a:rPr>
+              <a:t>=</a:t>
+            </a:r>
+            <a:r>
+              <a:rPr>
+                <a:latin typeface="Courier"/>
+              </a:rPr>
+              <a:t> sm.OLS(d[</a:t>
+            </a:r>
+            <a:r>
+              <a:rPr>
+                <a:solidFill>
+                  <a:srgbClr val="4070A0"/>
+                </a:solidFill>
+                <a:latin typeface="Courier"/>
+              </a:rPr>
+              <a:t>"share_fossil"</a:t>
+            </a:r>
+            <a:r>
+              <a:rPr>
+                <a:latin typeface="Courier"/>
+              </a:rPr>
+              <a:t>],       Z).fit().resid</a:t>
+            </a:r>
+            <a:br/>
+            <a:br/>
+            <a:r>
+              <a:rPr>
+                <a:solidFill>
+                  <a:srgbClr val="008000"/>
+                </a:solidFill>
+                <a:latin typeface="Courier"/>
+              </a:rPr>
+              <a:t>print</a:t>
+            </a:r>
+            <a:r>
+              <a:rPr>
+                <a:latin typeface="Courier"/>
+              </a:rPr>
+              <a:t>(sm.OLS(y_r, sm.add_constant(x_r)).fit().params.iloc[</a:t>
+            </a:r>
+            <a:r>
+              <a:rPr>
+                <a:solidFill>
+                  <a:srgbClr val="40A070"/>
+                </a:solidFill>
+                <a:latin typeface="Courier"/>
+              </a:rPr>
+              <a:t>1</a:t>
+            </a:r>
+            <a:r>
+              <a:rPr>
+                <a:latin typeface="Courier"/>
+              </a:rPr>
+              <a:t>])</a:t>
+            </a:r>
+            <a:br/>
+            <a:r>
+              <a:rPr i="1">
+                <a:solidFill>
+                  <a:srgbClr val="60A0B0"/>
+                </a:solidFill>
+                <a:latin typeface="Courier"/>
+              </a:rPr>
+              <a:t># identical to share_fossil in the full multiple regression</a:t>
+            </a:r>
+          </a:p>
+          <a:p>
+            <a:pPr lvl="0" indent="0" marL="0">
+              <a:buNone/>
+            </a:pPr>
+            <a:r>
+              <a:rPr/>
+              <a:t>Two routes, one number. That identity </a:t>
+            </a:r>
+            <a:r>
+              <a:rPr i="1"/>
+              <a:t>is</a:t>
+            </a:r>
+            <a:r>
+              <a:rPr/>
+              <a:t> what “controlling for” means.</a:t>
+            </a:r>
+          </a:p>
+        </p:txBody>
+      </p:sp>
+    </p:spTree>
+  </p:cSld>
+</p:sld>
+</file>
+
+<file path=ppt/slides/slide23.xml><?xml version="1.0" encoding="utf-8"?>
+<p:sld xmlns:a="http://schemas.openxmlformats.org/drawingml/2006/main" xmlns:r="http://schemas.openxmlformats.org/officeDocument/2006/relationships" xmlns:p="http://schemas.openxmlformats.org/presentationml/2006/main">
+  <p:cSld>
+    <p:spTree>
+      <p:nvGrpSpPr>
+        <p:cNvPr id="1" name=""/>
+        <p:cNvGrpSpPr/>
+        <p:nvPr/>
+      </p:nvGrpSpPr>
+      <p:grpSpPr>
+        <a:xfrm>
+          <a:off x="0" y="0"/>
+          <a:ext cx="0" cy="0"/>
+          <a:chOff x="0" y="0"/>
+          <a:chExt cx="0" cy="0"/>
+        </a:xfrm>
+      </p:grpSpPr>
+      <p:sp>
+        <p:nvSpPr>
+          <p:cNvPr id="2" name="Title 1"/>
+          <p:cNvSpPr>
+            <a:spLocks noGrp="1"/>
+          </p:cNvSpPr>
+          <p:nvPr>
+            <p:ph type="title"/>
+          </p:nvPr>
+        </p:nvSpPr>
+        <p:spPr/>
+        <p:txBody>
+          <a:bodyPr/>
+          <a:lstStyle/>
+          <a:p>
+            <a:pPr lvl="0" indent="0" marL="0">
+              <a:buNone/>
+            </a:pPr>
+            <a:r>
+              <a:rPr/>
+              <a:t>Multicollinearity, measured</a:t>
+            </a:r>
+          </a:p>
+        </p:txBody>
+      </p:sp>
+      <mc:AlternateContent xmlns:mc="http://schemas.openxmlformats.org/markup-compatibility/2006">
+        <mc:Choice xmlns:a14="http://schemas.microsoft.com/office/drawing/2010/main" Requires="a14">
+          <p:sp>
+            <p:nvSpPr>
+              <p:cNvPr id="3" name="Content Placeholder 2"/>
+              <p:cNvSpPr>
+                <a:spLocks noGrp="1"/>
+              </p:cNvSpPr>
+              <p:nvPr>
+                <p:ph idx="1"/>
+              </p:nvPr>
+            </p:nvSpPr>
+            <p:spPr/>
+            <p:txBody>
+              <a:bodyPr/>
+              <a:lstStyle/>
+              <a:p>
+                <a:pPr lvl="0" indent="0" marL="0">
+                  <a:buNone/>
+                </a:pPr>
+                <a:r>
+                  <a:rPr/>
+                  <a:t>Perfect collinearity breaks the inverse. </a:t>
+                </a:r>
+                <a:r>
+                  <a:rPr b="1"/>
+                  <a:t>Near</a:t>
+                </a:r>
+                <a:r>
+                  <a:rPr/>
+                  <a:t>-collinearity merely inflates the variance — and it is much harder to notice.</a:t>
+                </a:r>
+              </a:p>
+              <a:p>
+                <a:pPr lvl="0" indent="0" marL="0">
+                  <a:buNone/>
+                </a:pPr>
+                <a14:m>
+                  <m:oMathPara xmlns:m="http://schemas.openxmlformats.org/officeDocument/2006/math">
+                    <m:oMathParaPr>
+                      <m:jc m:val="center"/>
+                    </m:oMathParaPr>
+                    <m:oMath>
+                      <m:sSub>
+                        <m:e>
+                          <m:r>
+                            <m:rPr>
+                              <m:sty m:val="p"/>
+                            </m:rPr>
+                            <m:t>VIF</m:t>
+                          </m:r>
+                        </m:e>
+                        <m:sub>
+                          <m:r>
+                            <m:t>j</m:t>
+                          </m:r>
+                        </m:sub>
+                      </m:sSub>
+                      <m:r>
+                        <m:rPr>
+                          <m:sty m:val="p"/>
+                        </m:rPr>
+                        <m:t>=</m:t>
+                      </m:r>
+                      <m:f>
+                        <m:fPr>
+                          <m:type m:val="bar"/>
+                        </m:fPr>
+                        <m:num>
+                          <m:r>
+                            <m:t>1</m:t>
+                          </m:r>
+                        </m:num>
+                        <m:den>
+                          <m:r>
+                            <m:t>1</m:t>
+                          </m:r>
+                          <m:r>
+                            <m:rPr>
+                              <m:sty m:val="p"/>
+                            </m:rPr>
+                            <m:t>−</m:t>
+                          </m:r>
+                          <m:sSubSup>
+                            <m:e>
+                              <m:r>
+                                <m:t>R</m:t>
+                              </m:r>
+                            </m:e>
+                            <m:sub>
+                              <m:r>
+                                <m:t>j</m:t>
+                              </m:r>
+                            </m:sub>
+                            <m:sup>
+                              <m:r>
+                                <m:t>2</m:t>
+                              </m:r>
+                            </m:sup>
+                          </m:sSubSup>
+                        </m:den>
+                      </m:f>
+                    </m:oMath>
+                  </m:oMathPara>
+                </a14:m>
+              </a:p>
+              <a:p>
+                <a:pPr lvl="0" indent="0" marL="0">
+                  <a:buNone/>
+                </a:pPr>
+                <a:r>
+                  <a:rPr/>
+                  <a:t>where </a:t>
+                </a:r>
+                <a14:m>
+                  <m:oMath xmlns:m="http://schemas.openxmlformats.org/officeDocument/2006/math">
+                    <m:sSubSup>
+                      <m:e>
+                        <m:r>
+                          <m:t>R</m:t>
+                        </m:r>
+                      </m:e>
+                      <m:sub>
+                        <m:r>
+                          <m:t>j</m:t>
+                        </m:r>
+                      </m:sub>
+                      <m:sup>
+                        <m:r>
+                          <m:t>2</m:t>
+                        </m:r>
+                      </m:sup>
+                    </m:sSubSup>
+                  </m:oMath>
+                </a14:m>
+                <a:r>
+                  <a:rPr/>
+                  <a:t> comes from regressing </a:t>
+                </a:r>
+                <a14:m>
+                  <m:oMath xmlns:m="http://schemas.openxmlformats.org/officeDocument/2006/math">
+                    <m:sSub>
+                      <m:e>
+                        <m:r>
+                          <m:t>x</m:t>
+                        </m:r>
+                      </m:e>
+                      <m:sub>
+                        <m:r>
+                          <m:t>j</m:t>
+                        </m:r>
+                      </m:sub>
+                    </m:sSub>
+                  </m:oMath>
+                </a14:m>
+                <a:r>
+                  <a:rPr/>
+                  <a:t> on every other regressor.</a:t>
+                </a:r>
+              </a:p>
+              <a:p>
+                <a:pPr lvl="0" indent="0">
+                  <a:buNone/>
+                </a:pPr>
+                <a:r>
+                  <a:rPr b="1">
+                    <a:solidFill>
+                      <a:srgbClr val="008000"/>
+                    </a:solidFill>
+                    <a:latin typeface="Courier"/>
+                  </a:rPr>
+                  <a:t>from</a:t>
+                </a:r>
+                <a:r>
+                  <a:rPr>
+                    <a:latin typeface="Courier"/>
+                  </a:rPr>
+                  <a:t> statsmodels.stats.outliers_influence </a:t>
+                </a:r>
+                <a:r>
+                  <a:rPr b="1">
+                    <a:solidFill>
+                      <a:srgbClr val="008000"/>
+                    </a:solidFill>
+                    <a:latin typeface="Courier"/>
+                  </a:rPr>
+                  <a:t>import</a:t>
+                </a:r>
+                <a:r>
+                  <a:rPr>
+                    <a:latin typeface="Courier"/>
+                  </a:rPr>
+                  <a:t> variance_inflation_factor</a:t>
+                </a:r>
+                <a:br/>
+                <a:r>
+                  <a:rPr b="1">
+                    <a:solidFill>
+                      <a:srgbClr val="008000"/>
+                    </a:solidFill>
+                    <a:latin typeface="Courier"/>
+                  </a:rPr>
+                  <a:t>import</a:t>
+                </a:r>
+                <a:r>
+                  <a:rPr>
+                    <a:latin typeface="Courier"/>
+                  </a:rPr>
+                  <a:t> statsmodels.api </a:t>
+                </a:r>
+                <a:r>
+                  <a:rPr b="1">
+                    <a:solidFill>
+                      <a:srgbClr val="008000"/>
+                    </a:solidFill>
+                    <a:latin typeface="Courier"/>
+                  </a:rPr>
+                  <a:t>as</a:t>
+                </a:r>
+                <a:r>
+                  <a:rPr>
+                    <a:latin typeface="Courier"/>
+                  </a:rPr>
+                  <a:t> sm</a:t>
+                </a:r>
+                <a:br/>
+                <a:br/>
+                <a:r>
+                  <a:rPr>
+                    <a:latin typeface="Courier"/>
+                  </a:rPr>
+                  <a:t>Z </a:t>
+                </a:r>
+                <a:r>
+                  <a:rPr>
+                    <a:solidFill>
+                      <a:srgbClr val="666666"/>
+                    </a:solidFill>
+                    <a:latin typeface="Courier"/>
+                  </a:rPr>
+                  <a:t>=</a:t>
+                </a:r>
+                <a:r>
+                  <a:rPr>
+                    <a:latin typeface="Courier"/>
+                  </a:rPr>
+                  <a:t> sm.add_constant(d[[</a:t>
+                </a:r>
+                <a:r>
+                  <a:rPr>
+                    <a:solidFill>
+                      <a:srgbClr val="4070A0"/>
+                    </a:solidFill>
+                    <a:latin typeface="Courier"/>
+                  </a:rPr>
+                  <a:t>"share_fossil"</a:t>
+                </a:r>
+                <a:r>
+                  <a:rPr>
+                    <a:latin typeface="Courier"/>
+                  </a:rPr>
+                  <a:t>, </a:t>
+                </a:r>
+                <a:r>
+                  <a:rPr>
+                    <a:solidFill>
+                      <a:srgbClr val="4070A0"/>
+                    </a:solidFill>
+                    <a:latin typeface="Courier"/>
+                  </a:rPr>
+                  <a:t>"share_nuclear"</a:t>
+                </a:r>
+                <a:r>
+                  <a:rPr>
+                    <a:latin typeface="Courier"/>
+                  </a:rPr>
+                  <a:t>,</a:t>
+                </a:r>
+                <a:br/>
+                <a:r>
+                  <a:rPr>
+                    <a:latin typeface="Courier"/>
+                  </a:rPr>
+                  <a:t>                       </a:t>
+                </a:r>
+                <a:r>
+                  <a:rPr>
+                    <a:solidFill>
+                      <a:srgbClr val="4070A0"/>
+                    </a:solidFill>
+                    <a:latin typeface="Courier"/>
+                  </a:rPr>
+                  <a:t>"gdp_pc_eur"</a:t>
+                </a:r>
+                <a:r>
+                  <a:rPr>
+                    <a:latin typeface="Courier"/>
+                  </a:rPr>
+                  <a:t>, </a:t>
+                </a:r>
+                <a:r>
+                  <a:rPr>
+                    <a:solidFill>
+                      <a:srgbClr val="4070A0"/>
+                    </a:solidFill>
+                    <a:latin typeface="Courier"/>
+                  </a:rPr>
+                  <a:t>"productivity_idx"</a:t>
+                </a:r>
+                <a:r>
+                  <a:rPr>
+                    <a:latin typeface="Courier"/>
+                  </a:rPr>
+                  <a:t>]])</a:t>
+                </a:r>
+                <a:br/>
+                <a:r>
+                  <a:rPr b="1">
+                    <a:solidFill>
+                      <a:srgbClr val="007020"/>
+                    </a:solidFill>
+                    <a:latin typeface="Courier"/>
+                  </a:rPr>
+                  <a:t>for</a:t>
+                </a:r>
+                <a:r>
+                  <a:rPr>
+                    <a:latin typeface="Courier"/>
+                  </a:rPr>
+                  <a:t> i, name </a:t>
+                </a:r>
+                <a:r>
+                  <a:rPr b="1">
+                    <a:solidFill>
+                      <a:srgbClr val="007020"/>
+                    </a:solidFill>
+                    <a:latin typeface="Courier"/>
+                  </a:rPr>
+                  <a:t>in</a:t>
+                </a:r>
+                <a:r>
+                  <a:rPr>
+                    <a:latin typeface="Courier"/>
+                  </a:rPr>
+                  <a:t> </a:t>
+                </a:r>
+                <a:r>
+                  <a:rPr>
+                    <a:solidFill>
+                      <a:srgbClr val="008000"/>
+                    </a:solidFill>
+                    <a:latin typeface="Courier"/>
+                  </a:rPr>
+                  <a:t>enumerate</a:t>
+                </a:r>
+                <a:r>
+                  <a:rPr>
+                    <a:latin typeface="Courier"/>
+                  </a:rPr>
+                  <a:t>(Z.columns):</a:t>
+                </a:r>
+                <a:br/>
+                <a:r>
+                  <a:rPr>
+                    <a:latin typeface="Courier"/>
+                  </a:rPr>
+                  <a:t>    </a:t>
+                </a:r>
+                <a:r>
+                  <a:rPr>
+                    <a:solidFill>
+                      <a:srgbClr val="008000"/>
+                    </a:solidFill>
+                    <a:latin typeface="Courier"/>
+                  </a:rPr>
+                  <a:t>print</a:t>
+                </a:r>
+                <a:r>
+                  <a:rPr>
+                    <a:latin typeface="Courier"/>
+                  </a:rPr>
+                  <a:t>(</a:t>
+                </a:r>
+                <a:r>
+                  <a:rPr>
+                    <a:solidFill>
+                      <a:srgbClr val="BB6688"/>
+                    </a:solidFill>
+                    <a:latin typeface="Courier"/>
+                  </a:rPr>
+                  <a:t>f"</a:t>
+                </a:r>
+                <a:r>
+                  <a:rPr>
+                    <a:solidFill>
+                      <a:srgbClr val="4070A0"/>
+                    </a:solidFill>
+                    <a:latin typeface="Courier"/>
+                  </a:rPr>
+                  <a:t>{</a:t>
+                </a:r>
+                <a:r>
+                  <a:rPr>
+                    <a:latin typeface="Courier"/>
+                  </a:rPr>
+                  <a:t>name</a:t>
+                </a:r>
+                <a:r>
+                  <a:rPr>
+                    <a:solidFill>
+                      <a:srgbClr val="4070A0"/>
+                    </a:solidFill>
+                    <a:latin typeface="Courier"/>
+                  </a:rPr>
+                  <a:t>:18s}</a:t>
+                </a:r>
+                <a:r>
+                  <a:rPr>
+                    <a:solidFill>
+                      <a:srgbClr val="BB6688"/>
+                    </a:solidFill>
+                    <a:latin typeface="Courier"/>
+                  </a:rPr>
+                  <a:t> </a:t>
+                </a:r>
+                <a:r>
+                  <a:rPr>
+                    <a:solidFill>
+                      <a:srgbClr val="4070A0"/>
+                    </a:solidFill>
+                    <a:latin typeface="Courier"/>
+                  </a:rPr>
+                  <a:t>{</a:t>
+                </a:r>
+                <a:r>
+                  <a:rPr>
+                    <a:latin typeface="Courier"/>
+                  </a:rPr>
+                  <a:t>variance_inflation_factor(Z.values, i)</a:t>
+                </a:r>
+                <a:r>
+                  <a:rPr>
+                    <a:solidFill>
+                      <a:srgbClr val="4070A0"/>
+                    </a:solidFill>
+                    <a:latin typeface="Courier"/>
+                  </a:rPr>
+                  <a:t>:6.2f}</a:t>
+                </a:r>
+                <a:r>
+                  <a:rPr>
+                    <a:solidFill>
+                      <a:srgbClr val="BB6688"/>
+                    </a:solidFill>
+                    <a:latin typeface="Courier"/>
+                  </a:rPr>
+                  <a:t>"</a:t>
+                </a:r>
+                <a:r>
+                  <a:rPr>
+                    <a:latin typeface="Courier"/>
+                  </a:rPr>
+                  <a:t>)</a:t>
+                </a:r>
+              </a:p>
+            </p:txBody>
+          </p:sp>
+        </mc:Choice>
+      </mc:AlternateContent>
+    </p:spTree>
+  </p:cSld>
+</p:sld>
+</file>
+
+<file path=ppt/slides/slide24.xml><?xml version="1.0" encoding="utf-8"?>
+<p:sld xmlns:a="http://schemas.openxmlformats.org/drawingml/2006/main" xmlns:r="http://schemas.openxmlformats.org/officeDocument/2006/relationships" xmlns:p="http://schemas.openxmlformats.org/presentationml/2006/main">
+  <p:cSld>
+    <p:spTree>
+      <p:nvGrpSpPr>
+        <p:cNvPr id="1" name=""/>
+        <p:cNvGrpSpPr/>
+        <p:nvPr/>
+      </p:nvGrpSpPr>
+      <p:grpSpPr>
+        <a:xfrm>
+          <a:off x="0" y="0"/>
+          <a:ext cx="0" cy="0"/>
+          <a:chOff x="0" y="0"/>
+          <a:chExt cx="0" cy="0"/>
+        </a:xfrm>
+      </p:grpSpPr>
+      <p:sp>
+        <p:nvSpPr>
+          <p:cNvPr id="2" name="Title 1"/>
+          <p:cNvSpPr>
+            <a:spLocks noGrp="1"/>
+          </p:cNvSpPr>
+          <p:nvPr>
+            <p:ph type="title"/>
+          </p:nvPr>
+        </p:nvSpPr>
+        <p:spPr/>
+        <p:txBody>
+          <a:bodyPr/>
+          <a:lstStyle/>
+          <a:p>
+            <a:pPr lvl="0" indent="0" marL="0">
+              <a:buNone/>
+            </a:pPr>
+            <a:r>
+              <a:rPr/>
+              <a:t>Reading a VIF</a:t>
+            </a:r>
+          </a:p>
+        </p:txBody>
+      </p:sp>
+      <mc:AlternateContent xmlns:mc="http://schemas.openxmlformats.org/markup-compatibility/2006">
+        <mc:Choice xmlns:a14="http://schemas.microsoft.com/office/drawing/2010/main" Requires="a14">
+          <p:sp>
+            <p:nvSpPr>
+              <p:cNvPr id="3" name="Content Placeholder 2"/>
+              <p:cNvSpPr>
+                <a:spLocks noGrp="1"/>
+              </p:cNvSpPr>
+              <p:nvPr>
+                <p:ph idx="1"/>
+              </p:nvPr>
+            </p:nvSpPr>
+            <p:spPr/>
+            <p:txBody>
+              <a:bodyPr/>
+              <a:lstStyle/>
+              <a:p>
+                <a:pPr lvl="0"/>
+                <a14:m>
+                  <m:oMath xmlns:m="http://schemas.openxmlformats.org/officeDocument/2006/math">
+                    <m:r>
+                      <m:rPr>
+                        <m:sty m:val="p"/>
+                      </m:rPr>
+                      <m:t>VIF</m:t>
+                    </m:r>
+                    <m:r>
+                      <m:rPr>
+                        <m:sty m:val="p"/>
+                      </m:rPr>
+                      <m:t>=</m:t>
+                    </m:r>
+                    <m:r>
+                      <m:t>1</m:t>
+                    </m:r>
+                  </m:oMath>
+                </a14:m>
+                <a:r>
+                  <a:rPr/>
+                  <a:t> — orthogonal to everything else</a:t>
+                </a:r>
+              </a:p>
+              <a:p>
+                <a:pPr lvl="0"/>
+                <a14:m>
+                  <m:oMath xmlns:m="http://schemas.openxmlformats.org/officeDocument/2006/math">
+                    <m:r>
+                      <m:rPr>
+                        <m:sty m:val="p"/>
+                      </m:rPr>
+                      <m:t>&gt;</m:t>
+                    </m:r>
+                    <m:r>
+                      <m:t>5</m:t>
+                    </m:r>
+                  </m:oMath>
+                </a14:m>
+                <a:r>
+                  <a:rPr/>
+                  <a:t> — worth a comment</a:t>
+                </a:r>
+              </a:p>
+              <a:p>
+                <a:pPr lvl="0"/>
+                <a14:m>
+                  <m:oMath xmlns:m="http://schemas.openxmlformats.org/officeDocument/2006/math">
+                    <m:r>
+                      <m:rPr>
+                        <m:sty m:val="p"/>
+                      </m:rPr>
+                      <m:t>&gt;</m:t>
+                    </m:r>
+                    <m:r>
+                      <m:t>10</m:t>
+                    </m:r>
+                  </m:oMath>
+                </a14:m>
+                <a:r>
+                  <a:rPr/>
+                  <a:t> — the coefficient is barely identified</a:t>
+                </a:r>
+              </a:p>
+              <a:p>
+                <a:pPr lvl="0" indent="0" marL="0">
+                  <a:buNone/>
+                </a:pPr>
+                <a:r>
+                  <a:rPr/>
+                  <a:t>A high VIF is </a:t>
+                </a:r>
+                <a:r>
+                  <a:rPr b="1"/>
+                  <a:t>not</a:t>
+                </a:r>
+                <a:r>
+                  <a:rPr/>
+                  <a:t> a reason to drop a variable. If the control belongs in the model, dropping it trades a variance problem for a bias problem. Report the wide interval instead.</a:t>
+                </a:r>
+              </a:p>
+            </p:txBody>
+          </p:sp>
+        </mc:Choice>
+      </mc:AlternateContent>
+    </p:spTree>
+  </p:cSld>
+</p:sld>
+</file>
+
+<file path=ppt/slides/slide25.xml><?xml version="1.0" encoding="utf-8"?>
+<p:sld xmlns:a="http://schemas.openxmlformats.org/drawingml/2006/main" xmlns:r="http://schemas.openxmlformats.org/officeDocument/2006/relationships" xmlns:p="http://schemas.openxmlformats.org/presentationml/2006/main">
+  <p:cSld>
+    <p:spTree>
+      <p:nvGrpSpPr>
+        <p:cNvPr id="1" name=""/>
+        <p:cNvGrpSpPr/>
+        <p:nvPr/>
+      </p:nvGrpSpPr>
+      <p:grpSpPr>
+        <a:xfrm>
+          <a:off x="0" y="0"/>
+          <a:ext cx="0" cy="0"/>
+          <a:chOff x="0" y="0"/>
+          <a:chExt cx="0" cy="0"/>
+        </a:xfrm>
+      </p:grpSpPr>
+      <p:sp>
+        <p:nvSpPr>
+          <p:cNvPr id="2" name="Title 1"/>
+          <p:cNvSpPr>
+            <a:spLocks noGrp="1"/>
+          </p:cNvSpPr>
+          <p:nvPr>
+            <p:ph type="title"/>
+          </p:nvPr>
+        </p:nvSpPr>
+        <p:spPr/>
+        <p:txBody>
+          <a:bodyPr/>
+          <a:lstStyle/>
+          <a:p>
+            <a:pPr lvl="0" indent="0" marL="0">
+              <a:buNone/>
+            </a:pPr>
+            <a:r>
+              <a:rPr/>
+              <a:t>What to report</a:t>
+            </a:r>
+          </a:p>
+        </p:txBody>
+      </p:sp>
+      <mc:AlternateContent xmlns:mc="http://schemas.openxmlformats.org/markup-compatibility/2006">
+        <mc:Choice xmlns:a14="http://schemas.microsoft.com/office/drawing/2010/main" Requires="a14">
+          <p:sp>
+            <p:nvSpPr>
+              <p:cNvPr id="3" name="Content Placeholder 2"/>
+              <p:cNvSpPr>
+                <a:spLocks noGrp="1"/>
+              </p:cNvSpPr>
+              <p:nvPr>
+                <p:ph idx="1"/>
+              </p:nvPr>
+            </p:nvSpPr>
+            <p:spPr/>
+            <p:txBody>
+              <a:bodyPr/>
+              <a:lstStyle/>
+              <a:p>
+                <a:pPr lvl="0"/>
+                <a:r>
+                  <a:rPr/>
+                  <a:t>Which share you </a:t>
+                </a:r>
+                <a:r>
+                  <a:rPr b="1"/>
+                  <a:t>omitted</a:t>
+                </a:r>
+                <a:r>
+                  <a:rPr/>
+                  <a:t>, and therefore what the comparison is against</a:t>
+                </a:r>
+              </a:p>
+              <a:p>
+                <a:pPr lvl="0"/>
+                <a:r>
+                  <a:rPr/>
+                  <a:t>Whether the fossil coefficient </a:t>
+                </a:r>
+                <a:r>
+                  <a:rPr b="1"/>
+                  <a:t>moved</a:t>
+                </a:r>
+                <a:r>
+                  <a:rPr/>
+                  <a:t> when composition entered, and in which direction</a:t>
+                </a:r>
+              </a:p>
+              <a:p>
+                <a:pPr lvl="0"/>
+                <a14:m>
+                  <m:oMath xmlns:m="http://schemas.openxmlformats.org/officeDocument/2006/math">
+                    <m:sSup>
+                      <m:e>
+                        <m:r>
+                          <m:t>R</m:t>
+                        </m:r>
+                      </m:e>
+                      <m:sup>
+                        <m:r>
+                          <m:t>2</m:t>
+                        </m:r>
+                      </m:sup>
+                    </m:sSup>
+                  </m:oMath>
+                </a14:m>
+                <a:r>
+                  <a:rPr/>
+                  <a:t> </a:t>
+                </a:r>
+                <a:r>
+                  <a:rPr b="1"/>
+                  <a:t>and</a:t>
+                </a:r>
+                <a:r>
+                  <a:rPr/>
+                  <a:t> the residual standard error in price units — a share of variance is not a magnitude</a:t>
+                </a:r>
+              </a:p>
+              <a:p>
+                <a:pPr lvl="0"/>
+                <a:r>
+                  <a:rPr/>
+                  <a:t>That 2022 breaks the series, and what you did about it</a:t>
+                </a:r>
+              </a:p>
+              <a:p>
+                <a:pPr lvl="0" indent="0" marL="0">
+                  <a:buNone/>
+                </a:pPr>
+                <a:r>
+                  <a:rPr/>
+                  <a:t>Do not write “fossil generation raises prices by X”. You have an association in a 30-country panel, not an experiment. Session 10 is where causal language becomes available, and it costs more than this.</a:t>
+                </a:r>
+              </a:p>
+            </p:txBody>
+          </p:sp>
+        </mc:Choice>
+      </mc:AlternateContent>
+    </p:spTree>
+  </p:cSld>
+</p:sld>
+</file>
+
+<file path=ppt/slides/slide26.xml><?xml version="1.0" encoding="UTF-8"?><p:sld xmlns:a="http://schemas.openxmlformats.org/drawingml/2006/main" xmlns:r="http://schemas.openxmlformats.org/officeDocument/2006/relationships" xmlns:p="http://schemas.openxmlformats.org/presentationml/2006/main"><p:cSld><p:spTree><p:nvGrpSpPr><p:cNvPr id="1" name="" /><p:cNvGrpSpPr /><p:nvPr /></p:nvGrpSpPr><p:grpSpPr><a:xfrm><a:off x="0" y="0" /><a:ext cx="0" cy="0" /><a:chOff x="0" y="0" /><a:chExt cx="0" cy="0" /></a:xfrm></p:grpSpPr><p:sp><p:nvSpPr><p:cNvPr id="2" name="Title 1" /><p:cNvSpPr><a:spLocks noGrp="1" /></p:cNvSpPr><p:nvPr><p:ph type="title" /></p:nvPr></p:nvSpPr><p:spPr /><p:txBody><a:bodyPr /><a:lstStyle /><a:p><a:pPr lvl="0" indent="0" marL="0"><a:buNone /></a:pPr><a:r><a:rPr /><a:t>Common mistakes</a:t></a:r></a:p></p:txBody></p:sp><p:graphicFrame><p:nvGraphicFramePr><p:cNvPr id="6" name="Content Placeholder 5" /><p:cNvGraphicFramePr><a:graphicFrameLocks noGrp="1" /></p:cNvGraphicFramePr><p:nvPr><p:ph idx="1" /></p:nvPr></p:nvGraphicFramePr><p:xfrm><a:off x="457200" y="1193800" /><a:ext cx="8229600" cy="3390900" /></p:xfrm><a:graphic><a:graphicData uri="http://schemas.openxmlformats.org/drawingml/2006/table"><a:tbl><a:tblPr firstRow="1" bandRow="1"><a:tableStyleId>{5C22544A-7EE6-4342-B048-85BDC9FD1C3A}</a:tableStyleId></a:tblPr><a:tblGrid><a:gridCol w="4114800" /><a:gridCol w="4114800" /></a:tblGrid><a:tr h="0"><a:tc><a:txBody><a:bodyPr /><a:lstStyle /><a:p><a:pPr lvl="0" indent="0" marL="0"><a:buNone /></a:pPr><a:r><a:rPr /><a:t>Mistake</a:t></a:r></a:p></a:txBody><a:tcPr /></a:tc><a:tc><a:txBody><a:bodyPr /><a:lstStyle /><a:p><a:pPr lvl="0" indent="0" marL="0"><a:buNone /></a:pPr><a:r><a:rPr /><a:t>What happens</a:t></a:r></a:p></a:txBody><a:tcPr /></a:tc></a:tr><a:tr h="0"><a:tc><a:txBody><a:bodyPr /><a:lstStyle /><a:p><a:pPr lvl="0" indent="0" marL="0"><a:buNone /></a:pPr><a:r><a:rPr /><a:t>All three shares + intercept</a:t></a:r></a:p></a:txBody></a:tc><a:tc><a:txBody><a:bodyPr /><a:lstStyle /><a:p><a:pPr lvl="0" indent="0" marL="0"><a:buNone /></a:pPr><a:r><a:rPr /><a:t>Singular </a:t></a:r><a14:m><m:oMath xmlns:m="http://schemas.openxmlformats.org/officeDocument/2006/math"><m:r><m:t>X</m:t></m:r><m:r><m:rPr><m:sty m:val="p" /></m:rPr><m:t>′</m:t></m:r><m:r><m:t>X</m:t></m:r></m:oMath></a14:m><a:r><a:rPr /><a:t>; meaningless coefficients</a:t></a:r></a:p></a:txBody></a:tc></a:tr><a:tr h="0"><a:tc><a:txBody><a:bodyPr /><a:lstStyle /><a:p><a:pPr lvl="0" indent="0" marL="0"><a:buNone /></a:pPr><a:r><a:rPr /><a:t>Reading a coefficient without naming the omitted share</a:t></a:r></a:p></a:txBody></a:tc><a:tc><a:txBody><a:bodyPr /><a:lstStyle /><a:p><a:pPr lvl="0" indent="0" marL="0"><a:buNone /></a:pPr><a:r><a:rPr /><a:t>The number has no referent</a:t></a:r></a:p></a:txBody></a:tc></a:tr><a:tr h="0"><a:tc><a:txBody><a:bodyPr /><a:lstStyle /><a:p><a:pPr lvl="0" indent="0" marL="0"><a:buNone /></a:pPr><a:r><a:rPr /><a:t>Pooling 2022 with earlier years silently</a:t></a:r></a:p></a:txBody></a:tc><a:tc><a:txBody><a:bodyPr /><a:lstStyle /><a:p><a:pPr lvl="0" indent="0" marL="0"><a:buNone /></a:pPr><a:r><a:rPr /><a:t>One structural break masquerades as an effect</a:t></a:r></a:p></a:txBody></a:tc></a:tr><a:tr h="0"><a:tc><a:txBody><a:bodyPr /><a:lstStyle /><a:p><a:pPr lvl="0" indent="0" marL="0"><a:buNone /></a:pPr><a:r><a:rPr /><a:t>Dropping rows with </a:t></a:r><a:r><a:rPr><a:latin typeface="Courier" /></a:rPr><a:t>flag == &quot;u&quot;</a:t></a:r></a:p></a:txBody></a:tc><a:tc><a:txBody><a:bodyPr /><a:lstStyle /><a:p><a:pPr lvl="0" indent="0" marL="0"><a:buNone /></a:pPr><a:r><a:rPr /><a:t>Coverage tilts toward large economies</a:t></a:r></a:p></a:txBody></a:tc></a:tr><a:tr h="0"><a:tc><a:txBody><a:bodyPr /><a:lstStyle /><a:p><a:pPr lvl="0" indent="0" marL="0"><a:buNone /></a:pPr><a:r><a:rPr /><a:t>Reporting </a:t></a:r><a14:m><m:oMath xmlns:m="http://schemas.openxmlformats.org/officeDocument/2006/math"><m:sSup><m:e><m:r><m:t>R</m:t></m:r></m:e><m:sup><m:r><m:t>2</m:t></m:r></m:sup></m:sSup></m:oMath></a14:m><a:r><a:rPr /><a:t> alone</a:t></a:r></a:p></a:txBody></a:tc><a:tc><a:txBody><a:bodyPr /><a:lstStyle /><a:p><a:pPr lvl="0" indent="0" marL="0"><a:buNone /></a:pPr><a:r><a:rPr /><a:t>No sense of magnitude</a:t></a:r></a:p></a:txBody></a:tc></a:tr></a:tbl></a:graphicData></a:graphic></p:graphicFrame></p:spTree></p:cSld></p:sld>
+</file>
+
+<file path=ppt/slides/slide27.xml><?xml version="1.0" encoding="utf-8"?>
+<p:sld xmlns:a="http://schemas.openxmlformats.org/drawingml/2006/main" xmlns:r="http://schemas.openxmlformats.org/officeDocument/2006/relationships" xmlns:p="http://schemas.openxmlformats.org/presentationml/2006/main">
+  <p:cSld>
+    <p:spTree>
+      <p:nvGrpSpPr>
+        <p:cNvPr id="1" name=""/>
+        <p:cNvGrpSpPr/>
+        <p:nvPr/>
+      </p:nvGrpSpPr>
+      <p:grpSpPr>
+        <a:xfrm>
+          <a:off x="0" y="0"/>
+          <a:ext cx="0" cy="0"/>
+          <a:chOff x="0" y="0"/>
+          <a:chExt cx="0" cy="0"/>
+        </a:xfrm>
+      </p:grpSpPr>
+      <p:sp>
+        <p:nvSpPr>
+          <p:cNvPr id="2" name="Title 1"/>
+          <p:cNvSpPr>
+            <a:spLocks noGrp="1"/>
+          </p:cNvSpPr>
+          <p:nvPr>
+            <p:ph type="title"/>
+          </p:nvPr>
+        </p:nvSpPr>
+        <p:spPr/>
+        <p:txBody>
+          <a:bodyPr/>
+          <a:lstStyle/>
+          <a:p>
+            <a:pPr lvl="0" indent="0" marL="0">
+              <a:buNone/>
+            </a:pPr>
+            <a:r>
+              <a:rPr/>
+              <a:t>In the lab</a:t>
+            </a:r>
+          </a:p>
+        </p:txBody>
+      </p:sp>
+      <p:sp>
+        <p:nvSpPr>
+          <p:cNvPr id="3" name="Content Placeholder 2"/>
+          <p:cNvSpPr>
+            <a:spLocks noGrp="1"/>
+          </p:cNvSpPr>
+          <p:nvPr>
+            <p:ph idx="1"/>
+          </p:nvPr>
+        </p:nvSpPr>
+        <p:spPr/>
+        <p:txBody>
+          <a:bodyPr/>
+          <a:lstStyle/>
+          <a:p>
+            <a:pPr lvl="0" indent="0" marL="0">
+              <a:buNone/>
+            </a:pPr>
+            <a:r>
+              <a:rPr/>
+              <a:t>Work through </a:t>
+            </a:r>
+            <a:r>
+              <a:rPr>
+                <a:hlinkClick r:id="rId2"/>
+                <a:latin typeface="Courier"/>
+              </a:rPr>
+              <a:t>02-lab/README.md</a:t>
+            </a:r>
+            <a:r>
+              <a:rPr/>
+              <a:t>.</a:t>
+            </a:r>
+          </a:p>
+          <a:p>
+            <a:pPr lvl="0" indent="0" marL="0">
+              <a:buNone/>
+            </a:pPr>
+            <a:r>
+              <a:rPr/>
+              <a:t>You will:</a:t>
+            </a:r>
+          </a:p>
+          <a:p>
+            <a:pPr lvl="0" indent="-342900" marL="342900">
+              <a:buAutoNum type="arabicPeriod"/>
+            </a:pPr>
+            <a:r>
+              <a:rPr/>
+              <a:t>Build the merged panel and confirm the collinearity for yourself</a:t>
+            </a:r>
+          </a:p>
+          <a:p>
+            <a:pPr lvl="0" indent="-342900" marL="342900">
+              <a:buAutoNum type="arabicPeriod"/>
+            </a:pPr>
+            <a:r>
+              <a:rPr/>
+              <a:t>Estimate the naive and the composition-adjusted specification</a:t>
+            </a:r>
+          </a:p>
+          <a:p>
+            <a:pPr lvl="0" indent="-342900" marL="342900">
+              <a:buAutoNum type="arabicPeriod"/>
+            </a:pPr>
+            <a:r>
+              <a:rPr/>
+              <a:t>Reproduce the coefficient by residualising, and show the two agree</a:t>
+            </a:r>
+          </a:p>
+          <a:p>
+            <a:pPr lvl="0" indent="-342900" marL="342900">
+              <a:buAutoNum type="arabicPeriod"/>
+            </a:pPr>
+            <a:r>
+              <a:rPr/>
+              <a:t>Write </a:t>
+            </a:r>
+            <a:r>
+              <a:rPr b="1"/>
+              <a:t>three sentences</a:t>
+            </a:r>
+            <a:r>
+              <a:rPr/>
+              <a:t> your group will defend if drawn</a:t>
+            </a:r>
+          </a:p>
+          <a:p>
+            <a:pPr lvl="0" indent="0" marL="0">
+              <a:buNone/>
+            </a:pPr>
+            <a:r>
+              <a:rPr/>
+              <a:t>The three sentences are the deliverable. The code is how you earn the right to write them.</a:t>
+            </a:r>
+          </a:p>
+        </p:txBody>
+      </p:sp>
+    </p:spTree>
+  </p:cSld>
+</p:sld>
+</file>
+
+<file path=ppt/slides/slide3.xml><?xml version="1.0" encoding="utf-8"?>
+<p:sld xmlns:a="http://schemas.openxmlformats.org/drawingml/2006/main" xmlns:r="http://schemas.openxmlformats.org/officeDocument/2006/relationships" xmlns:p="http://schemas.openxmlformats.org/presentationml/2006/main">
+  <p:cSld>
+    <p:spTree>
+      <p:nvGrpSpPr>
+        <p:cNvPr id="1" name=""/>
+        <p:cNvGrpSpPr/>
+        <p:nvPr/>
+      </p:nvGrpSpPr>
+      <p:grpSpPr>
+        <a:xfrm>
+          <a:off x="0" y="0"/>
+          <a:ext cx="0" cy="0"/>
+          <a:chOff x="0" y="0"/>
+          <a:chExt cx="0" cy="0"/>
+        </a:xfrm>
+      </p:grpSpPr>
+      <p:sp>
+        <p:nvSpPr>
+          <p:cNvPr id="2" name="Title 1"/>
+          <p:cNvSpPr>
+            <a:spLocks noGrp="1"/>
+          </p:cNvSpPr>
+          <p:nvPr>
+            <p:ph type="title"/>
+          </p:nvPr>
+        </p:nvSpPr>
+        <p:spPr/>
+        <p:txBody>
+          <a:bodyPr/>
+          <a:lstStyle/>
+          <a:p>
+            <a:pPr lvl="0" indent="0" marL="0">
+              <a:buNone/>
+            </a:pPr>
+            <a:r>
+              <a:rPr/>
+              <a:t>The 90 minutes ahead</a:t>
+            </a:r>
+          </a:p>
+        </p:txBody>
+      </p:sp>
+      <p:graphicFrame>
+        <p:nvGraphicFramePr>
+          <p:cNvPr id="6" name="Content Placeholder 5"/>
+          <p:cNvGraphicFramePr>
+            <a:graphicFrameLocks noGrp="1"/>
+          </p:cNvGraphicFramePr>
+          <p:nvPr>
+            <p:ph idx="1"/>
+          </p:nvPr>
+        </p:nvGraphicFramePr>
+        <p:xfrm>
+          <a:off x="457200" y="1193800"/>
+          <a:ext cx="8229600" cy="3390900"/>
+        </p:xfrm>
+        <a:graphic>
+          <a:graphicData uri="http://schemas.openxmlformats.org/drawingml/2006/table">
+            <a:tbl>
+              <a:tblPr firstRow="0" bandRow="1">
+                <a:tableStyleId>{5C22544A-7EE6-4342-B048-85BDC9FD1C3A}</a:tableStyleId>
+              </a:tblPr>
+              <a:tblGrid>
+                <a:gridCol w="4114800"/>
+                <a:gridCol w="4114800"/>
+              </a:tblGrid>
+              <a:tr h="0">
+                <a:tc>
+                  <a:txBody>
+                    <a:bodyPr/>
+                    <a:lstStyle/>
+                    <a:p>
+                      <a:pPr lvl="0" indent="0" marL="0">
+                        <a:buNone/>
+                      </a:pPr>
+                      <a:r>
+                        <a:rPr b="1"/>
+                        <a:t>0–10</a:t>
+                      </a:r>
+                    </a:p>
+                  </a:txBody>
+                </a:tc>
+                <a:tc>
+                  <a:txBody>
+                    <a:bodyPr/>
+                    <a:lstStyle/>
+                    <a:p>
+                      <a:pPr lvl="0" indent="0" marL="0">
+                        <a:buNone/>
+                      </a:pPr>
+                      <a:r>
+                        <a:rPr/>
+                        <a:t>The question, and why composition is in the way</a:t>
+                      </a:r>
+                    </a:p>
+                  </a:txBody>
+                </a:tc>
+              </a:tr>
+              <a:tr h="0">
+                <a:tc>
+                  <a:txBody>
+                    <a:bodyPr/>
+                    <a:lstStyle/>
+                    <a:p>
+                      <a:pPr lvl="0" indent="0" marL="0">
+                        <a:buNone/>
+                      </a:pPr>
+                      <a:r>
+                        <a:rPr b="1"/>
+                        <a:t>10–30</a:t>
+                      </a:r>
+                    </a:p>
+                  </a:txBody>
+                </a:tc>
+                <a:tc>
+                  <a:txBody>
+                    <a:bodyPr/>
+                    <a:lstStyle/>
+                    <a:p>
+                      <a:pPr lvl="0" indent="0" marL="0">
+                        <a:buNone/>
+                      </a:pPr>
+                      <a:r>
+                        <a:rPr/>
+                        <a:t>Least squares as a projection</a:t>
+                      </a:r>
+                    </a:p>
+                  </a:txBody>
+                </a:tc>
+              </a:tr>
+              <a:tr h="0">
+                <a:tc>
+                  <a:txBody>
+                    <a:bodyPr/>
+                    <a:lstStyle/>
+                    <a:p>
+                      <a:pPr lvl="0" indent="0" marL="0">
+                        <a:buNone/>
+                      </a:pPr>
+                      <a:r>
+                        <a:rPr b="1"/>
+                        <a:t>30–50</a:t>
+                      </a:r>
+                    </a:p>
+                  </a:txBody>
+                </a:tc>
+                <a:tc>
+                  <a:txBody>
+                    <a:bodyPr/>
+                    <a:lstStyle/>
+                    <a:p>
+                      <a:pPr lvl="0" indent="0" marL="0">
+                        <a:buNone/>
+                      </a:pPr>
+                      <a:r>
+                        <a:rPr/>
+                        <a:t>Frisch–Waugh–Lovell</a:t>
+                      </a:r>
+                    </a:p>
+                  </a:txBody>
+                </a:tc>
+              </a:tr>
+              <a:tr h="0">
+                <a:tc>
+                  <a:txBody>
+                    <a:bodyPr/>
+                    <a:lstStyle/>
+                    <a:p>
+                      <a:pPr lvl="0" indent="0" marL="0">
+                        <a:buNone/>
+                      </a:pPr>
+                      <a:r>
+                        <a:rPr b="1"/>
+                        <a:t>50–70</a:t>
+                      </a:r>
+                    </a:p>
+                  </a:txBody>
+                </a:tc>
+                <a:tc>
+                  <a:txBody>
+                    <a:bodyPr/>
+                    <a:lstStyle/>
+                    <a:p>
+                      <a:pPr lvl="0" indent="0" marL="0">
+                        <a:buNone/>
+                      </a:pPr>
+                      <a:r>
+                        <a:rPr/>
+                        <a:t>The data, and the collinearity in it</a:t>
+                      </a:r>
+                    </a:p>
+                  </a:txBody>
+                </a:tc>
+              </a:tr>
+              <a:tr h="0">
+                <a:tc>
+                  <a:txBody>
+                    <a:bodyPr/>
+                    <a:lstStyle/>
+                    <a:p>
+                      <a:pPr lvl="0" indent="0" marL="0">
+                        <a:buNone/>
+                      </a:pPr>
+                      <a:r>
+                        <a:rPr b="1"/>
+                        <a:t>70–85</a:t>
+                      </a:r>
+                    </a:p>
+                  </a:txBody>
+                </a:tc>
+                <a:tc>
+                  <a:txBody>
+                    <a:bodyPr/>
+                    <a:lstStyle/>
+                    <a:p>
+                      <a:pPr lvl="0" indent="0" marL="0">
+                        <a:buNone/>
+                      </a:pPr>
+                      <a:r>
+                        <a:rPr/>
+                        <a:t>Doing it, and verifying the identity</a:t>
+                      </a:r>
+                    </a:p>
+                  </a:txBody>
+                </a:tc>
+              </a:tr>
+              <a:tr h="0">
+                <a:tc>
+                  <a:txBody>
+                    <a:bodyPr/>
+                    <a:lstStyle/>
+                    <a:p>
+                      <a:pPr lvl="0" indent="0" marL="0">
+                        <a:buNone/>
+                      </a:pPr>
+                      <a:r>
+                        <a:rPr b="1"/>
+                        <a:t>85–90</a:t>
+                      </a:r>
+                    </a:p>
+                  </a:txBody>
+                </a:tc>
+                <a:tc>
+                  <a:txBody>
+                    <a:bodyPr/>
+                    <a:lstStyle/>
+                    <a:p>
+                      <a:pPr lvl="0" indent="0" marL="0">
+                        <a:buNone/>
+                      </a:pPr>
+                      <a:r>
+                        <a:rPr/>
+                        <a:t>Handoff to the lab</a:t>
+                      </a:r>
+                    </a:p>
+                  </a:txBody>
+                </a:tc>
+              </a:tr>
+            </a:tbl>
+          </a:graphicData>
+        </a:graphic>
+      </p:graphicFrame>
+    </p:spTree>
+  </p:cSld>
+</p:sld>
+</file>
+
+<file path=ppt/slides/slide4.xml><?xml version="1.0" encoding="utf-8"?>
+<p:sld xmlns:a="http://schemas.openxmlformats.org/drawingml/2006/main" xmlns:r="http://schemas.openxmlformats.org/officeDocument/2006/relationships" xmlns:p="http://schemas.openxmlformats.org/presentationml/2006/main">
+  <p:cSld>
+    <p:spTree>
+      <p:nvGrpSpPr>
+        <p:cNvPr id="1" name=""/>
+        <p:cNvGrpSpPr/>
+        <p:nvPr/>
+      </p:nvGrpSpPr>
+      <p:grpSpPr>
+        <a:xfrm>
+          <a:off x="0" y="0"/>
+          <a:ext cx="0" cy="0"/>
+          <a:chOff x="0" y="0"/>
+          <a:chExt cx="0" cy="0"/>
+        </a:xfrm>
+      </p:grpSpPr>
+      <p:sp>
+        <p:nvSpPr>
+          <p:cNvPr id="2" name="Title 1"/>
+          <p:cNvSpPr>
+            <a:spLocks noGrp="1"/>
+          </p:cNvSpPr>
+          <p:nvPr>
+            <p:ph type="title"/>
+          </p:nvPr>
+        </p:nvSpPr>
+        <p:spPr/>
+        <p:txBody>
+          <a:bodyPr/>
+          <a:lstStyle/>
+          <a:p>
+            <a:pPr lvl="0" indent="0" marL="0">
+              <a:buNone/>
+            </a:pPr>
+            <a:r>
+              <a:rPr/>
+              <a:t>Before class you read</a:t>
+            </a:r>
+          </a:p>
+        </p:txBody>
+      </p:sp>
+      <p:sp>
+        <p:nvSpPr>
+          <p:cNvPr id="3" name="Content Placeholder 2"/>
+          <p:cNvSpPr>
+            <a:spLocks noGrp="1"/>
+          </p:cNvSpPr>
+          <p:nvPr>
+            <p:ph idx="1"/>
+          </p:nvPr>
+        </p:nvSpPr>
+        <p:spPr/>
+        <p:txBody>
+          <a:bodyPr/>
+          <a:lstStyle/>
+          <a:p>
+            <a:pPr lvl="0" indent="0" marL="0">
+              <a:buNone/>
+            </a:pPr>
+            <a:r>
+              <a:rPr b="1"/>
+              <a:t>Topalova &amp; Khandelwal</a:t>
+            </a:r>
+            <a:r>
+              <a:rPr/>
+              <a:t>, </a:t>
+            </a:r>
+            <a:r>
+              <a:rPr i="1"/>
+              <a:t>Trade Liberalization and Firm Productivity: The Case of India</a:t>
+            </a:r>
+            <a:r>
+              <a:rPr/>
+              <a:t>.</a:t>
+            </a:r>
+          </a:p>
+          <a:p>
+            <a:pPr lvl="0" indent="0" marL="0">
+              <a:buNone/>
+            </a:pPr>
+            <a:r>
+              <a:rPr/>
+              <a:t>Harvard Dataverse, DOI 10.7910/DVN/8WEXYD · CC0 · 32,422 firm-years</a:t>
+            </a:r>
+          </a:p>
+          <a:p>
+            <a:pPr lvl="0" indent="0" marL="0">
+              <a:buNone/>
+            </a:pPr>
+            <a:r>
+              <a:rPr/>
+              <a:t>This is one of the sessions with the </a:t>
+            </a:r>
+            <a:r>
+              <a:rPr b="1"/>
+              <a:t>authors’ own data</a:t>
+            </a:r>
+            <a:r>
+              <a:rPr/>
+              <a:t>. Their central problem is ours: tariffs fell where industries already differed, so the raw comparison confounds the policy with the composition of who received it.</a:t>
+            </a:r>
+          </a:p>
+        </p:txBody>
+      </p:sp>
+    </p:spTree>
+  </p:cSld>
+</p:sld>
+</file>
+
+<file path=ppt/slides/slide5.xml><?xml version="1.0" encoding="utf-8"?>
+<p:sld xmlns:a="http://schemas.openxmlformats.org/drawingml/2006/main" xmlns:r="http://schemas.openxmlformats.org/officeDocument/2006/relationships" xmlns:p="http://schemas.openxmlformats.org/presentationml/2006/main">
+  <p:cSld>
+    <p:spTree>
+      <p:nvGrpSpPr>
+        <p:cNvPr id="1" name=""/>
+        <p:cNvGrpSpPr/>
+        <p:nvPr/>
+      </p:nvGrpSpPr>
+      <p:grpSpPr>
+        <a:xfrm>
+          <a:off x="0" y="0"/>
+          <a:ext cx="0" cy="0"/>
+          <a:chOff x="0" y="0"/>
+          <a:chExt cx="0" cy="0"/>
+        </a:xfrm>
+      </p:grpSpPr>
+      <p:sp>
+        <p:nvSpPr>
+          <p:cNvPr id="2" name="Title 1"/>
+          <p:cNvSpPr>
+            <a:spLocks noGrp="1"/>
+          </p:cNvSpPr>
+          <p:nvPr>
+            <p:ph type="title"/>
+          </p:nvPr>
+        </p:nvSpPr>
+        <p:spPr/>
+        <p:txBody>
+          <a:bodyPr/>
+          <a:lstStyle/>
+          <a:p>
+            <a:pPr lvl="0" indent="0" marL="0">
+              <a:buNone/>
+            </a:pPr>
+            <a:r>
+              <a:rPr/>
+              <a:t>Read it for one thing</a:t>
+            </a:r>
+          </a:p>
+        </p:txBody>
+      </p:sp>
+      <p:sp>
+        <p:nvSpPr>
+          <p:cNvPr id="3" name="Content Placeholder 2"/>
+          <p:cNvSpPr>
+            <a:spLocks noGrp="1"/>
+          </p:cNvSpPr>
+          <p:nvPr>
+            <p:ph idx="1"/>
+          </p:nvPr>
+        </p:nvSpPr>
+        <p:spPr/>
+        <p:txBody>
+          <a:bodyPr/>
+          <a:lstStyle/>
+          <a:p>
+            <a:pPr lvl="0" indent="0" marL="1270000">
+              <a:buNone/>
+            </a:pPr>
+            <a:r>
+              <a:rPr sz="2000"/>
+              <a:t>How do they separate the effect of falling tariffs from the fact that </a:t>
+            </a:r>
+            <a:r>
+              <a:rPr sz="2000" b="1"/>
+              <a:t>liberalised industries were not like the others to begin with</a:t>
+            </a:r>
+            <a:r>
+              <a:rPr sz="2000"/>
+              <a:t>?</a:t>
+            </a:r>
+          </a:p>
+          <a:p>
+            <a:pPr lvl="0" indent="0" marL="0">
+              <a:buNone/>
+            </a:pPr>
+            <a:r>
+              <a:rPr/>
+              <a:t>Every control they add is a projection. Today you learn what that sentence means geometrically, and then you will see it in their tables.</a:t>
+            </a:r>
+          </a:p>
+        </p:txBody>
+      </p:sp>
+    </p:spTree>
+  </p:cSld>
+</p:sld>
+</file>
+
+<file path=ppt/slides/slide6.xml><?xml version="1.0" encoding="utf-8"?>
+<p:sld xmlns:a="http://schemas.openxmlformats.org/drawingml/2006/main" xmlns:r="http://schemas.openxmlformats.org/officeDocument/2006/relationships" xmlns:p="http://schemas.openxmlformats.org/presentationml/2006/main">
+  <p:cSld>
+    <p:spTree>
+      <p:nvGrpSpPr>
+        <p:cNvPr id="1" name=""/>
+        <p:cNvGrpSpPr/>
+        <p:nvPr/>
+      </p:nvGrpSpPr>
+      <p:grpSpPr>
+        <a:xfrm>
+          <a:off x="0" y="0"/>
+          <a:ext cx="0" cy="0"/>
+          <a:chOff x="0" y="0"/>
+          <a:chExt cx="0" cy="0"/>
+        </a:xfrm>
+      </p:grpSpPr>
+      <p:sp>
+        <p:nvSpPr>
+          <p:cNvPr id="2" name="Title 1"/>
+          <p:cNvSpPr>
+            <a:spLocks noGrp="1"/>
+          </p:cNvSpPr>
+          <p:nvPr>
+            <p:ph type="title"/>
+          </p:nvPr>
+        </p:nvSpPr>
+        <p:spPr>
+          <a:xfrm>
+            <a:off x="722313" y="3305176"/>
+            <a:ext cx="7772400" cy="1021556"/>
+          </a:xfrm>
+        </p:spPr>
+        <p:txBody>
+          <a:bodyPr/>
+          <a:lstStyle/>
+          <a:p>
+            <a:pPr lvl="0" indent="0" marL="0">
+              <a:buNone/>
+            </a:pPr>
+            <a:r>
+              <a:rPr/>
+              <a:t>The question</a:t>
+            </a:r>
+          </a:p>
+        </p:txBody>
+      </p:sp>
+    </p:spTree>
+  </p:cSld>
+</p:sld>
+</file>
+
+<file path=ppt/slides/slide7.xml><?xml version="1.0" encoding="utf-8"?>
+<p:sld xmlns:a="http://schemas.openxmlformats.org/drawingml/2006/main" xmlns:r="http://schemas.openxmlformats.org/officeDocument/2006/relationships" xmlns:p="http://schemas.openxmlformats.org/presentationml/2006/main">
+  <p:cSld>
+    <p:spTree>
+      <p:nvGrpSpPr>
+        <p:cNvPr id="1" name=""/>
+        <p:cNvGrpSpPr/>
+        <p:nvPr/>
+      </p:nvGrpSpPr>
+      <p:grpSpPr>
+        <a:xfrm>
+          <a:off x="0" y="0"/>
+          <a:ext cx="0" cy="0"/>
+          <a:chOff x="0" y="0"/>
+          <a:chExt cx="0" cy="0"/>
+        </a:xfrm>
+      </p:grpSpPr>
+      <p:sp>
+        <p:nvSpPr>
+          <p:cNvPr id="2" name="Title 1"/>
+          <p:cNvSpPr>
+            <a:spLocks noGrp="1"/>
+          </p:cNvSpPr>
+          <p:nvPr>
+            <p:ph type="title"/>
+          </p:nvPr>
+        </p:nvSpPr>
+        <p:spPr/>
+        <p:txBody>
+          <a:bodyPr/>
+          <a:lstStyle/>
+          <a:p>
+            <a:pPr lvl="0" indent="0" marL="0">
+              <a:buNone/>
+            </a:pPr>
+            <a:r>
+              <a:rPr/>
+              <a:t>Electricity prices across Europe</a:t>
+            </a:r>
+          </a:p>
+        </p:txBody>
+      </p:sp>
+      <p:sp>
+        <p:nvSpPr>
+          <p:cNvPr id="3" name="Content Placeholder 2"/>
+          <p:cNvSpPr>
+            <a:spLocks noGrp="1"/>
+          </p:cNvSpPr>
+          <p:nvPr>
+            <p:ph idx="1"/>
+          </p:nvPr>
+        </p:nvSpPr>
+        <p:spPr/>
+        <p:txBody>
+          <a:bodyPr/>
+          <a:lstStyle/>
+          <a:p>
+            <a:pPr lvl="0" indent="0" marL="0">
+              <a:buNone/>
+            </a:pPr>
+            <a:r>
+              <a:rPr/>
+              <a:t>Industrial electricity costs more in some European countries than others.</a:t>
+            </a:r>
+          </a:p>
+          <a:p>
+            <a:pPr lvl="0" indent="0" marL="0">
+              <a:buNone/>
+            </a:pPr>
+            <a:r>
+              <a:rPr/>
+              <a:t>A natural first claim:</a:t>
+            </a:r>
+          </a:p>
+          <a:p>
+            <a:pPr lvl="0" indent="0" marL="1270000">
+              <a:buNone/>
+            </a:pPr>
+            <a:r>
+              <a:rPr sz="2000" i="1"/>
+              <a:t>“Countries with more fossil generation have higher electricity prices.”</a:t>
+            </a:r>
+          </a:p>
+          <a:p>
+            <a:pPr lvl="0" indent="0" marL="0">
+              <a:buNone/>
+            </a:pPr>
+            <a:r>
+              <a:rPr/>
+              <a:t>Before we can defend that sentence, we have to separate two things:</a:t>
+            </a:r>
+          </a:p>
+          <a:p>
+            <a:pPr lvl="0"/>
+            <a:r>
+              <a:rPr/>
+              <a:t>the </a:t>
+            </a:r>
+            <a:r>
+              <a:rPr b="1"/>
+              <a:t>effect</a:t>
+            </a:r>
+            <a:r>
+              <a:rPr/>
+              <a:t> of the generation mix on price</a:t>
+            </a:r>
+          </a:p>
+          <a:p>
+            <a:pPr lvl="0"/>
+            <a:r>
+              <a:rPr/>
+              <a:t>the </a:t>
+            </a:r>
+            <a:r>
+              <a:rPr b="1"/>
+              <a:t>composition</a:t>
+            </a:r>
+            <a:r>
+              <a:rPr/>
+              <a:t> of the countries that happen to have that mix</a:t>
+            </a:r>
+          </a:p>
+          <a:p>
+            <a:pPr lvl="0" indent="0" marL="0">
+              <a:buNone/>
+            </a:pPr>
+            <a:r>
+              <a:rPr/>
+              <a:t>Rich countries differ from poor ones in more than their power stations.</a:t>
+            </a:r>
+          </a:p>
+        </p:txBody>
+      </p:sp>
+    </p:spTree>
+  </p:cSld>
+</p:sld>
+</file>
+
+<file path=ppt/slides/slide8.xml><?xml version="1.0" encoding="utf-8"?>
+<p:sld xmlns:a="http://schemas.openxmlformats.org/drawingml/2006/main" xmlns:r="http://schemas.openxmlformats.org/officeDocument/2006/relationships" xmlns:p="http://schemas.openxmlformats.org/presentationml/2006/main">
+  <p:cSld>
+    <p:spTree>
+      <p:nvGrpSpPr>
+        <p:cNvPr id="1" name=""/>
+        <p:cNvGrpSpPr/>
+        <p:nvPr/>
+      </p:nvGrpSpPr>
+      <p:grpSpPr>
+        <a:xfrm>
+          <a:off x="0" y="0"/>
+          <a:ext cx="0" cy="0"/>
+          <a:chOff x="0" y="0"/>
+          <a:chExt cx="0" cy="0"/>
+        </a:xfrm>
+      </p:grpSpPr>
+      <p:sp>
+        <p:nvSpPr>
+          <p:cNvPr id="2" name="Title 1"/>
+          <p:cNvSpPr>
+            <a:spLocks noGrp="1"/>
+          </p:cNvSpPr>
+          <p:nvPr>
+            <p:ph type="title"/>
+          </p:nvPr>
+        </p:nvSpPr>
+        <p:spPr/>
+        <p:txBody>
+          <a:bodyPr/>
+          <a:lstStyle/>
+          <a:p>
+            <a:pPr lvl="0" indent="0" marL="0">
+              <a:buNone/>
+            </a:pPr>
+            <a:r>
+              <a:rPr/>
+              <a:t>Why this is a geometry problem</a:t>
+            </a:r>
+          </a:p>
+        </p:txBody>
+      </p:sp>
+      <mc:AlternateContent xmlns:mc="http://schemas.openxmlformats.org/markup-compatibility/2006">
+        <mc:Choice xmlns:a14="http://schemas.microsoft.com/office/drawing/2010/main" Requires="a14">
+          <p:sp>
+            <p:nvSpPr>
+              <p:cNvPr id="3" name="Content Placeholder 2"/>
+              <p:cNvSpPr>
+                <a:spLocks noGrp="1"/>
+              </p:cNvSpPr>
+              <p:nvPr>
+                <p:ph idx="1"/>
+              </p:nvPr>
+            </p:nvSpPr>
+            <p:spPr/>
+            <p:txBody>
+              <a:bodyPr/>
+              <a:lstStyle/>
+              <a:p>
+                <a:pPr lvl="0" indent="0" marL="0">
+                  <a:buNone/>
+                </a:pPr>
+                <a:r>
+                  <a:rPr/>
+                  <a:t>Least squares is not a formula to memorise. It is a </a:t>
+                </a:r>
+                <a:r>
+                  <a:rPr b="1"/>
+                  <a:t>projection</a:t>
+                </a:r>
+                <a:r>
+                  <a:rPr/>
+                  <a:t>.</a:t>
+                </a:r>
+              </a:p>
+              <a:p>
+                <a:pPr lvl="0" indent="0" marL="0">
+                  <a:buNone/>
+                </a:pPr>
+                <a14:m>
+                  <m:oMathPara xmlns:m="http://schemas.openxmlformats.org/officeDocument/2006/math">
+                    <m:oMathParaPr>
+                      <m:jc m:val="center"/>
+                    </m:oMathParaPr>
+                    <m:oMath>
+                      <m:acc>
+                        <m:accPr>
+                          <m:chr m:val="̂"/>
+                        </m:accPr>
+                        <m:e>
+                          <m:r>
+                            <m:t>y</m:t>
+                          </m:r>
+                        </m:e>
+                      </m:acc>
+                      <m:r>
+                        <m:rPr>
+                          <m:sty m:val="p"/>
+                        </m:rPr>
+                        <m:t>=</m:t>
+                      </m:r>
+                      <m:r>
+                        <m:t>X</m:t>
+                      </m:r>
+                      <m:sSup>
+                        <m:e>
+                          <m:d>
+                            <m:dPr>
+                              <m:begChr m:val="("/>
+                              <m:sepChr m:val=""/>
+                              <m:endChr m:val=")"/>
+                              <m:grow/>
+                            </m:dPr>
+                            <m:e>
+                              <m:r>
+                                <m:t>X</m:t>
+                              </m:r>
+                              <m:r>
+                                <m:rPr>
+                                  <m:sty m:val="p"/>
+                                </m:rPr>
+                                <m:t>′</m:t>
+                              </m:r>
+                              <m:r>
+                                <m:t>X</m:t>
+                              </m:r>
+                            </m:e>
+                          </m:d>
+                        </m:e>
+                        <m:sup>
+                          <m:r>
+                            <m:rPr>
+                              <m:sty m:val="p"/>
+                            </m:rPr>
+                            <m:t>−</m:t>
+                          </m:r>
+                          <m:r>
+                            <m:t>1</m:t>
+                          </m:r>
+                        </m:sup>
+                      </m:sSup>
+                      <m:r>
+                        <m:t>X</m:t>
+                      </m:r>
+                      <m:r>
+                        <m:rPr>
+                          <m:sty m:val="p"/>
+                        </m:rPr>
+                        <m:t>′</m:t>
+                      </m:r>
+                      <m:r>
+                        <m:t>y</m:t>
+                      </m:r>
+                      <m:r>
+                        <m:rPr>
+                          <m:sty m:val="p"/>
+                        </m:rPr>
+                        <m:t>=</m:t>
+                      </m:r>
+                      <m:sSub>
+                        <m:e>
+                          <m:r>
+                            <m:t>P</m:t>
+                          </m:r>
+                        </m:e>
+                        <m:sub>
+                          <m:r>
+                            <m:t>X</m:t>
+                          </m:r>
+                        </m:sub>
+                      </m:sSub>
+                      <m:r>
+                        <m:t> </m:t>
+                      </m:r>
+                      <m:r>
+                        <m:t>y</m:t>
+                      </m:r>
+                    </m:oMath>
+                  </m:oMathPara>
+                </a14:m>
+              </a:p>
+              <a:p>
+                <a:pPr lvl="0" indent="0" marL="0">
+                  <a:buNone/>
+                </a:pPr>
+                <a14:m>
+                  <m:oMath xmlns:m="http://schemas.openxmlformats.org/officeDocument/2006/math">
+                    <m:sSub>
+                      <m:e>
+                        <m:r>
+                          <m:t>P</m:t>
+                        </m:r>
+                      </m:e>
+                      <m:sub>
+                        <m:r>
+                          <m:t>X</m:t>
+                        </m:r>
+                      </m:sub>
+                    </m:sSub>
+                  </m:oMath>
+                </a14:m>
+                <a:r>
+                  <a:rPr/>
+                  <a:t> projects </a:t>
+                </a:r>
+                <a14:m>
+                  <m:oMath xmlns:m="http://schemas.openxmlformats.org/officeDocument/2006/math">
+                    <m:r>
+                      <m:t>y</m:t>
+                    </m:r>
+                  </m:oMath>
+                </a14:m>
+                <a:r>
+                  <a:rPr/>
+                  <a:t> onto the column space of </a:t>
+                </a:r>
+                <a14:m>
+                  <m:oMath xmlns:m="http://schemas.openxmlformats.org/officeDocument/2006/math">
+                    <m:r>
+                      <m:t>X</m:t>
+                    </m:r>
+                  </m:oMath>
+                </a14:m>
+                <a:r>
+                  <a:rPr/>
+                  <a:t>. The residual</a:t>
+                </a:r>
+              </a:p>
+              <a:p>
+                <a:pPr lvl="0" indent="0" marL="0">
+                  <a:buNone/>
+                </a:pPr>
+                <a14:m>
+                  <m:oMathPara xmlns:m="http://schemas.openxmlformats.org/officeDocument/2006/math">
+                    <m:oMathParaPr>
+                      <m:jc m:val="center"/>
+                    </m:oMathParaPr>
+                    <m:oMath>
+                      <m:r>
+                        <m:t>e</m:t>
+                      </m:r>
+                      <m:r>
+                        <m:rPr>
+                          <m:sty m:val="p"/>
+                        </m:rPr>
+                        <m:t>=</m:t>
+                      </m:r>
+                      <m:d>
+                        <m:dPr>
+                          <m:begChr m:val="("/>
+                          <m:sepChr m:val=""/>
+                          <m:endChr m:val=")"/>
+                          <m:grow/>
+                        </m:dPr>
+                        <m:e>
+                          <m:r>
+                            <m:t>I</m:t>
+                          </m:r>
+                          <m:r>
+                            <m:rPr>
+                              <m:sty m:val="p"/>
+                            </m:rPr>
+                            <m:t>−</m:t>
+                          </m:r>
+                          <m:sSub>
+                            <m:e>
+                              <m:r>
+                                <m:t>P</m:t>
+                              </m:r>
+                            </m:e>
+                            <m:sub>
+                              <m:r>
+                                <m:t>X</m:t>
+                              </m:r>
+                            </m:sub>
+                          </m:sSub>
+                        </m:e>
+                      </m:d>
+                      <m:r>
+                        <m:t> </m:t>
+                      </m:r>
+                      <m:r>
+                        <m:t>y</m:t>
+                      </m:r>
+                      <m:r>
+                        <m:rPr>
+                          <m:sty m:val="p"/>
+                        </m:rPr>
+                        <m:t>=</m:t>
+                      </m:r>
+                      <m:sSub>
+                        <m:e>
+                          <m:r>
+                            <m:t>M</m:t>
+                          </m:r>
+                        </m:e>
+                        <m:sub>
+                          <m:r>
+                            <m:t>X</m:t>
+                          </m:r>
+                        </m:sub>
+                      </m:sSub>
+                      <m:r>
+                        <m:t> </m:t>
+                      </m:r>
+                      <m:r>
+                        <m:t>y</m:t>
+                      </m:r>
+                    </m:oMath>
+                  </m:oMathPara>
+                </a14:m>
+              </a:p>
+              <a:p>
+                <a:pPr lvl="0" indent="0" marL="0">
+                  <a:buNone/>
+                </a:pPr>
+                <a:r>
+                  <a:rPr/>
+                  <a:t>is what is left </a:t>
+                </a:r>
+                <a:r>
+                  <a:rPr b="1"/>
+                  <a:t>orthogonal</a:t>
+                </a:r>
+                <a:r>
+                  <a:rPr/>
+                  <a:t> to everything </a:t>
+                </a:r>
+                <a14:m>
+                  <m:oMath xmlns:m="http://schemas.openxmlformats.org/officeDocument/2006/math">
+                    <m:r>
+                      <m:t>X</m:t>
+                    </m:r>
+                  </m:oMath>
+                </a14:m>
+                <a:r>
+                  <a:rPr/>
+                  <a:t> can explain.</a:t>
+                </a:r>
+              </a:p>
+              <a:p>
+                <a:pPr lvl="0" indent="0" marL="0">
+                  <a:buNone/>
+                </a:pPr>
+                <a:r>
+                  <a:rPr/>
+                  <a:t>Every result today follows from one fact: </a:t>
+                </a:r>
+                <a14:m>
+                  <m:oMath xmlns:m="http://schemas.openxmlformats.org/officeDocument/2006/math">
+                    <m:sSub>
+                      <m:e>
+                        <m:r>
+                          <m:t>M</m:t>
+                        </m:r>
+                      </m:e>
+                      <m:sub>
+                        <m:r>
+                          <m:t>X</m:t>
+                        </m:r>
+                      </m:sub>
+                    </m:sSub>
+                    <m:r>
+                      <m:t>X</m:t>
+                    </m:r>
+                    <m:r>
+                      <m:rPr>
+                        <m:sty m:val="p"/>
+                      </m:rPr>
+                      <m:t>=</m:t>
+                    </m:r>
+                    <m:r>
+                      <m:t>0</m:t>
+                    </m:r>
+                  </m:oMath>
+                </a14:m>
+                <a:r>
+                  <a:rPr/>
+                  <a:t>. The residual carries no trace of the columns you controlled for.</a:t>
+                </a:r>
+              </a:p>
+            </p:txBody>
+          </p:sp>
+        </mc:Choice>
+      </mc:AlternateContent>
+    </p:spTree>
+  </p:cSld>
+</p:sld>
+</file>
+
+<file path=ppt/slides/slide9.xml><?xml version="1.0" encoding="utf-8"?>
+<p:sld xmlns:a="http://schemas.openxmlformats.org/drawingml/2006/main" xmlns:r="http://schemas.openxmlformats.org/officeDocument/2006/relationships" xmlns:p="http://schemas.openxmlformats.org/presentationml/2006/main">
+  <p:cSld>
+    <p:spTree>
+      <p:nvGrpSpPr>
+        <p:cNvPr id="1" name=""/>
+        <p:cNvGrpSpPr/>
+        <p:nvPr/>
+      </p:nvGrpSpPr>
+      <p:grpSpPr>
+        <a:xfrm>
+          <a:off x="0" y="0"/>
+          <a:ext cx="0" cy="0"/>
+          <a:chOff x="0" y="0"/>
+          <a:chExt cx="0" cy="0"/>
+        </a:xfrm>
+      </p:grpSpPr>
+      <mc:AlternateContent xmlns:mc="http://schemas.openxmlformats.org/markup-compatibility/2006">
+        <mc:Choice xmlns:a14="http://schemas.microsoft.com/office/drawing/2010/main" Requires="a14">
+          <p:sp>
+            <p:nvSpPr>
+              <p:cNvPr id="2" name="Title 1"/>
+              <p:cNvSpPr>
+                <a:spLocks noGrp="1"/>
+              </p:cNvSpPr>
+              <p:nvPr>
+                <p:ph type="title"/>
+              </p:nvPr>
+            </p:nvSpPr>
+            <p:spPr/>
+            <p:txBody>
+              <a:bodyPr/>
+              <a:lstStyle/>
+              <a:p>
+                <a:pPr lvl="0" indent="0" marL="0">
+                  <a:buNone/>
+                </a:pPr>
+                <a:r>
+                  <a:rPr/>
+                  <a:t>Two properties of </a:t>
+                </a:r>
+                <a14:m>
+                  <m:oMath xmlns:m="http://schemas.openxmlformats.org/officeDocument/2006/math">
+                    <m:sSub>
+                      <m:e>
+                        <m:r>
+                          <m:t>P</m:t>
+                        </m:r>
+                      </m:e>
+                      <m:sub>
+                        <m:r>
+                          <m:t>X</m:t>
+                        </m:r>
+                      </m:sub>
+                    </m:sSub>
+                  </m:oMath>
+                </a14:m>
+                <a:r>
+                  <a:rPr/>
+                  <a:t> worth memorising</a:t>
+                </a:r>
+              </a:p>
+            </p:txBody>
+          </p:sp>
+        </mc:Choice>
+      </mc:AlternateContent>
+      <mc:AlternateContent xmlns:mc="http://schemas.openxmlformats.org/markup-compatibility/2006">
+        <mc:Choice xmlns:a14="http://schemas.microsoft.com/office/drawing/2010/main" Requires="a14">
+          <p:sp>
+            <p:nvSpPr>
+              <p:cNvPr id="3" name="Content Placeholder 2"/>
+              <p:cNvSpPr>
+                <a:spLocks noGrp="1"/>
+              </p:cNvSpPr>
+              <p:nvPr>
+                <p:ph idx="1"/>
+              </p:nvPr>
+            </p:nvSpPr>
+            <p:spPr/>
+            <p:txBody>
+              <a:bodyPr/>
+              <a:lstStyle/>
+              <a:p>
+                <a:pPr lvl="0" indent="0" marL="0">
+                  <a:buNone/>
+                </a:pPr>
+                <a14:m>
+                  <m:oMathPara xmlns:m="http://schemas.openxmlformats.org/officeDocument/2006/math">
+                    <m:oMathParaPr>
+                      <m:jc m:val="center"/>
+                    </m:oMathParaPr>
+                    <m:oMath>
+                      <m:sSub>
+                        <m:e>
+                          <m:r>
+                            <m:t>P</m:t>
+                          </m:r>
+                        </m:e>
+                        <m:sub>
+                          <m:r>
+                            <m:t>X</m:t>
+                          </m:r>
+                        </m:sub>
+                      </m:sSub>
+                      <m:r>
+                        <m:rPr>
+                          <m:sty m:val="p"/>
+                        </m:rPr>
+                        <m:t>=</m:t>
+                      </m:r>
+                      <m:r>
+                        <m:t>X</m:t>
+                      </m:r>
+                      <m:sSup>
+                        <m:e>
+                          <m:d>
+                            <m:dPr>
+                              <m:begChr m:val="("/>
+                              <m:sepChr m:val=""/>
+                              <m:endChr m:val=")"/>
+                              <m:grow/>
+                            </m:dPr>
+                            <m:e>
+                              <m:r>
+                                <m:t>X</m:t>
+                              </m:r>
+                              <m:r>
+                                <m:rPr>
+                                  <m:sty m:val="p"/>
+                                </m:rPr>
+                                <m:t>′</m:t>
+                              </m:r>
+                              <m:r>
+                                <m:t>X</m:t>
+                              </m:r>
+                            </m:e>
+                          </m:d>
+                        </m:e>
+                        <m:sup>
+                          <m:r>
+                            <m:rPr>
+                              <m:sty m:val="p"/>
+                            </m:rPr>
+                            <m:t>−</m:t>
+                          </m:r>
+                          <m:r>
+                            <m:t>1</m:t>
+                          </m:r>
+                        </m:sup>
+                      </m:sSup>
+                      <m:r>
+                        <m:t>X</m:t>
+                      </m:r>
+                      <m:r>
+                        <m:rPr>
+                          <m:sty m:val="p"/>
+                        </m:rPr>
+                        <m:t>′</m:t>
+                      </m:r>
+                      <m:r>
+                        <m:rPr>
+                          <m:sty m:val="p"/>
+                        </m:rPr>
+                        <m:t>,</m:t>
+                      </m:r>
+                      <m:r>
+                        <m:t>  </m:t>
+                      </m:r>
+                      <m:sSub>
+                        <m:e>
+                          <m:r>
+                            <m:t>M</m:t>
+                          </m:r>
+                        </m:e>
+                        <m:sub>
+                          <m:r>
+                            <m:t>X</m:t>
+                          </m:r>
+                        </m:sub>
+                      </m:sSub>
+                      <m:r>
+                        <m:rPr>
+                          <m:sty m:val="p"/>
+                        </m:rPr>
+                        <m:t>=</m:t>
+                      </m:r>
+                      <m:r>
+                        <m:t>I</m:t>
+                      </m:r>
+                      <m:r>
+                        <m:rPr>
+                          <m:sty m:val="p"/>
+                        </m:rPr>
+                        <m:t>−</m:t>
+                      </m:r>
+                      <m:sSub>
+                        <m:e>
+                          <m:r>
+                            <m:t>P</m:t>
+                          </m:r>
+                        </m:e>
+                        <m:sub>
+                          <m:r>
+                            <m:t>X</m:t>
+                          </m:r>
+                        </m:sub>
+                      </m:sSub>
+                    </m:oMath>
+                  </m:oMathPara>
+                </a14:m>
+              </a:p>
+              <a:p>
+                <a:pPr lvl="0"/>
+                <a:r>
+                  <a:rPr b="1"/>
+                  <a:t>Idempotent</a:t>
+                </a:r>
+                <a:r>
+                  <a:rPr/>
+                  <a:t>: </a:t>
+                </a:r>
+                <a14:m>
+                  <m:oMath xmlns:m="http://schemas.openxmlformats.org/officeDocument/2006/math">
+                    <m:sSub>
+                      <m:e>
+                        <m:r>
+                          <m:t>P</m:t>
+                        </m:r>
+                      </m:e>
+                      <m:sub>
+                        <m:r>
+                          <m:t>X</m:t>
+                        </m:r>
+                      </m:sub>
+                    </m:sSub>
+                    <m:sSub>
+                      <m:e>
+                        <m:r>
+                          <m:t>P</m:t>
+                        </m:r>
+                      </m:e>
+                      <m:sub>
+                        <m:r>
+                          <m:t>X</m:t>
+                        </m:r>
+                      </m:sub>
+                    </m:sSub>
+                    <m:r>
+                      <m:rPr>
+                        <m:sty m:val="p"/>
+                      </m:rPr>
+                      <m:t>=</m:t>
+                    </m:r>
+                    <m:sSub>
+                      <m:e>
+                        <m:r>
+                          <m:t>P</m:t>
+                        </m:r>
+                      </m:e>
+                      <m:sub>
+                        <m:r>
+                          <m:t>X</m:t>
+                        </m:r>
+                      </m:sub>
+                    </m:sSub>
+                  </m:oMath>
+                </a14:m>
+                <a:r>
+                  <a:rPr/>
+                  <a:t>. Projecting twice changes nothing — you are already in the space.</a:t>
+                </a:r>
+              </a:p>
+              <a:p>
+                <a:pPr lvl="0"/>
+                <a:r>
+                  <a:rPr b="1"/>
+                  <a:t>Symmetric</a:t>
+                </a:r>
+                <a:r>
+                  <a:rPr/>
+                  <a:t>: </a:t>
+                </a:r>
+                <a14:m>
+                  <m:oMath xmlns:m="http://schemas.openxmlformats.org/officeDocument/2006/math">
+                    <m:sSub>
+                      <m:e>
+                        <m:r>
+                          <m:t>P</m:t>
+                        </m:r>
+                      </m:e>
+                      <m:sub>
+                        <m:r>
+                          <m:t>X</m:t>
+                        </m:r>
+                      </m:sub>
+                    </m:sSub>
+                    <m:r>
+                      <m:rPr>
+                        <m:sty m:val="p"/>
+                      </m:rPr>
+                      <m:t>′</m:t>
+                    </m:r>
+                    <m:r>
+                      <m:rPr>
+                        <m:sty m:val="p"/>
+                      </m:rPr>
+                      <m:t>=</m:t>
+                    </m:r>
+                    <m:sSub>
+                      <m:e>
+                        <m:r>
+                          <m:t>P</m:t>
+                        </m:r>
+                      </m:e>
+                      <m:sub>
+                        <m:r>
+                          <m:t>X</m:t>
+                        </m:r>
+                      </m:sub>
+                    </m:sSub>
+                  </m:oMath>
+                </a14:m>
+                <a:r>
+                  <a:rPr/>
+                  <a:t>.</a:t>
+                </a:r>
+              </a:p>
+              <a:p>
+                <a:pPr lvl="0"/>
+                <a:r>
+                  <a:rPr b="1"/>
+                  <a:t>Orthogonal complements</a:t>
+                </a:r>
+                <a:r>
+                  <a:rPr/>
+                  <a:t>: </a:t>
+                </a:r>
+                <a14:m>
+                  <m:oMath xmlns:m="http://schemas.openxmlformats.org/officeDocument/2006/math">
+                    <m:sSub>
+                      <m:e>
+                        <m:r>
+                          <m:t>P</m:t>
+                        </m:r>
+                      </m:e>
+                      <m:sub>
+                        <m:r>
+                          <m:t>X</m:t>
+                        </m:r>
+                      </m:sub>
+                    </m:sSub>
+                    <m:sSub>
+                      <m:e>
+                        <m:r>
+                          <m:t>M</m:t>
+                        </m:r>
+                      </m:e>
+                      <m:sub>
+                        <m:r>
+                          <m:t>X</m:t>
+                        </m:r>
+                      </m:sub>
+                    </m:sSub>
+                    <m:r>
+                      <m:rPr>
+                        <m:sty m:val="p"/>
+                      </m:rPr>
+                      <m:t>=</m:t>
+                    </m:r>
+                    <m:r>
+                      <m:t>0</m:t>
+                    </m:r>
+                  </m:oMath>
+                </a14:m>
+                <a:r>
+                  <a:rPr/>
+                  <a:t>. Fitted values and residuals share no information at all.</a:t>
+                </a:r>
+              </a:p>
+            </p:txBody>
+          </p:sp>
+        </mc:Choice>
+      </mc:AlternateContent>
     </p:spTree>
   </p:cSld>
 </p:sld>

--- a/02-geometry-of-least-squares/slides.pptx
+++ b/02-geometry-of-least-squares/slides.pptx
@@ -940,7 +940,7 @@
           <a:bodyPr anchor="t"/>
           <a:lstStyle>
             <a:lvl1pPr algn="l">
-              <a:defRPr sz="3000" b="1" cap="all"/>
+              <a:defRPr sz="2350" b="1" cap="all"/>
             </a:lvl1pPr>
           </a:lstStyle>
           <a:p>
@@ -972,7 +972,7 @@
           <a:lstStyle>
             <a:lvl1pPr marL="0" indent="0">
               <a:buNone/>
-              <a:defRPr sz="1500">
+              <a:defRPr sz="1150">
                 <a:solidFill>
                   <a:schemeClr val="tx1">
                     <a:tint val="75000"/>
@@ -982,7 +982,7 @@
             </a:lvl1pPr>
             <a:lvl2pPr marL="342900" indent="0">
               <a:buNone/>
-              <a:defRPr sz="1350">
+              <a:defRPr sz="1050">
                 <a:solidFill>
                   <a:schemeClr val="tx1">
                     <a:tint val="75000"/>
@@ -992,7 +992,7 @@
             </a:lvl2pPr>
             <a:lvl3pPr marL="685800" indent="0">
               <a:buNone/>
-              <a:defRPr sz="1200">
+              <a:defRPr sz="950">
                 <a:solidFill>
                   <a:schemeClr val="tx1">
                     <a:tint val="75000"/>
@@ -1002,7 +1002,7 @@
             </a:lvl3pPr>
             <a:lvl4pPr marL="1028700" indent="0">
               <a:buNone/>
-              <a:defRPr sz="1050">
+              <a:defRPr sz="800">
                 <a:solidFill>
                   <a:schemeClr val="tx1">
                     <a:tint val="75000"/>
@@ -1012,7 +1012,7 @@
             </a:lvl4pPr>
             <a:lvl5pPr marL="1371600" indent="0">
               <a:buNone/>
-              <a:defRPr sz="1050">
+              <a:defRPr sz="800">
                 <a:solidFill>
                   <a:schemeClr val="tx1">
                     <a:tint val="75000"/>
@@ -1022,7 +1022,7 @@
             </a:lvl5pPr>
             <a:lvl6pPr marL="1714500" indent="0">
               <a:buNone/>
-              <a:defRPr sz="1050">
+              <a:defRPr sz="800">
                 <a:solidFill>
                   <a:schemeClr val="tx1">
                     <a:tint val="75000"/>
@@ -1032,7 +1032,7 @@
             </a:lvl6pPr>
             <a:lvl7pPr marL="2057400" indent="0">
               <a:buNone/>
-              <a:defRPr sz="1050">
+              <a:defRPr sz="800">
                 <a:solidFill>
                   <a:schemeClr val="tx1">
                     <a:tint val="75000"/>
@@ -1042,7 +1042,7 @@
             </a:lvl7pPr>
             <a:lvl8pPr marL="2400300" indent="0">
               <a:buNone/>
-              <a:defRPr sz="1050">
+              <a:defRPr sz="800">
                 <a:solidFill>
                   <a:schemeClr val="tx1">
                     <a:tint val="75000"/>
@@ -1052,7 +1052,7 @@
             </a:lvl8pPr>
             <a:lvl9pPr marL="2743200" indent="0">
               <a:buNone/>
-              <a:defRPr sz="1050">
+              <a:defRPr sz="800">
                 <a:solidFill>
                   <a:schemeClr val="tx1">
                     <a:tint val="75000"/>
@@ -1207,31 +1207,31 @@
           <a:bodyPr/>
           <a:lstStyle>
             <a:lvl1pPr>
-              <a:defRPr sz="2100"/>
+              <a:defRPr sz="1650"/>
             </a:lvl1pPr>
             <a:lvl2pPr>
-              <a:defRPr sz="1800"/>
+              <a:defRPr sz="1400"/>
             </a:lvl2pPr>
             <a:lvl3pPr>
-              <a:defRPr sz="1500"/>
+              <a:defRPr sz="1150"/>
             </a:lvl3pPr>
             <a:lvl4pPr>
-              <a:defRPr sz="1350"/>
+              <a:defRPr sz="1050"/>
             </a:lvl4pPr>
             <a:lvl5pPr>
-              <a:defRPr sz="1350"/>
+              <a:defRPr sz="1050"/>
             </a:lvl5pPr>
             <a:lvl6pPr>
-              <a:defRPr sz="1350"/>
+              <a:defRPr sz="1050"/>
             </a:lvl6pPr>
             <a:lvl7pPr>
-              <a:defRPr sz="1350"/>
+              <a:defRPr sz="1050"/>
             </a:lvl7pPr>
             <a:lvl8pPr>
-              <a:defRPr sz="1350"/>
+              <a:defRPr sz="1050"/>
             </a:lvl8pPr>
             <a:lvl9pPr>
-              <a:defRPr sz="1350"/>
+              <a:defRPr sz="1050"/>
             </a:lvl9pPr>
           </a:lstStyle>
           <a:p>
@@ -1291,31 +1291,31 @@
           <a:bodyPr/>
           <a:lstStyle>
             <a:lvl1pPr>
-              <a:defRPr sz="2100"/>
+              <a:defRPr sz="1650"/>
             </a:lvl1pPr>
             <a:lvl2pPr>
-              <a:defRPr sz="1800"/>
+              <a:defRPr sz="1400"/>
             </a:lvl2pPr>
             <a:lvl3pPr>
-              <a:defRPr sz="1500"/>
+              <a:defRPr sz="1150"/>
             </a:lvl3pPr>
             <a:lvl4pPr>
-              <a:defRPr sz="1350"/>
+              <a:defRPr sz="1050"/>
             </a:lvl4pPr>
             <a:lvl5pPr>
-              <a:defRPr sz="1350"/>
+              <a:defRPr sz="1050"/>
             </a:lvl5pPr>
             <a:lvl6pPr>
-              <a:defRPr sz="1350"/>
+              <a:defRPr sz="1050"/>
             </a:lvl6pPr>
             <a:lvl7pPr>
-              <a:defRPr sz="1350"/>
+              <a:defRPr sz="1050"/>
             </a:lvl7pPr>
             <a:lvl8pPr>
-              <a:defRPr sz="1350"/>
+              <a:defRPr sz="1050"/>
             </a:lvl8pPr>
             <a:lvl9pPr>
-              <a:defRPr sz="1350"/>
+              <a:defRPr sz="1050"/>
             </a:lvl9pPr>
           </a:lstStyle>
           <a:p>
@@ -1497,39 +1497,39 @@
           <a:lstStyle>
             <a:lvl1pPr marL="0" indent="0">
               <a:buNone/>
-              <a:defRPr sz="1800" b="1"/>
+              <a:defRPr sz="1400" b="1"/>
             </a:lvl1pPr>
             <a:lvl2pPr marL="342900" indent="0">
               <a:buNone/>
-              <a:defRPr sz="1500" b="1"/>
+              <a:defRPr sz="1150" b="1"/>
             </a:lvl2pPr>
             <a:lvl3pPr marL="685800" indent="0">
               <a:buNone/>
-              <a:defRPr sz="1350" b="1"/>
+              <a:defRPr sz="1050" b="1"/>
             </a:lvl3pPr>
             <a:lvl4pPr marL="1028700" indent="0">
               <a:buNone/>
-              <a:defRPr sz="1200" b="1"/>
+              <a:defRPr sz="950" b="1"/>
             </a:lvl4pPr>
             <a:lvl5pPr marL="1371600" indent="0">
               <a:buNone/>
-              <a:defRPr sz="1200" b="1"/>
+              <a:defRPr sz="950" b="1"/>
             </a:lvl5pPr>
             <a:lvl6pPr marL="1714500" indent="0">
               <a:buNone/>
-              <a:defRPr sz="1200" b="1"/>
+              <a:defRPr sz="950" b="1"/>
             </a:lvl6pPr>
             <a:lvl7pPr marL="2057400" indent="0">
               <a:buNone/>
-              <a:defRPr sz="1200" b="1"/>
+              <a:defRPr sz="950" b="1"/>
             </a:lvl7pPr>
             <a:lvl8pPr marL="2400300" indent="0">
               <a:buNone/>
-              <a:defRPr sz="1200" b="1"/>
+              <a:defRPr sz="950" b="1"/>
             </a:lvl8pPr>
             <a:lvl9pPr marL="2743200" indent="0">
               <a:buNone/>
-              <a:defRPr sz="1200" b="1"/>
+              <a:defRPr sz="950" b="1"/>
             </a:lvl9pPr>
           </a:lstStyle>
           <a:p>
@@ -1561,31 +1561,31 @@
           <a:bodyPr/>
           <a:lstStyle>
             <a:lvl1pPr>
-              <a:defRPr sz="1800"/>
+              <a:defRPr sz="1400"/>
             </a:lvl1pPr>
             <a:lvl2pPr>
-              <a:defRPr sz="1500"/>
+              <a:defRPr sz="1150"/>
             </a:lvl2pPr>
             <a:lvl3pPr>
-              <a:defRPr sz="1350"/>
+              <a:defRPr sz="1050"/>
             </a:lvl3pPr>
             <a:lvl4pPr>
-              <a:defRPr sz="1200"/>
+              <a:defRPr sz="950"/>
             </a:lvl4pPr>
             <a:lvl5pPr>
-              <a:defRPr sz="1200"/>
+              <a:defRPr sz="950"/>
             </a:lvl5pPr>
             <a:lvl6pPr>
-              <a:defRPr sz="1200"/>
+              <a:defRPr sz="950"/>
             </a:lvl6pPr>
             <a:lvl7pPr>
-              <a:defRPr sz="1200"/>
+              <a:defRPr sz="950"/>
             </a:lvl7pPr>
             <a:lvl8pPr>
-              <a:defRPr sz="1200"/>
+              <a:defRPr sz="950"/>
             </a:lvl8pPr>
             <a:lvl9pPr>
-              <a:defRPr sz="1200"/>
+              <a:defRPr sz="950"/>
             </a:lvl9pPr>
           </a:lstStyle>
           <a:p>
@@ -1646,39 +1646,39 @@
           <a:lstStyle>
             <a:lvl1pPr marL="0" indent="0">
               <a:buNone/>
-              <a:defRPr sz="1800" b="1"/>
+              <a:defRPr sz="1400" b="1"/>
             </a:lvl1pPr>
             <a:lvl2pPr marL="342900" indent="0">
               <a:buNone/>
-              <a:defRPr sz="1500" b="1"/>
+              <a:defRPr sz="1150" b="1"/>
             </a:lvl2pPr>
             <a:lvl3pPr marL="685800" indent="0">
               <a:buNone/>
-              <a:defRPr sz="1350" b="1"/>
+              <a:defRPr sz="1050" b="1"/>
             </a:lvl3pPr>
             <a:lvl4pPr marL="1028700" indent="0">
               <a:buNone/>
-              <a:defRPr sz="1200" b="1"/>
+              <a:defRPr sz="950" b="1"/>
             </a:lvl4pPr>
             <a:lvl5pPr marL="1371600" indent="0">
               <a:buNone/>
-              <a:defRPr sz="1200" b="1"/>
+              <a:defRPr sz="950" b="1"/>
             </a:lvl5pPr>
             <a:lvl6pPr marL="1714500" indent="0">
               <a:buNone/>
-              <a:defRPr sz="1200" b="1"/>
+              <a:defRPr sz="950" b="1"/>
             </a:lvl6pPr>
             <a:lvl7pPr marL="2057400" indent="0">
               <a:buNone/>
-              <a:defRPr sz="1200" b="1"/>
+              <a:defRPr sz="950" b="1"/>
             </a:lvl7pPr>
             <a:lvl8pPr marL="2400300" indent="0">
               <a:buNone/>
-              <a:defRPr sz="1200" b="1"/>
+              <a:defRPr sz="950" b="1"/>
             </a:lvl8pPr>
             <a:lvl9pPr marL="2743200" indent="0">
               <a:buNone/>
-              <a:defRPr sz="1200" b="1"/>
+              <a:defRPr sz="950" b="1"/>
             </a:lvl9pPr>
           </a:lstStyle>
           <a:p>
@@ -1710,31 +1710,31 @@
           <a:bodyPr/>
           <a:lstStyle>
             <a:lvl1pPr>
-              <a:defRPr sz="1800"/>
+              <a:defRPr sz="1400"/>
             </a:lvl1pPr>
             <a:lvl2pPr>
-              <a:defRPr sz="1500"/>
+              <a:defRPr sz="1150"/>
             </a:lvl2pPr>
             <a:lvl3pPr>
-              <a:defRPr sz="1350"/>
+              <a:defRPr sz="1050"/>
             </a:lvl3pPr>
             <a:lvl4pPr>
-              <a:defRPr sz="1200"/>
+              <a:defRPr sz="950"/>
             </a:lvl4pPr>
             <a:lvl5pPr>
-              <a:defRPr sz="1200"/>
+              <a:defRPr sz="950"/>
             </a:lvl5pPr>
             <a:lvl6pPr>
-              <a:defRPr sz="1200"/>
+              <a:defRPr sz="950"/>
             </a:lvl6pPr>
             <a:lvl7pPr>
-              <a:defRPr sz="1200"/>
+              <a:defRPr sz="950"/>
             </a:lvl7pPr>
             <a:lvl8pPr>
-              <a:defRPr sz="1200"/>
+              <a:defRPr sz="950"/>
             </a:lvl8pPr>
             <a:lvl9pPr>
-              <a:defRPr sz="1200"/>
+              <a:defRPr sz="950"/>
             </a:lvl9pPr>
           </a:lstStyle>
           <a:p>
@@ -2101,7 +2101,7 @@
           <a:bodyPr anchor="b"/>
           <a:lstStyle>
             <a:lvl1pPr algn="l">
-              <a:defRPr sz="1500" b="1"/>
+              <a:defRPr sz="1150" b="1"/>
             </a:lvl1pPr>
           </a:lstStyle>
           <a:p>
@@ -2132,31 +2132,31 @@
           <a:bodyPr/>
           <a:lstStyle>
             <a:lvl1pPr>
-              <a:defRPr sz="2400"/>
+              <a:defRPr sz="1850"/>
             </a:lvl1pPr>
             <a:lvl2pPr>
-              <a:defRPr sz="2100"/>
+              <a:defRPr sz="1650"/>
             </a:lvl2pPr>
             <a:lvl3pPr>
-              <a:defRPr sz="1800"/>
+              <a:defRPr sz="1400"/>
             </a:lvl3pPr>
             <a:lvl4pPr>
-              <a:defRPr sz="1500"/>
+              <a:defRPr sz="1150"/>
             </a:lvl4pPr>
             <a:lvl5pPr>
-              <a:defRPr sz="1500"/>
+              <a:defRPr sz="1150"/>
             </a:lvl5pPr>
             <a:lvl6pPr>
-              <a:defRPr sz="1500"/>
+              <a:defRPr sz="1150"/>
             </a:lvl6pPr>
             <a:lvl7pPr>
-              <a:defRPr sz="1500"/>
+              <a:defRPr sz="1150"/>
             </a:lvl7pPr>
             <a:lvl8pPr>
-              <a:defRPr sz="1500"/>
+              <a:defRPr sz="1150"/>
             </a:lvl8pPr>
             <a:lvl9pPr>
-              <a:defRPr sz="1500"/>
+              <a:defRPr sz="1150"/>
             </a:lvl9pPr>
           </a:lstStyle>
           <a:p>
@@ -2217,39 +2217,39 @@
           <a:lstStyle>
             <a:lvl1pPr marL="0" indent="0">
               <a:buNone/>
-              <a:defRPr sz="1050"/>
+              <a:defRPr sz="800"/>
             </a:lvl1pPr>
             <a:lvl2pPr marL="342900" indent="0">
               <a:buNone/>
-              <a:defRPr sz="900"/>
+              <a:defRPr sz="700"/>
             </a:lvl2pPr>
             <a:lvl3pPr marL="685800" indent="0">
               <a:buNone/>
-              <a:defRPr sz="750"/>
+              <a:defRPr sz="700"/>
             </a:lvl3pPr>
             <a:lvl4pPr marL="1028700" indent="0">
               <a:buNone/>
-              <a:defRPr sz="675"/>
+              <a:defRPr sz="700"/>
             </a:lvl4pPr>
             <a:lvl5pPr marL="1371600" indent="0">
               <a:buNone/>
-              <a:defRPr sz="675"/>
+              <a:defRPr sz="700"/>
             </a:lvl5pPr>
             <a:lvl6pPr marL="1714500" indent="0">
               <a:buNone/>
-              <a:defRPr sz="675"/>
+              <a:defRPr sz="700"/>
             </a:lvl6pPr>
             <a:lvl7pPr marL="2057400" indent="0">
               <a:buNone/>
-              <a:defRPr sz="675"/>
+              <a:defRPr sz="700"/>
             </a:lvl7pPr>
             <a:lvl8pPr marL="2400300" indent="0">
               <a:buNone/>
-              <a:defRPr sz="675"/>
+              <a:defRPr sz="700"/>
             </a:lvl8pPr>
             <a:lvl9pPr marL="2743200" indent="0">
               <a:buNone/>
-              <a:defRPr sz="675"/>
+              <a:defRPr sz="700"/>
             </a:lvl9pPr>
           </a:lstStyle>
           <a:p>
@@ -2376,7 +2376,7 @@
           <a:bodyPr anchor="b"/>
           <a:lstStyle>
             <a:lvl1pPr algn="l">
-              <a:defRPr sz="1500" b="1"/>
+              <a:defRPr sz="1150" b="1"/>
             </a:lvl1pPr>
           </a:lstStyle>
           <a:p>
@@ -2408,39 +2408,39 @@
           <a:lstStyle>
             <a:lvl1pPr marL="0" indent="0">
               <a:buNone/>
-              <a:defRPr sz="2400"/>
+              <a:defRPr sz="1850"/>
             </a:lvl1pPr>
             <a:lvl2pPr marL="342900" indent="0">
               <a:buNone/>
-              <a:defRPr sz="2100"/>
+              <a:defRPr sz="1650"/>
             </a:lvl2pPr>
             <a:lvl3pPr marL="685800" indent="0">
               <a:buNone/>
-              <a:defRPr sz="1800"/>
+              <a:defRPr sz="1400"/>
             </a:lvl3pPr>
             <a:lvl4pPr marL="1028700" indent="0">
               <a:buNone/>
-              <a:defRPr sz="1500"/>
+              <a:defRPr sz="1150"/>
             </a:lvl4pPr>
             <a:lvl5pPr marL="1371600" indent="0">
               <a:buNone/>
-              <a:defRPr sz="1500"/>
+              <a:defRPr sz="1150"/>
             </a:lvl5pPr>
             <a:lvl6pPr marL="1714500" indent="0">
               <a:buNone/>
-              <a:defRPr sz="1500"/>
+              <a:defRPr sz="1150"/>
             </a:lvl6pPr>
             <a:lvl7pPr marL="2057400" indent="0">
               <a:buNone/>
-              <a:defRPr sz="1500"/>
+              <a:defRPr sz="1150"/>
             </a:lvl7pPr>
             <a:lvl8pPr marL="2400300" indent="0">
               <a:buNone/>
-              <a:defRPr sz="1500"/>
+              <a:defRPr sz="1150"/>
             </a:lvl8pPr>
             <a:lvl9pPr marL="2743200" indent="0">
               <a:buNone/>
-              <a:defRPr sz="1500"/>
+              <a:defRPr sz="1150"/>
             </a:lvl9pPr>
           </a:lstStyle>
           <a:p>
@@ -2469,39 +2469,39 @@
           <a:lstStyle>
             <a:lvl1pPr marL="0" indent="0">
               <a:buNone/>
-              <a:defRPr sz="1050"/>
+              <a:defRPr sz="800"/>
             </a:lvl1pPr>
             <a:lvl2pPr marL="342900" indent="0">
               <a:buNone/>
-              <a:defRPr sz="900"/>
+              <a:defRPr sz="700"/>
             </a:lvl2pPr>
             <a:lvl3pPr marL="685800" indent="0">
               <a:buNone/>
-              <a:defRPr sz="750"/>
+              <a:defRPr sz="700"/>
             </a:lvl3pPr>
             <a:lvl4pPr marL="1028700" indent="0">
               <a:buNone/>
-              <a:defRPr sz="675"/>
+              <a:defRPr sz="700"/>
             </a:lvl4pPr>
             <a:lvl5pPr marL="1371600" indent="0">
               <a:buNone/>
-              <a:defRPr sz="675"/>
+              <a:defRPr sz="700"/>
             </a:lvl5pPr>
             <a:lvl6pPr marL="1714500" indent="0">
               <a:buNone/>
-              <a:defRPr sz="675"/>
+              <a:defRPr sz="700"/>
             </a:lvl6pPr>
             <a:lvl7pPr marL="2057400" indent="0">
               <a:buNone/>
-              <a:defRPr sz="675"/>
+              <a:defRPr sz="700"/>
             </a:lvl7pPr>
             <a:lvl8pPr marL="2400300" indent="0">
               <a:buNone/>
-              <a:defRPr sz="675"/>
+              <a:defRPr sz="700"/>
             </a:lvl8pPr>
             <a:lvl9pPr marL="2743200" indent="0">
               <a:buNone/>
-              <a:defRPr sz="675"/>
+              <a:defRPr sz="700"/>
             </a:lvl9pPr>
           </a:lstStyle>
           <a:p>
@@ -2729,7 +2729,7 @@
           <a:bodyPr anchor="ctr" bIns="45720" lIns="91440" rIns="91440" rtlCol="0" tIns="45720" vert="horz"/>
           <a:lstStyle>
             <a:lvl1pPr algn="l">
-              <a:defRPr sz="900">
+              <a:defRPr sz="700">
                 <a:solidFill>
                   <a:schemeClr val="tx1">
                     <a:tint val="75000"/>
@@ -2770,7 +2770,7 @@
           <a:bodyPr anchor="ctr" bIns="45720" lIns="91440" rIns="91440" rtlCol="0" tIns="45720" vert="horz"/>
           <a:lstStyle>
             <a:lvl1pPr algn="ctr">
-              <a:defRPr sz="900">
+              <a:defRPr sz="700">
                 <a:solidFill>
                   <a:schemeClr val="tx1">
                     <a:tint val="75000"/>
@@ -2807,7 +2807,7 @@
           <a:bodyPr anchor="ctr" bIns="45720" lIns="91440" rIns="91440" rtlCol="0" tIns="45720" vert="horz"/>
           <a:lstStyle>
             <a:lvl1pPr algn="r">
-              <a:defRPr sz="900">
+              <a:defRPr sz="700">
                 <a:solidFill>
                   <a:schemeClr val="tx1">
                     <a:tint val="75000"/>
@@ -2853,7 +2853,7 @@
           <a:spcPct val="0"/>
         </a:spcBef>
         <a:buNone/>
-        <a:defRPr kern="1200" sz="3300">
+        <a:defRPr kern="1200" sz="2550">
           <a:solidFill>
             <a:schemeClr val="tx1"/>
           </a:solidFill>
@@ -2870,7 +2870,7 @@
         </a:spcBef>
         <a:buFont typeface="Arial"/>
         <a:buChar char="•"/>
-        <a:defRPr kern="1200" sz="2400">
+        <a:defRPr kern="1200" sz="1850">
           <a:solidFill>
             <a:schemeClr val="tx1"/>
           </a:solidFill>
@@ -2885,7 +2885,7 @@
         </a:spcBef>
         <a:buFont typeface="Arial"/>
         <a:buChar char="–"/>
-        <a:defRPr kern="1200" sz="2100">
+        <a:defRPr kern="1200" sz="1650">
           <a:solidFill>
             <a:schemeClr val="tx1"/>
           </a:solidFill>
@@ -2900,7 +2900,7 @@
         </a:spcBef>
         <a:buFont typeface="Arial"/>
         <a:buChar char="•"/>
-        <a:defRPr kern="1200" sz="1800">
+        <a:defRPr kern="1200" sz="1400">
           <a:solidFill>
             <a:schemeClr val="tx1"/>
           </a:solidFill>
@@ -2915,7 +2915,7 @@
         </a:spcBef>
         <a:buFont typeface="Arial"/>
         <a:buChar char="–"/>
-        <a:defRPr kern="1200" sz="1500">
+        <a:defRPr kern="1200" sz="1150">
           <a:solidFill>
             <a:schemeClr val="tx1"/>
           </a:solidFill>
@@ -2930,7 +2930,7 @@
         </a:spcBef>
         <a:buFont typeface="Arial"/>
         <a:buChar char="»"/>
-        <a:defRPr kern="1200" sz="1500">
+        <a:defRPr kern="1200" sz="1150">
           <a:solidFill>
             <a:schemeClr val="tx1"/>
           </a:solidFill>
@@ -2945,7 +2945,7 @@
         </a:spcBef>
         <a:buFont typeface="Arial"/>
         <a:buChar char="•"/>
-        <a:defRPr kern="1200" sz="1500">
+        <a:defRPr kern="1200" sz="1150">
           <a:solidFill>
             <a:schemeClr val="tx1"/>
           </a:solidFill>
@@ -2960,7 +2960,7 @@
         </a:spcBef>
         <a:buFont typeface="Arial"/>
         <a:buChar char="•"/>
-        <a:defRPr kern="1200" sz="1500">
+        <a:defRPr kern="1200" sz="1150">
           <a:solidFill>
             <a:schemeClr val="tx1"/>
           </a:solidFill>
@@ -2975,7 +2975,7 @@
         </a:spcBef>
         <a:buFont typeface="Arial"/>
         <a:buChar char="•"/>
-        <a:defRPr kern="1200" sz="1500">
+        <a:defRPr kern="1200" sz="1150">
           <a:solidFill>
             <a:schemeClr val="tx1"/>
           </a:solidFill>
@@ -2990,7 +2990,7 @@
         </a:spcBef>
         <a:buFont typeface="Arial"/>
         <a:buChar char="•"/>
-        <a:defRPr kern="1200" sz="1500">
+        <a:defRPr kern="1200" sz="1150">
           <a:solidFill>
             <a:schemeClr val="tx1"/>
           </a:solidFill>
@@ -3005,7 +3005,7 @@
         <a:defRPr lang="en-US"/>
       </a:defPPr>
       <a:lvl1pPr algn="l" defTabSz="342900" eaLnBrk="1" hangingPunct="1" latinLnBrk="0" marL="0" rtl="0">
-        <a:defRPr kern="1200" sz="1350">
+        <a:defRPr kern="1200" sz="1050">
           <a:solidFill>
             <a:schemeClr val="tx1"/>
           </a:solidFill>
@@ -3015,7 +3015,7 @@
         </a:defRPr>
       </a:lvl1pPr>
       <a:lvl2pPr algn="l" defTabSz="342900" eaLnBrk="1" hangingPunct="1" latinLnBrk="0" marL="342900" rtl="0">
-        <a:defRPr kern="1200" sz="1350">
+        <a:defRPr kern="1200" sz="1050">
           <a:solidFill>
             <a:schemeClr val="tx1"/>
           </a:solidFill>
@@ -3025,7 +3025,7 @@
         </a:defRPr>
       </a:lvl2pPr>
       <a:lvl3pPr algn="l" defTabSz="342900" eaLnBrk="1" hangingPunct="1" latinLnBrk="0" marL="685800" rtl="0">
-        <a:defRPr kern="1200" sz="1350">
+        <a:defRPr kern="1200" sz="1050">
           <a:solidFill>
             <a:schemeClr val="tx1"/>
           </a:solidFill>
@@ -3035,7 +3035,7 @@
         </a:defRPr>
       </a:lvl3pPr>
       <a:lvl4pPr algn="l" defTabSz="342900" eaLnBrk="1" hangingPunct="1" latinLnBrk="0" marL="1028700" rtl="0">
-        <a:defRPr kern="1200" sz="1350">
+        <a:defRPr kern="1200" sz="1050">
           <a:solidFill>
             <a:schemeClr val="tx1"/>
           </a:solidFill>
@@ -3045,7 +3045,7 @@
         </a:defRPr>
       </a:lvl4pPr>
       <a:lvl5pPr algn="l" defTabSz="342900" eaLnBrk="1" hangingPunct="1" latinLnBrk="0" marL="1371600" rtl="0">
-        <a:defRPr kern="1200" sz="1350">
+        <a:defRPr kern="1200" sz="1050">
           <a:solidFill>
             <a:schemeClr val="tx1"/>
           </a:solidFill>
@@ -3055,7 +3055,7 @@
         </a:defRPr>
       </a:lvl5pPr>
       <a:lvl6pPr algn="l" defTabSz="342900" eaLnBrk="1" hangingPunct="1" latinLnBrk="0" marL="1714500" rtl="0">
-        <a:defRPr kern="1200" sz="1350">
+        <a:defRPr kern="1200" sz="1050">
           <a:solidFill>
             <a:schemeClr val="tx1"/>
           </a:solidFill>
@@ -3065,7 +3065,7 @@
         </a:defRPr>
       </a:lvl6pPr>
       <a:lvl7pPr algn="l" defTabSz="342900" eaLnBrk="1" hangingPunct="1" latinLnBrk="0" marL="2057400" rtl="0">
-        <a:defRPr kern="1200" sz="1350">
+        <a:defRPr kern="1200" sz="1050">
           <a:solidFill>
             <a:schemeClr val="tx1"/>
           </a:solidFill>
@@ -3075,7 +3075,7 @@
         </a:defRPr>
       </a:lvl7pPr>
       <a:lvl8pPr algn="l" defTabSz="342900" eaLnBrk="1" hangingPunct="1" latinLnBrk="0" marL="2400300" rtl="0">
-        <a:defRPr kern="1200" sz="1350">
+        <a:defRPr kern="1200" sz="1050">
           <a:solidFill>
             <a:schemeClr val="tx1"/>
           </a:solidFill>
@@ -3085,7 +3085,7 @@
         </a:defRPr>
       </a:lvl8pPr>
       <a:lvl9pPr algn="l" defTabSz="342900" eaLnBrk="1" hangingPunct="1" latinLnBrk="0" marL="2743200" rtl="0">
-        <a:defRPr kern="1200" sz="1350">
+        <a:defRPr kern="1200" sz="1050">
           <a:solidFill>
             <a:schemeClr val="tx1"/>
           </a:solidFill>

--- a/02-geometry-of-least-squares/slides.pptx
+++ b/02-geometry-of-least-squares/slides.pptx
@@ -940,7 +940,7 @@
           <a:bodyPr anchor="t"/>
           <a:lstStyle>
             <a:lvl1pPr algn="l">
-              <a:defRPr sz="2350" b="1" cap="all"/>
+              <a:defRPr sz="1850" b="1" cap="all"/>
             </a:lvl1pPr>
           </a:lstStyle>
           <a:p>
@@ -972,7 +972,7 @@
           <a:lstStyle>
             <a:lvl1pPr marL="0" indent="0">
               <a:buNone/>
-              <a:defRPr sz="1150">
+              <a:defRPr sz="950">
                 <a:solidFill>
                   <a:schemeClr val="tx1">
                     <a:tint val="75000"/>
@@ -982,7 +982,7 @@
             </a:lvl1pPr>
             <a:lvl2pPr marL="342900" indent="0">
               <a:buNone/>
-              <a:defRPr sz="1050">
+              <a:defRPr sz="850">
                 <a:solidFill>
                   <a:schemeClr val="tx1">
                     <a:tint val="75000"/>
@@ -992,7 +992,7 @@
             </a:lvl2pPr>
             <a:lvl3pPr marL="685800" indent="0">
               <a:buNone/>
-              <a:defRPr sz="950">
+              <a:defRPr sz="750">
                 <a:solidFill>
                   <a:schemeClr val="tx1">
                     <a:tint val="75000"/>
@@ -1002,7 +1002,7 @@
             </a:lvl3pPr>
             <a:lvl4pPr marL="1028700" indent="0">
               <a:buNone/>
-              <a:defRPr sz="800">
+              <a:defRPr sz="650">
                 <a:solidFill>
                   <a:schemeClr val="tx1">
                     <a:tint val="75000"/>
@@ -1012,7 +1012,7 @@
             </a:lvl4pPr>
             <a:lvl5pPr marL="1371600" indent="0">
               <a:buNone/>
-              <a:defRPr sz="800">
+              <a:defRPr sz="650">
                 <a:solidFill>
                   <a:schemeClr val="tx1">
                     <a:tint val="75000"/>
@@ -1022,7 +1022,7 @@
             </a:lvl5pPr>
             <a:lvl6pPr marL="1714500" indent="0">
               <a:buNone/>
-              <a:defRPr sz="800">
+              <a:defRPr sz="650">
                 <a:solidFill>
                   <a:schemeClr val="tx1">
                     <a:tint val="75000"/>
@@ -1032,7 +1032,7 @@
             </a:lvl6pPr>
             <a:lvl7pPr marL="2057400" indent="0">
               <a:buNone/>
-              <a:defRPr sz="800">
+              <a:defRPr sz="650">
                 <a:solidFill>
                   <a:schemeClr val="tx1">
                     <a:tint val="75000"/>
@@ -1042,7 +1042,7 @@
             </a:lvl7pPr>
             <a:lvl8pPr marL="2400300" indent="0">
               <a:buNone/>
-              <a:defRPr sz="800">
+              <a:defRPr sz="650">
                 <a:solidFill>
                   <a:schemeClr val="tx1">
                     <a:tint val="75000"/>
@@ -1052,7 +1052,7 @@
             </a:lvl8pPr>
             <a:lvl9pPr marL="2743200" indent="0">
               <a:buNone/>
-              <a:defRPr sz="800">
+              <a:defRPr sz="650">
                 <a:solidFill>
                   <a:schemeClr val="tx1">
                     <a:tint val="75000"/>
@@ -1207,31 +1207,31 @@
           <a:bodyPr/>
           <a:lstStyle>
             <a:lvl1pPr>
-              <a:defRPr sz="1650"/>
+              <a:defRPr sz="1300"/>
             </a:lvl1pPr>
             <a:lvl2pPr>
-              <a:defRPr sz="1400"/>
+              <a:defRPr sz="1100"/>
             </a:lvl2pPr>
             <a:lvl3pPr>
-              <a:defRPr sz="1150"/>
+              <a:defRPr sz="950"/>
             </a:lvl3pPr>
             <a:lvl4pPr>
-              <a:defRPr sz="1050"/>
+              <a:defRPr sz="850"/>
             </a:lvl4pPr>
             <a:lvl5pPr>
-              <a:defRPr sz="1050"/>
+              <a:defRPr sz="850"/>
             </a:lvl5pPr>
             <a:lvl6pPr>
-              <a:defRPr sz="1050"/>
+              <a:defRPr sz="850"/>
             </a:lvl6pPr>
             <a:lvl7pPr>
-              <a:defRPr sz="1050"/>
+              <a:defRPr sz="850"/>
             </a:lvl7pPr>
             <a:lvl8pPr>
-              <a:defRPr sz="1050"/>
+              <a:defRPr sz="850"/>
             </a:lvl8pPr>
             <a:lvl9pPr>
-              <a:defRPr sz="1050"/>
+              <a:defRPr sz="850"/>
             </a:lvl9pPr>
           </a:lstStyle>
           <a:p>
@@ -1291,31 +1291,31 @@
           <a:bodyPr/>
           <a:lstStyle>
             <a:lvl1pPr>
-              <a:defRPr sz="1650"/>
+              <a:defRPr sz="1300"/>
             </a:lvl1pPr>
             <a:lvl2pPr>
-              <a:defRPr sz="1400"/>
+              <a:defRPr sz="1100"/>
             </a:lvl2pPr>
             <a:lvl3pPr>
-              <a:defRPr sz="1150"/>
+              <a:defRPr sz="950"/>
             </a:lvl3pPr>
             <a:lvl4pPr>
-              <a:defRPr sz="1050"/>
+              <a:defRPr sz="850"/>
             </a:lvl4pPr>
             <a:lvl5pPr>
-              <a:defRPr sz="1050"/>
+              <a:defRPr sz="850"/>
             </a:lvl5pPr>
             <a:lvl6pPr>
-              <a:defRPr sz="1050"/>
+              <a:defRPr sz="850"/>
             </a:lvl6pPr>
             <a:lvl7pPr>
-              <a:defRPr sz="1050"/>
+              <a:defRPr sz="850"/>
             </a:lvl7pPr>
             <a:lvl8pPr>
-              <a:defRPr sz="1050"/>
+              <a:defRPr sz="850"/>
             </a:lvl8pPr>
             <a:lvl9pPr>
-              <a:defRPr sz="1050"/>
+              <a:defRPr sz="850"/>
             </a:lvl9pPr>
           </a:lstStyle>
           <a:p>
@@ -1497,39 +1497,39 @@
           <a:lstStyle>
             <a:lvl1pPr marL="0" indent="0">
               <a:buNone/>
-              <a:defRPr sz="1400" b="1"/>
+              <a:defRPr sz="1100" b="1"/>
             </a:lvl1pPr>
             <a:lvl2pPr marL="342900" indent="0">
               <a:buNone/>
-              <a:defRPr sz="1150" b="1"/>
+              <a:defRPr sz="950" b="1"/>
             </a:lvl2pPr>
             <a:lvl3pPr marL="685800" indent="0">
               <a:buNone/>
-              <a:defRPr sz="1050" b="1"/>
+              <a:defRPr sz="850" b="1"/>
             </a:lvl3pPr>
             <a:lvl4pPr marL="1028700" indent="0">
               <a:buNone/>
-              <a:defRPr sz="950" b="1"/>
+              <a:defRPr sz="750" b="1"/>
             </a:lvl4pPr>
             <a:lvl5pPr marL="1371600" indent="0">
               <a:buNone/>
-              <a:defRPr sz="950" b="1"/>
+              <a:defRPr sz="750" b="1"/>
             </a:lvl5pPr>
             <a:lvl6pPr marL="1714500" indent="0">
               <a:buNone/>
-              <a:defRPr sz="950" b="1"/>
+              <a:defRPr sz="750" b="1"/>
             </a:lvl6pPr>
             <a:lvl7pPr marL="2057400" indent="0">
               <a:buNone/>
-              <a:defRPr sz="950" b="1"/>
+              <a:defRPr sz="750" b="1"/>
             </a:lvl7pPr>
             <a:lvl8pPr marL="2400300" indent="0">
               <a:buNone/>
-              <a:defRPr sz="950" b="1"/>
+              <a:defRPr sz="750" b="1"/>
             </a:lvl8pPr>
             <a:lvl9pPr marL="2743200" indent="0">
               <a:buNone/>
-              <a:defRPr sz="950" b="1"/>
+              <a:defRPr sz="750" b="1"/>
             </a:lvl9pPr>
           </a:lstStyle>
           <a:p>
@@ -1561,31 +1561,31 @@
           <a:bodyPr/>
           <a:lstStyle>
             <a:lvl1pPr>
-              <a:defRPr sz="1400"/>
+              <a:defRPr sz="1100"/>
             </a:lvl1pPr>
             <a:lvl2pPr>
-              <a:defRPr sz="1150"/>
+              <a:defRPr sz="950"/>
             </a:lvl2pPr>
             <a:lvl3pPr>
-              <a:defRPr sz="1050"/>
+              <a:defRPr sz="850"/>
             </a:lvl3pPr>
             <a:lvl4pPr>
-              <a:defRPr sz="950"/>
+              <a:defRPr sz="750"/>
             </a:lvl4pPr>
             <a:lvl5pPr>
-              <a:defRPr sz="950"/>
+              <a:defRPr sz="750"/>
             </a:lvl5pPr>
             <a:lvl6pPr>
-              <a:defRPr sz="950"/>
+              <a:defRPr sz="750"/>
             </a:lvl6pPr>
             <a:lvl7pPr>
-              <a:defRPr sz="950"/>
+              <a:defRPr sz="750"/>
             </a:lvl7pPr>
             <a:lvl8pPr>
-              <a:defRPr sz="950"/>
+              <a:defRPr sz="750"/>
             </a:lvl8pPr>
             <a:lvl9pPr>
-              <a:defRPr sz="950"/>
+              <a:defRPr sz="750"/>
             </a:lvl9pPr>
           </a:lstStyle>
           <a:p>
@@ -1646,39 +1646,39 @@
           <a:lstStyle>
             <a:lvl1pPr marL="0" indent="0">
               <a:buNone/>
-              <a:defRPr sz="1400" b="1"/>
+              <a:defRPr sz="1100" b="1"/>
             </a:lvl1pPr>
             <a:lvl2pPr marL="342900" indent="0">
               <a:buNone/>
-              <a:defRPr sz="1150" b="1"/>
+              <a:defRPr sz="950" b="1"/>
             </a:lvl2pPr>
             <a:lvl3pPr marL="685800" indent="0">
               <a:buNone/>
-              <a:defRPr sz="1050" b="1"/>
+              <a:defRPr sz="850" b="1"/>
             </a:lvl3pPr>
             <a:lvl4pPr marL="1028700" indent="0">
               <a:buNone/>
-              <a:defRPr sz="950" b="1"/>
+              <a:defRPr sz="750" b="1"/>
             </a:lvl4pPr>
             <a:lvl5pPr marL="1371600" indent="0">
               <a:buNone/>
-              <a:defRPr sz="950" b="1"/>
+              <a:defRPr sz="750" b="1"/>
             </a:lvl5pPr>
             <a:lvl6pPr marL="1714500" indent="0">
               <a:buNone/>
-              <a:defRPr sz="950" b="1"/>
+              <a:defRPr sz="750" b="1"/>
             </a:lvl6pPr>
             <a:lvl7pPr marL="2057400" indent="0">
               <a:buNone/>
-              <a:defRPr sz="950" b="1"/>
+              <a:defRPr sz="750" b="1"/>
             </a:lvl7pPr>
             <a:lvl8pPr marL="2400300" indent="0">
               <a:buNone/>
-              <a:defRPr sz="950" b="1"/>
+              <a:defRPr sz="750" b="1"/>
             </a:lvl8pPr>
             <a:lvl9pPr marL="2743200" indent="0">
               <a:buNone/>
-              <a:defRPr sz="950" b="1"/>
+              <a:defRPr sz="750" b="1"/>
             </a:lvl9pPr>
           </a:lstStyle>
           <a:p>
@@ -1710,31 +1710,31 @@
           <a:bodyPr/>
           <a:lstStyle>
             <a:lvl1pPr>
-              <a:defRPr sz="1400"/>
+              <a:defRPr sz="1100"/>
             </a:lvl1pPr>
             <a:lvl2pPr>
-              <a:defRPr sz="1150"/>
+              <a:defRPr sz="950"/>
             </a:lvl2pPr>
             <a:lvl3pPr>
-              <a:defRPr sz="1050"/>
+              <a:defRPr sz="850"/>
             </a:lvl3pPr>
             <a:lvl4pPr>
-              <a:defRPr sz="950"/>
+              <a:defRPr sz="750"/>
             </a:lvl4pPr>
             <a:lvl5pPr>
-              <a:defRPr sz="950"/>
+              <a:defRPr sz="750"/>
             </a:lvl5pPr>
             <a:lvl6pPr>
-              <a:defRPr sz="950"/>
+              <a:defRPr sz="750"/>
             </a:lvl6pPr>
             <a:lvl7pPr>
-              <a:defRPr sz="950"/>
+              <a:defRPr sz="750"/>
             </a:lvl7pPr>
             <a:lvl8pPr>
-              <a:defRPr sz="950"/>
+              <a:defRPr sz="750"/>
             </a:lvl8pPr>
             <a:lvl9pPr>
-              <a:defRPr sz="950"/>
+              <a:defRPr sz="750"/>
             </a:lvl9pPr>
           </a:lstStyle>
           <a:p>
@@ -2101,7 +2101,7 @@
           <a:bodyPr anchor="b"/>
           <a:lstStyle>
             <a:lvl1pPr algn="l">
-              <a:defRPr sz="1150" b="1"/>
+              <a:defRPr sz="950" b="1"/>
             </a:lvl1pPr>
           </a:lstStyle>
           <a:p>
@@ -2132,31 +2132,31 @@
           <a:bodyPr/>
           <a:lstStyle>
             <a:lvl1pPr>
-              <a:defRPr sz="1850"/>
+              <a:defRPr sz="1500"/>
             </a:lvl1pPr>
             <a:lvl2pPr>
-              <a:defRPr sz="1650"/>
+              <a:defRPr sz="1300"/>
             </a:lvl2pPr>
             <a:lvl3pPr>
-              <a:defRPr sz="1400"/>
+              <a:defRPr sz="1100"/>
             </a:lvl3pPr>
             <a:lvl4pPr>
-              <a:defRPr sz="1150"/>
+              <a:defRPr sz="950"/>
             </a:lvl4pPr>
             <a:lvl5pPr>
-              <a:defRPr sz="1150"/>
+              <a:defRPr sz="950"/>
             </a:lvl5pPr>
             <a:lvl6pPr>
-              <a:defRPr sz="1150"/>
+              <a:defRPr sz="950"/>
             </a:lvl6pPr>
             <a:lvl7pPr>
-              <a:defRPr sz="1150"/>
+              <a:defRPr sz="950"/>
             </a:lvl7pPr>
             <a:lvl8pPr>
-              <a:defRPr sz="1150"/>
+              <a:defRPr sz="950"/>
             </a:lvl8pPr>
             <a:lvl9pPr>
-              <a:defRPr sz="1150"/>
+              <a:defRPr sz="950"/>
             </a:lvl9pPr>
           </a:lstStyle>
           <a:p>
@@ -2217,39 +2217,39 @@
           <a:lstStyle>
             <a:lvl1pPr marL="0" indent="0">
               <a:buNone/>
-              <a:defRPr sz="800"/>
+              <a:defRPr sz="650"/>
             </a:lvl1pPr>
             <a:lvl2pPr marL="342900" indent="0">
               <a:buNone/>
-              <a:defRPr sz="700"/>
+              <a:defRPr sz="550"/>
             </a:lvl2pPr>
             <a:lvl3pPr marL="685800" indent="0">
               <a:buNone/>
-              <a:defRPr sz="700"/>
+              <a:defRPr sz="550"/>
             </a:lvl3pPr>
             <a:lvl4pPr marL="1028700" indent="0">
               <a:buNone/>
-              <a:defRPr sz="700"/>
+              <a:defRPr sz="550"/>
             </a:lvl4pPr>
             <a:lvl5pPr marL="1371600" indent="0">
               <a:buNone/>
-              <a:defRPr sz="700"/>
+              <a:defRPr sz="550"/>
             </a:lvl5pPr>
             <a:lvl6pPr marL="1714500" indent="0">
               <a:buNone/>
-              <a:defRPr sz="700"/>
+              <a:defRPr sz="550"/>
             </a:lvl6pPr>
             <a:lvl7pPr marL="2057400" indent="0">
               <a:buNone/>
-              <a:defRPr sz="700"/>
+              <a:defRPr sz="550"/>
             </a:lvl7pPr>
             <a:lvl8pPr marL="2400300" indent="0">
               <a:buNone/>
-              <a:defRPr sz="700"/>
+              <a:defRPr sz="550"/>
             </a:lvl8pPr>
             <a:lvl9pPr marL="2743200" indent="0">
               <a:buNone/>
-              <a:defRPr sz="700"/>
+              <a:defRPr sz="550"/>
             </a:lvl9pPr>
           </a:lstStyle>
           <a:p>
@@ -2376,7 +2376,7 @@
           <a:bodyPr anchor="b"/>
           <a:lstStyle>
             <a:lvl1pPr algn="l">
-              <a:defRPr sz="1150" b="1"/>
+              <a:defRPr sz="950" b="1"/>
             </a:lvl1pPr>
           </a:lstStyle>
           <a:p>
@@ -2408,39 +2408,39 @@
           <a:lstStyle>
             <a:lvl1pPr marL="0" indent="0">
               <a:buNone/>
-              <a:defRPr sz="1850"/>
+              <a:defRPr sz="1500"/>
             </a:lvl1pPr>
             <a:lvl2pPr marL="342900" indent="0">
               <a:buNone/>
-              <a:defRPr sz="1650"/>
+              <a:defRPr sz="1300"/>
             </a:lvl2pPr>
             <a:lvl3pPr marL="685800" indent="0">
               <a:buNone/>
-              <a:defRPr sz="1400"/>
+              <a:defRPr sz="1100"/>
             </a:lvl3pPr>
             <a:lvl4pPr marL="1028700" indent="0">
               <a:buNone/>
-              <a:defRPr sz="1150"/>
+              <a:defRPr sz="950"/>
             </a:lvl4pPr>
             <a:lvl5pPr marL="1371600" indent="0">
               <a:buNone/>
-              <a:defRPr sz="1150"/>
+              <a:defRPr sz="950"/>
             </a:lvl5pPr>
             <a:lvl6pPr marL="1714500" indent="0">
               <a:buNone/>
-              <a:defRPr sz="1150"/>
+              <a:defRPr sz="950"/>
             </a:lvl6pPr>
             <a:lvl7pPr marL="2057400" indent="0">
               <a:buNone/>
-              <a:defRPr sz="1150"/>
+              <a:defRPr sz="950"/>
             </a:lvl7pPr>
             <a:lvl8pPr marL="2400300" indent="0">
               <a:buNone/>
-              <a:defRPr sz="1150"/>
+              <a:defRPr sz="950"/>
             </a:lvl8pPr>
             <a:lvl9pPr marL="2743200" indent="0">
               <a:buNone/>
-              <a:defRPr sz="1150"/>
+              <a:defRPr sz="950"/>
             </a:lvl9pPr>
           </a:lstStyle>
           <a:p>
@@ -2469,39 +2469,39 @@
           <a:lstStyle>
             <a:lvl1pPr marL="0" indent="0">
               <a:buNone/>
-              <a:defRPr sz="800"/>
+              <a:defRPr sz="650"/>
             </a:lvl1pPr>
             <a:lvl2pPr marL="342900" indent="0">
               <a:buNone/>
-              <a:defRPr sz="700"/>
+              <a:defRPr sz="550"/>
             </a:lvl2pPr>
             <a:lvl3pPr marL="685800" indent="0">
               <a:buNone/>
-              <a:defRPr sz="700"/>
+              <a:defRPr sz="550"/>
             </a:lvl3pPr>
             <a:lvl4pPr marL="1028700" indent="0">
               <a:buNone/>
-              <a:defRPr sz="700"/>
+              <a:defRPr sz="550"/>
             </a:lvl4pPr>
             <a:lvl5pPr marL="1371600" indent="0">
               <a:buNone/>
-              <a:defRPr sz="700"/>
+              <a:defRPr sz="550"/>
             </a:lvl5pPr>
             <a:lvl6pPr marL="1714500" indent="0">
               <a:buNone/>
-              <a:defRPr sz="700"/>
+              <a:defRPr sz="550"/>
             </a:lvl6pPr>
             <a:lvl7pPr marL="2057400" indent="0">
               <a:buNone/>
-              <a:defRPr sz="700"/>
+              <a:defRPr sz="550"/>
             </a:lvl7pPr>
             <a:lvl8pPr marL="2400300" indent="0">
               <a:buNone/>
-              <a:defRPr sz="700"/>
+              <a:defRPr sz="550"/>
             </a:lvl8pPr>
             <a:lvl9pPr marL="2743200" indent="0">
               <a:buNone/>
-              <a:defRPr sz="700"/>
+              <a:defRPr sz="550"/>
             </a:lvl9pPr>
           </a:lstStyle>
           <a:p>
@@ -2729,7 +2729,7 @@
           <a:bodyPr anchor="ctr" bIns="45720" lIns="91440" rIns="91440" rtlCol="0" tIns="45720" vert="horz"/>
           <a:lstStyle>
             <a:lvl1pPr algn="l">
-              <a:defRPr sz="700">
+              <a:defRPr sz="550">
                 <a:solidFill>
                   <a:schemeClr val="tx1">
                     <a:tint val="75000"/>
@@ -2770,7 +2770,7 @@
           <a:bodyPr anchor="ctr" bIns="45720" lIns="91440" rIns="91440" rtlCol="0" tIns="45720" vert="horz"/>
           <a:lstStyle>
             <a:lvl1pPr algn="ctr">
-              <a:defRPr sz="700">
+              <a:defRPr sz="550">
                 <a:solidFill>
                   <a:schemeClr val="tx1">
                     <a:tint val="75000"/>
@@ -2807,7 +2807,7 @@
           <a:bodyPr anchor="ctr" bIns="45720" lIns="91440" rIns="91440" rtlCol="0" tIns="45720" vert="horz"/>
           <a:lstStyle>
             <a:lvl1pPr algn="r">
-              <a:defRPr sz="700">
+              <a:defRPr sz="550">
                 <a:solidFill>
                   <a:schemeClr val="tx1">
                     <a:tint val="75000"/>
@@ -2853,7 +2853,7 @@
           <a:spcPct val="0"/>
         </a:spcBef>
         <a:buNone/>
-        <a:defRPr kern="1200" sz="2550">
+        <a:defRPr kern="1200" sz="2050">
           <a:solidFill>
             <a:schemeClr val="tx1"/>
           </a:solidFill>
@@ -2870,7 +2870,7 @@
         </a:spcBef>
         <a:buFont typeface="Arial"/>
         <a:buChar char="•"/>
-        <a:defRPr kern="1200" sz="1850">
+        <a:defRPr kern="1200" sz="1500">
           <a:solidFill>
             <a:schemeClr val="tx1"/>
           </a:solidFill>
@@ -2885,7 +2885,7 @@
         </a:spcBef>
         <a:buFont typeface="Arial"/>
         <a:buChar char="–"/>
-        <a:defRPr kern="1200" sz="1650">
+        <a:defRPr kern="1200" sz="1300">
           <a:solidFill>
             <a:schemeClr val="tx1"/>
           </a:solidFill>
@@ -2900,7 +2900,7 @@
         </a:spcBef>
         <a:buFont typeface="Arial"/>
         <a:buChar char="•"/>
-        <a:defRPr kern="1200" sz="1400">
+        <a:defRPr kern="1200" sz="1100">
           <a:solidFill>
             <a:schemeClr val="tx1"/>
           </a:solidFill>
@@ -2915,7 +2915,7 @@
         </a:spcBef>
         <a:buFont typeface="Arial"/>
         <a:buChar char="–"/>
-        <a:defRPr kern="1200" sz="1150">
+        <a:defRPr kern="1200" sz="950">
           <a:solidFill>
             <a:schemeClr val="tx1"/>
           </a:solidFill>
@@ -2930,7 +2930,7 @@
         </a:spcBef>
         <a:buFont typeface="Arial"/>
         <a:buChar char="»"/>
-        <a:defRPr kern="1200" sz="1150">
+        <a:defRPr kern="1200" sz="950">
           <a:solidFill>
             <a:schemeClr val="tx1"/>
           </a:solidFill>
@@ -2945,7 +2945,7 @@
         </a:spcBef>
         <a:buFont typeface="Arial"/>
         <a:buChar char="•"/>
-        <a:defRPr kern="1200" sz="1150">
+        <a:defRPr kern="1200" sz="950">
           <a:solidFill>
             <a:schemeClr val="tx1"/>
           </a:solidFill>
@@ -2960,7 +2960,7 @@
         </a:spcBef>
         <a:buFont typeface="Arial"/>
         <a:buChar char="•"/>
-        <a:defRPr kern="1200" sz="1150">
+        <a:defRPr kern="1200" sz="950">
           <a:solidFill>
             <a:schemeClr val="tx1"/>
           </a:solidFill>
@@ -2975,7 +2975,7 @@
         </a:spcBef>
         <a:buFont typeface="Arial"/>
         <a:buChar char="•"/>
-        <a:defRPr kern="1200" sz="1150">
+        <a:defRPr kern="1200" sz="950">
           <a:solidFill>
             <a:schemeClr val="tx1"/>
           </a:solidFill>
@@ -2990,7 +2990,7 @@
         </a:spcBef>
         <a:buFont typeface="Arial"/>
         <a:buChar char="•"/>
-        <a:defRPr kern="1200" sz="1150">
+        <a:defRPr kern="1200" sz="950">
           <a:solidFill>
             <a:schemeClr val="tx1"/>
           </a:solidFill>
@@ -3005,7 +3005,7 @@
         <a:defRPr lang="en-US"/>
       </a:defPPr>
       <a:lvl1pPr algn="l" defTabSz="342900" eaLnBrk="1" hangingPunct="1" latinLnBrk="0" marL="0" rtl="0">
-        <a:defRPr kern="1200" sz="1050">
+        <a:defRPr kern="1200" sz="850">
           <a:solidFill>
             <a:schemeClr val="tx1"/>
           </a:solidFill>
@@ -3015,7 +3015,7 @@
         </a:defRPr>
       </a:lvl1pPr>
       <a:lvl2pPr algn="l" defTabSz="342900" eaLnBrk="1" hangingPunct="1" latinLnBrk="0" marL="342900" rtl="0">
-        <a:defRPr kern="1200" sz="1050">
+        <a:defRPr kern="1200" sz="850">
           <a:solidFill>
             <a:schemeClr val="tx1"/>
           </a:solidFill>
@@ -3025,7 +3025,7 @@
         </a:defRPr>
       </a:lvl2pPr>
       <a:lvl3pPr algn="l" defTabSz="342900" eaLnBrk="1" hangingPunct="1" latinLnBrk="0" marL="685800" rtl="0">
-        <a:defRPr kern="1200" sz="1050">
+        <a:defRPr kern="1200" sz="850">
           <a:solidFill>
             <a:schemeClr val="tx1"/>
           </a:solidFill>
@@ -3035,7 +3035,7 @@
         </a:defRPr>
       </a:lvl3pPr>
       <a:lvl4pPr algn="l" defTabSz="342900" eaLnBrk="1" hangingPunct="1" latinLnBrk="0" marL="1028700" rtl="0">
-        <a:defRPr kern="1200" sz="1050">
+        <a:defRPr kern="1200" sz="850">
           <a:solidFill>
             <a:schemeClr val="tx1"/>
           </a:solidFill>
@@ -3045,7 +3045,7 @@
         </a:defRPr>
       </a:lvl4pPr>
       <a:lvl5pPr algn="l" defTabSz="342900" eaLnBrk="1" hangingPunct="1" latinLnBrk="0" marL="1371600" rtl="0">
-        <a:defRPr kern="1200" sz="1050">
+        <a:defRPr kern="1200" sz="850">
           <a:solidFill>
             <a:schemeClr val="tx1"/>
           </a:solidFill>
@@ -3055,7 +3055,7 @@
         </a:defRPr>
       </a:lvl5pPr>
       <a:lvl6pPr algn="l" defTabSz="342900" eaLnBrk="1" hangingPunct="1" latinLnBrk="0" marL="1714500" rtl="0">
-        <a:defRPr kern="1200" sz="1050">
+        <a:defRPr kern="1200" sz="850">
           <a:solidFill>
             <a:schemeClr val="tx1"/>
           </a:solidFill>
@@ -3065,7 +3065,7 @@
         </a:defRPr>
       </a:lvl6pPr>
       <a:lvl7pPr algn="l" defTabSz="342900" eaLnBrk="1" hangingPunct="1" latinLnBrk="0" marL="2057400" rtl="0">
-        <a:defRPr kern="1200" sz="1050">
+        <a:defRPr kern="1200" sz="850">
           <a:solidFill>
             <a:schemeClr val="tx1"/>
           </a:solidFill>
@@ -3075,7 +3075,7 @@
         </a:defRPr>
       </a:lvl7pPr>
       <a:lvl8pPr algn="l" defTabSz="342900" eaLnBrk="1" hangingPunct="1" latinLnBrk="0" marL="2400300" rtl="0">
-        <a:defRPr kern="1200" sz="1050">
+        <a:defRPr kern="1200" sz="850">
           <a:solidFill>
             <a:schemeClr val="tx1"/>
           </a:solidFill>
@@ -3085,7 +3085,7 @@
         </a:defRPr>
       </a:lvl8pPr>
       <a:lvl9pPr algn="l" defTabSz="342900" eaLnBrk="1" hangingPunct="1" latinLnBrk="0" marL="2743200" rtl="0">
-        <a:defRPr kern="1200" sz="1050">
+        <a:defRPr kern="1200" sz="850">
           <a:solidFill>
             <a:schemeClr val="tx1"/>
           </a:solidFill>

--- a/02-geometry-of-least-squares/slides.pptx
+++ b/02-geometry-of-least-squares/slides.pptx
@@ -2822,6 +2822,72 @@
               <a:t>‹#›</a:t>
             </a:fld>
             <a:endParaRPr lang="en-US"/>
+          </a:p>
+        </p:txBody>
+      </p:sp>
+      <p:sp>
+        <p:nvSpPr>
+          <p:cNvPr id="7" name="Author Footer"/>
+          <p:cNvSpPr txBox="1"/>
+          <p:nvPr/>
+        </p:nvSpPr>
+        <p:spPr>
+          <a:xfrm>
+            <a:off x="457200" y="4735000"/>
+            <a:ext cx="5000000" cy="260000"/>
+          </a:xfrm>
+          <a:prstGeom prst="rect">
+            <a:avLst/>
+          </a:prstGeom>
+          <a:noFill/>
+        </p:spPr>
+        <p:txBody>
+          <a:bodyPr anchor="ctr" bIns="0" lIns="0" rIns="0" tIns="0" wrap="square"/>
+          <a:lstStyle/>
+          <a:p>
+            <a:pPr algn="l"/>
+            <a:r>
+              <a:rPr dirty="0" lang="en-US" sz="900">
+                <a:solidFill>
+                  <a:srgbClr val="6E7275"/>
+                </a:solidFill>
+                <a:latin typeface="+mn-lt"/>
+              </a:rPr>
+              <a:t>Thierry Warin, PhD</a:t>
+            </a:r>
+          </a:p>
+        </p:txBody>
+      </p:sp>
+      <p:sp>
+        <p:nvSpPr>
+          <p:cNvPr id="8" name="Slide Number Footer"/>
+          <p:cNvSpPr txBox="1"/>
+          <p:nvPr/>
+        </p:nvSpPr>
+        <p:spPr>
+          <a:xfrm>
+            <a:off x="7200000" y="4735000"/>
+            <a:ext cx="1486800" cy="260000"/>
+          </a:xfrm>
+          <a:prstGeom prst="rect">
+            <a:avLst/>
+          </a:prstGeom>
+          <a:noFill/>
+        </p:spPr>
+        <p:txBody>
+          <a:bodyPr anchor="ctr" bIns="0" lIns="0" rIns="0" tIns="0" wrap="square"/>
+          <a:lstStyle/>
+          <a:p>
+            <a:pPr algn="r"/>
+            <a:fld id="{9B1A2C3D-4E5F-6A7B-8C9D-0E1F2A3B4C5D}" type="slidenum">
+              <a:rPr dirty="0" lang="en-US" sz="900">
+                <a:solidFill>
+                  <a:srgbClr val="6E7275"/>
+                </a:solidFill>
+                <a:latin typeface="+mn-lt"/>
+              </a:rPr>
+              <a:t>2</a:t>
+            </a:fld>
           </a:p>
         </p:txBody>
       </p:sp>
@@ -3202,7 +3268,7 @@
             </a:pPr>
             <a:r>
               <a:rPr/>
-              <a:t>18 August 2026</a:t>
+              <a:t>19 August 2026</a:t>
             </a:r>
           </a:p>
         </p:txBody>

--- a/02-geometry-of-least-squares/slides.pptx
+++ b/02-geometry-of-least-squares/slides.pptx
@@ -6996,14 +6996,12 @@
           <a:p>
             <a:pPr lvl="0"/>
             <a:r>
+              <a:rPr b="1"/>
+              <a:t>Every member</a:t>
+            </a:r>
+            <a:r>
               <a:rPr/>
-              <a:t>Fill in this session’s row of </a:t>
-            </a:r>
-            <a:r>
-              <a:rPr>
-                <a:latin typeface="Courier"/>
-              </a:rPr>
-              <a:t>assessment/role-logs/gNN.md</a:t>
+              <a:t> commits and pushes from their own machine</a:t>
             </a:r>
           </a:p>
           <a:p>

--- a/02-geometry-of-least-squares/slides.pptx
+++ b/02-geometry-of-least-squares/slides.pptx
@@ -6612,7 +6612,7 @@
             </a:r>
             <a:r>
               <a:rPr b="1"/>
-              <a:t>its own angle</a:t>
+              <a:t>its own project</a:t>
             </a:r>
             <a:r>
               <a:rPr/>
@@ -6625,7 +6625,7 @@
             </a:pPr>
             <a:r>
               <a:rPr/>
-              <a:t>Your angle and data are fixed for the semester: </a:t>
+              <a:t>Your project and data are fixed for the semester: </a:t>
             </a:r>
             <a:r>
               <a:rPr>

--- a/02-geometry-of-least-squares/slides.pptx
+++ b/02-geometry-of-least-squares/slides.pptx
@@ -6608,15 +6608,15 @@
             </a:pPr>
             <a:r>
               <a:rPr/>
-              <a:t>All ten groups attack it, each on </a:t>
+              <a:t>All ten groups attack it on the </a:t>
             </a:r>
             <a:r>
               <a:rPr b="1"/>
-              <a:t>its own project</a:t>
+              <a:t>practice data</a:t>
             </a:r>
             <a:r>
               <a:rPr/>
-              <a:t>. The last twenty minutes assemble the answers.</a:t>
+              <a:t> — projects arrive in Session 04. The last twenty minutes assemble the answers.</a:t>
             </a:r>
           </a:p>
           <a:p>
@@ -6625,7 +6625,7 @@
             </a:pPr>
             <a:r>
               <a:rPr/>
-              <a:t>Your project and data are fixed for the semester: </a:t>
+              <a:t>How projects work, and what arrives in Session 04: </a:t>
             </a:r>
             <a:r>
               <a:rPr>

--- a/02-geometry-of-least-squares/slides.pptx
+++ b/02-geometry-of-least-squares/slides.pptx
@@ -6470,7 +6470,7 @@
                 </a:r>
                 <a:r>
                   <a:rPr/>
-                  <a:t> do internally. You verify the precision difference yourself in the lab.</a:t>
+                  <a:t> do internally. You verify the precision difference yourself in the practice session.</a:t>
                 </a:r>
               </a:p>
             </p:txBody>
@@ -6524,7 +6524,7 @@
             </a:pPr>
             <a:r>
               <a:rPr/>
-              <a:t>The lab</a:t>
+              <a:t>The practice</a:t>
             </a:r>
           </a:p>
         </p:txBody>
@@ -7024,7 +7024,7 @@
                 <a:hlinkClick r:id="rId2"/>
                 <a:latin typeface="Courier"/>
               </a:rPr>
-              <a:t>02-lab/README.md</a:t>
+              <a:t>02-practice/README.md</a:t>
             </a:r>
           </a:p>
         </p:txBody>

--- a/02-geometry-of-least-squares/slides.pptx
+++ b/02-geometry-of-least-squares/slides.pptx
@@ -4733,7 +4733,13 @@
                       <m:rPr>
                         <m:sty m:val="p"/>
                       </m:rPr>
-                      <m:t>tr</m:t>
+                      <m:t>t</m:t>
+                    </m:r>
+                    <m:r>
+                      <m:rPr>
+                        <m:sty m:val="p"/>
+                      </m:rPr>
+                      <m:t>r</m:t>
                     </m:r>
                     <m:d>
                       <m:dPr>

--- a/02-geometry-of-least-squares/slides.pptx
+++ b/02-geometry-of-least-squares/slides.pptx
@@ -32,6 +32,15 @@
     <p:sldId id="280" r:id="rId26"/>
     <p:sldId id="281" r:id="rId27"/>
     <p:sldId id="282" r:id="rId28"/>
+    <p:sldId id="283" r:id="rId29"/>
+    <p:sldId id="284" r:id="rId30"/>
+    <p:sldId id="285" r:id="rId31"/>
+    <p:sldId id="286" r:id="rId32"/>
+    <p:sldId id="287" r:id="rId33"/>
+    <p:sldId id="288" r:id="rId34"/>
+    <p:sldId id="289" r:id="rId35"/>
+    <p:sldId id="290" r:id="rId36"/>
+    <p:sldId id="291" r:id="rId37"/>
   </p:sldIdLst>
   <p:sldSz cx="9144000" cy="5143500" type="screen16x9"/>
   <p:notesSz cx="6858000" cy="9144000"/>
@@ -932,15 +941,15 @@
         </p:nvSpPr>
         <p:spPr>
           <a:xfrm>
-            <a:off x="722313" y="3305176"/>
-            <a:ext cx="7772400" cy="1021556"/>
+            <a:off x="722313" y="1850000"/>
+            <a:ext cx="7772400" cy="1300000"/>
           </a:xfrm>
         </p:spPr>
         <p:txBody>
           <a:bodyPr anchor="t"/>
           <a:lstStyle>
             <a:lvl1pPr algn="l">
-              <a:defRPr sz="1850" b="1" cap="all"/>
+              <a:defRPr sz="2800" b="1" cap="none"/>
             </a:lvl1pPr>
           </a:lstStyle>
           <a:p>
@@ -963,8 +972,8 @@
         </p:nvSpPr>
         <p:spPr>
           <a:xfrm>
-            <a:off x="722313" y="2180035"/>
-            <a:ext cx="7772400" cy="1125140"/>
+            <a:off x="722313" y="3250000"/>
+            <a:ext cx="7772400" cy="700000"/>
           </a:xfrm>
         </p:spPr>
         <p:txBody>
@@ -3268,7 +3277,7 @@
             </a:pPr>
             <a:r>
               <a:rPr/>
-              <a:t>20 August 2026</a:t>
+              <a:t>21 August 2026</a:t>
             </a:r>
           </a:p>
         </p:txBody>
@@ -3315,7 +3324,425 @@
             </a:pPr>
             <a:r>
               <a:rPr/>
-              <a:t>Expand, then differentiate</a:t>
+              <a:t>Stack the data</a:t>
+            </a:r>
+          </a:p>
+        </p:txBody>
+      </p:sp>
+      <mc:AlternateContent xmlns:mc="http://schemas.openxmlformats.org/markup-compatibility/2006">
+        <mc:Choice xmlns:a14="http://schemas.microsoft.com/office/drawing/2010/main" Requires="a14">
+          <p:sp>
+            <p:nvSpPr>
+              <p:cNvPr id="3" name="Content Placeholder 2"/>
+              <p:cNvSpPr>
+                <a:spLocks noGrp="1"/>
+              </p:cNvSpPr>
+              <p:nvPr>
+                <p:ph idx="1"/>
+              </p:nvPr>
+            </p:nvSpPr>
+            <p:spPr/>
+            <p:txBody>
+              <a:bodyPr/>
+              <a:lstStyle/>
+              <a:p>
+                <a:pPr lvl="0" indent="0" marL="0">
+                  <a:buNone/>
+                </a:pPr>
+                <a14:m>
+                  <m:oMath xmlns:m="http://schemas.openxmlformats.org/officeDocument/2006/math">
+                    <m:r>
+                      <m:t>y</m:t>
+                    </m:r>
+                    <m:r>
+                      <m:rPr>
+                        <m:sty m:val="p"/>
+                      </m:rPr>
+                      <m:t>∈</m:t>
+                    </m:r>
+                    <m:sSup>
+                      <m:e>
+                        <m:r>
+                          <m:rPr>
+                            <m:sty m:val="p"/>
+                            <m:scr m:val="double-struck"/>
+                          </m:rPr>
+                          <m:t>R</m:t>
+                        </m:r>
+                      </m:e>
+                      <m:sup>
+                        <m:r>
+                          <m:t>n</m:t>
+                        </m:r>
+                      </m:sup>
+                    </m:sSup>
+                  </m:oMath>
+                </a14:m>
+                <a:r>
+                  <a:rPr/>
+                  <a:t>, </a:t>
+                </a:r>
+                <a14:m>
+                  <m:oMath xmlns:m="http://schemas.openxmlformats.org/officeDocument/2006/math">
+                    <m:r>
+                      <m:t>X</m:t>
+                    </m:r>
+                    <m:r>
+                      <m:rPr>
+                        <m:sty m:val="p"/>
+                      </m:rPr>
+                      <m:t>∈</m:t>
+                    </m:r>
+                    <m:sSup>
+                      <m:e>
+                        <m:r>
+                          <m:rPr>
+                            <m:sty m:val="p"/>
+                            <m:scr m:val="double-struck"/>
+                          </m:rPr>
+                          <m:t>R</m:t>
+                        </m:r>
+                      </m:e>
+                      <m:sup>
+                        <m:r>
+                          <m:t>n</m:t>
+                        </m:r>
+                        <m:r>
+                          <m:rPr>
+                            <m:sty m:val="p"/>
+                          </m:rPr>
+                          <m:t>×</m:t>
+                        </m:r>
+                        <m:r>
+                          <m:t>p</m:t>
+                        </m:r>
+                      </m:sup>
+                    </m:sSup>
+                  </m:oMath>
+                </a14:m>
+                <a:r>
+                  <a:rPr/>
+                  <a:t> with a leading column of ones:</a:t>
+                </a:r>
+              </a:p>
+              <a:p>
+                <a:pPr lvl="0" indent="0" marL="0">
+                  <a:buNone/>
+                </a:pPr>
+                <a14:m>
+                  <m:oMathPara xmlns:m="http://schemas.openxmlformats.org/officeDocument/2006/math">
+                    <m:oMathParaPr>
+                      <m:jc m:val="center"/>
+                    </m:oMathParaPr>
+                    <m:oMath>
+                      <m:r>
+                        <m:t>y</m:t>
+                      </m:r>
+                      <m:r>
+                        <m:rPr>
+                          <m:sty m:val="p"/>
+                        </m:rPr>
+                        <m:t>=</m:t>
+                      </m:r>
+                      <m:r>
+                        <m:t>X</m:t>
+                      </m:r>
+                      <m:r>
+                        <m:t>β</m:t>
+                      </m:r>
+                      <m:r>
+                        <m:rPr>
+                          <m:sty m:val="p"/>
+                        </m:rPr>
+                        <m:t>+</m:t>
+                      </m:r>
+                      <m:r>
+                        <m:t>ε</m:t>
+                      </m:r>
+                    </m:oMath>
+                  </m:oMathPara>
+                </a14:m>
+              </a:p>
+              <a:p>
+                <a:pPr lvl="0" indent="0" marL="0">
+                  <a:buNone/>
+                </a:pPr>
+                <a:r>
+                  <a:rPr/>
+                  <a:t>We want the </a:t>
+                </a:r>
+                <a14:m>
+                  <m:oMath xmlns:m="http://schemas.openxmlformats.org/officeDocument/2006/math">
+                    <m:acc>
+                      <m:accPr>
+                        <m:chr m:val="̂"/>
+                      </m:accPr>
+                      <m:e>
+                        <m:r>
+                          <m:t>β</m:t>
+                        </m:r>
+                      </m:e>
+                    </m:acc>
+                  </m:oMath>
+                </a14:m>
+                <a:r>
+                  <a:rPr/>
+                  <a:t> minimising the residual sum of squares</a:t>
+                </a:r>
+              </a:p>
+              <a:p>
+                <a:pPr lvl="0" indent="0" marL="0">
+                  <a:buNone/>
+                </a:pPr>
+                <a14:m>
+                  <m:oMathPara xmlns:m="http://schemas.openxmlformats.org/officeDocument/2006/math">
+                    <m:oMathParaPr>
+                      <m:jc m:val="center"/>
+                    </m:oMathParaPr>
+                    <m:oMath>
+                      <m:r>
+                        <m:t>S</m:t>
+                      </m:r>
+                      <m:d>
+                        <m:dPr>
+                          <m:begChr m:val="("/>
+                          <m:sepChr m:val=""/>
+                          <m:endChr m:val=")"/>
+                          <m:grow/>
+                        </m:dPr>
+                        <m:e>
+                          <m:r>
+                            <m:t>β</m:t>
+                          </m:r>
+                        </m:e>
+                      </m:d>
+                      <m:r>
+                        <m:rPr>
+                          <m:sty m:val="p"/>
+                        </m:rPr>
+                        <m:t>=</m:t>
+                      </m:r>
+                      <m:r>
+                        <m:rPr>
+                          <m:sty m:val="p"/>
+                        </m:rPr>
+                        <m:t>∥</m:t>
+                      </m:r>
+                      <m:r>
+                        <m:t>y</m:t>
+                      </m:r>
+                      <m:r>
+                        <m:rPr>
+                          <m:sty m:val="p"/>
+                        </m:rPr>
+                        <m:t>−</m:t>
+                      </m:r>
+                      <m:r>
+                        <m:t>X</m:t>
+                      </m:r>
+                      <m:r>
+                        <m:t>β</m:t>
+                      </m:r>
+                      <m:sSubSup>
+                        <m:e>
+                          <m:r>
+                            <m:rPr>
+                              <m:sty m:val="p"/>
+                            </m:rPr>
+                            <m:t>∥</m:t>
+                          </m:r>
+                        </m:e>
+                        <m:sub>
+                          <m:r>
+                            <m:t>2</m:t>
+                          </m:r>
+                        </m:sub>
+                        <m:sup>
+                          <m:r>
+                            <m:t>2</m:t>
+                          </m:r>
+                        </m:sup>
+                      </m:sSubSup>
+                      <m:r>
+                        <m:rPr>
+                          <m:sty m:val="p"/>
+                        </m:rPr>
+                        <m:t>=</m:t>
+                      </m:r>
+                      <m:sSup>
+                        <m:e>
+                          <m:d>
+                            <m:dPr>
+                              <m:begChr m:val="("/>
+                              <m:sepChr m:val=""/>
+                              <m:endChr m:val=")"/>
+                              <m:grow/>
+                            </m:dPr>
+                            <m:e>
+                              <m:r>
+                                <m:t>y</m:t>
+                              </m:r>
+                              <m:r>
+                                <m:rPr>
+                                  <m:sty m:val="p"/>
+                                </m:rPr>
+                                <m:t>−</m:t>
+                              </m:r>
+                              <m:r>
+                                <m:t>X</m:t>
+                              </m:r>
+                              <m:r>
+                                <m:t>β</m:t>
+                              </m:r>
+                            </m:e>
+                          </m:d>
+                        </m:e>
+                        <m:sup>
+                          <m:r>
+                            <m:rPr>
+                              <m:sty m:val="p"/>
+                            </m:rPr>
+                            <m:t>⊤</m:t>
+                          </m:r>
+                        </m:sup>
+                      </m:sSup>
+                      <m:d>
+                        <m:dPr>
+                          <m:begChr m:val="("/>
+                          <m:sepChr m:val=""/>
+                          <m:endChr m:val=")"/>
+                          <m:grow/>
+                        </m:dPr>
+                        <m:e>
+                          <m:r>
+                            <m:t>y</m:t>
+                          </m:r>
+                          <m:r>
+                            <m:rPr>
+                              <m:sty m:val="p"/>
+                            </m:rPr>
+                            <m:t>−</m:t>
+                          </m:r>
+                          <m:r>
+                            <m:t>X</m:t>
+                          </m:r>
+                          <m:r>
+                            <m:t>β</m:t>
+                          </m:r>
+                        </m:e>
+                      </m:d>
+                    </m:oMath>
+                  </m:oMathPara>
+                </a14:m>
+              </a:p>
+              <a:p>
+                <a:pPr lvl="0" indent="0" marL="0">
+                  <a:buNone/>
+                </a:pPr>
+                <a:r>
+                  <a:rPr/>
+                  <a:t>Everything today follows from that one line. There are two routes to the minimum, and they turn out to be the same statement.</a:t>
+                </a:r>
+              </a:p>
+            </p:txBody>
+          </p:sp>
+        </mc:Choice>
+      </mc:AlternateContent>
+    </p:spTree>
+  </p:cSld>
+</p:sld>
+</file>
+
+<file path=ppt/slides/slide11.xml><?xml version="1.0" encoding="utf-8"?>
+<p:sld xmlns:a="http://schemas.openxmlformats.org/drawingml/2006/main" xmlns:r="http://schemas.openxmlformats.org/officeDocument/2006/relationships" xmlns:p="http://schemas.openxmlformats.org/presentationml/2006/main">
+  <p:cSld>
+    <p:spTree>
+      <p:nvGrpSpPr>
+        <p:cNvPr id="1" name=""/>
+        <p:cNvGrpSpPr/>
+        <p:nvPr/>
+      </p:nvGrpSpPr>
+      <p:grpSpPr>
+        <a:xfrm>
+          <a:off x="0" y="0"/>
+          <a:ext cx="0" cy="0"/>
+          <a:chOff x="0" y="0"/>
+          <a:chExt cx="0" cy="0"/>
+        </a:xfrm>
+      </p:grpSpPr>
+      <p:sp>
+        <p:nvSpPr>
+          <p:cNvPr id="2" name="Title 1"/>
+          <p:cNvSpPr>
+            <a:spLocks noGrp="1"/>
+          </p:cNvSpPr>
+          <p:nvPr>
+            <p:ph type="title"/>
+          </p:nvPr>
+        </p:nvSpPr>
+        <p:spPr>
+          <a:xfrm>
+            <a:off x="722313" y="1850000"/>
+            <a:ext cx="7772400" cy="1300000"/>
+          </a:xfrm>
+        </p:spPr>
+        <p:txBody>
+          <a:bodyPr/>
+          <a:lstStyle/>
+          <a:p>
+            <a:pPr lvl="0" indent="0" marL="0">
+              <a:buNone/>
+            </a:pPr>
+            <a:r>
+              <a:rPr/>
+              <a:t>3 · Route 1 — calculus</a:t>
+            </a:r>
+          </a:p>
+        </p:txBody>
+      </p:sp>
+    </p:spTree>
+  </p:cSld>
+</p:sld>
+</file>
+
+<file path=ppt/slides/slide12.xml><?xml version="1.0" encoding="utf-8"?>
+<p:sld xmlns:a="http://schemas.openxmlformats.org/drawingml/2006/main" xmlns:r="http://schemas.openxmlformats.org/officeDocument/2006/relationships" xmlns:p="http://schemas.openxmlformats.org/presentationml/2006/main">
+  <p:cSld>
+    <p:spTree>
+      <p:nvGrpSpPr>
+        <p:cNvPr id="1" name=""/>
+        <p:cNvGrpSpPr/>
+        <p:nvPr/>
+      </p:nvGrpSpPr>
+      <p:grpSpPr>
+        <a:xfrm>
+          <a:off x="0" y="0"/>
+          <a:ext cx="0" cy="0"/>
+          <a:chOff x="0" y="0"/>
+          <a:chExt cx="0" cy="0"/>
+        </a:xfrm>
+      </p:grpSpPr>
+      <p:sp>
+        <p:nvSpPr>
+          <p:cNvPr id="2" name="Title 1"/>
+          <p:cNvSpPr>
+            <a:spLocks noGrp="1"/>
+          </p:cNvSpPr>
+          <p:nvPr>
+            <p:ph type="title"/>
+          </p:nvPr>
+        </p:nvSpPr>
+        <p:spPr/>
+        <p:txBody>
+          <a:bodyPr/>
+          <a:lstStyle/>
+          <a:p>
+            <a:pPr lvl="0" indent="0" marL="0">
+              <a:buNone/>
+            </a:pPr>
+            <a:r>
+              <a:rPr/>
+              <a:t>Expand, differentiate, solve</a:t>
             </a:r>
           </a:p>
         </p:txBody>
@@ -3574,6 +4001,9 @@
                       <m:r>
                         <m:t>β</m:t>
                       </m:r>
+                      <m:r>
+                        <m:t> </m:t>
+                      </m:r>
                       <m:limUpp>
                         <m:e>
                           <m:r>
@@ -3593,79 +4023,28 @@
                         </m:lim>
                       </m:limUpp>
                       <m:r>
+                        <m:t> </m:t>
+                      </m:r>
+                      <m:r>
                         <m:t>0</m:t>
                       </m:r>
                     </m:oMath>
                   </m:oMathPara>
                 </a14:m>
               </a:p>
-            </p:txBody>
-          </p:sp>
-        </mc:Choice>
-      </mc:AlternateContent>
-    </p:spTree>
-  </p:cSld>
-</p:sld>
-</file>
-
-<file path=ppt/slides/slide11.xml><?xml version="1.0" encoding="utf-8"?>
-<p:sld xmlns:a="http://schemas.openxmlformats.org/drawingml/2006/main" xmlns:r="http://schemas.openxmlformats.org/officeDocument/2006/relationships" xmlns:p="http://schemas.openxmlformats.org/presentationml/2006/main">
-  <p:cSld>
-    <p:spTree>
-      <p:nvGrpSpPr>
-        <p:cNvPr id="1" name=""/>
-        <p:cNvGrpSpPr/>
-        <p:nvPr/>
-      </p:nvGrpSpPr>
-      <p:grpSpPr>
-        <a:xfrm>
-          <a:off x="0" y="0"/>
-          <a:ext cx="0" cy="0"/>
-          <a:chOff x="0" y="0"/>
-          <a:chExt cx="0" cy="0"/>
-        </a:xfrm>
-      </p:grpSpPr>
-      <p:sp>
-        <p:nvSpPr>
-          <p:cNvPr id="2" name="Title 1"/>
-          <p:cNvSpPr>
-            <a:spLocks noGrp="1"/>
-          </p:cNvSpPr>
-          <p:nvPr>
-            <p:ph type="title"/>
-          </p:nvPr>
-        </p:nvSpPr>
-        <p:spPr/>
-        <p:txBody>
-          <a:bodyPr/>
-          <a:lstStyle/>
-          <a:p>
-            <a:pPr lvl="0" indent="0" marL="0">
-              <a:buNone/>
-            </a:pPr>
-            <a:r>
-              <a:rPr/>
-              <a:t>The normal equations</a:t>
-            </a:r>
-          </a:p>
-        </p:txBody>
-      </p:sp>
-      <mc:AlternateContent xmlns:mc="http://schemas.openxmlformats.org/markup-compatibility/2006">
-        <mc:Choice xmlns:a14="http://schemas.microsoft.com/office/drawing/2010/main" Requires="a14">
-          <p:sp>
-            <p:nvSpPr>
-              <p:cNvPr id="3" name="Content Placeholder 2"/>
-              <p:cNvSpPr>
-                <a:spLocks noGrp="1"/>
-              </p:cNvSpPr>
-              <p:nvPr>
-                <p:ph idx="1"/>
-              </p:nvPr>
-            </p:nvSpPr>
-            <p:spPr/>
-            <p:txBody>
-              <a:bodyPr/>
-              <a:lstStyle/>
+              <a:p>
+                <a:pPr lvl="0" indent="0" marL="0">
+                  <a:buNone/>
+                </a:pPr>
+                <a:r>
+                  <a:rPr/>
+                  <a:t>giving the </a:t>
+                </a:r>
+                <a:r>
+                  <a:rPr b="1"/>
+                  <a:t>normal equations</a:t>
+                </a:r>
+              </a:p>
               <a:p>
                 <a:pPr lvl="0" indent="0" marL="0">
                   <a:buNone/>
@@ -3679,7 +4058,7 @@
                       <m:borderBox>
                         <m:e>
                           <m:r>
-                            <m:t> </m:t>
+                            <m:t> </m:t>
                           </m:r>
                           <m:sSup>
                             <m:e>
@@ -3734,7 +4113,7 @@
                             <m:t>y</m:t>
                           </m:r>
                           <m:r>
-                            <m:t> </m:t>
+                            <m:t> </m:t>
                           </m:r>
                         </m:e>
                       </m:borderBox>
@@ -3742,6 +4121,78 @@
                   </m:oMathPara>
                 </a14:m>
               </a:p>
+            </p:txBody>
+          </p:sp>
+        </mc:Choice>
+      </mc:AlternateContent>
+    </p:spTree>
+  </p:cSld>
+</p:sld>
+</file>
+
+<file path=ppt/slides/slide13.xml><?xml version="1.0" encoding="utf-8"?>
+<p:sld xmlns:a="http://schemas.openxmlformats.org/drawingml/2006/main" xmlns:r="http://schemas.openxmlformats.org/officeDocument/2006/relationships" xmlns:p="http://schemas.openxmlformats.org/presentationml/2006/main">
+  <p:cSld>
+    <p:spTree>
+      <p:nvGrpSpPr>
+        <p:cNvPr id="1" name=""/>
+        <p:cNvGrpSpPr/>
+        <p:nvPr/>
+      </p:nvGrpSpPr>
+      <p:grpSpPr>
+        <a:xfrm>
+          <a:off x="0" y="0"/>
+          <a:ext cx="0" cy="0"/>
+          <a:chOff x="0" y="0"/>
+          <a:chExt cx="0" cy="0"/>
+        </a:xfrm>
+      </p:grpSpPr>
+      <p:sp>
+        <p:nvSpPr>
+          <p:cNvPr id="2" name="Title 1"/>
+          <p:cNvSpPr>
+            <a:spLocks noGrp="1"/>
+          </p:cNvSpPr>
+          <p:nvPr>
+            <p:ph type="title"/>
+          </p:nvPr>
+        </p:nvSpPr>
+        <p:spPr>
+          <a:xfrm>
+            <a:off x="457201" y="204787"/>
+            <a:ext cx="3008313" cy="871538"/>
+          </a:xfrm>
+        </p:spPr>
+        <p:txBody>
+          <a:bodyPr/>
+          <a:lstStyle/>
+          <a:p>
+            <a:pPr lvl="0" indent="0" marL="0">
+              <a:buNone/>
+            </a:pPr>
+            <a:r>
+              <a:rPr/>
+              <a:t>And it is a minimum</a:t>
+            </a:r>
+          </a:p>
+        </p:txBody>
+      </p:sp>
+      <mc:AlternateContent xmlns:mc="http://schemas.openxmlformats.org/markup-compatibility/2006">
+        <mc:Choice xmlns:a14="http://schemas.microsoft.com/office/drawing/2010/main" Requires="a14">
+          <p:sp>
+            <p:nvSpPr>
+              <p:cNvPr id="4" name="Text Placeholder 3"/>
+              <p:cNvSpPr>
+                <a:spLocks noGrp="1"/>
+              </p:cNvSpPr>
+              <p:nvPr>
+                <p:ph idx="2" sz="half" type="body"/>
+              </p:nvPr>
+            </p:nvSpPr>
+            <p:spPr/>
+            <p:txBody>
+              <a:bodyPr/>
+              <a:lstStyle/>
               <a:p>
                 <a:pPr lvl="0" indent="0" marL="0">
                   <a:buNone/>
@@ -3759,107 +4210,92 @@
                 </a14:m>
                 <a:r>
                   <a:rPr/>
-                  <a:t> has full column rank,</a:t>
-                </a:r>
-              </a:p>
-              <a:p>
-                <a:pPr lvl="0" indent="0" marL="0">
-                  <a:buNone/>
-                </a:pPr>
+                  <a:t> has full column rank, </a:t>
+                </a:r>
                 <a14:m>
-                  <m:oMathPara xmlns:m="http://schemas.openxmlformats.org/officeDocument/2006/math">
-                    <m:oMathParaPr>
-                      <m:jc m:val="center"/>
-                    </m:oMathParaPr>
-                    <m:oMath>
-                      <m:acc>
-                        <m:accPr>
-                          <m:chr m:val="̂"/>
-                        </m:accPr>
-                        <m:e>
-                          <m:r>
-                            <m:t>β</m:t>
-                          </m:r>
-                        </m:e>
-                      </m:acc>
-                      <m:r>
-                        <m:rPr>
-                          <m:sty m:val="p"/>
-                        </m:rPr>
-                        <m:t>=</m:t>
-                      </m:r>
-                      <m:sSup>
-                        <m:e>
-                          <m:d>
-                            <m:dPr>
-                              <m:begChr m:val="("/>
-                              <m:sepChr m:val=""/>
-                              <m:endChr m:val=")"/>
-                              <m:grow/>
-                            </m:dPr>
-                            <m:e>
-                              <m:sSup>
-                                <m:e>
-                                  <m:r>
-                                    <m:t>X</m:t>
-                                  </m:r>
-                                </m:e>
-                                <m:sup>
-                                  <m:r>
-                                    <m:rPr>
-                                      <m:sty m:val="p"/>
-                                    </m:rPr>
-                                    <m:t>⊤</m:t>
-                                  </m:r>
-                                </m:sup>
-                              </m:sSup>
-                              <m:r>
-                                <m:t>X</m:t>
-                              </m:r>
-                            </m:e>
-                          </m:d>
-                        </m:e>
-                        <m:sup>
-                          <m:r>
-                            <m:rPr>
-                              <m:sty m:val="p"/>
-                            </m:rPr>
-                            <m:t>−</m:t>
-                          </m:r>
-                          <m:r>
-                            <m:t>1</m:t>
-                          </m:r>
-                        </m:sup>
-                      </m:sSup>
-                      <m:sSup>
-                        <m:e>
-                          <m:r>
-                            <m:t>X</m:t>
-                          </m:r>
-                        </m:e>
-                        <m:sup>
-                          <m:r>
-                            <m:rPr>
-                              <m:sty m:val="p"/>
-                            </m:rPr>
-                            <m:t>⊤</m:t>
-                          </m:r>
-                        </m:sup>
-                      </m:sSup>
-                      <m:r>
-                        <m:t>y</m:t>
-                      </m:r>
-                    </m:oMath>
-                  </m:oMathPara>
+                  <m:oMath xmlns:m="http://schemas.openxmlformats.org/officeDocument/2006/math">
+                    <m:acc>
+                      <m:accPr>
+                        <m:chr m:val="̂"/>
+                      </m:accPr>
+                      <m:e>
+                        <m:r>
+                          <m:t>β</m:t>
+                        </m:r>
+                      </m:e>
+                    </m:acc>
+                    <m:r>
+                      <m:rPr>
+                        <m:sty m:val="p"/>
+                      </m:rPr>
+                      <m:t>=</m:t>
+                    </m:r>
+                    <m:sSup>
+                      <m:e>
+                        <m:d>
+                          <m:dPr>
+                            <m:begChr m:val="("/>
+                            <m:sepChr m:val=""/>
+                            <m:endChr m:val=")"/>
+                            <m:grow/>
+                          </m:dPr>
+                          <m:e>
+                            <m:sSup>
+                              <m:e>
+                                <m:r>
+                                  <m:t>X</m:t>
+                                </m:r>
+                              </m:e>
+                              <m:sup>
+                                <m:r>
+                                  <m:rPr>
+                                    <m:sty m:val="p"/>
+                                  </m:rPr>
+                                  <m:t>⊤</m:t>
+                                </m:r>
+                              </m:sup>
+                            </m:sSup>
+                            <m:r>
+                              <m:t>X</m:t>
+                            </m:r>
+                          </m:e>
+                        </m:d>
+                      </m:e>
+                      <m:sup>
+                        <m:r>
+                          <m:rPr>
+                            <m:sty m:val="p"/>
+                          </m:rPr>
+                          <m:t>−</m:t>
+                        </m:r>
+                        <m:r>
+                          <m:t>1</m:t>
+                        </m:r>
+                      </m:sup>
+                    </m:sSup>
+                    <m:sSup>
+                      <m:e>
+                        <m:r>
+                          <m:t>X</m:t>
+                        </m:r>
+                      </m:e>
+                      <m:sup>
+                        <m:r>
+                          <m:rPr>
+                            <m:sty m:val="p"/>
+                          </m:rPr>
+                          <m:t>⊤</m:t>
+                        </m:r>
+                      </m:sup>
+                    </m:sSup>
+                    <m:r>
+                      <m:t>y</m:t>
+                    </m:r>
+                  </m:oMath>
                 </a14:m>
-              </a:p>
-              <a:p>
-                <a:pPr lvl="0" indent="0" marL="0">
-                  <a:buNone/>
-                </a:pPr>
                 <a:r>
                   <a:rPr/>
-                  <a:t>The Hessian is </a:t>
+                  <a:t>. The Hessian is </a:t>
                 </a:r>
                 <a14:m>
                   <m:oMath xmlns:m="http://schemas.openxmlformats.org/officeDocument/2006/math">
@@ -3905,7 +4341,7 @@
                 </a:r>
                 <a:r>
                   <a:rPr/>
-                  <a:t> minimum. </a:t>
+                  <a:t> minimum and </a:t>
                 </a:r>
                 <a14:m>
                   <m:oMath xmlns:m="http://schemas.openxmlformats.org/officeDocument/2006/math">
@@ -3919,25 +4355,46 @@
                   <a:t> is convex.</a:t>
                 </a:r>
               </a:p>
-              <a:p>
-                <a:pPr lvl="0" indent="0" marL="0">
-                  <a:buNone/>
-                </a:pPr>
-                <a:r>
-                  <a:rPr/>
-                  <a:t>Convexity is why there is one answer. Session 07 abandons it.</a:t>
-                </a:r>
-              </a:p>
             </p:txBody>
           </p:sp>
         </mc:Choice>
       </mc:AlternateContent>
+      <p:pic>
+        <p:nvPicPr>
+          <p:cNvPr descr="slides_files/figure-pptx/cell-3-output-1.png" id="0" name="Picture 1"/>
+          <p:cNvPicPr>
+            <a:picLocks noGrp="1" noChangeAspect="1"/>
+          </p:cNvPicPr>
+          <p:nvPr/>
+        </p:nvPicPr>
+        <p:blipFill>
+          <a:blip r:embed="rId2"/>
+          <a:stretch>
+            <a:fillRect/>
+          </a:stretch>
+        </p:blipFill>
+        <p:spPr bwMode="auto">
+          <a:xfrm>
+            <a:off x="3568700" y="1397000"/>
+            <a:ext cx="5105400" cy="2006600"/>
+          </a:xfrm>
+          <a:prstGeom prst="rect">
+            <a:avLst/>
+          </a:prstGeom>
+          <a:noFill/>
+          <a:ln w="9525">
+            <a:noFill/>
+            <a:headEnd/>
+            <a:tailEnd/>
+          </a:ln>
+        </p:spPr>
+      </p:pic>
     </p:spTree>
   </p:cSld>
 </p:sld>
 </file>
 
-<file path=ppt/slides/slide12.xml><?xml version="1.0" encoding="utf-8"?>
+<file path=ppt/slides/slide14.xml><?xml version="1.0" encoding="utf-8"?>
 <p:sld xmlns:a="http://schemas.openxmlformats.org/drawingml/2006/main" xmlns:r="http://schemas.openxmlformats.org/officeDocument/2006/relationships" xmlns:p="http://schemas.openxmlformats.org/presentationml/2006/main">
   <p:cSld>
     <p:spTree>
@@ -3956,20 +4413,15 @@
       </p:grpSpPr>
       <p:sp>
         <p:nvSpPr>
-          <p:cNvPr id="2" name="Title 1"/>
-          <p:cNvSpPr>
-            <a:spLocks noGrp="1"/>
-          </p:cNvSpPr>
-          <p:nvPr>
-            <p:ph type="title"/>
-          </p:nvPr>
-        </p:nvSpPr>
-        <p:spPr>
-          <a:xfrm>
-            <a:off x="722313" y="3305176"/>
-            <a:ext cx="7772400" cy="1021556"/>
-          </a:xfrm>
-        </p:spPr>
+          <p:cNvPr id="3" name="Content Placeholder 2"/>
+          <p:cNvSpPr>
+            <a:spLocks noGrp="1"/>
+          </p:cNvSpPr>
+          <p:nvPr>
+            <p:ph idx="1"/>
+          </p:nvPr>
+        </p:nvSpPr>
+        <p:spPr/>
         <p:txBody>
           <a:bodyPr/>
           <a:lstStyle/>
@@ -3979,7 +4431,7 @@
             </a:pPr>
             <a:r>
               <a:rPr/>
-              <a:t>2.3 Route 2 — geometry</a:t>
+              <a:t>Convexity is why there is one answer. Session 07 gives it up, and pays for it.</a:t>
             </a:r>
           </a:p>
         </p:txBody>
@@ -3989,7 +4441,7 @@
 </p:sld>
 </file>
 
-<file path=ppt/slides/slide13.xml><?xml version="1.0" encoding="utf-8"?>
+<file path=ppt/slides/slide15.xml><?xml version="1.0" encoding="utf-8"?>
 <p:sld xmlns:a="http://schemas.openxmlformats.org/drawingml/2006/main" xmlns:r="http://schemas.openxmlformats.org/officeDocument/2006/relationships" xmlns:p="http://schemas.openxmlformats.org/presentationml/2006/main">
   <p:cSld>
     <p:spTree>
@@ -4016,7 +4468,12 @@
             <p:ph type="title"/>
           </p:nvPr>
         </p:nvSpPr>
-        <p:spPr/>
+        <p:spPr>
+          <a:xfrm>
+            <a:off x="722313" y="1850000"/>
+            <a:ext cx="7772400" cy="1300000"/>
+          </a:xfrm>
+        </p:spPr>
         <p:txBody>
           <a:bodyPr/>
           <a:lstStyle/>
@@ -4026,7 +4483,54 @@
             </a:pPr>
             <a:r>
               <a:rPr/>
-              <a:t>The projection theorem</a:t>
+              <a:t>4 · Route 2 — geometry</a:t>
+            </a:r>
+          </a:p>
+        </p:txBody>
+      </p:sp>
+    </p:spTree>
+  </p:cSld>
+</p:sld>
+</file>
+
+<file path=ppt/slides/slide16.xml><?xml version="1.0" encoding="utf-8"?>
+<p:sld xmlns:a="http://schemas.openxmlformats.org/drawingml/2006/main" xmlns:r="http://schemas.openxmlformats.org/officeDocument/2006/relationships" xmlns:p="http://schemas.openxmlformats.org/presentationml/2006/main">
+  <p:cSld>
+    <p:spTree>
+      <p:nvGrpSpPr>
+        <p:cNvPr id="1" name=""/>
+        <p:cNvGrpSpPr/>
+        <p:nvPr/>
+      </p:nvGrpSpPr>
+      <p:grpSpPr>
+        <a:xfrm>
+          <a:off x="0" y="0"/>
+          <a:ext cx="0" cy="0"/>
+          <a:chOff x="0" y="0"/>
+          <a:chExt cx="0" cy="0"/>
+        </a:xfrm>
+      </p:grpSpPr>
+      <p:sp>
+        <p:nvSpPr>
+          <p:cNvPr id="2" name="Title 1"/>
+          <p:cNvSpPr>
+            <a:spLocks noGrp="1"/>
+          </p:cNvSpPr>
+          <p:nvPr>
+            <p:ph type="title"/>
+          </p:nvPr>
+        </p:nvSpPr>
+        <p:spPr/>
+        <p:txBody>
+          <a:bodyPr/>
+          <a:lstStyle/>
+          <a:p>
+            <a:pPr lvl="0" indent="0" marL="0">
+              <a:buNone/>
+            </a:pPr>
+            <a:r>
+              <a:rPr/>
+              <a:t>The question, restated</a:t>
             </a:r>
           </a:p>
         </p:txBody>
@@ -4063,7 +4567,7 @@
                 </a14:m>
                 <a:r>
                   <a:rPr/>
-                  <a:t> ranges over </a:t>
+                  <a:t> can only reach points in </a:t>
                 </a:r>
                 <a14:m>
                   <m:oMath xmlns:m="http://schemas.openxmlformats.org/officeDocument/2006/math">
@@ -4091,7 +4595,7 @@
                 </a14:m>
                 <a:r>
                   <a:rPr/>
-                  <a:t>, a </a:t>
+                  <a:t> — a </a:t>
                 </a:r>
                 <a14:m>
                   <m:oMath xmlns:m="http://schemas.openxmlformats.org/officeDocument/2006/math">
@@ -4135,7 +4639,7 @@
                 </a:pPr>
                 <a:r>
                   <a:rPr/>
-                  <a:t>Minimising </a:t>
+                  <a:t>So minimising </a:t>
                 </a:r>
                 <a14:m>
                   <m:oMath xmlns:m="http://schemas.openxmlformats.org/officeDocument/2006/math">
@@ -4170,39 +4674,16 @@
                 </a14:m>
                 <a:r>
                   <a:rPr/>
-                  <a:t> means: </a:t>
-                </a:r>
-                <a:r>
-                  <a:rPr b="1"/>
-                  <a:t>find the point in </a:t>
-                </a:r>
-                <a14:m>
-                  <m:oMath xmlns:m="http://schemas.openxmlformats.org/officeDocument/2006/math">
-                    <m:r>
-                      <m:rPr>
-                        <m:sty m:val="p"/>
-                        <m:scr m:val="script"/>
-                      </m:rPr>
-                      <m:t>C</m:t>
-                    </m:r>
-                    <m:d>
-                      <m:dPr>
-                        <m:begChr m:val="("/>
-                        <m:sepChr m:val=""/>
-                        <m:endChr m:val=")"/>
-                        <m:grow/>
-                      </m:dPr>
-                      <m:e>
-                        <m:r>
-                          <m:t>X</m:t>
-                        </m:r>
-                      </m:e>
-                    </m:d>
-                  </m:oMath>
-                </a14:m>
-                <a:r>
-                  <a:rPr b="1"/>
-                  <a:t> closest to </a:t>
+                  <a:t> asks:</a:t>
+                </a:r>
+              </a:p>
+              <a:p>
+                <a:pPr lvl="0" indent="0" marL="1270000">
+                  <a:buNone/>
+                </a:pPr>
+                <a:r>
+                  <a:rPr sz="2000" b="1"/>
+                  <a:t>which point of that subspace is closest to </a:t>
                 </a:r>
                 <a14:m>
                   <m:oMath xmlns:m="http://schemas.openxmlformats.org/officeDocument/2006/math">
@@ -4212,143 +4693,8 @@
                   </m:oMath>
                 </a14:m>
                 <a:r>
-                  <a:rPr b="1"/>
-                  <a:t>.</a:t>
-                </a:r>
-              </a:p>
-              <a:p>
-                <a:pPr lvl="0" indent="0" marL="0">
-                  <a:buNone/>
-                </a:pPr>
-                <a:r>
-                  <a:rPr/>
-                  <a:t>By the projection theorem that point is the orthogonal projection of </a:t>
-                </a:r>
-                <a14:m>
-                  <m:oMath xmlns:m="http://schemas.openxmlformats.org/officeDocument/2006/math">
-                    <m:r>
-                      <m:t>y</m:t>
-                    </m:r>
-                  </m:oMath>
-                </a14:m>
-                <a:r>
-                  <a:rPr/>
-                  <a:t> onto </a:t>
-                </a:r>
-                <a14:m>
-                  <m:oMath xmlns:m="http://schemas.openxmlformats.org/officeDocument/2006/math">
-                    <m:r>
-                      <m:rPr>
-                        <m:sty m:val="p"/>
-                        <m:scr m:val="script"/>
-                      </m:rPr>
-                      <m:t>C</m:t>
-                    </m:r>
-                    <m:d>
-                      <m:dPr>
-                        <m:begChr m:val="("/>
-                        <m:sepChr m:val=""/>
-                        <m:endChr m:val=")"/>
-                        <m:grow/>
-                      </m:dPr>
-                      <m:e>
-                        <m:r>
-                          <m:t>X</m:t>
-                        </m:r>
-                      </m:e>
-                    </m:d>
-                  </m:oMath>
-                </a14:m>
-                <a:r>
-                  <a:rPr/>
-                  <a:t>, characterised by the residual being orthogonal to the subspace:</a:t>
-                </a:r>
-              </a:p>
-              <a:p>
-                <a:pPr lvl="0" indent="0" marL="0">
-                  <a:buNone/>
-                </a:pPr>
-                <a14:m>
-                  <m:oMathPara xmlns:m="http://schemas.openxmlformats.org/officeDocument/2006/math">
-                    <m:oMathParaPr>
-                      <m:jc m:val="center"/>
-                    </m:oMathParaPr>
-                    <m:oMath>
-                      <m:sSup>
-                        <m:e>
-                          <m:r>
-                            <m:t>X</m:t>
-                          </m:r>
-                        </m:e>
-                        <m:sup>
-                          <m:r>
-                            <m:rPr>
-                              <m:sty m:val="p"/>
-                            </m:rPr>
-                            <m:t>⊤</m:t>
-                          </m:r>
-                        </m:sup>
-                      </m:sSup>
-                      <m:d>
-                        <m:dPr>
-                          <m:begChr m:val="("/>
-                          <m:sepChr m:val=""/>
-                          <m:endChr m:val=")"/>
-                          <m:grow/>
-                        </m:dPr>
-                        <m:e>
-                          <m:r>
-                            <m:t>y</m:t>
-                          </m:r>
-                          <m:r>
-                            <m:rPr>
-                              <m:sty m:val="p"/>
-                            </m:rPr>
-                            <m:t>−</m:t>
-                          </m:r>
-                          <m:r>
-                            <m:t>X</m:t>
-                          </m:r>
-                          <m:acc>
-                            <m:accPr>
-                              <m:chr m:val="̂"/>
-                            </m:accPr>
-                            <m:e>
-                              <m:r>
-                                <m:t>β</m:t>
-                              </m:r>
-                            </m:e>
-                          </m:acc>
-                        </m:e>
-                      </m:d>
-                      <m:r>
-                        <m:rPr>
-                          <m:sty m:val="p"/>
-                        </m:rPr>
-                        <m:t>=</m:t>
-                      </m:r>
-                      <m:r>
-                        <m:t>0</m:t>
-                      </m:r>
-                    </m:oMath>
-                  </m:oMathPara>
-                </a14:m>
-              </a:p>
-              <a:p>
-                <a:pPr lvl="0" indent="0" marL="0">
-                  <a:buNone/>
-                </a:pPr>
-                <a:r>
-                  <a:rPr/>
-                  <a:t>Which </a:t>
-                </a:r>
-                <a:r>
-                  <a:rPr i="1"/>
-                  <a:t>is</a:t>
-                </a:r>
-                <a:r>
-                  <a:rPr/>
-                  <a:t> the normal equations. The two routes are the same statement in different clothes.</a:t>
+                  <a:rPr sz="2000" b="1"/>
+                  <a:t>?</a:t>
                 </a:r>
               </a:p>
             </p:txBody>
@@ -4360,7 +4706,211 @@
 </p:sld>
 </file>
 
-<file path=ppt/slides/slide14.xml><?xml version="1.0" encoding="utf-8"?>
+<file path=ppt/slides/slide17.xml><?xml version="1.0" encoding="utf-8"?>
+<p:sld xmlns:a="http://schemas.openxmlformats.org/drawingml/2006/main" xmlns:r="http://schemas.openxmlformats.org/officeDocument/2006/relationships" xmlns:p="http://schemas.openxmlformats.org/presentationml/2006/main">
+  <p:cSld>
+    <p:spTree>
+      <p:nvGrpSpPr>
+        <p:cNvPr id="1" name=""/>
+        <p:cNvGrpSpPr/>
+        <p:nvPr/>
+      </p:nvGrpSpPr>
+      <p:grpSpPr>
+        <a:xfrm>
+          <a:off x="0" y="0"/>
+          <a:ext cx="0" cy="0"/>
+          <a:chOff x="0" y="0"/>
+          <a:chExt cx="0" cy="0"/>
+        </a:xfrm>
+      </p:grpSpPr>
+      <p:sp>
+        <p:nvSpPr>
+          <p:cNvPr id="2" name="Title 1"/>
+          <p:cNvSpPr>
+            <a:spLocks noGrp="1"/>
+          </p:cNvSpPr>
+          <p:nvPr>
+            <p:ph type="title"/>
+          </p:nvPr>
+        </p:nvSpPr>
+        <p:spPr/>
+        <p:txBody>
+          <a:bodyPr/>
+          <a:lstStyle/>
+          <a:p>
+            <a:pPr lvl="0" indent="0" marL="0">
+              <a:buNone/>
+            </a:pPr>
+            <a:r>
+              <a:rPr/>
+              <a:t>The answer is a right angle</a:t>
+            </a:r>
+          </a:p>
+        </p:txBody>
+      </p:sp>
+      <p:pic>
+        <p:nvPicPr>
+          <p:cNvPr descr="slides_files/figure-pptx/cell-4-output-1.png" id="0" name="Picture 1"/>
+          <p:cNvPicPr>
+            <a:picLocks noGrp="1" noChangeAspect="1"/>
+          </p:cNvPicPr>
+          <p:nvPr/>
+        </p:nvPicPr>
+        <p:blipFill>
+          <a:blip r:embed="rId2"/>
+          <a:stretch>
+            <a:fillRect/>
+          </a:stretch>
+        </p:blipFill>
+        <p:spPr bwMode="auto">
+          <a:xfrm>
+            <a:off x="1346200" y="1193800"/>
+            <a:ext cx="6438900" cy="3390900"/>
+          </a:xfrm>
+          <a:prstGeom prst="rect">
+            <a:avLst/>
+          </a:prstGeom>
+          <a:noFill/>
+          <a:ln w="9525">
+            <a:noFill/>
+            <a:headEnd/>
+            <a:tailEnd/>
+          </a:ln>
+        </p:spPr>
+      </p:pic>
+    </p:spTree>
+  </p:cSld>
+</p:sld>
+</file>
+
+<file path=ppt/slides/slide18.xml><?xml version="1.0" encoding="utf-8"?>
+<p:sld xmlns:a="http://schemas.openxmlformats.org/drawingml/2006/main" xmlns:r="http://schemas.openxmlformats.org/officeDocument/2006/relationships" xmlns:p="http://schemas.openxmlformats.org/presentationml/2006/main">
+  <p:cSld>
+    <p:spTree>
+      <p:nvGrpSpPr>
+        <p:cNvPr id="1" name=""/>
+        <p:cNvGrpSpPr/>
+        <p:nvPr/>
+      </p:nvGrpSpPr>
+      <p:grpSpPr>
+        <a:xfrm>
+          <a:off x="0" y="0"/>
+          <a:ext cx="0" cy="0"/>
+          <a:chOff x="0" y="0"/>
+          <a:chExt cx="0" cy="0"/>
+        </a:xfrm>
+      </p:grpSpPr>
+      <mc:AlternateContent xmlns:mc="http://schemas.openxmlformats.org/markup-compatibility/2006">
+        <mc:Choice xmlns:a14="http://schemas.microsoft.com/office/drawing/2010/main" Requires="a14">
+          <p:sp>
+            <p:nvSpPr>
+              <p:cNvPr id="3" name="Content Placeholder 2"/>
+              <p:cNvSpPr>
+                <a:spLocks noGrp="1"/>
+              </p:cNvSpPr>
+              <p:nvPr>
+                <p:ph idx="1"/>
+              </p:nvPr>
+            </p:nvSpPr>
+            <p:spPr/>
+            <p:txBody>
+              <a:bodyPr/>
+              <a:lstStyle/>
+              <a:p>
+                <a:pPr lvl="0" indent="0" marL="0">
+                  <a:buNone/>
+                </a:pPr>
+                <a:r>
+                  <a:rPr/>
+                  <a:t>The closest point is the </a:t>
+                </a:r>
+                <a:r>
+                  <a:rPr b="1"/>
+                  <a:t>orthogonal projection</a:t>
+                </a:r>
+                <a:r>
+                  <a:rPr/>
+                  <a:t>, so the residual is perpendicular to the subspace: </a:t>
+                </a:r>
+                <a14:m>
+                  <m:oMath xmlns:m="http://schemas.openxmlformats.org/officeDocument/2006/math">
+                    <m:sSup>
+                      <m:e>
+                        <m:r>
+                          <m:t>X</m:t>
+                        </m:r>
+                      </m:e>
+                      <m:sup>
+                        <m:r>
+                          <m:rPr>
+                            <m:sty m:val="p"/>
+                          </m:rPr>
+                          <m:t>⊤</m:t>
+                        </m:r>
+                      </m:sup>
+                    </m:sSup>
+                    <m:d>
+                      <m:dPr>
+                        <m:begChr m:val="("/>
+                        <m:sepChr m:val=""/>
+                        <m:endChr m:val=")"/>
+                        <m:grow/>
+                      </m:dPr>
+                      <m:e>
+                        <m:r>
+                          <m:t>y</m:t>
+                        </m:r>
+                        <m:r>
+                          <m:rPr>
+                            <m:sty m:val="p"/>
+                          </m:rPr>
+                          <m:t>−</m:t>
+                        </m:r>
+                        <m:r>
+                          <m:t>X</m:t>
+                        </m:r>
+                        <m:acc>
+                          <m:accPr>
+                            <m:chr m:val="̂"/>
+                          </m:accPr>
+                          <m:e>
+                            <m:r>
+                              <m:t>β</m:t>
+                            </m:r>
+                          </m:e>
+                        </m:acc>
+                      </m:e>
+                    </m:d>
+                    <m:r>
+                      <m:rPr>
+                        <m:sty m:val="p"/>
+                      </m:rPr>
+                      <m:t>=</m:t>
+                    </m:r>
+                    <m:r>
+                      <m:t>0</m:t>
+                    </m:r>
+                  </m:oMath>
+                </a14:m>
+                <a:r>
+                  <a:rPr/>
+                  <a:t> — </a:t>
+                </a:r>
+                <a:r>
+                  <a:rPr i="1"/>
+                  <a:t>which is the normal equations again.</a:t>
+                </a:r>
+              </a:p>
+            </p:txBody>
+          </p:sp>
+        </mc:Choice>
+      </mc:AlternateContent>
+    </p:spTree>
+  </p:cSld>
+</p:sld>
+</file>
+
+<file path=ppt/slides/slide19.xml><?xml version="1.0" encoding="utf-8"?>
 <p:sld xmlns:a="http://schemas.openxmlformats.org/drawingml/2006/main" xmlns:r="http://schemas.openxmlformats.org/officeDocument/2006/relationships" xmlns:p="http://schemas.openxmlformats.org/presentationml/2006/main">
   <p:cSld>
     <p:spTree>
@@ -4632,100 +5182,6 @@
                 </a14:m>
               </a:p>
               <a:p>
-                <a:pPr lvl="0" indent="0" marL="0">
-                  <a:buNone/>
-                </a:pPr>
-                <a14:m>
-                  <m:oMath xmlns:m="http://schemas.openxmlformats.org/officeDocument/2006/math">
-                    <m:r>
-                      <m:t>H</m:t>
-                    </m:r>
-                  </m:oMath>
-                </a14:m>
-                <a:r>
-                  <a:rPr/>
-                  <a:t> puts the hat on </a:t>
-                </a:r>
-                <a14:m>
-                  <m:oMath xmlns:m="http://schemas.openxmlformats.org/officeDocument/2006/math">
-                    <m:r>
-                      <m:t>y</m:t>
-                    </m:r>
-                  </m:oMath>
-                </a14:m>
-                <a:r>
-                  <a:rPr/>
-                  <a:t>. The last identity says fitted values and residuals share no information.</a:t>
-                </a:r>
-              </a:p>
-            </p:txBody>
-          </p:sp>
-        </mc:Choice>
-      </mc:AlternateContent>
-    </p:spTree>
-  </p:cSld>
-</p:sld>
-</file>
-
-<file path=ppt/slides/slide15.xml><?xml version="1.0" encoding="utf-8"?>
-<p:sld xmlns:a="http://schemas.openxmlformats.org/drawingml/2006/main" xmlns:r="http://schemas.openxmlformats.org/officeDocument/2006/relationships" xmlns:p="http://schemas.openxmlformats.org/presentationml/2006/main">
-  <p:cSld>
-    <p:spTree>
-      <p:nvGrpSpPr>
-        <p:cNvPr id="1" name=""/>
-        <p:cNvGrpSpPr/>
-        <p:nvPr/>
-      </p:nvGrpSpPr>
-      <p:grpSpPr>
-        <a:xfrm>
-          <a:off x="0" y="0"/>
-          <a:ext cx="0" cy="0"/>
-          <a:chOff x="0" y="0"/>
-          <a:chExt cx="0" cy="0"/>
-        </a:xfrm>
-      </p:grpSpPr>
-      <p:sp>
-        <p:nvSpPr>
-          <p:cNvPr id="2" name="Title 1"/>
-          <p:cNvSpPr>
-            <a:spLocks noGrp="1"/>
-          </p:cNvSpPr>
-          <p:nvPr>
-            <p:ph type="title"/>
-          </p:nvPr>
-        </p:nvSpPr>
-        <p:spPr/>
-        <p:txBody>
-          <a:bodyPr/>
-          <a:lstStyle/>
-          <a:p>
-            <a:pPr lvl="0" indent="0" marL="0">
-              <a:buNone/>
-            </a:pPr>
-            <a:r>
-              <a:rPr/>
-              <a:t>Consequences worth internalising</a:t>
-            </a:r>
-          </a:p>
-        </p:txBody>
-      </p:sp>
-      <mc:AlternateContent xmlns:mc="http://schemas.openxmlformats.org/markup-compatibility/2006">
-        <mc:Choice xmlns:a14="http://schemas.microsoft.com/office/drawing/2010/main" Requires="a14">
-          <p:sp>
-            <p:nvSpPr>
-              <p:cNvPr id="3" name="Content Placeholder 2"/>
-              <p:cNvSpPr>
-                <a:spLocks noGrp="1"/>
-              </p:cNvSpPr>
-              <p:nvPr>
-                <p:ph idx="1"/>
-              </p:nvPr>
-            </p:nvSpPr>
-            <p:spPr/>
-            <p:txBody>
-              <a:bodyPr/>
-              <a:lstStyle/>
-              <a:p>
                 <a:pPr lvl="0"/>
                 <a14:m>
                   <m:oMath xmlns:m="http://schemas.openxmlformats.org/officeDocument/2006/math">
@@ -4767,7 +5223,7 @@
                 </a14:m>
                 <a:r>
                   <a:rPr/>
-                  <a:t> — the projection uses exactly </a:t>
+                  <a:t> — the projection spends exactly </a:t>
                 </a:r>
                 <a14:m>
                   <m:oMath xmlns:m="http://schemas.openxmlformats.org/officeDocument/2006/math">
@@ -4848,57 +5304,6 @@
                 <a:r>
                   <a:rPr b="1"/>
                   <a:t>leverage</a:t>
-                </a:r>
-                <a:r>
-                  <a:rPr/>
-                  <a:t>: how much </a:t>
-                </a:r>
-                <a14:m>
-                  <m:oMath xmlns:m="http://schemas.openxmlformats.org/officeDocument/2006/math">
-                    <m:sSub>
-                      <m:e>
-                        <m:acc>
-                          <m:accPr>
-                            <m:chr m:val="̂"/>
-                          </m:accPr>
-                          <m:e>
-                            <m:r>
-                              <m:t>y</m:t>
-                            </m:r>
-                          </m:e>
-                        </m:acc>
-                      </m:e>
-                      <m:sub>
-                        <m:r>
-                          <m:t>i</m:t>
-                        </m:r>
-                      </m:sub>
-                    </m:sSub>
-                  </m:oMath>
-                </a14:m>
-                <a:r>
-                  <a:rPr/>
-                  <a:t> moves when </a:t>
-                </a:r>
-                <a14:m>
-                  <m:oMath xmlns:m="http://schemas.openxmlformats.org/officeDocument/2006/math">
-                    <m:sSub>
-                      <m:e>
-                        <m:r>
-                          <m:t>y</m:t>
-                        </m:r>
-                      </m:e>
-                      <m:sub>
-                        <m:r>
-                          <m:t>i</m:t>
-                        </m:r>
-                      </m:sub>
-                    </m:sSub>
-                  </m:oMath>
-                </a14:m>
-                <a:r>
-                  <a:rPr/>
-                  <a:t> moves</a:t>
                 </a:r>
               </a:p>
               <a:p>
@@ -5007,7 +5412,24 @@
                 </a14:m>
                 <a:r>
                   <a:rPr/>
-                  <a:t> is Pythagoras</a:t>
+                  <a:t> — Pythagoras</a:t>
+                </a:r>
+              </a:p>
+              <a:p>
+                <a:pPr lvl="0" indent="0" marL="0">
+                  <a:buNone/>
+                </a:pPr>
+                <a:r>
+                  <a:rPr/>
+                  <a:t>That last identity says fitted values and residuals share </a:t>
+                </a:r>
+                <a:r>
+                  <a:rPr b="1"/>
+                  <a:t>no</a:t>
+                </a:r>
+                <a:r>
+                  <a:rPr/>
+                  <a:t> information. It is the whole reason a residual plot is informative.</a:t>
                 </a:r>
               </a:p>
             </p:txBody>
@@ -5019,7 +5441,300 @@
 </p:sld>
 </file>
 
-<file path=ppt/slides/slide16.xml><?xml version="1.0" encoding="utf-8"?>
+<file path=ppt/slides/slide2.xml><?xml version="1.0" encoding="utf-8"?>
+<p:sld xmlns:a="http://schemas.openxmlformats.org/drawingml/2006/main" xmlns:r="http://schemas.openxmlformats.org/officeDocument/2006/relationships" xmlns:p="http://schemas.openxmlformats.org/presentationml/2006/main">
+  <p:cSld>
+    <p:spTree>
+      <p:nvGrpSpPr>
+        <p:cNvPr id="1" name=""/>
+        <p:cNvGrpSpPr/>
+        <p:nvPr/>
+      </p:nvGrpSpPr>
+      <p:grpSpPr>
+        <a:xfrm>
+          <a:off x="0" y="0"/>
+          <a:ext cx="0" cy="0"/>
+          <a:chOff x="0" y="0"/>
+          <a:chExt cx="0" cy="0"/>
+        </a:xfrm>
+      </p:grpSpPr>
+      <p:sp>
+        <p:nvSpPr>
+          <p:cNvPr id="3" name="Content Placeholder 2"/>
+          <p:cNvSpPr>
+            <a:spLocks noGrp="1"/>
+          </p:cNvSpPr>
+          <p:nvPr>
+            <p:ph idx="1"/>
+          </p:nvPr>
+        </p:nvSpPr>
+        <p:spPr/>
+        <p:txBody>
+          <a:bodyPr/>
+          <a:lstStyle/>
+          <a:p>
+            <a:pPr lvl="0" indent="0" marL="0">
+              <a:spcBef>
+                <a:spcPts val="3000"/>
+              </a:spcBef>
+              <a:buNone/>
+            </a:pPr>
+            <a:r>
+              <a:rPr b="1"/>
+              <a:t>Why is the most-used estimator in economics a right-angle triangle?</a:t>
+            </a:r>
+          </a:p>
+        </p:txBody>
+      </p:sp>
+    </p:spTree>
+  </p:cSld>
+</p:sld>
+</file>
+
+<file path=ppt/slides/slide20.xml><?xml version="1.0" encoding="utf-8"?>
+<p:sld xmlns:a="http://schemas.openxmlformats.org/drawingml/2006/main" xmlns:r="http://schemas.openxmlformats.org/officeDocument/2006/relationships" xmlns:p="http://schemas.openxmlformats.org/presentationml/2006/main">
+  <p:cSld>
+    <p:spTree>
+      <p:nvGrpSpPr>
+        <p:cNvPr id="1" name=""/>
+        <p:cNvGrpSpPr/>
+        <p:nvPr/>
+      </p:nvGrpSpPr>
+      <p:grpSpPr>
+        <a:xfrm>
+          <a:off x="0" y="0"/>
+          <a:ext cx="0" cy="0"/>
+          <a:chOff x="0" y="0"/>
+          <a:chExt cx="0" cy="0"/>
+        </a:xfrm>
+      </p:grpSpPr>
+      <mc:AlternateContent xmlns:mc="http://schemas.openxmlformats.org/markup-compatibility/2006">
+        <mc:Choice xmlns:a14="http://schemas.microsoft.com/office/drawing/2010/main" Requires="a14">
+          <p:sp>
+            <p:nvSpPr>
+              <p:cNvPr id="2" name="Title 1"/>
+              <p:cNvSpPr>
+                <a:spLocks noGrp="1"/>
+              </p:cNvSpPr>
+              <p:nvPr>
+                <p:ph type="title"/>
+              </p:nvPr>
+            </p:nvSpPr>
+            <p:spPr>
+              <a:xfrm>
+                <a:off x="722313" y="1850000"/>
+                <a:ext cx="7772400" cy="1300000"/>
+              </a:xfrm>
+            </p:spPr>
+            <p:txBody>
+              <a:bodyPr/>
+              <a:lstStyle/>
+              <a:p>
+                <a:pPr lvl="0" indent="0" marL="0">
+                  <a:buNone/>
+                </a:pPr>
+                <a:r>
+                  <a:rPr/>
+                  <a:t>5 · Leverage and </a:t>
+                </a:r>
+                <a14:m>
+                  <m:oMath xmlns:m="http://schemas.openxmlformats.org/officeDocument/2006/math">
+                    <m:sSup>
+                      <m:e>
+                        <m:r>
+                          <m:t>R</m:t>
+                        </m:r>
+                      </m:e>
+                      <m:sup>
+                        <m:r>
+                          <m:t>2</m:t>
+                        </m:r>
+                      </m:sup>
+                    </m:sSup>
+                  </m:oMath>
+                </a14:m>
+              </a:p>
+            </p:txBody>
+          </p:sp>
+        </mc:Choice>
+      </mc:AlternateContent>
+    </p:spTree>
+  </p:cSld>
+</p:sld>
+</file>
+
+<file path=ppt/slides/slide21.xml><?xml version="1.0" encoding="utf-8"?>
+<p:sld xmlns:a="http://schemas.openxmlformats.org/drawingml/2006/main" xmlns:r="http://schemas.openxmlformats.org/officeDocument/2006/relationships" xmlns:p="http://schemas.openxmlformats.org/presentationml/2006/main">
+  <p:cSld>
+    <p:spTree>
+      <p:nvGrpSpPr>
+        <p:cNvPr id="1" name=""/>
+        <p:cNvGrpSpPr/>
+        <p:nvPr/>
+      </p:nvGrpSpPr>
+      <p:grpSpPr>
+        <a:xfrm>
+          <a:off x="0" y="0"/>
+          <a:ext cx="0" cy="0"/>
+          <a:chOff x="0" y="0"/>
+          <a:chExt cx="0" cy="0"/>
+        </a:xfrm>
+      </p:grpSpPr>
+      <p:sp>
+        <p:nvSpPr>
+          <p:cNvPr id="2" name="Title 1"/>
+          <p:cNvSpPr>
+            <a:spLocks noGrp="1"/>
+          </p:cNvSpPr>
+          <p:nvPr>
+            <p:ph type="title"/>
+          </p:nvPr>
+        </p:nvSpPr>
+        <p:spPr/>
+        <p:txBody>
+          <a:bodyPr/>
+          <a:lstStyle/>
+          <a:p>
+            <a:pPr lvl="0" indent="0" marL="0">
+              <a:buNone/>
+            </a:pPr>
+            <a:r>
+              <a:rPr/>
+              <a:t>Who is pulling the line?</a:t>
+            </a:r>
+          </a:p>
+        </p:txBody>
+      </p:sp>
+      <p:pic>
+        <p:nvPicPr>
+          <p:cNvPr descr="slides_files/figure-pptx/cell-5-output-1.png" id="0" name="Picture 1"/>
+          <p:cNvPicPr>
+            <a:picLocks noGrp="1" noChangeAspect="1"/>
+          </p:cNvPicPr>
+          <p:nvPr/>
+        </p:nvPicPr>
+        <p:blipFill>
+          <a:blip r:embed="rId2"/>
+          <a:stretch>
+            <a:fillRect/>
+          </a:stretch>
+        </p:blipFill>
+        <p:spPr bwMode="auto">
+          <a:xfrm>
+            <a:off x="1143000" y="1193800"/>
+            <a:ext cx="6858000" cy="3390900"/>
+          </a:xfrm>
+          <a:prstGeom prst="rect">
+            <a:avLst/>
+          </a:prstGeom>
+          <a:noFill/>
+          <a:ln w="9525">
+            <a:noFill/>
+            <a:headEnd/>
+            <a:tailEnd/>
+          </a:ln>
+        </p:spPr>
+      </p:pic>
+    </p:spTree>
+  </p:cSld>
+</p:sld>
+</file>
+
+<file path=ppt/slides/slide22.xml><?xml version="1.0" encoding="utf-8"?>
+<p:sld xmlns:a="http://schemas.openxmlformats.org/drawingml/2006/main" xmlns:r="http://schemas.openxmlformats.org/officeDocument/2006/relationships" xmlns:p="http://schemas.openxmlformats.org/presentationml/2006/main">
+  <p:cSld>
+    <p:spTree>
+      <p:nvGrpSpPr>
+        <p:cNvPr id="1" name=""/>
+        <p:cNvGrpSpPr/>
+        <p:nvPr/>
+      </p:nvGrpSpPr>
+      <p:grpSpPr>
+        <a:xfrm>
+          <a:off x="0" y="0"/>
+          <a:ext cx="0" cy="0"/>
+          <a:chOff x="0" y="0"/>
+          <a:chExt cx="0" cy="0"/>
+        </a:xfrm>
+      </p:grpSpPr>
+      <mc:AlternateContent xmlns:mc="http://schemas.openxmlformats.org/markup-compatibility/2006">
+        <mc:Choice xmlns:a14="http://schemas.microsoft.com/office/drawing/2010/main" Requires="a14">
+          <p:sp>
+            <p:nvSpPr>
+              <p:cNvPr id="3" name="Content Placeholder 2"/>
+              <p:cNvSpPr>
+                <a:spLocks noGrp="1"/>
+              </p:cNvSpPr>
+              <p:nvPr>
+                <p:ph idx="1"/>
+              </p:nvPr>
+            </p:nvSpPr>
+            <p:spPr/>
+            <p:txBody>
+              <a:bodyPr/>
+              <a:lstStyle/>
+              <a:p>
+                <a:pPr lvl="0" indent="0" marL="0">
+                  <a:buNone/>
+                </a:pPr>
+                <a:r>
+                  <a:rPr/>
+                  <a:t>High leverage is </a:t>
+                </a:r>
+                <a:r>
+                  <a:rPr b="1"/>
+                  <a:t>not</a:t>
+                </a:r>
+                <a:r>
+                  <a:rPr/>
+                  <a:t> an error. It means that observation has unusual regressors, so it moves </a:t>
+                </a:r>
+                <a14:m>
+                  <m:oMath xmlns:m="http://schemas.openxmlformats.org/officeDocument/2006/math">
+                    <m:sSub>
+                      <m:e>
+                        <m:acc>
+                          <m:accPr>
+                            <m:chr m:val="̂"/>
+                          </m:accPr>
+                          <m:e>
+                            <m:r>
+                              <m:t>y</m:t>
+                            </m:r>
+                          </m:e>
+                        </m:acc>
+                      </m:e>
+                      <m:sub>
+                        <m:r>
+                          <m:t>i</m:t>
+                        </m:r>
+                      </m:sub>
+                    </m:sSub>
+                  </m:oMath>
+                </a14:m>
+                <a:r>
+                  <a:rPr/>
+                  <a:t> a lot. High leverage </a:t>
+                </a:r>
+                <a:r>
+                  <a:rPr b="1"/>
+                  <a:t>and</a:t>
+                </a:r>
+                <a:r>
+                  <a:rPr/>
+                  <a:t> a large residual is what deserves a look.</a:t>
+                </a:r>
+              </a:p>
+            </p:txBody>
+          </p:sp>
+        </mc:Choice>
+      </mc:AlternateContent>
+    </p:spTree>
+  </p:cSld>
+</p:sld>
+</file>
+
+<file path=ppt/slides/slide23.xml><?xml version="1.0" encoding="utf-8"?>
 <p:sld xmlns:a="http://schemas.openxmlformats.org/drawingml/2006/main" xmlns:r="http://schemas.openxmlformats.org/officeDocument/2006/relationships" xmlns:p="http://schemas.openxmlformats.org/presentationml/2006/main">
   <p:cSld>
     <p:spTree>
@@ -5081,6 +5796,58 @@
           </p:sp>
         </mc:Choice>
       </mc:AlternateContent>
+      <p:pic>
+        <p:nvPicPr>
+          <p:cNvPr descr="slides_files/figure-pptx/cell-6-output-1.png" id="0" name="Picture 1"/>
+          <p:cNvPicPr>
+            <a:picLocks noGrp="1" noChangeAspect="1"/>
+          </p:cNvPicPr>
+          <p:nvPr/>
+        </p:nvPicPr>
+        <p:blipFill>
+          <a:blip r:embed="rId2"/>
+          <a:stretch>
+            <a:fillRect/>
+          </a:stretch>
+        </p:blipFill>
+        <p:spPr bwMode="auto">
+          <a:xfrm>
+            <a:off x="1143000" y="1193800"/>
+            <a:ext cx="6870700" cy="3390900"/>
+          </a:xfrm>
+          <a:prstGeom prst="rect">
+            <a:avLst/>
+          </a:prstGeom>
+          <a:noFill/>
+          <a:ln w="9525">
+            <a:noFill/>
+            <a:headEnd/>
+            <a:tailEnd/>
+          </a:ln>
+        </p:spPr>
+      </p:pic>
+    </p:spTree>
+  </p:cSld>
+</p:sld>
+</file>
+
+<file path=ppt/slides/slide24.xml><?xml version="1.0" encoding="utf-8"?>
+<p:sld xmlns:a="http://schemas.openxmlformats.org/drawingml/2006/main" xmlns:r="http://schemas.openxmlformats.org/officeDocument/2006/relationships" xmlns:p="http://schemas.openxmlformats.org/presentationml/2006/main">
+  <p:cSld>
+    <p:spTree>
+      <p:nvGrpSpPr>
+        <p:cNvPr id="1" name=""/>
+        <p:cNvGrpSpPr/>
+        <p:nvPr/>
+      </p:nvGrpSpPr>
+      <p:grpSpPr>
+        <a:xfrm>
+          <a:off x="0" y="0"/>
+          <a:ext cx="0" cy="0"/>
+          <a:chOff x="0" y="0"/>
+          <a:chExt cx="0" cy="0"/>
+        </a:xfrm>
+      </p:grpSpPr>
       <mc:AlternateContent xmlns:mc="http://schemas.openxmlformats.org/markup-compatibility/2006">
         <mc:Choice xmlns:a14="http://schemas.microsoft.com/office/drawing/2010/main" Requires="a14">
           <p:sp>
@@ -5097,15 +5864,6 @@
             <p:txBody>
               <a:bodyPr/>
               <a:lstStyle/>
-              <a:p>
-                <a:pPr lvl="0" indent="0" marL="0">
-                  <a:buNone/>
-                </a:pPr>
-                <a:r>
-                  <a:rPr/>
-                  <a:t>The decomposition is a right-angle triangle, so</a:t>
-                </a:r>
-              </a:p>
               <a:p>
                 <a:pPr lvl="0" indent="0" marL="0">
                   <a:buNone/>
@@ -5232,41 +5990,10 @@
                 </a:pPr>
                 <a:r>
                   <a:rPr/>
-                  <a:t>with </a:t>
-                </a:r>
-                <a14:m>
-                  <m:oMath xmlns:m="http://schemas.openxmlformats.org/officeDocument/2006/math">
-                    <m:r>
-                      <m:t>θ</m:t>
-                    </m:r>
-                  </m:oMath>
-                </a14:m>
-                <a:r>
-                  <a:rPr/>
-                  <a:t> the angle between </a:t>
-                </a:r>
-                <a14:m>
-                  <m:oMath xmlns:m="http://schemas.openxmlformats.org/officeDocument/2006/math">
-                    <m:r>
-                      <m:t>y</m:t>
-                    </m:r>
-                  </m:oMath>
-                </a14:m>
-                <a:r>
-                  <a:rPr/>
-                  <a:t> and the space the regressors span.</a:t>
-                </a:r>
-              </a:p>
-              <a:p>
-                <a:pPr lvl="0" indent="0" marL="0">
-                  <a:buNone/>
-                </a:pPr>
-                <a:r>
-                  <a:rPr/>
                   <a:t>That is </a:t>
                 </a:r>
                 <a:r>
-                  <a:rPr i="1"/>
+                  <a:rPr b="1"/>
                   <a:t>all</a:t>
                 </a:r>
                 <a:r>
@@ -5291,7 +6018,7 @@
                 </a14:m>
                 <a:r>
                   <a:rPr/>
-                  <a:t> is — a statement about an angle. Not about whether the model is right, and not about whether anything causes anything.</a:t>
+                  <a:t> is: a statement about an angle. Not whether the model is right, not whether anything causes anything, and not whether it holds next year.</a:t>
                 </a:r>
               </a:p>
             </p:txBody>
@@ -5303,7 +6030,7 @@
 </p:sld>
 </file>
 
-<file path=ppt/slides/slide17.xml><?xml version="1.0" encoding="utf-8"?>
+<file path=ppt/slides/slide25.xml><?xml version="1.0" encoding="utf-8"?>
 <p:sld xmlns:a="http://schemas.openxmlformats.org/drawingml/2006/main" xmlns:r="http://schemas.openxmlformats.org/officeDocument/2006/relationships" xmlns:p="http://schemas.openxmlformats.org/presentationml/2006/main">
   <p:cSld>
     <p:spTree>
@@ -5332,8 +6059,8 @@
         </p:nvSpPr>
         <p:spPr>
           <a:xfrm>
-            <a:off x="722313" y="3305176"/>
-            <a:ext cx="7772400" cy="1021556"/>
+            <a:off x="722313" y="1850000"/>
+            <a:ext cx="7772400" cy="1300000"/>
           </a:xfrm>
         </p:spPr>
         <p:txBody>
@@ -5345,7 +6072,7 @@
             </a:pPr>
             <a:r>
               <a:rPr/>
-              <a:t>2.4 Frisch–Waugh–Lovell</a:t>
+              <a:t>6 · Frisch–Waugh–Lovell</a:t>
             </a:r>
           </a:p>
         </p:txBody>
@@ -5355,7 +6082,7 @@
 </p:sld>
 </file>
 
-<file path=ppt/slides/slide18.xml><?xml version="1.0" encoding="utf-8"?>
+<file path=ppt/slides/slide26.xml><?xml version="1.0" encoding="utf-8"?>
 <p:sld xmlns:a="http://schemas.openxmlformats.org/drawingml/2006/main" xmlns:r="http://schemas.openxmlformats.org/officeDocument/2006/relationships" xmlns:p="http://schemas.openxmlformats.org/presentationml/2006/main">
   <p:cSld>
     <p:spTree>
@@ -5392,7 +6119,7 @@
             </a:pPr>
             <a:r>
               <a:rPr/>
-              <a:t>Adding a regressor</a:t>
+              <a:t>The theorem</a:t>
             </a:r>
           </a:p>
         </p:txBody>
@@ -5500,7 +6227,15 @@
                 </a14:m>
                 <a:r>
                   <a:rPr/>
-                  <a:t> from the full regression equals the coefficient from regressing </a:t>
+                  <a:t> from the </a:t>
+                </a:r>
+                <a:r>
+                  <a:rPr b="1"/>
+                  <a:t>full</a:t>
+                </a:r>
+                <a:r>
+                  <a:rPr/>
+                  <a:t> regression equals the coefficient from regressing </a:t>
                 </a:r>
                 <a14:m>
                   <m:oMath xmlns:m="http://schemas.openxmlformats.org/officeDocument/2006/math">
@@ -5710,7 +6445,7 @@
                 </a14:m>
                 <a:r>
                   <a:rPr/>
-                  <a:t> is the residual-maker for </a:t>
+                  <a:t> is the residual-maker: it strips out everything </a:t>
                 </a:r>
                 <a14:m>
                   <m:oMath xmlns:m="http://schemas.openxmlformats.org/officeDocument/2006/math">
@@ -5730,27 +6465,7 @@
                 </a14:m>
                 <a:r>
                   <a:rPr/>
-                  <a:t>: it strips out everything </a:t>
-                </a:r>
-                <a14:m>
-                  <m:oMath xmlns:m="http://schemas.openxmlformats.org/officeDocument/2006/math">
-                    <m:sSub>
-                      <m:e>
-                        <m:r>
-                          <m:t>X</m:t>
-                        </m:r>
-                      </m:e>
-                      <m:sub>
-                        <m:r>
-                          <m:t>1</m:t>
-                        </m:r>
-                      </m:sub>
-                    </m:sSub>
-                  </m:oMath>
-                </a14:m>
-                <a:r>
-                  <a:rPr/>
-                  <a:t> explains.</a:t>
+                  <a:t> can explain.</a:t>
                 </a:r>
               </a:p>
             </p:txBody>
@@ -5762,7 +6477,7 @@
 </p:sld>
 </file>
 
-<file path=ppt/slides/slide19.xml><?xml version="1.0" encoding="utf-8"?>
+<file path=ppt/slides/slide27.xml><?xml version="1.0" encoding="utf-8"?>
 <p:sld xmlns:a="http://schemas.openxmlformats.org/drawingml/2006/main" xmlns:r="http://schemas.openxmlformats.org/officeDocument/2006/relationships" xmlns:p="http://schemas.openxmlformats.org/presentationml/2006/main">
   <p:cSld>
     <p:spTree>
@@ -5841,41 +6556,15 @@
             </a:pPr>
             <a:r>
               <a:rPr/>
-              <a:t>This single theorem:</a:t>
-            </a:r>
-          </a:p>
-          <a:p>
-            <a:pPr lvl="0"/>
+              <a:t>This is what “controlling for” </a:t>
+            </a:r>
+            <a:r>
+              <a:rPr i="1"/>
+              <a:t>means</a:t>
+            </a:r>
             <a:r>
               <a:rPr/>
-              <a:t>explains what “controlling for” means</a:t>
-            </a:r>
-          </a:p>
-          <a:p>
-            <a:pPr lvl="0"/>
-            <a:r>
-              <a:rPr/>
-              <a:t>explains why collinearity inflates variance</a:t>
-            </a:r>
-          </a:p>
-          <a:p>
-            <a:pPr lvl="0"/>
-            <a:r>
-              <a:rPr/>
-              <a:t>returns later as the foundation of </a:t>
-            </a:r>
-            <a:r>
-              <a:rPr b="1"/>
-              <a:t>double machine learning</a:t>
-            </a:r>
-          </a:p>
-          <a:p>
-            <a:pPr lvl="0" indent="0" marL="0">
-              <a:buNone/>
-            </a:pPr>
-            <a:r>
-              <a:rPr/>
-              <a:t>Learn it now. It is the most reused result in the course.</a:t>
+              <a:t> — not “holding constant” as a figure of speech, but projecting out, literally.</a:t>
             </a:r>
           </a:p>
         </p:txBody>
@@ -5885,7 +6574,7 @@
 </p:sld>
 </file>
 
-<file path=ppt/slides/slide2.xml><?xml version="1.0" encoding="utf-8"?>
+<file path=ppt/slides/slide28.xml><?xml version="1.0" encoding="utf-8"?>
 <p:sld xmlns:a="http://schemas.openxmlformats.org/drawingml/2006/main" xmlns:r="http://schemas.openxmlformats.org/officeDocument/2006/relationships" xmlns:p="http://schemas.openxmlformats.org/presentationml/2006/main">
   <p:cSld>
     <p:spTree>
@@ -5904,12 +6593,12 @@
       </p:grpSpPr>
       <p:sp>
         <p:nvSpPr>
-          <p:cNvPr id="3" name="Content Placeholder 2"/>
-          <p:cNvSpPr>
-            <a:spLocks noGrp="1"/>
-          </p:cNvSpPr>
-          <p:nvPr>
-            <p:ph idx="1"/>
+          <p:cNvPr id="2" name="Title 1"/>
+          <p:cNvSpPr>
+            <a:spLocks noGrp="1"/>
+          </p:cNvSpPr>
+          <p:nvPr>
+            <p:ph type="title"/>
           </p:nvPr>
         </p:nvSpPr>
         <p:spPr/>
@@ -5918,24 +6607,51 @@
           <a:lstStyle/>
           <a:p>
             <a:pPr lvl="0" indent="0" marL="0">
-              <a:spcBef>
-                <a:spcPts val="3000"/>
-              </a:spcBef>
               <a:buNone/>
             </a:pPr>
             <a:r>
-              <a:rPr b="1"/>
-              <a:t>Why is the most-used estimator in economics a right-angle triangle?</a:t>
-            </a:r>
-          </a:p>
-        </p:txBody>
-      </p:sp>
+              <a:rPr/>
+              <a:t>See it happen</a:t>
+            </a:r>
+          </a:p>
+        </p:txBody>
+      </p:sp>
+      <p:pic>
+        <p:nvPicPr>
+          <p:cNvPr descr="slides_files/figure-pptx/cell-7-output-1.png" id="0" name="Picture 1"/>
+          <p:cNvPicPr>
+            <a:picLocks noGrp="1" noChangeAspect="1"/>
+          </p:cNvPicPr>
+          <p:nvPr/>
+        </p:nvPicPr>
+        <p:blipFill>
+          <a:blip r:embed="rId2"/>
+          <a:stretch>
+            <a:fillRect/>
+          </a:stretch>
+        </p:blipFill>
+        <p:spPr bwMode="auto">
+          <a:xfrm>
+            <a:off x="787400" y="1193800"/>
+            <a:ext cx="7569200" cy="3390900"/>
+          </a:xfrm>
+          <a:prstGeom prst="rect">
+            <a:avLst/>
+          </a:prstGeom>
+          <a:noFill/>
+          <a:ln w="9525">
+            <a:noFill/>
+            <a:headEnd/>
+            <a:tailEnd/>
+          </a:ln>
+        </p:spPr>
+      </p:pic>
     </p:spTree>
   </p:cSld>
 </p:sld>
 </file>
 
-<file path=ppt/slides/slide20.xml><?xml version="1.0" encoding="utf-8"?>
+<file path=ppt/slides/slide29.xml><?xml version="1.0" encoding="utf-8"?>
 <p:sld xmlns:a="http://schemas.openxmlformats.org/drawingml/2006/main" xmlns:r="http://schemas.openxmlformats.org/officeDocument/2006/relationships" xmlns:p="http://schemas.openxmlformats.org/presentationml/2006/main">
   <p:cSld>
     <p:spTree>
@@ -5954,20 +6670,15 @@
       </p:grpSpPr>
       <p:sp>
         <p:nvSpPr>
-          <p:cNvPr id="2" name="Title 1"/>
-          <p:cNvSpPr>
-            <a:spLocks noGrp="1"/>
-          </p:cNvSpPr>
-          <p:nvPr>
-            <p:ph type="title"/>
-          </p:nvPr>
-        </p:nvSpPr>
-        <p:spPr>
-          <a:xfrm>
-            <a:off x="722313" y="3305176"/>
-            <a:ext cx="7772400" cy="1021556"/>
-          </a:xfrm>
-        </p:spPr>
+          <p:cNvPr id="3" name="Content Placeholder 2"/>
+          <p:cNvSpPr>
+            <a:spLocks noGrp="1"/>
+          </p:cNvSpPr>
+          <p:nvPr>
+            <p:ph idx="1"/>
+          </p:nvPr>
+        </p:nvSpPr>
+        <p:spPr/>
         <p:txBody>
           <a:bodyPr/>
           <a:lstStyle/>
@@ -5977,7 +6688,15 @@
             </a:pPr>
             <a:r>
               <a:rPr/>
-              <a:t>2.5 Numerical warning</a:t>
+              <a:t>Two routes, </a:t>
+            </a:r>
+            <a:r>
+              <a:rPr b="1"/>
+              <a:t>one number</a:t>
+            </a:r>
+            <a:r>
+              <a:rPr/>
+              <a:t>. That identity is what the theorem asserts — and you verify it yourself in the practice session.</a:t>
             </a:r>
           </a:p>
         </p:txBody>
@@ -5987,7 +6706,10 @@
 </p:sld>
 </file>
 
-<file path=ppt/slides/slide21.xml><?xml version="1.0" encoding="utf-8"?>
+<file path=ppt/slides/slide3.xml><?xml version="1.0" encoding="UTF-8"?><p:sld xmlns:a="http://schemas.openxmlformats.org/drawingml/2006/main" xmlns:r="http://schemas.openxmlformats.org/officeDocument/2006/relationships" xmlns:p="http://schemas.openxmlformats.org/presentationml/2006/main"><p:cSld><p:spTree><p:nvGrpSpPr><p:cNvPr id="1" name="" /><p:cNvGrpSpPr /><p:nvPr /></p:nvGrpSpPr><p:grpSpPr><a:xfrm><a:off x="0" y="0" /><a:ext cx="0" cy="0" /><a:chOff x="0" y="0" /><a:chExt cx="0" cy="0" /></a:xfrm></p:grpSpPr><p:sp><p:nvSpPr><p:cNvPr id="2" name="Title 1" /><p:cNvSpPr><a:spLocks noGrp="1" /></p:cNvSpPr><p:nvPr><p:ph type="title" /></p:nvPr></p:nvSpPr><p:spPr /><p:txBody><a:bodyPr /><a:lstStyle /><a:p><a:pPr lvl="0" indent="0" marL="0"><a:buNone /></a:pPr><a:r><a:rPr /><a:t>Outline</a:t></a:r></a:p></p:txBody></p:sp><p:graphicFrame><p:nvGraphicFramePr><p:cNvPr id="6" name="Content Placeholder 5" /><p:cNvGraphicFramePr><a:graphicFrameLocks noGrp="1" /></p:cNvGraphicFramePr><p:nvPr><p:ph idx="1" /></p:nvPr></p:nvGraphicFramePr><p:xfrm><a:off x="457200" y="1193800" /><a:ext cx="8229600" cy="3390900" /></p:xfrm><a:graphic><a:graphicData uri="http://schemas.openxmlformats.org/drawingml/2006/table"><a:tbl><a:tblPr firstRow="0" bandRow="1"><a:tableStyleId>{5C22544A-7EE6-4342-B048-85BDC9FD1C3A}</a:tableStyleId></a:tblPr><a:tblGrid><a:gridCol w="4114800" /><a:gridCol w="4114800" /></a:tblGrid><a:tr h="0"><a:tc><a:txBody><a:bodyPr /><a:lstStyle /><a:p><a:pPr lvl="0" indent="0" marL="0"><a:buNone /></a:pPr><a:r><a:rPr b="1" /><a:t>1</a:t></a:r></a:p></a:txBody></a:tc><a:tc><a:txBody><a:bodyPr /><a:lstStyle /><a:p><a:pPr lvl="0" indent="0" marL="0"><a:buNone /></a:pPr><a:r><a:rPr /><a:t>Where we are, and what this adds</a:t></a:r></a:p></a:txBody></a:tc></a:tr><a:tr h="0"><a:tc><a:txBody><a:bodyPr /><a:lstStyle /><a:p><a:pPr lvl="0" indent="0" marL="0"><a:buNone /></a:pPr><a:r><a:rPr b="1" /><a:t>2</a:t></a:r></a:p></a:txBody></a:tc><a:tc><a:txBody><a:bodyPr /><a:lstStyle /><a:p><a:pPr lvl="0" indent="0" marL="0"><a:buNone /></a:pPr><a:r><a:rPr /><a:t>The model in matrix form</a:t></a:r></a:p></a:txBody></a:tc></a:tr><a:tr h="0"><a:tc><a:txBody><a:bodyPr /><a:lstStyle /><a:p><a:pPr lvl="0" indent="0" marL="0"><a:buNone /></a:pPr><a:r><a:rPr b="1" /><a:t>3</a:t></a:r></a:p></a:txBody></a:tc><a:tc><a:txBody><a:bodyPr /><a:lstStyle /><a:p><a:pPr lvl="0" indent="0" marL="0"><a:buNone /></a:pPr><a:r><a:rPr /><a:t>Route 1 — calculus</a:t></a:r></a:p></a:txBody></a:tc></a:tr><a:tr h="0"><a:tc><a:txBody><a:bodyPr /><a:lstStyle /><a:p><a:pPr lvl="0" indent="0" marL="0"><a:buNone /></a:pPr><a:r><a:rPr b="1" /><a:t>4</a:t></a:r></a:p></a:txBody></a:tc><a:tc><a:txBody><a:bodyPr /><a:lstStyle /><a:p><a:pPr lvl="0" indent="0" marL="0"><a:buNone /></a:pPr><a:r><a:rPr /><a:t>Route 2 — geometry </a:t></a:r><a:r><a:rPr i="1" /><a:t>(the one worth remembering)</a:t></a:r></a:p></a:txBody></a:tc></a:tr><a:tr h="0"><a:tc><a:txBody><a:bodyPr /><a:lstStyle /><a:p><a:pPr lvl="0" indent="0" marL="0"><a:buNone /></a:pPr><a:r><a:rPr b="1" /><a:t>5</a:t></a:r></a:p></a:txBody></a:tc><a:tc><a:txBody><a:bodyPr /><a:lstStyle /><a:p><a:pPr lvl="0" indent="0" marL="0"><a:buNone /></a:pPr><a:r><a:rPr /><a:t>Leverage, and </a:t></a:r><a14:m><m:oMath xmlns:m="http://schemas.openxmlformats.org/officeDocument/2006/math"><m:sSup><m:e><m:r><m:t>R</m:t></m:r></m:e><m:sup><m:r><m:t>2</m:t></m:r></m:sup></m:sSup></m:oMath></a14:m><a:r><a:rPr /><a:t> as an angle</a:t></a:r></a:p></a:txBody></a:tc></a:tr><a:tr h="0"><a:tc><a:txBody><a:bodyPr /><a:lstStyle /><a:p><a:pPr lvl="0" indent="0" marL="0"><a:buNone /></a:pPr><a:r><a:rPr b="1" /><a:t>6</a:t></a:r></a:p></a:txBody></a:tc><a:tc><a:txBody><a:bodyPr /><a:lstStyle /><a:p><a:pPr lvl="0" indent="0" marL="0"><a:buNone /></a:pPr><a:r><a:rPr /><a:t>Frisch–Waugh–Lovell</a:t></a:r></a:p></a:txBody></a:tc></a:tr><a:tr h="0"><a:tc><a:txBody><a:bodyPr /><a:lstStyle /><a:p><a:pPr lvl="0" indent="0" marL="0"><a:buNone /></a:pPr><a:r><a:rPr b="1" /><a:t>7</a:t></a:r></a:p></a:txBody></a:tc><a:tc><a:txBody><a:bodyPr /><a:lstStyle /><a:p><a:pPr lvl="0" indent="0" marL="0"><a:buNone /></a:pPr><a:r><a:rPr /><a:t>Never invert </a:t></a:r><a14:m><m:oMath xmlns:m="http://schemas.openxmlformats.org/officeDocument/2006/math"><m:sSup><m:e><m:r><m:t>X</m:t></m:r></m:e><m:sup><m:r><m:rPr><m:sty m:val="p" /></m:rPr><m:t>⊤</m:t></m:r></m:sup></m:sSup><m:r><m:t>X</m:t></m:r></m:oMath></a14:m></a:p></a:txBody></a:tc></a:tr><a:tr h="0"><a:tc><a:txBody><a:bodyPr /><a:lstStyle /><a:p><a:pPr lvl="0" indent="0" marL="0"><a:buNone /></a:pPr><a:r><a:rPr b="1" /><a:t>8</a:t></a:r></a:p></a:txBody></a:tc><a:tc><a:txBody><a:bodyPr /><a:lstStyle /><a:p><a:pPr lvl="0" indent="0" marL="0"><a:buNone /></a:pPr><a:r><a:rPr /><a:t>Key takeaways</a:t></a:r></a:p></a:txBody></a:tc></a:tr></a:tbl></a:graphicData></a:graphic></p:graphicFrame></p:spTree></p:cSld></p:sld>
+</file>
+
+<file path=ppt/slides/slide30.xml><?xml version="1.0" encoding="utf-8"?>
 <p:sld xmlns:a="http://schemas.openxmlformats.org/drawingml/2006/main" xmlns:r="http://schemas.openxmlformats.org/officeDocument/2006/relationships" xmlns:p="http://schemas.openxmlformats.org/presentationml/2006/main">
   <p:cSld>
     <p:spTree>
@@ -6016,7 +6738,12 @@
                 <p:ph type="title"/>
               </p:nvPr>
             </p:nvSpPr>
-            <p:spPr/>
+            <p:spPr>
+              <a:xfrm>
+                <a:off x="722313" y="1850000"/>
+                <a:ext cx="7772400" cy="1300000"/>
+              </a:xfrm>
+            </p:spPr>
             <p:txBody>
               <a:bodyPr/>
               <a:lstStyle/>
@@ -6026,83 +6753,7 @@
                 </a:pPr>
                 <a:r>
                   <a:rPr/>
-                  <a:t>Never compute </a:t>
-                </a:r>
-                <a14:m>
-                  <m:oMath xmlns:m="http://schemas.openxmlformats.org/officeDocument/2006/math">
-                    <m:sSup>
-                      <m:e>
-                        <m:d>
-                          <m:dPr>
-                            <m:begChr m:val="("/>
-                            <m:sepChr m:val=""/>
-                            <m:endChr m:val=")"/>
-                            <m:grow/>
-                          </m:dPr>
-                          <m:e>
-                            <m:sSup>
-                              <m:e>
-                                <m:r>
-                                  <m:t>X</m:t>
-                                </m:r>
-                              </m:e>
-                              <m:sup>
-                                <m:r>
-                                  <m:rPr>
-                                    <m:sty m:val="p"/>
-                                  </m:rPr>
-                                  <m:t>⊤</m:t>
-                                </m:r>
-                              </m:sup>
-                            </m:sSup>
-                            <m:r>
-                              <m:t>X</m:t>
-                            </m:r>
-                          </m:e>
-                        </m:d>
-                      </m:e>
-                      <m:sup>
-                        <m:r>
-                          <m:rPr>
-                            <m:sty m:val="p"/>
-                          </m:rPr>
-                          <m:t>−</m:t>
-                        </m:r>
-                        <m:r>
-                          <m:t>1</m:t>
-                        </m:r>
-                      </m:sup>
-                    </m:sSup>
-                  </m:oMath>
-                </a14:m>
-              </a:p>
-            </p:txBody>
-          </p:sp>
-        </mc:Choice>
-      </mc:AlternateContent>
-      <mc:AlternateContent xmlns:mc="http://schemas.openxmlformats.org/markup-compatibility/2006">
-        <mc:Choice xmlns:a14="http://schemas.microsoft.com/office/drawing/2010/main" Requires="a14">
-          <p:sp>
-            <p:nvSpPr>
-              <p:cNvPr id="3" name="Content Placeholder 2"/>
-              <p:cNvSpPr>
-                <a:spLocks noGrp="1"/>
-              </p:cNvSpPr>
-              <p:nvPr>
-                <p:ph idx="1"/>
-              </p:nvPr>
-            </p:nvSpPr>
-            <p:spPr/>
-            <p:txBody>
-              <a:bodyPr/>
-              <a:lstStyle/>
-              <a:p>
-                <a:pPr lvl="0" indent="0" marL="0">
-                  <a:buNone/>
-                </a:pPr>
-                <a:r>
-                  <a:rPr/>
-                  <a:t>Forming </a:t>
+                  <a:t>7 · Never invert </a:t>
                 </a:r>
                 <a14:m>
                   <m:oMath xmlns:m="http://schemas.openxmlformats.org/officeDocument/2006/math">
@@ -6126,19 +6777,79 @@
                     </m:r>
                   </m:oMath>
                 </a14:m>
-                <a:r>
-                  <a:rPr/>
-                  <a:t> </a:t>
-                </a:r>
-                <a:r>
-                  <a:rPr b="1"/>
-                  <a:t>squares the condition number</a:t>
-                </a:r>
-                <a:r>
-                  <a:rPr/>
-                  <a:t>:</a:t>
-                </a:r>
               </a:p>
+            </p:txBody>
+          </p:sp>
+        </mc:Choice>
+      </mc:AlternateContent>
+    </p:spTree>
+  </p:cSld>
+</p:sld>
+</file>
+
+<file path=ppt/slides/slide31.xml><?xml version="1.0" encoding="utf-8"?>
+<p:sld xmlns:a="http://schemas.openxmlformats.org/drawingml/2006/main" xmlns:r="http://schemas.openxmlformats.org/officeDocument/2006/relationships" xmlns:p="http://schemas.openxmlformats.org/presentationml/2006/main">
+  <p:cSld>
+    <p:spTree>
+      <p:nvGrpSpPr>
+        <p:cNvPr id="1" name=""/>
+        <p:cNvGrpSpPr/>
+        <p:nvPr/>
+      </p:nvGrpSpPr>
+      <p:grpSpPr>
+        <a:xfrm>
+          <a:off x="0" y="0"/>
+          <a:ext cx="0" cy="0"/>
+          <a:chOff x="0" y="0"/>
+          <a:chExt cx="0" cy="0"/>
+        </a:xfrm>
+      </p:grpSpPr>
+      <p:sp>
+        <p:nvSpPr>
+          <p:cNvPr id="2" name="Title 1"/>
+          <p:cNvSpPr>
+            <a:spLocks noGrp="1"/>
+          </p:cNvSpPr>
+          <p:nvPr>
+            <p:ph type="title"/>
+          </p:nvPr>
+        </p:nvSpPr>
+        <p:spPr>
+          <a:xfrm>
+            <a:off x="457201" y="204787"/>
+            <a:ext cx="3008313" cy="871538"/>
+          </a:xfrm>
+        </p:spPr>
+        <p:txBody>
+          <a:bodyPr/>
+          <a:lstStyle/>
+          <a:p>
+            <a:pPr lvl="0" indent="0" marL="0">
+              <a:buNone/>
+            </a:pPr>
+            <a:r>
+              <a:rPr/>
+              <a:t>Forming it squares the conditioning</a:t>
+            </a:r>
+          </a:p>
+        </p:txBody>
+      </p:sp>
+      <mc:AlternateContent xmlns:mc="http://schemas.openxmlformats.org/markup-compatibility/2006">
+        <mc:Choice xmlns:a14="http://schemas.microsoft.com/office/drawing/2010/main" Requires="a14">
+          <p:sp>
+            <p:nvSpPr>
+              <p:cNvPr id="4" name="Text Placeholder 3"/>
+              <p:cNvSpPr>
+                <a:spLocks noGrp="1"/>
+              </p:cNvSpPr>
+              <p:nvPr>
+                <p:ph idx="2" sz="half" type="body"/>
+              </p:nvPr>
+            </p:nvSpPr>
+            <p:spPr/>
+            <p:txBody>
+              <a:bodyPr/>
+              <a:lstStyle/>
               <a:p>
                 <a:pPr lvl="0" indent="0" marL="0">
                   <a:buNone/>
@@ -6221,44 +6932,57 @@
                 </a:pPr>
                 <a:r>
                   <a:rPr/>
-                  <a:t>so you lose roughly twice as many digits of precision.</a:t>
-                </a:r>
-              </a:p>
-              <a:p>
-                <a:pPr lvl="0" indent="0" marL="0">
-                  <a:buNone/>
-                </a:pPr>
+                  <a:t>so you lose roughly </a:t>
+                </a:r>
+                <a:r>
+                  <a:rPr b="1"/>
+                  <a:t>twice as many digits</a:t>
+                </a:r>
                 <a:r>
                   <a:rPr/>
-                  <a:t>Slide 2.2 shows how to </a:t>
-                </a:r>
-                <a:r>
-                  <a:rPr i="1"/>
-                  <a:t>state</a:t>
-                </a:r>
-                <a:r>
-                  <a:rPr/>
-                  <a:t> the estimator. It is not how to </a:t>
-                </a:r>
-                <a:r>
-                  <a:rPr i="1"/>
-                  <a:t>compute</a:t>
-                </a:r>
-                <a:r>
-                  <a:rPr/>
-                  <a:t> it.</a:t>
+                  <a:t> of precision.</a:t>
                 </a:r>
               </a:p>
             </p:txBody>
           </p:sp>
         </mc:Choice>
       </mc:AlternateContent>
+      <p:pic>
+        <p:nvPicPr>
+          <p:cNvPr descr="slides_files/figure-pptx/cell-8-output-1.png" id="0" name="Picture 1"/>
+          <p:cNvPicPr>
+            <a:picLocks noGrp="1" noChangeAspect="1"/>
+          </p:cNvPicPr>
+          <p:nvPr/>
+        </p:nvPicPr>
+        <p:blipFill>
+          <a:blip r:embed="rId2"/>
+          <a:stretch>
+            <a:fillRect/>
+          </a:stretch>
+        </p:blipFill>
+        <p:spPr bwMode="auto">
+          <a:xfrm>
+            <a:off x="3568700" y="1282700"/>
+            <a:ext cx="5105400" cy="2209800"/>
+          </a:xfrm>
+          <a:prstGeom prst="rect">
+            <a:avLst/>
+          </a:prstGeom>
+          <a:noFill/>
+          <a:ln w="9525">
+            <a:noFill/>
+            <a:headEnd/>
+            <a:tailEnd/>
+          </a:ln>
+        </p:spPr>
+      </p:pic>
     </p:spTree>
   </p:cSld>
 </p:sld>
 </file>
 
-<file path=ppt/slides/slide22.xml><?xml version="1.0" encoding="utf-8"?>
+<file path=ppt/slides/slide32.xml><?xml version="1.0" encoding="utf-8"?>
 <p:sld xmlns:a="http://schemas.openxmlformats.org/drawingml/2006/main" xmlns:r="http://schemas.openxmlformats.org/officeDocument/2006/relationships" xmlns:p="http://schemas.openxmlformats.org/presentationml/2006/main">
   <p:cSld>
     <p:spTree>
@@ -6295,7 +7019,7 @@
             </a:pPr>
             <a:r>
               <a:rPr/>
-              <a:t>Use QR</a:t>
+              <a:t>Use QR instead</a:t>
             </a:r>
           </a:p>
         </p:txBody>
@@ -6320,6 +7044,10 @@
                 <a:pPr lvl="0" indent="0" marL="0">
                   <a:buNone/>
                 </a:pPr>
+                <a:r>
+                  <a:rPr/>
+                  <a:t>Write </a:t>
+                </a:r>
                 <a14:m>
                   <m:oMath xmlns:m="http://schemas.openxmlformats.org/officeDocument/2006/math">
                     <m:r>
@@ -6387,7 +7115,7 @@
                 </a14:m>
                 <a:r>
                   <a:rPr/>
-                  <a:t> upper triangular. Then</a:t>
+                  <a:t> upper triangular; then</a:t>
                 </a:r>
               </a:p>
               <a:p>
@@ -6447,7 +7175,7 @@
                 </a:pPr>
                 <a:r>
                   <a:rPr/>
-                  <a:t>solved by back-substitution.</a:t>
+                  <a:t>is solved by back-substitution.</a:t>
                 </a:r>
               </a:p>
               <a:p>
@@ -6476,7 +7204,32 @@
                 </a:r>
                 <a:r>
                   <a:rPr/>
-                  <a:t> do internally. You verify the precision difference yourself in the practice session.</a:t>
+                  <a:t> do internally. The formula on slide 3 is how you </a:t>
+                </a:r>
+                <a:r>
+                  <a:rPr b="1"/>
+                  <a:t>state</a:t>
+                </a:r>
+                <a:r>
+                  <a:rPr/>
+                  <a:t> the estimator, not how you </a:t>
+                </a:r>
+                <a:r>
+                  <a:rPr b="1"/>
+                  <a:t>compute</a:t>
+                </a:r>
+                <a:r>
+                  <a:rPr/>
+                  <a:t> it.</a:t>
+                </a:r>
+              </a:p>
+              <a:p>
+                <a:pPr lvl="0" indent="0" marL="0">
+                  <a:buNone/>
+                </a:pPr>
+                <a:r>
+                  <a:rPr/>
+                  <a:t>In the practice session you add a near-duplicate column and watch the explicit-inverse route fail while QR survives.</a:t>
                 </a:r>
               </a:p>
             </p:txBody>
@@ -6488,7 +7241,7 @@
 </p:sld>
 </file>
 
-<file path=ppt/slides/slide23.xml><?xml version="1.0" encoding="utf-8"?>
+<file path=ppt/slides/slide33.xml><?xml version="1.0" encoding="utf-8"?>
 <p:sld xmlns:a="http://schemas.openxmlformats.org/drawingml/2006/main" xmlns:r="http://schemas.openxmlformats.org/officeDocument/2006/relationships" xmlns:p="http://schemas.openxmlformats.org/presentationml/2006/main">
   <p:cSld>
     <p:spTree>
@@ -6517,8 +7270,8 @@
         </p:nvSpPr>
         <p:spPr>
           <a:xfrm>
-            <a:off x="722313" y="3305176"/>
-            <a:ext cx="7772400" cy="1021556"/>
+            <a:off x="722313" y="1850000"/>
+            <a:ext cx="7772400" cy="1300000"/>
           </a:xfrm>
         </p:spPr>
         <p:txBody>
@@ -6530,7 +7283,7 @@
             </a:pPr>
             <a:r>
               <a:rPr/>
-              <a:t>The practice</a:t>
+              <a:t>8 · Key takeaways</a:t>
             </a:r>
           </a:p>
         </p:txBody>
@@ -6540,7 +7293,7 @@
 </p:sld>
 </file>
 
-<file path=ppt/slides/slide24.xml><?xml version="1.0" encoding="utf-8"?>
+<file path=ppt/slides/slide34.xml><?xml version="1.0" encoding="utf-8"?>
 <p:sld xmlns:a="http://schemas.openxmlformats.org/drawingml/2006/main" xmlns:r="http://schemas.openxmlformats.org/officeDocument/2006/relationships" xmlns:p="http://schemas.openxmlformats.org/presentationml/2006/main">
   <p:cSld>
     <p:spTree>
@@ -6577,82 +7330,236 @@
             </a:pPr>
             <a:r>
               <a:rPr/>
-              <a:t>The theme</a:t>
-            </a:r>
-          </a:p>
-        </p:txBody>
-      </p:sp>
-      <p:sp>
-        <p:nvSpPr>
-          <p:cNvPr id="3" name="Content Placeholder 2"/>
-          <p:cNvSpPr>
-            <a:spLocks noGrp="1"/>
-          </p:cNvSpPr>
-          <p:nvPr>
-            <p:ph idx="1"/>
-          </p:nvPr>
-        </p:nvSpPr>
-        <p:spPr/>
-        <p:txBody>
-          <a:bodyPr/>
-          <a:lstStyle/>
-          <a:p>
-            <a:pPr lvl="0" indent="0" marL="0">
-              <a:spcBef>
-                <a:spcPts val="3000"/>
-              </a:spcBef>
-              <a:buNone/>
-            </a:pPr>
-            <a:r>
-              <a:rPr sz="2000" b="1"/>
-              <a:t>How much of the measured gap is real, and how much is composition?</a:t>
-            </a:r>
-          </a:p>
-          <a:p>
-            <a:pPr lvl="0" indent="0" marL="0">
-              <a:buNone/>
-            </a:pPr>
-            <a:r>
-              <a:rPr/>
-              <a:t>All ten groups attack it on the </a:t>
-            </a:r>
-            <a:r>
-              <a:rPr b="1"/>
-              <a:t>practice data</a:t>
-            </a:r>
-            <a:r>
-              <a:rPr/>
-              <a:t> — projects arrive in Session 04. The last twenty minutes assemble the answers.</a:t>
-            </a:r>
-          </a:p>
-          <a:p>
-            <a:pPr lvl="0" indent="0" marL="0">
-              <a:buNone/>
-            </a:pPr>
-            <a:r>
-              <a:rPr/>
-              <a:t>How projects work, and what arrives in Session 04: </a:t>
-            </a:r>
-            <a:r>
-              <a:rPr>
-                <a:hlinkClick r:id="rId2"/>
-                <a:latin typeface="Courier"/>
-              </a:rPr>
-              <a:t>RESEARCH-MANDATES.md</a:t>
-            </a:r>
-            <a:r>
-              <a:rPr/>
-              <a:t>.</a:t>
-            </a:r>
-          </a:p>
-        </p:txBody>
-      </p:sp>
+              <a:t>What to carry out of this session</a:t>
+            </a:r>
+          </a:p>
+        </p:txBody>
+      </p:sp>
+      <mc:AlternateContent xmlns:mc="http://schemas.openxmlformats.org/markup-compatibility/2006">
+        <mc:Choice xmlns:a14="http://schemas.microsoft.com/office/drawing/2010/main" Requires="a14">
+          <p:sp>
+            <p:nvSpPr>
+              <p:cNvPr id="3" name="Content Placeholder 2"/>
+              <p:cNvSpPr>
+                <a:spLocks noGrp="1"/>
+              </p:cNvSpPr>
+              <p:nvPr>
+                <p:ph idx="1"/>
+              </p:nvPr>
+            </p:nvSpPr>
+            <p:spPr/>
+            <p:txBody>
+              <a:bodyPr/>
+              <a:lstStyle/>
+              <a:p>
+                <a:pPr lvl="0" indent="-342900" marL="342900">
+                  <a:buAutoNum type="arabicPeriod"/>
+                </a:pPr>
+                <a:r>
+                  <a:rPr b="1"/>
+                  <a:t>Least squares is a projection.</a:t>
+                </a:r>
+                <a:r>
+                  <a:rPr/>
+                  <a:t> Calculus and geometry give one answer; the geometry is the one to remember.</a:t>
+                </a:r>
+              </a:p>
+              <a:p>
+                <a:pPr lvl="0" indent="-342900" marL="342900">
+                  <a:buAutoNum type="arabicPeriod"/>
+                </a:pPr>
+                <a14:m>
+                  <m:oMath xmlns:m="http://schemas.openxmlformats.org/officeDocument/2006/math">
+                    <m:r>
+                      <m:t>H</m:t>
+                    </m:r>
+                  </m:oMath>
+                </a14:m>
+                <a:r>
+                  <a:rPr b="1"/>
+                  <a:t> is the whole story</a:t>
+                </a:r>
+                <a:r>
+                  <a:rPr/>
+                  <a:t>: </a:t>
+                </a:r>
+                <a14:m>
+                  <m:oMath xmlns:m="http://schemas.openxmlformats.org/officeDocument/2006/math">
+                    <m:acc>
+                      <m:accPr>
+                        <m:chr m:val="̂"/>
+                      </m:accPr>
+                      <m:e>
+                        <m:r>
+                          <m:t>y</m:t>
+                        </m:r>
+                      </m:e>
+                    </m:acc>
+                  </m:oMath>
+                </a14:m>
+                <a:r>
+                  <a:rPr/>
+                  <a:t>, residuals, </a:t>
+                </a:r>
+                <a14:m>
+                  <m:oMath xmlns:m="http://schemas.openxmlformats.org/officeDocument/2006/math">
+                    <m:r>
+                      <m:rPr>
+                        <m:sty m:val="p"/>
+                      </m:rPr>
+                      <m:t>t</m:t>
+                    </m:r>
+                    <m:r>
+                      <m:rPr>
+                        <m:sty m:val="p"/>
+                      </m:rPr>
+                      <m:t>r</m:t>
+                    </m:r>
+                    <m:d>
+                      <m:dPr>
+                        <m:begChr m:val="("/>
+                        <m:sepChr m:val=""/>
+                        <m:endChr m:val=")"/>
+                        <m:grow/>
+                      </m:dPr>
+                      <m:e>
+                        <m:r>
+                          <m:t>H</m:t>
+                        </m:r>
+                      </m:e>
+                    </m:d>
+                    <m:r>
+                      <m:rPr>
+                        <m:sty m:val="p"/>
+                      </m:rPr>
+                      <m:t>=</m:t>
+                    </m:r>
+                    <m:r>
+                      <m:t>p</m:t>
+                    </m:r>
+                  </m:oMath>
+                </a14:m>
+                <a:r>
+                  <a:rPr/>
+                  <a:t>, leverage, Pythagoras.</a:t>
+                </a:r>
+              </a:p>
+              <a:p>
+                <a:pPr lvl="0" indent="-342900" marL="342900">
+                  <a:buAutoNum type="arabicPeriod"/>
+                </a:pPr>
+                <a14:m>
+                  <m:oMath xmlns:m="http://schemas.openxmlformats.org/officeDocument/2006/math">
+                    <m:sSup>
+                      <m:e>
+                        <m:r>
+                          <m:t>R</m:t>
+                        </m:r>
+                      </m:e>
+                      <m:sup>
+                        <m:r>
+                          <m:t>2</m:t>
+                        </m:r>
+                      </m:sup>
+                    </m:sSup>
+                  </m:oMath>
+                </a14:m>
+                <a:r>
+                  <a:rPr b="1"/>
+                  <a:t> is </a:t>
+                </a:r>
+                <a14:m>
+                  <m:oMath xmlns:m="http://schemas.openxmlformats.org/officeDocument/2006/math">
+                    <m:sSup>
+                      <m:e>
+                        <m:r>
+                          <m:rPr>
+                            <m:sty m:val="p"/>
+                          </m:rPr>
+                          <m:t>cos</m:t>
+                        </m:r>
+                      </m:e>
+                      <m:sup>
+                        <m:r>
+                          <m:t>2</m:t>
+                        </m:r>
+                      </m:sup>
+                    </m:sSup>
+                    <m:r>
+                      <m:t>θ</m:t>
+                    </m:r>
+                  </m:oMath>
+                </a14:m>
+                <a:r>
+                  <a:rPr/>
+                  <a:t> — an angle, and nothing more.</a:t>
+                </a:r>
+              </a:p>
+              <a:p>
+                <a:pPr lvl="0" indent="-342900" marL="342900">
+                  <a:buAutoNum type="arabicPeriod"/>
+                </a:pPr>
+                <a:r>
+                  <a:rPr b="1"/>
+                  <a:t>“Controlling for” is projecting out.</a:t>
+                </a:r>
+                <a:r>
+                  <a:rPr/>
+                  <a:t> That is FWL, and it returns in Session 10.</a:t>
+                </a:r>
+              </a:p>
+              <a:p>
+                <a:pPr lvl="0" indent="-342900" marL="342900">
+                  <a:buAutoNum type="arabicPeriod"/>
+                </a:pPr>
+                <a:r>
+                  <a:rPr b="1"/>
+                  <a:t>Never invert </a:t>
+                </a:r>
+                <a14:m>
+                  <m:oMath xmlns:m="http://schemas.openxmlformats.org/officeDocument/2006/math">
+                    <m:sSup>
+                      <m:e>
+                        <m:r>
+                          <m:t>X</m:t>
+                        </m:r>
+                      </m:e>
+                      <m:sup>
+                        <m:r>
+                          <m:rPr>
+                            <m:sty m:val="p"/>
+                          </m:rPr>
+                          <m:t>⊤</m:t>
+                        </m:r>
+                      </m:sup>
+                    </m:sSup>
+                    <m:r>
+                      <m:t>X</m:t>
+                    </m:r>
+                  </m:oMath>
+                </a14:m>
+                <a:r>
+                  <a:rPr b="1"/>
+                  <a:t>.</a:t>
+                </a:r>
+                <a:r>
+                  <a:rPr/>
+                  <a:t> State it that way; compute it with QR.</a:t>
+                </a:r>
+              </a:p>
+            </p:txBody>
+          </p:sp>
+        </mc:Choice>
+      </mc:AlternateContent>
     </p:spTree>
   </p:cSld>
 </p:sld>
 </file>
 
-<file path=ppt/slides/slide25.xml><?xml version="1.0" encoding="utf-8"?>
+<file path=ppt/slides/slide35.xml><?xml version="1.0" encoding="UTF-8"?><p:sld xmlns:a="http://schemas.openxmlformats.org/drawingml/2006/main" xmlns:r="http://schemas.openxmlformats.org/officeDocument/2006/relationships" xmlns:p="http://schemas.openxmlformats.org/presentationml/2006/main"><p:cSld><p:spTree><p:nvGrpSpPr><p:cNvPr id="1" name="" /><p:cNvGrpSpPr /><p:nvPr /></p:nvGrpSpPr><p:grpSpPr><a:xfrm><a:off x="0" y="0" /><a:ext cx="0" cy="0" /><a:chOff x="0" y="0" /><a:chExt cx="0" cy="0" /></a:xfrm></p:grpSpPr><p:sp><p:nvSpPr><p:cNvPr id="2" name="Title 1" /><p:cNvSpPr><a:spLocks noGrp="1" /></p:cNvSpPr><p:nvPr><p:ph type="title" /></p:nvPr></p:nvSpPr><p:spPr /><p:txBody><a:bodyPr /><a:lstStyle /><a:p><a:pPr lvl="0" indent="0" marL="0"><a:buNone /></a:pPr><a:r><a:rPr /><a:t>What loses marks reliably</a:t></a:r></a:p></p:txBody></p:sp><p:graphicFrame><p:nvGraphicFramePr><p:cNvPr id="6" name="Content Placeholder 5" /><p:cNvGraphicFramePr><a:graphicFrameLocks noGrp="1" /></p:cNvGraphicFramePr><p:nvPr><p:ph idx="1" /></p:nvPr></p:nvGraphicFramePr><p:xfrm><a:off x="457200" y="1193800" /><a:ext cx="8229600" cy="3390900" /></p:xfrm><a:graphic><a:graphicData uri="http://schemas.openxmlformats.org/drawingml/2006/table"><a:tbl><a:tblPr firstRow="0" bandRow="1"><a:tableStyleId>{5C22544A-7EE6-4342-B048-85BDC9FD1C3A}</a:tableStyleId></a:tblPr><a:tblGrid><a:gridCol w="4114800" /><a:gridCol w="4114800" /></a:tblGrid><a:tr h="0"><a:tc><a:txBody><a:bodyPr /><a:lstStyle /><a:p><a:pPr lvl="0" indent="0" marL="0"><a:buNone /></a:pPr><a:r><a:rPr /><a:t>All three energy shares plus an intercept</a:t></a:r></a:p></a:txBody></a:tc><a:tc><a:txBody><a:bodyPr /><a:lstStyle /><a:p><a:pPr lvl="0" indent="0" marL="0"><a:buNone /></a:pPr><a:r><a:rPr /><a:t>exact collinearity — </a:t></a:r><a14:m><m:oMath xmlns:m="http://schemas.openxmlformats.org/officeDocument/2006/math"><m:sSup><m:e><m:r><m:t>X</m:t></m:r></m:e><m:sup><m:r><m:rPr><m:sty m:val="p" /></m:rPr><m:t>⊤</m:t></m:r></m:sup></m:sSup><m:r><m:t>X</m:t></m:r></m:oMath></a14:m><a:r><a:rPr /><a:t> is singular</a:t></a:r></a:p></a:txBody></a:tc></a:tr><a:tr h="0"><a:tc><a:txBody><a:bodyPr /><a:lstStyle /><a:p><a:pPr lvl="0" indent="0" marL="0"><a:buNone /></a:pPr><a:r><a:rPr /><a:t>A coefficient with no stated omitted category</a:t></a:r></a:p></a:txBody></a:tc><a:tc><a:txBody><a:bodyPr /><a:lstStyle /><a:p><a:pPr lvl="0" indent="0" marL="0"><a:buNone /></a:pPr><a:r><a:rPr /><a:t>the number has no referent</a:t></a:r></a:p></a:txBody></a:tc></a:tr><a:tr h="0"><a:tc><a:txBody><a:bodyPr /><a:lstStyle /><a:p><a:pPr lvl="0" indent="0" marL="0"><a:buNone /></a:pPr><a14:m><m:oMath xmlns:m="http://schemas.openxmlformats.org/officeDocument/2006/math"><m:sSup><m:e><m:r><m:t>R</m:t></m:r></m:e><m:sup><m:r><m:t>2</m:t></m:r></m:sup></m:sSup></m:oMath></a14:m><a:r><a:rPr /><a:t> reported alone</a:t></a:r></a:p></a:txBody></a:tc><a:tc><a:txBody><a:bodyPr /><a:lstStyle /><a:p><a:pPr lvl="0" indent="0" marL="0"><a:buNone /></a:pPr><a:r><a:rPr /><a:t>give the error in the outcome’s units too</a:t></a:r></a:p></a:txBody></a:tc></a:tr><a:tr h="0"><a:tc><a:txBody><a:bodyPr /><a:lstStyle /><a:p><a:pPr lvl="0" indent="0" marL="0"><a:buNone /></a:pPr><a:r><a:rPr /><a:t>“Fossil generation raises prices by </a:t></a:r><a14:m><m:oMath xmlns:m="http://schemas.openxmlformats.org/officeDocument/2006/math"><m:r><m:t>X</m:t></m:r></m:oMath></a14:m><a:r><a:rPr /><a:t>”</a:t></a:r></a:p></a:txBody></a:tc><a:tc><a:txBody><a:bodyPr /><a:lstStyle /><a:p><a:pPr lvl="0" indent="0" marL="0"><a:buNone /></a:pPr><a:r><a:rPr /><a:t>an association in a 30-country panel, not an effect</a:t></a:r></a:p></a:txBody></a:tc></a:tr></a:tbl></a:graphicData></a:graphic></p:graphicFrame></p:spTree></p:cSld></p:sld>
+</file>
+
+<file path=ppt/slides/slide36.xml><?xml version="1.0" encoding="utf-8"?>
 <p:sld xmlns:a="http://schemas.openxmlformats.org/drawingml/2006/main" xmlns:r="http://schemas.openxmlformats.org/officeDocument/2006/relationships" xmlns:p="http://schemas.openxmlformats.org/presentationml/2006/main">
   <p:cSld>
     <p:spTree>
@@ -6689,7 +7596,7 @@
             </a:pPr>
             <a:r>
               <a:rPr/>
-              <a:t>What you build</a:t>
+              <a:t>In the practice session</a:t>
             </a:r>
           </a:p>
         </p:txBody>
@@ -6712,6 +7619,10 @@
             <a:pPr lvl="0" indent="-342900" marL="342900">
               <a:buAutoNum type="arabicPeriod"/>
             </a:pPr>
+            <a:r>
+              <a:rPr/>
+              <a:t>Implement </a:t>
+            </a:r>
             <a:r>
               <a:rPr>
                 <a:latin typeface="Courier"/>
@@ -6720,7 +7631,7 @@
             </a:r>
             <a:r>
               <a:rPr/>
-              <a:t> with an explicit inverse, </a:t>
+              <a:t> and </a:t>
             </a:r>
             <a:r>
               <a:rPr>
@@ -6730,17 +7641,7 @@
             </a:r>
             <a:r>
               <a:rPr/>
-              <a:t> with </a:t>
-            </a:r>
-            <a:r>
-              <a:rPr>
-                <a:latin typeface="Courier"/>
-              </a:rPr>
-              <a:t>numpy.linalg.qr</a:t>
-            </a:r>
-            <a:r>
-              <a:rPr/>
-              <a:t> — both against </a:t>
+              <a:t>; compare both to </a:t>
             </a:r>
             <a:r>
               <a:rPr>
@@ -6755,7 +7656,7 @@
             </a:pPr>
             <a:r>
               <a:rPr/>
-              <a:t>The hat-matrix diagonal; leverage against residual</a:t>
+              <a:t>Compute the hat diagonal; plot leverage against residual</a:t>
             </a:r>
           </a:p>
           <a:p>
@@ -6764,7 +7665,7 @@
             </a:pPr>
             <a:r>
               <a:rPr/>
-              <a:t>Verify Pythagoras numerically, then drop the intercept</a:t>
+              <a:t>Verify Pythagoras numerically, then drop the intercept and watch it break</a:t>
             </a:r>
           </a:p>
           <a:p>
@@ -6790,7 +7691,34 @@
             </a:r>
             <a:r>
               <a:rPr/>
-              <a:t> — residualise, re-regress, confirm the match</a:t>
+              <a:t> — residualise, re-regress, confirm the coefficients match</a:t>
+            </a:r>
+          </a:p>
+          <a:p>
+            <a:pPr lvl="0" indent="0" marL="0">
+              <a:buNone/>
+            </a:pPr>
+            <a:r>
+              <a:rPr/>
+              <a:t>Brief: </a:t>
+            </a:r>
+            <a:r>
+              <a:rPr>
+                <a:hlinkClick r:id="rId2"/>
+                <a:latin typeface="Courier"/>
+              </a:rPr>
+              <a:t>02-practice/README.md</a:t>
+            </a:r>
+            <a:r>
+              <a:rPr/>
+              <a:t> · derivations: </a:t>
+            </a:r>
+            <a:r>
+              <a:rPr>
+                <a:hlinkClick r:id="rId3"/>
+                <a:latin typeface="Courier"/>
+              </a:rPr>
+              <a:t>01-lecture/README.md</a:t>
             </a:r>
           </a:p>
         </p:txBody>
@@ -6800,7 +7728,7 @@
 </p:sld>
 </file>
 
-<file path=ppt/slides/slide26.xml><?xml version="1.0" encoding="utf-8"?>
+<file path=ppt/slides/slide4.xml><?xml version="1.0" encoding="utf-8"?>
 <p:sld xmlns:a="http://schemas.openxmlformats.org/drawingml/2006/main" xmlns:r="http://schemas.openxmlformats.org/officeDocument/2006/relationships" xmlns:p="http://schemas.openxmlformats.org/presentationml/2006/main">
   <p:cSld>
     <p:spTree>
@@ -6837,106 +7765,206 @@
             </a:pPr>
             <a:r>
               <a:rPr/>
-              <a:t>The two-minute report</a:t>
-            </a:r>
-          </a:p>
-        </p:txBody>
-      </p:sp>
-      <p:sp>
-        <p:nvSpPr>
-          <p:cNvPr id="3" name="Content Placeholder 2"/>
-          <p:cNvSpPr>
-            <a:spLocks noGrp="1"/>
-          </p:cNvSpPr>
-          <p:nvPr>
-            <p:ph idx="1"/>
-          </p:nvPr>
-        </p:nvSpPr>
-        <p:spPr/>
-        <p:txBody>
-          <a:bodyPr/>
-          <a:lstStyle/>
-          <a:p>
-            <a:pPr lvl="0" indent="0" marL="0">
-              <a:buNone/>
-            </a:pPr>
-            <a:r>
-              <a:rPr b="1"/>
-              <a:t>One slide. Three sentences.</a:t>
-            </a:r>
-          </a:p>
-          <a:p>
-            <a:pPr lvl="0" indent="-342900" marL="342900">
-              <a:buAutoNum type="arabicPeriod"/>
-            </a:pPr>
-            <a:r>
-              <a:rPr b="1"/>
-              <a:t>What I did.</a:t>
-            </a:r>
-            <a:r>
-              <a:rPr/>
-              <a:t> </a:t>
-            </a:r>
-            <a:r>
-              <a:rPr i="1"/>
-              <a:t>“We regressed X on Y for our unit, partialling out Z.”</a:t>
-            </a:r>
-          </a:p>
-          <a:p>
-            <a:pPr lvl="0" indent="-342900" marL="342900">
-              <a:buAutoNum type="arabicPeriod"/>
-            </a:pPr>
-            <a:r>
-              <a:rPr b="1"/>
-              <a:t>The number.</a:t>
-            </a:r>
-            <a:r>
-              <a:rPr/>
-              <a:t> One estimate, with its uncertainty or benchmark.</a:t>
-            </a:r>
-          </a:p>
-          <a:p>
-            <a:pPr lvl="0" indent="-342900" marL="342900">
-              <a:buAutoNum type="arabicPeriod"/>
-            </a:pPr>
-            <a:r>
-              <a:rPr b="1"/>
-              <a:t>The catch.</a:t>
-            </a:r>
-            <a:r>
-              <a:rPr/>
-              <a:t> What you cannot claim, or where the data failed you.</a:t>
-            </a:r>
-          </a:p>
-          <a:p>
-            <a:pPr lvl="0" indent="0" marL="0">
-              <a:buNone/>
-            </a:pPr>
-            <a:r>
-              <a:rPr/>
-              <a:t>The presenter is </a:t>
-            </a:r>
-            <a:r>
-              <a:rPr b="1"/>
-              <a:t>drawn at random</a:t>
-            </a:r>
-            <a:r>
-              <a:rPr/>
-              <a:t>. No method exposition. </a:t>
-            </a:r>
-            <a:r>
-              <a:rPr b="1"/>
-              <a:t>Sentence 3 earns the slot.</a:t>
-            </a:r>
-          </a:p>
-        </p:txBody>
-      </p:sp>
+              <a:t>Learning objectives</a:t>
+            </a:r>
+          </a:p>
+        </p:txBody>
+      </p:sp>
+      <mc:AlternateContent xmlns:mc="http://schemas.openxmlformats.org/markup-compatibility/2006">
+        <mc:Choice xmlns:a14="http://schemas.microsoft.com/office/drawing/2010/main" Requires="a14">
+          <p:sp>
+            <p:nvSpPr>
+              <p:cNvPr id="3" name="Content Placeholder 2"/>
+              <p:cNvSpPr>
+                <a:spLocks noGrp="1"/>
+              </p:cNvSpPr>
+              <p:nvPr>
+                <p:ph idx="1"/>
+              </p:nvPr>
+            </p:nvSpPr>
+            <p:spPr/>
+            <p:txBody>
+              <a:bodyPr/>
+              <a:lstStyle/>
+              <a:p>
+                <a:pPr lvl="0"/>
+                <a:r>
+                  <a:rPr/>
+                  <a:t>Derive the </a:t>
+                </a:r>
+                <a:r>
+                  <a:rPr b="1"/>
+                  <a:t>normal equations</a:t>
+                </a:r>
+                <a:r>
+                  <a:rPr/>
+                  <a:t> twice — by calculus and by projection — and see they are one statement</a:t>
+                </a:r>
+              </a:p>
+              <a:p>
+                <a:pPr lvl="0"/>
+                <a:r>
+                  <a:rPr/>
+                  <a:t>Read the </a:t>
+                </a:r>
+                <a:r>
+                  <a:rPr b="1"/>
+                  <a:t>hat matrix</a:t>
+                </a:r>
+                <a:r>
+                  <a:rPr/>
+                  <a:t> </a:t>
+                </a:r>
+                <a14:m>
+                  <m:oMath xmlns:m="http://schemas.openxmlformats.org/officeDocument/2006/math">
+                    <m:r>
+                      <m:t>H</m:t>
+                    </m:r>
+                  </m:oMath>
+                </a14:m>
+                <a:r>
+                  <a:rPr/>
+                  <a:t>: fitted values, residuals, degrees of freedom, leverage</a:t>
+                </a:r>
+              </a:p>
+              <a:p>
+                <a:pPr lvl="0"/>
+                <a:r>
+                  <a:rPr/>
+                  <a:t>Explain </a:t>
+                </a:r>
+                <a14:m>
+                  <m:oMath xmlns:m="http://schemas.openxmlformats.org/officeDocument/2006/math">
+                    <m:sSup>
+                      <m:e>
+                        <m:r>
+                          <m:t>R</m:t>
+                        </m:r>
+                      </m:e>
+                      <m:sup>
+                        <m:r>
+                          <m:t>2</m:t>
+                        </m:r>
+                      </m:sup>
+                    </m:sSup>
+                  </m:oMath>
+                </a14:m>
+                <a:r>
+                  <a:rPr/>
+                  <a:t> as a </a:t>
+                </a:r>
+                <a:r>
+                  <a:rPr b="1"/>
+                  <a:t>squared cosine</a:t>
+                </a:r>
+                <a:r>
+                  <a:rPr/>
+                  <a:t>, and say what it therefore cannot tell you</a:t>
+                </a:r>
+              </a:p>
+              <a:p>
+                <a:pPr lvl="0"/>
+                <a:r>
+                  <a:rPr/>
+                  <a:t>State </a:t>
+                </a:r>
+                <a:r>
+                  <a:rPr b="1"/>
+                  <a:t>Frisch–Waugh–Lovell</a:t>
+                </a:r>
+                <a:r>
+                  <a:rPr/>
+                  <a:t> and use it to say what “controlling for” means</a:t>
+                </a:r>
+              </a:p>
+              <a:p>
+                <a:pPr lvl="0"/>
+                <a:r>
+                  <a:rPr/>
+                  <a:t>Say why you should never compute </a:t>
+                </a:r>
+                <a14:m>
+                  <m:oMath xmlns:m="http://schemas.openxmlformats.org/officeDocument/2006/math">
+                    <m:sSup>
+                      <m:e>
+                        <m:d>
+                          <m:dPr>
+                            <m:begChr m:val="("/>
+                            <m:sepChr m:val=""/>
+                            <m:endChr m:val=")"/>
+                            <m:grow/>
+                          </m:dPr>
+                          <m:e>
+                            <m:sSup>
+                              <m:e>
+                                <m:r>
+                                  <m:t>X</m:t>
+                                </m:r>
+                              </m:e>
+                              <m:sup>
+                                <m:r>
+                                  <m:rPr>
+                                    <m:sty m:val="p"/>
+                                  </m:rPr>
+                                  <m:t>⊤</m:t>
+                                </m:r>
+                              </m:sup>
+                            </m:sSup>
+                            <m:r>
+                              <m:t>X</m:t>
+                            </m:r>
+                          </m:e>
+                        </m:d>
+                      </m:e>
+                      <m:sup>
+                        <m:r>
+                          <m:rPr>
+                            <m:sty m:val="p"/>
+                          </m:rPr>
+                          <m:t>−</m:t>
+                        </m:r>
+                        <m:r>
+                          <m:t>1</m:t>
+                        </m:r>
+                      </m:sup>
+                    </m:sSup>
+                  </m:oMath>
+                </a14:m>
+                <a:r>
+                  <a:rPr/>
+                  <a:t>, and what to do instead</a:t>
+                </a:r>
+              </a:p>
+              <a:p>
+                <a:pPr lvl="0" indent="0" marL="0">
+                  <a:buNone/>
+                </a:pPr>
+                <a:r>
+                  <a:rPr/>
+                  <a:t>Full derivations: </a:t>
+                </a:r>
+                <a:r>
+                  <a:rPr>
+                    <a:hlinkClick r:id="rId2"/>
+                    <a:latin typeface="Courier"/>
+                  </a:rPr>
+                  <a:t>01-lecture/README.md</a:t>
+                </a:r>
+                <a:r>
+                  <a:rPr/>
+                  <a:t> §2.1–2.5. These slides are the same argument, drawn.</a:t>
+                </a:r>
+              </a:p>
+            </p:txBody>
+          </p:sp>
+        </mc:Choice>
+      </mc:AlternateContent>
     </p:spTree>
   </p:cSld>
 </p:sld>
 </file>
 
-<file path=ppt/slides/slide27.xml><?xml version="1.0" encoding="utf-8"?>
+<file path=ppt/slides/slide5.xml><?xml version="1.0" encoding="utf-8"?>
 <p:sld xmlns:a="http://schemas.openxmlformats.org/drawingml/2006/main" xmlns:r="http://schemas.openxmlformats.org/officeDocument/2006/relationships" xmlns:p="http://schemas.openxmlformats.org/presentationml/2006/main">
   <p:cSld>
     <p:spTree>
@@ -6963,7 +7991,12 @@
             <p:ph type="title"/>
           </p:nvPr>
         </p:nvSpPr>
-        <p:spPr/>
+        <p:spPr>
+          <a:xfrm>
+            <a:off x="722313" y="1850000"/>
+            <a:ext cx="7772400" cy="1300000"/>
+          </a:xfrm>
+        </p:spPr>
         <p:txBody>
           <a:bodyPr/>
           <a:lstStyle/>
@@ -6973,64 +8006,7 @@
             </a:pPr>
             <a:r>
               <a:rPr/>
-              <a:t>Before you leave</a:t>
-            </a:r>
-          </a:p>
-        </p:txBody>
-      </p:sp>
-      <p:sp>
-        <p:nvSpPr>
-          <p:cNvPr id="3" name="Content Placeholder 2"/>
-          <p:cNvSpPr>
-            <a:spLocks noGrp="1"/>
-          </p:cNvSpPr>
-          <p:nvPr>
-            <p:ph idx="1"/>
-          </p:nvPr>
-        </p:nvSpPr>
-        <p:spPr/>
-        <p:txBody>
-          <a:bodyPr/>
-          <a:lstStyle/>
-          <a:p>
-            <a:pPr lvl="0"/>
-            <a:r>
-              <a:rPr/>
-              <a:t>Commit to your group branch as you go</a:t>
-            </a:r>
-          </a:p>
-          <a:p>
-            <a:pPr lvl="0"/>
-            <a:r>
-              <a:rPr b="1"/>
-              <a:t>Every member</a:t>
-            </a:r>
-            <a:r>
-              <a:rPr/>
-              <a:t> commits and pushes from their own machine</a:t>
-            </a:r>
-          </a:p>
-          <a:p>
-            <a:pPr lvl="0"/>
-            <a:r>
-              <a:rPr/>
-              <a:t>One documented instance where you caught the LLM being wrong</a:t>
-            </a:r>
-          </a:p>
-          <a:p>
-            <a:pPr lvl="0" indent="0" marL="0">
-              <a:buNone/>
-            </a:pPr>
-            <a:r>
-              <a:rPr/>
-              <a:t>Full brief: </a:t>
-            </a:r>
-            <a:r>
-              <a:rPr>
-                <a:hlinkClick r:id="rId2"/>
-                <a:latin typeface="Courier"/>
-              </a:rPr>
-              <a:t>02-practice/README.md</a:t>
+              <a:t>1 · What this adds</a:t>
             </a:r>
           </a:p>
         </p:txBody>
@@ -7040,7 +8016,7 @@
 </p:sld>
 </file>
 
-<file path=ppt/slides/slide3.xml><?xml version="1.0" encoding="utf-8"?>
+<file path=ppt/slides/slide6.xml><?xml version="1.0" encoding="utf-8"?>
 <p:sld xmlns:a="http://schemas.openxmlformats.org/drawingml/2006/main" xmlns:r="http://schemas.openxmlformats.org/officeDocument/2006/relationships" xmlns:p="http://schemas.openxmlformats.org/presentationml/2006/main">
   <p:cSld>
     <p:spTree>
@@ -7077,7 +8053,92 @@
             </a:pPr>
             <a:r>
               <a:rPr/>
-              <a:t>These slides follow the notes</a:t>
+              <a:t>Where we are</a:t>
+            </a:r>
+          </a:p>
+        </p:txBody>
+      </p:sp>
+      <p:sp>
+        <p:nvSpPr>
+          <p:cNvPr id="3" name="Content Placeholder 2"/>
+          <p:cNvSpPr>
+            <a:spLocks noGrp="1"/>
+          </p:cNvSpPr>
+          <p:nvPr>
+            <p:ph idx="1"/>
+          </p:nvPr>
+        </p:nvSpPr>
+        <p:spPr/>
+        <p:txBody>
+          <a:bodyPr/>
+          <a:lstStyle/>
+          <a:p>
+            <a:pPr lvl="0" indent="0" marL="0">
+              <a:buNone/>
+            </a:pPr>
+            <a:r>
+              <a:rPr/>
+              <a:t>Session 01 set up the machine and asked what a scenario is. </a:t>
+            </a:r>
+            <a:r>
+              <a:rPr b="1"/>
+              <a:t>No mathematics.</a:t>
+            </a:r>
+          </a:p>
+          <a:p>
+            <a:pPr lvl="0" indent="0" marL="0">
+              <a:buNone/>
+            </a:pPr>
+            <a:r>
+              <a:rPr/>
+              <a:t>This is the first method in the course, and everything after it is a variation. Sessions 03–11 add assumptions to this estimator, relax them, or replace it — but the geometry drawn today recurs in every one.</a:t>
+            </a:r>
+          </a:p>
+        </p:txBody>
+      </p:sp>
+    </p:spTree>
+  </p:cSld>
+</p:sld>
+</file>
+
+<file path=ppt/slides/slide7.xml><?xml version="1.0" encoding="utf-8"?>
+<p:sld xmlns:a="http://schemas.openxmlformats.org/drawingml/2006/main" xmlns:r="http://schemas.openxmlformats.org/officeDocument/2006/relationships" xmlns:p="http://schemas.openxmlformats.org/presentationml/2006/main">
+  <p:cSld>
+    <p:spTree>
+      <p:nvGrpSpPr>
+        <p:cNvPr id="1" name=""/>
+        <p:cNvGrpSpPr/>
+        <p:nvPr/>
+      </p:nvGrpSpPr>
+      <p:grpSpPr>
+        <a:xfrm>
+          <a:off x="0" y="0"/>
+          <a:ext cx="0" cy="0"/>
+          <a:chOff x="0" y="0"/>
+          <a:chExt cx="0" cy="0"/>
+        </a:xfrm>
+      </p:grpSpPr>
+      <p:sp>
+        <p:nvSpPr>
+          <p:cNvPr id="2" name="Title 1"/>
+          <p:cNvSpPr>
+            <a:spLocks noGrp="1"/>
+          </p:cNvSpPr>
+          <p:nvPr>
+            <p:ph type="title"/>
+          </p:nvPr>
+        </p:nvSpPr>
+        <p:spPr/>
+        <p:txBody>
+          <a:bodyPr/>
+          <a:lstStyle/>
+          <a:p>
+            <a:pPr lvl="0" indent="0" marL="0">
+              <a:buNone/>
+            </a:pPr>
+            <a:r>
+              <a:rPr/>
+              <a:t>What today buys you</a:t>
             </a:r>
           </a:p>
         </p:txBody>
@@ -7116,8 +8177,8 @@
                         <a:buNone/>
                       </a:pPr>
                       <a:r>
-                        <a:rPr b="1"/>
-                        <a:t>2.1</a:t>
+                        <a:rPr/>
+                        <a:t>A way to fit a line to anything</a:t>
                       </a:r>
                     </a:p>
                   </a:txBody>
@@ -7132,7 +8193,15 @@
                       </a:pPr>
                       <a:r>
                         <a:rPr/>
-                        <a:t>The model in matrix form</a:t>
+                        <a:t>and to know </a:t>
+                      </a:r>
+                      <a:r>
+                        <a:rPr b="1"/>
+                        <a:t>exactly</a:t>
+                      </a:r>
+                      <a:r>
+                        <a:rPr/>
+                        <a:t> what it optimises</a:t>
                       </a:r>
                     </a:p>
                   </a:txBody>
@@ -7148,8 +8217,8 @@
                         <a:buNone/>
                       </a:pPr>
                       <a:r>
-                        <a:rPr b="1"/>
-                        <a:t>2.2</a:t>
+                        <a:rPr/>
+                        <a:t>The meaning of “controlling for”</a:t>
                       </a:r>
                     </a:p>
                   </a:txBody>
@@ -7164,7 +8233,15 @@
                       </a:pPr>
                       <a:r>
                         <a:rPr/>
-                        <a:t>Route 1 — calculus</a:t>
+                        <a:t>as a </a:t>
+                      </a:r>
+                      <a:r>
+                        <a:rPr b="1"/>
+                        <a:t>projection</a:t>
+                      </a:r>
+                      <a:r>
+                        <a:rPr/>
+                        <a:t>, not a hand-wave</a:t>
                       </a:r>
                     </a:p>
                   </a:txBody>
@@ -7180,8 +8257,8 @@
                         <a:buNone/>
                       </a:pPr>
                       <a:r>
-                        <a:rPr b="1"/>
-                        <a:t>2.3</a:t>
+                        <a:rPr/>
+                        <a:t>The reason collinearity hurts</a:t>
                       </a:r>
                     </a:p>
                   </a:txBody>
@@ -7196,11 +8273,7 @@
                       </a:pPr>
                       <a:r>
                         <a:rPr/>
-                        <a:t>Route 2 — geometry </a:t>
-                      </a:r>
-                      <a:r>
-                        <a:rPr i="1"/>
-                        <a:t>(the one worth remembering)</a:t>
+                        <a:t>before we meet the cure in Session 05</a:t>
                       </a:r>
                     </a:p>
                   </a:txBody>
@@ -7216,8 +8289,8 @@
                         <a:buNone/>
                       </a:pPr>
                       <a:r>
-                        <a:rPr b="1"/>
-                        <a:t>2.4</a:t>
+                        <a:rPr/>
+                        <a:t>The identity behind causal ML</a:t>
                       </a:r>
                     </a:p>
                   </a:txBody>
@@ -7232,39 +8305,7 @@
                       </a:pPr>
                       <a:r>
                         <a:rPr/>
-                        <a:t>Adding a regressor: Frisch–Waugh–Lovell</a:t>
-                      </a:r>
-                    </a:p>
-                  </a:txBody>
-                </a:tc>
-              </a:tr>
-              <a:tr h="0">
-                <a:tc>
-                  <a:txBody>
-                    <a:bodyPr/>
-                    <a:lstStyle/>
-                    <a:p>
-                      <a:pPr lvl="0" indent="0" marL="0">
-                        <a:buNone/>
-                      </a:pPr>
-                      <a:r>
-                        <a:rPr b="1"/>
-                        <a:t>2.5</a:t>
-                      </a:r>
-                    </a:p>
-                  </a:txBody>
-                </a:tc>
-                <a:tc>
-                  <a:txBody>
-                    <a:bodyPr/>
-                    <a:lstStyle/>
-                    <a:p>
-                      <a:pPr lvl="0" indent="0" marL="0">
-                        <a:buNone/>
-                      </a:pPr>
-                      <a:r>
-                        <a:rPr/>
-                        <a:t>Numerical warning</a:t>
+                        <a:t>FWL returns in Session 10, unchanged</a:t>
                       </a:r>
                     </a:p>
                   </a:txBody>
@@ -7274,166 +8315,6 @@
           </a:graphicData>
         </a:graphic>
       </p:graphicFrame>
-    </p:spTree>
-  </p:cSld>
-</p:sld>
-</file>
-
-<file path=ppt/slides/slide4.xml><?xml version="1.0" encoding="utf-8"?>
-<p:sld xmlns:a="http://schemas.openxmlformats.org/drawingml/2006/main" xmlns:r="http://schemas.openxmlformats.org/officeDocument/2006/relationships" xmlns:p="http://schemas.openxmlformats.org/presentationml/2006/main">
-  <p:cSld>
-    <p:spTree>
-      <p:nvGrpSpPr>
-        <p:cNvPr id="1" name=""/>
-        <p:cNvGrpSpPr/>
-        <p:nvPr/>
-      </p:nvGrpSpPr>
-      <p:grpSpPr>
-        <a:xfrm>
-          <a:off x="0" y="0"/>
-          <a:ext cx="0" cy="0"/>
-          <a:chOff x="0" y="0"/>
-          <a:chExt cx="0" cy="0"/>
-        </a:xfrm>
-      </p:grpSpPr>
-      <p:sp>
-        <p:nvSpPr>
-          <p:cNvPr id="3" name="Content Placeholder 2"/>
-          <p:cNvSpPr>
-            <a:spLocks noGrp="1"/>
-          </p:cNvSpPr>
-          <p:nvPr>
-            <p:ph idx="1"/>
-          </p:nvPr>
-        </p:nvSpPr>
-        <p:spPr/>
-        <p:txBody>
-          <a:bodyPr/>
-          <a:lstStyle/>
-          <a:p>
-            <a:pPr lvl="0" indent="0" marL="0">
-              <a:buNone/>
-            </a:pPr>
-            <a:r>
-              <a:rPr/>
-              <a:t>Same numbering, same notation as </a:t>
-            </a:r>
-            <a:r>
-              <a:rPr>
-                <a:hlinkClick r:id="rId2"/>
-                <a:latin typeface="Courier"/>
-              </a:rPr>
-              <a:t>01-lecture/README.md</a:t>
-            </a:r>
-            <a:r>
-              <a:rPr/>
-              <a:t>. The notes are the reference; these slides are the walk-through.</a:t>
-            </a:r>
-          </a:p>
-        </p:txBody>
-      </p:sp>
-    </p:spTree>
-  </p:cSld>
-</p:sld>
-</file>
-
-<file path=ppt/slides/slide5.xml><?xml version="1.0" encoding="UTF-8"?><p:sld xmlns:a="http://schemas.openxmlformats.org/drawingml/2006/main" xmlns:r="http://schemas.openxmlformats.org/officeDocument/2006/relationships" xmlns:p="http://schemas.openxmlformats.org/presentationml/2006/main"><p:cSld><p:spTree><p:nvGrpSpPr><p:cNvPr id="1" name="" /><p:cNvGrpSpPr /><p:nvPr /></p:nvGrpSpPr><p:grpSpPr><a:xfrm><a:off x="0" y="0" /><a:ext cx="0" cy="0" /><a:chOff x="0" y="0" /><a:chExt cx="0" cy="0" /></a:xfrm></p:grpSpPr><p:sp><p:nvSpPr><p:cNvPr id="2" name="Title 1" /><p:cNvSpPr><a:spLocks noGrp="1" /></p:cNvSpPr><p:nvPr><p:ph type="title" /></p:nvPr></p:nvSpPr><p:spPr /><p:txBody><a:bodyPr /><a:lstStyle /><a:p><a:pPr lvl="0" indent="0" marL="0"><a:buNone /></a:pPr><a:r><a:rPr /><a:t>Notation</a:t></a:r></a:p></p:txBody></p:sp><p:graphicFrame><p:nvGraphicFramePr><p:cNvPr id="6" name="Content Placeholder 5" /><p:cNvGraphicFramePr><a:graphicFrameLocks noGrp="1" /></p:cNvGraphicFramePr><p:nvPr><p:ph idx="1" /></p:nvPr></p:nvGraphicFramePr><p:xfrm><a:off x="457200" y="1193800" /><a:ext cx="8229600" cy="3390900" /></p:xfrm><a:graphic><a:graphicData uri="http://schemas.openxmlformats.org/drawingml/2006/table"><a:tbl><a:tblPr firstRow="1" bandRow="1"><a:tableStyleId>{5C22544A-7EE6-4342-B048-85BDC9FD1C3A}</a:tableStyleId></a:tblPr><a:tblGrid><a:gridCol w="4114800" /><a:gridCol w="4114800" /></a:tblGrid><a:tr h="0"><a:tc><a:txBody><a:bodyPr /><a:lstStyle /><a:p><a:pPr lvl="0" indent="0" marL="0"><a:buNone /></a:pPr><a:r><a:rPr /><a:t>Symbol</a:t></a:r></a:p></a:txBody><a:tcPr /></a:tc><a:tc><a:txBody><a:bodyPr /><a:lstStyle /><a:p><a:pPr lvl="0" indent="0" marL="0"><a:buNone /></a:pPr><a:r><a:rPr /><a:t>Meaning</a:t></a:r></a:p></a:txBody><a:tcPr /></a:tc></a:tr><a:tr h="0"><a:tc><a:txBody><a:bodyPr /><a:lstStyle /><a:p><a:pPr lvl="0" indent="0" marL="0"><a:buNone /></a:pPr><a14:m><m:oMath xmlns:m="http://schemas.openxmlformats.org/officeDocument/2006/math"><m:r><m:t>n</m:t></m:r></m:oMath></a14:m><a:r><a:rPr /><a:t>, </a:t></a:r><a14:m><m:oMath xmlns:m="http://schemas.openxmlformats.org/officeDocument/2006/math"><m:r><m:t>p</m:t></m:r></m:oMath></a14:m></a:p></a:txBody></a:tc><a:tc><a:txBody><a:bodyPr /><a:lstStyle /><a:p><a:pPr lvl="0" indent="0" marL="0"><a:buNone /></a:pPr><a:r><a:rPr /><a:t>number of observations, number of predictors</a:t></a:r></a:p></a:txBody></a:tc></a:tr><a:tr h="0"><a:tc><a:txBody><a:bodyPr /><a:lstStyle /><a:p><a:pPr lvl="0" indent="0" marL="0"><a:buNone /></a:pPr><a14:m><m:oMath xmlns:m="http://schemas.openxmlformats.org/officeDocument/2006/math"><m:r><m:t>X</m:t></m:r></m:oMath></a14:m></a:p></a:txBody></a:tc><a:tc><a:txBody><a:bodyPr /><a:lstStyle /><a:p><a:pPr lvl="0" indent="0" marL="0"><a:buNone /></a:pPr><a14:m><m:oMath xmlns:m="http://schemas.openxmlformats.org/officeDocument/2006/math"><m:r><m:t>n</m:t></m:r><m:r><m:rPr><m:sty m:val="p" /></m:rPr><m:t>×</m:t></m:r><m:r><m:t>p</m:t></m:r></m:oMath></a14:m><a:r><a:rPr /><a:t> design matrix (first column ones)</a:t></a:r></a:p></a:txBody></a:tc></a:tr><a:tr h="0"><a:tc><a:txBody><a:bodyPr /><a:lstStyle /><a:p><a:pPr lvl="0" indent="0" marL="0"><a:buNone /></a:pPr><a14:m><m:oMath xmlns:m="http://schemas.openxmlformats.org/officeDocument/2006/math"><m:r><m:t>y</m:t></m:r></m:oMath></a14:m></a:p></a:txBody></a:tc><a:tc><a:txBody><a:bodyPr /><a:lstStyle /><a:p><a:pPr lvl="0" indent="0" marL="0"><a:buNone /></a:pPr><a14:m><m:oMath xmlns:m="http://schemas.openxmlformats.org/officeDocument/2006/math"><m:r><m:t>n</m:t></m:r></m:oMath></a14:m><a:r><a:rPr /><a:t>-vector of outcomes</a:t></a:r></a:p></a:txBody></a:tc></a:tr><a:tr h="0"><a:tc><a:txBody><a:bodyPr /><a:lstStyle /><a:p><a:pPr lvl="0" indent="0" marL="0"><a:buNone /></a:pPr><a14:m><m:oMath xmlns:m="http://schemas.openxmlformats.org/officeDocument/2006/math"><m:acc><m:accPr><m:chr m:val="̂" /></m:accPr><m:e><m:r><m:t>β</m:t></m:r></m:e></m:acc></m:oMath></a14:m></a:p></a:txBody></a:tc><a:tc><a:txBody><a:bodyPr /><a:lstStyle /><a:p><a:pPr lvl="0" indent="0" marL="0"><a:buNone /></a:pPr><a:r><a:rPr /><a:t>estimated coefficient vector</a:t></a:r></a:p></a:txBody></a:tc></a:tr><a:tr h="0"><a:tc><a:txBody><a:bodyPr /><a:lstStyle /><a:p><a:pPr lvl="0" indent="0" marL="0"><a:buNone /></a:pPr><a14:m><m:oMath xmlns:m="http://schemas.openxmlformats.org/officeDocument/2006/math"><m:acc><m:accPr><m:chr m:val="̂" /></m:accPr><m:e><m:r><m:t>y</m:t></m:r></m:e></m:acc><m:r><m:rPr><m:sty m:val="p" /></m:rPr><m:t>=</m:t></m:r><m:r><m:t>X</m:t></m:r><m:acc><m:accPr><m:chr m:val="̂" /></m:accPr><m:e><m:r><m:t>β</m:t></m:r></m:e></m:acc></m:oMath></a14:m></a:p></a:txBody></a:tc><a:tc><a:txBody><a:bodyPr /><a:lstStyle /><a:p><a:pPr lvl="0" indent="0" marL="0"><a:buNone /></a:pPr><a:r><a:rPr /><a:t>fitted values</a:t></a:r></a:p></a:txBody></a:tc></a:tr><a:tr h="0"><a:tc><a:txBody><a:bodyPr /><a:lstStyle /><a:p><a:pPr lvl="0" indent="0" marL="0"><a:buNone /></a:pPr><a14:m><m:oMath xmlns:m="http://schemas.openxmlformats.org/officeDocument/2006/math"><m:r><m:t>H</m:t></m:r><m:r><m:rPr><m:sty m:val="p" /></m:rPr><m:t>=</m:t></m:r><m:r><m:t>X</m:t></m:r><m:sSup><m:e><m:d><m:dPr><m:begChr m:val="(" /><m:sepChr m:val="" /><m:endChr m:val=")" /><m:grow /></m:dPr><m:e><m:sSup><m:e><m:r><m:t>X</m:t></m:r></m:e><m:sup><m:r><m:rPr><m:sty m:val="p" /></m:rPr><m:t>⊤</m:t></m:r></m:sup></m:sSup><m:r><m:t>X</m:t></m:r></m:e></m:d></m:e><m:sup><m:r><m:rPr><m:sty m:val="p" /></m:rPr><m:t>−</m:t></m:r><m:r><m:t>1</m:t></m:r></m:sup></m:sSup><m:sSup><m:e><m:r><m:t>X</m:t></m:r></m:e><m:sup><m:r><m:rPr><m:sty m:val="p" /></m:rPr><m:t>⊤</m:t></m:r></m:sup></m:sSup></m:oMath></a14:m></a:p></a:txBody></a:tc><a:tc><a:txBody><a:bodyPr /><a:lstStyle /><a:p><a:pPr lvl="0" indent="0" marL="0"><a:buNone /></a:pPr><a:r><a:rPr /><a:t>hat (projection) matrix</a:t></a:r></a:p></a:txBody></a:tc></a:tr></a:tbl></a:graphicData></a:graphic></p:graphicFrame></p:spTree></p:cSld></p:sld>
-</file>
-
-<file path=ppt/slides/slide6.xml><?xml version="1.0" encoding="utf-8"?>
-<p:sld xmlns:a="http://schemas.openxmlformats.org/drawingml/2006/main" xmlns:r="http://schemas.openxmlformats.org/officeDocument/2006/relationships" xmlns:p="http://schemas.openxmlformats.org/presentationml/2006/main">
-  <p:cSld>
-    <p:spTree>
-      <p:nvGrpSpPr>
-        <p:cNvPr id="1" name=""/>
-        <p:cNvGrpSpPr/>
-        <p:nvPr/>
-      </p:nvGrpSpPr>
-      <p:grpSpPr>
-        <a:xfrm>
-          <a:off x="0" y="0"/>
-          <a:ext cx="0" cy="0"/>
-          <a:chOff x="0" y="0"/>
-          <a:chExt cx="0" cy="0"/>
-        </a:xfrm>
-      </p:grpSpPr>
-      <p:sp>
-        <p:nvSpPr>
-          <p:cNvPr id="3" name="Content Placeholder 2"/>
-          <p:cNvSpPr>
-            <a:spLocks noGrp="1"/>
-          </p:cNvSpPr>
-          <p:nvPr>
-            <p:ph idx="1"/>
-          </p:nvPr>
-        </p:nvSpPr>
-        <p:spPr/>
-        <p:txBody>
-          <a:bodyPr/>
-          <a:lstStyle/>
-          <a:p>
-            <a:pPr lvl="0" indent="0" marL="0">
-              <a:buNone/>
-            </a:pPr>
-            <a:r>
-              <a:rPr/>
-              <a:t>This table is in every session’s notes. Learn it once.</a:t>
-            </a:r>
-          </a:p>
-        </p:txBody>
-      </p:sp>
-    </p:spTree>
-  </p:cSld>
-</p:sld>
-</file>
-
-<file path=ppt/slides/slide7.xml><?xml version="1.0" encoding="utf-8"?>
-<p:sld xmlns:a="http://schemas.openxmlformats.org/drawingml/2006/main" xmlns:r="http://schemas.openxmlformats.org/officeDocument/2006/relationships" xmlns:p="http://schemas.openxmlformats.org/presentationml/2006/main">
-  <p:cSld>
-    <p:spTree>
-      <p:nvGrpSpPr>
-        <p:cNvPr id="1" name=""/>
-        <p:cNvGrpSpPr/>
-        <p:nvPr/>
-      </p:nvGrpSpPr>
-      <p:grpSpPr>
-        <a:xfrm>
-          <a:off x="0" y="0"/>
-          <a:ext cx="0" cy="0"/>
-          <a:chOff x="0" y="0"/>
-          <a:chExt cx="0" cy="0"/>
-        </a:xfrm>
-      </p:grpSpPr>
-      <p:sp>
-        <p:nvSpPr>
-          <p:cNvPr id="2" name="Title 1"/>
-          <p:cNvSpPr>
-            <a:spLocks noGrp="1"/>
-          </p:cNvSpPr>
-          <p:nvPr>
-            <p:ph type="title"/>
-          </p:nvPr>
-        </p:nvSpPr>
-        <p:spPr>
-          <a:xfrm>
-            <a:off x="722313" y="3305176"/>
-            <a:ext cx="7772400" cy="1021556"/>
-          </a:xfrm>
-        </p:spPr>
-        <p:txBody>
-          <a:bodyPr/>
-          <a:lstStyle/>
-          <a:p>
-            <a:pPr lvl="0" indent="0" marL="0">
-              <a:buNone/>
-            </a:pPr>
-            <a:r>
-              <a:rPr/>
-              <a:t>2.1 The model in matrix form</a:t>
-            </a:r>
-          </a:p>
-        </p:txBody>
-      </p:sp>
     </p:spTree>
   </p:cSld>
 </p:sld>
@@ -7458,12 +8339,12 @@
       </p:grpSpPr>
       <p:sp>
         <p:nvSpPr>
-          <p:cNvPr id="2" name="Title 1"/>
-          <p:cNvSpPr>
-            <a:spLocks noGrp="1"/>
-          </p:cNvSpPr>
-          <p:nvPr>
-            <p:ph type="title"/>
+          <p:cNvPr id="3" name="Content Placeholder 2"/>
+          <p:cNvSpPr>
+            <a:spLocks noGrp="1"/>
+          </p:cNvSpPr>
+          <p:nvPr>
+            <p:ph idx="1"/>
           </p:nvPr>
         </p:nvSpPr>
         <p:spPr/>
@@ -7476,396 +8357,11 @@
             </a:pPr>
             <a:r>
               <a:rPr/>
-              <a:t>Stack the data</a:t>
-            </a:r>
-          </a:p>
-        </p:txBody>
-      </p:sp>
-      <mc:AlternateContent xmlns:mc="http://schemas.openxmlformats.org/markup-compatibility/2006">
-        <mc:Choice xmlns:a14="http://schemas.microsoft.com/office/drawing/2010/main" Requires="a14">
-          <p:sp>
-            <p:nvSpPr>
-              <p:cNvPr id="3" name="Content Placeholder 2"/>
-              <p:cNvSpPr>
-                <a:spLocks noGrp="1"/>
-              </p:cNvSpPr>
-              <p:nvPr>
-                <p:ph idx="1"/>
-              </p:nvPr>
-            </p:nvSpPr>
-            <p:spPr/>
-            <p:txBody>
-              <a:bodyPr/>
-              <a:lstStyle/>
-              <a:p>
-                <a:pPr lvl="0" indent="0" marL="0">
-                  <a:buNone/>
-                </a:pPr>
-                <a14:m>
-                  <m:oMath xmlns:m="http://schemas.openxmlformats.org/officeDocument/2006/math">
-                    <m:r>
-                      <m:t>y</m:t>
-                    </m:r>
-                    <m:r>
-                      <m:rPr>
-                        <m:sty m:val="p"/>
-                      </m:rPr>
-                      <m:t>∈</m:t>
-                    </m:r>
-                    <m:sSup>
-                      <m:e>
-                        <m:r>
-                          <m:rPr>
-                            <m:sty m:val="p"/>
-                            <m:scr m:val="double-struck"/>
-                          </m:rPr>
-                          <m:t>R</m:t>
-                        </m:r>
-                      </m:e>
-                      <m:sup>
-                        <m:r>
-                          <m:t>n</m:t>
-                        </m:r>
-                      </m:sup>
-                    </m:sSup>
-                  </m:oMath>
-                </a14:m>
-                <a:r>
-                  <a:rPr/>
-                  <a:t>, </a:t>
-                </a:r>
-                <a14:m>
-                  <m:oMath xmlns:m="http://schemas.openxmlformats.org/officeDocument/2006/math">
-                    <m:r>
-                      <m:t>X</m:t>
-                    </m:r>
-                    <m:r>
-                      <m:rPr>
-                        <m:sty m:val="p"/>
-                      </m:rPr>
-                      <m:t>∈</m:t>
-                    </m:r>
-                    <m:sSup>
-                      <m:e>
-                        <m:r>
-                          <m:rPr>
-                            <m:sty m:val="p"/>
-                            <m:scr m:val="double-struck"/>
-                          </m:rPr>
-                          <m:t>R</m:t>
-                        </m:r>
-                      </m:e>
-                      <m:sup>
-                        <m:r>
-                          <m:t>n</m:t>
-                        </m:r>
-                        <m:r>
-                          <m:rPr>
-                            <m:sty m:val="p"/>
-                          </m:rPr>
-                          <m:t>×</m:t>
-                        </m:r>
-                        <m:r>
-                          <m:t>p</m:t>
-                        </m:r>
-                      </m:sup>
-                    </m:sSup>
-                  </m:oMath>
-                </a14:m>
-                <a:r>
-                  <a:rPr/>
-                  <a:t> (first column a vector of ones), </a:t>
-                </a:r>
-                <a14:m>
-                  <m:oMath xmlns:m="http://schemas.openxmlformats.org/officeDocument/2006/math">
-                    <m:r>
-                      <m:t>β</m:t>
-                    </m:r>
-                    <m:r>
-                      <m:rPr>
-                        <m:sty m:val="p"/>
-                      </m:rPr>
-                      <m:t>∈</m:t>
-                    </m:r>
-                    <m:sSup>
-                      <m:e>
-                        <m:r>
-                          <m:rPr>
-                            <m:sty m:val="p"/>
-                            <m:scr m:val="double-struck"/>
-                          </m:rPr>
-                          <m:t>R</m:t>
-                        </m:r>
-                      </m:e>
-                      <m:sup>
-                        <m:r>
-                          <m:t>p</m:t>
-                        </m:r>
-                      </m:sup>
-                    </m:sSup>
-                  </m:oMath>
-                </a14:m>
-                <a:r>
-                  <a:rPr/>
-                  <a:t>, </a:t>
-                </a:r>
-                <a14:m>
-                  <m:oMath xmlns:m="http://schemas.openxmlformats.org/officeDocument/2006/math">
-                    <m:r>
-                      <m:t>ε</m:t>
-                    </m:r>
-                    <m:r>
-                      <m:rPr>
-                        <m:sty m:val="p"/>
-                      </m:rPr>
-                      <m:t>∈</m:t>
-                    </m:r>
-                    <m:sSup>
-                      <m:e>
-                        <m:r>
-                          <m:rPr>
-                            <m:sty m:val="p"/>
-                            <m:scr m:val="double-struck"/>
-                          </m:rPr>
-                          <m:t>R</m:t>
-                        </m:r>
-                      </m:e>
-                      <m:sup>
-                        <m:r>
-                          <m:t>n</m:t>
-                        </m:r>
-                      </m:sup>
-                    </m:sSup>
-                  </m:oMath>
-                </a14:m>
-                <a:r>
-                  <a:rPr/>
-                  <a:t>:</a:t>
-                </a:r>
-              </a:p>
-              <a:p>
-                <a:pPr lvl="0" indent="0" marL="0">
-                  <a:buNone/>
-                </a:pPr>
-                <a14:m>
-                  <m:oMathPara xmlns:m="http://schemas.openxmlformats.org/officeDocument/2006/math">
-                    <m:oMathParaPr>
-                      <m:jc m:val="center"/>
-                    </m:oMathParaPr>
-                    <m:oMath>
-                      <m:r>
-                        <m:t>y</m:t>
-                      </m:r>
-                      <m:r>
-                        <m:rPr>
-                          <m:sty m:val="p"/>
-                        </m:rPr>
-                        <m:t>=</m:t>
-                      </m:r>
-                      <m:r>
-                        <m:t>X</m:t>
-                      </m:r>
-                      <m:r>
-                        <m:t>β</m:t>
-                      </m:r>
-                      <m:r>
-                        <m:rPr>
-                          <m:sty m:val="p"/>
-                        </m:rPr>
-                        <m:t>+</m:t>
-                      </m:r>
-                      <m:r>
-                        <m:t>ε</m:t>
-                      </m:r>
-                    </m:oMath>
-                  </m:oMathPara>
-                </a14:m>
-              </a:p>
-              <a:p>
-                <a:pPr lvl="0" indent="0" marL="0">
-                  <a:buNone/>
-                </a:pPr>
-                <a:r>
-                  <a:rPr/>
-                  <a:t>We seek </a:t>
-                </a:r>
-                <a14:m>
-                  <m:oMath xmlns:m="http://schemas.openxmlformats.org/officeDocument/2006/math">
-                    <m:acc>
-                      <m:accPr>
-                        <m:chr m:val="̂"/>
-                      </m:accPr>
-                      <m:e>
-                        <m:r>
-                          <m:t>β</m:t>
-                        </m:r>
-                      </m:e>
-                    </m:acc>
-                  </m:oMath>
-                </a14:m>
-                <a:r>
-                  <a:rPr/>
-                  <a:t> minimising the residual sum of squares</a:t>
-                </a:r>
-              </a:p>
-              <a:p>
-                <a:pPr lvl="0" indent="0" marL="0">
-                  <a:buNone/>
-                </a:pPr>
-                <a14:m>
-                  <m:oMathPara xmlns:m="http://schemas.openxmlformats.org/officeDocument/2006/math">
-                    <m:oMathParaPr>
-                      <m:jc m:val="center"/>
-                    </m:oMathParaPr>
-                    <m:oMath>
-                      <m:r>
-                        <m:t>S</m:t>
-                      </m:r>
-                      <m:d>
-                        <m:dPr>
-                          <m:begChr m:val="("/>
-                          <m:sepChr m:val=""/>
-                          <m:endChr m:val=")"/>
-                          <m:grow/>
-                        </m:dPr>
-                        <m:e>
-                          <m:r>
-                            <m:t>β</m:t>
-                          </m:r>
-                        </m:e>
-                      </m:d>
-                      <m:r>
-                        <m:rPr>
-                          <m:sty m:val="p"/>
-                        </m:rPr>
-                        <m:t>=</m:t>
-                      </m:r>
-                      <m:r>
-                        <m:rPr>
-                          <m:sty m:val="p"/>
-                        </m:rPr>
-                        <m:t>∥</m:t>
-                      </m:r>
-                      <m:r>
-                        <m:t>y</m:t>
-                      </m:r>
-                      <m:r>
-                        <m:rPr>
-                          <m:sty m:val="p"/>
-                        </m:rPr>
-                        <m:t>−</m:t>
-                      </m:r>
-                      <m:r>
-                        <m:t>X</m:t>
-                      </m:r>
-                      <m:r>
-                        <m:t>β</m:t>
-                      </m:r>
-                      <m:sSubSup>
-                        <m:e>
-                          <m:r>
-                            <m:rPr>
-                              <m:sty m:val="p"/>
-                            </m:rPr>
-                            <m:t>∥</m:t>
-                          </m:r>
-                        </m:e>
-                        <m:sub>
-                          <m:r>
-                            <m:t>2</m:t>
-                          </m:r>
-                        </m:sub>
-                        <m:sup>
-                          <m:r>
-                            <m:t>2</m:t>
-                          </m:r>
-                        </m:sup>
-                      </m:sSubSup>
-                      <m:r>
-                        <m:rPr>
-                          <m:sty m:val="p"/>
-                        </m:rPr>
-                        <m:t>=</m:t>
-                      </m:r>
-                      <m:sSup>
-                        <m:e>
-                          <m:d>
-                            <m:dPr>
-                              <m:begChr m:val="("/>
-                              <m:sepChr m:val=""/>
-                              <m:endChr m:val=")"/>
-                              <m:grow/>
-                            </m:dPr>
-                            <m:e>
-                              <m:r>
-                                <m:t>y</m:t>
-                              </m:r>
-                              <m:r>
-                                <m:rPr>
-                                  <m:sty m:val="p"/>
-                                </m:rPr>
-                                <m:t>−</m:t>
-                              </m:r>
-                              <m:r>
-                                <m:t>X</m:t>
-                              </m:r>
-                              <m:r>
-                                <m:t>β</m:t>
-                              </m:r>
-                            </m:e>
-                          </m:d>
-                        </m:e>
-                        <m:sup>
-                          <m:r>
-                            <m:rPr>
-                              <m:sty m:val="p"/>
-                            </m:rPr>
-                            <m:t>⊤</m:t>
-                          </m:r>
-                        </m:sup>
-                      </m:sSup>
-                      <m:d>
-                        <m:dPr>
-                          <m:begChr m:val="("/>
-                          <m:sepChr m:val=""/>
-                          <m:endChr m:val=")"/>
-                          <m:grow/>
-                        </m:dPr>
-                        <m:e>
-                          <m:r>
-                            <m:t>y</m:t>
-                          </m:r>
-                          <m:r>
-                            <m:rPr>
-                              <m:sty m:val="p"/>
-                            </m:rPr>
-                            <m:t>−</m:t>
-                          </m:r>
-                          <m:r>
-                            <m:t>X</m:t>
-                          </m:r>
-                          <m:r>
-                            <m:t>β</m:t>
-                          </m:r>
-                        </m:e>
-                      </m:d>
-                    </m:oMath>
-                  </m:oMathPara>
-                </a14:m>
-              </a:p>
-              <a:p>
-                <a:pPr lvl="0" indent="0" marL="0">
-                  <a:buNone/>
-                </a:pPr>
-                <a:r>
-                  <a:rPr/>
-                  <a:t>Two routes to the minimum. They turn out to be the same statement.</a:t>
-                </a:r>
-              </a:p>
-            </p:txBody>
-          </p:sp>
-        </mc:Choice>
-      </mc:AlternateContent>
+              <a:t>Learn the picture once and you re-use it nine times.</a:t>
+            </a:r>
+          </a:p>
+        </p:txBody>
+      </p:sp>
     </p:spTree>
   </p:cSld>
 </p:sld>
@@ -7900,8 +8396,8 @@
         </p:nvSpPr>
         <p:spPr>
           <a:xfrm>
-            <a:off x="722313" y="3305176"/>
-            <a:ext cx="7772400" cy="1021556"/>
+            <a:off x="722313" y="1850000"/>
+            <a:ext cx="7772400" cy="1300000"/>
           </a:xfrm>
         </p:spPr>
         <p:txBody>
@@ -7913,7 +8409,7 @@
             </a:pPr>
             <a:r>
               <a:rPr/>
-              <a:t>2.2 Route 1 — calculus</a:t>
+              <a:t>2 · The model</a:t>
             </a:r>
           </a:p>
         </p:txBody>
